--- a/Curso Gas B/00 - El Reglamento de Gas - estructura, ambito y generalidades/00 - El Reglamento de Gas - Vídeo 3.pptx
+++ b/Curso Gas B/00 - El Reglamento de Gas - estructura, ambito y generalidades/00 - El Reglamento de Gas - Vídeo 3.pptx
@@ -516,12 +516,12 @@
           <a:lstStyle/>
           <a:p>
             <a:r>
-              <a:t>N1: La instalación ya tiene gas; ¿y ahora qué?</a:t>
-            </a:r>
-          </a:p>
-          <a:p>
-            <a:r>
-              <a:t>N2: Ahora hay que mantenerla viva y segura durante años. En este cierre del articulado vemos quién debe mantener y controlar las instalaciones, la diferencia muy preguntada entre inspección y revisión, quién puede operar en instalaciones de gas y las reglas finales del Reglamento: cumplimiento, excepciones, reconocimiento mutuo, normas UNE, sanciones y accidentes. Es el bloque que convierte a un instalador en un profesional que entiende su responsabilidad.</a:t>
+              <a:t>N1: La instalación ya tiene gas. ¿Y ahora qué?</a:t>
+            </a:r>
+          </a:p>
+          <a:p>
+            <a:r>
+              <a:t>N2: Ahora hay que mantenerla viva y segura durante años. En este cierre del articulado vemos quién debe mantener y controlar las instalaciones, la diferencia más preguntada de todo el tema, que es inspección contra revisión, quién puede operar en instalaciones de gas y las reglas finales del Reglamento: cumplimiento, excepciones, reconocimiento mutuo, normas UNE, sanciones y accidentes. Es el bloque que convierte al instalador en un profesional que entiende su responsabilidad de verdad.</a:t>
             </a:r>
           </a:p>
         </p:txBody>
@@ -591,12 +591,12 @@
           <a:lstStyle/>
           <a:p>
             <a:r>
-              <a:t>N1: ¿Qué diferencia hay entre técnica equivalente y excepción?</a:t>
-            </a:r>
-          </a:p>
-          <a:p>
-            <a:r>
-              <a:t>N2: No las confundas. La técnica equivalente, del artículo noveno, es 'lo hago distinto pero igual de seguro'. La excepción, del artículo décimo, es el último recurso: cuando es materialmente imposible cumplir y tampoco cabe una equivalente, se pide permiso para saltarse la prescripción a cambio de medidas compensatorias. La excepción siempre la firma un técnico facultativo competente, expone motivos y medidas, y la aprueba la Administración, que puede rechazarla o exigir cambios. Y como la equivalente, se pide antes del procedimiento del artículo quinto.</a:t>
+              <a:t>N1: ¿El Reglamento es lo máximo que puedes hacer, o lo mínimo?</a:t>
+            </a:r>
+          </a:p>
+          <a:p>
+            <a:r>
+              <a:t>N2: Es el mínimo. Sus prescripciones son mínimos obligatorios: marcan el suelo, no el techo. Puedes hacerlo más seguro, nunca menos. Y si por lo que sea no puedes cumplir a la letra, hay dos salidas, siempre antes del procedimiento del artículo quinto y firmadas por técnico competente. La primera es la técnica equivalente, del artículo noveno: lo hago distinto pero demuestro que es igual de seguro o más, y me lo aprueban. La segunda, como último recurso, es la excepción, del artículo décimo: es imposible cumplir y tampoco hay equivalente, así que pido permiso para saltármelo a cambio de medidas compensatorias. No confundas equivalente con excepción: una es otro camino igual de seguro, la otra es el último cartucho.</a:t>
             </a:r>
           </a:p>
         </p:txBody>
@@ -666,12 +666,12 @@
           <a:lstStyle/>
           <a:p>
             <a:r>
-              <a:t>N1: Un material aprobado en otro país europeo, ¿vale aquí?</a:t>
-            </a:r>
-          </a:p>
-          <a:p>
-            <a:r>
-              <a:t>N2: Sí. Se consideran conformes los productos comercializados legalmente en otro Estado miembro de la Unión Europea, en Turquía o en un país del Espacio Económico Europeo, siempre que garanticen un nivel de seguridad equivalente al que exigimos aquí. Es la lógica del mercado único europeo: no hay que volver a certificar en cada país. No suele ser una pregunta gorda, pero conviene reconocerlo.</a:t>
+              <a:t>N1: Dos detalles finos pero preguntados: material extranjero y normas UNE.</a:t>
+            </a:r>
+          </a:p>
+          <a:p>
+            <a:r>
+              <a:t>N2: Primero, el reconocimiento mutuo del artículo once: un material aprobado legalmente en otro Estado de la Unión Europea, o de la zona asimilada, vale aquí, siempre que garantice un nivel de seguridad equivalente. Es la lógica del mercado único: no hay que volver a certificar en cada país. Y segundo, el artículo doce: las ITC citan las normas UNE sin indicar el año de edición, para no quedarse anticuadas cada vez que se revisa una norma. El listado oficial con los años vive en la ITC-ICG once. Por eso en todo el curso verás, por ejemplo, UNE sesenta mil seiscientos setenta sin fecha: no es un olvido, es exactamente como manda el Reglamento.</a:t>
             </a:r>
           </a:p>
         </p:txBody>
@@ -741,12 +741,12 @@
           <a:lstStyle/>
           <a:p>
             <a:r>
-              <a:t>N1: ¿Por qué las normas UNE aparecen sin fecha?</a:t>
-            </a:r>
-          </a:p>
-          <a:p>
-            <a:r>
-              <a:t>N2: Detalle fino pero preguntado: las ITC citan las normas UNE sin indicar el año de edición, para no quedarse anticuadas cada vez que se revisa una norma. El listado oficial, con los años, vive en la ITC-ICG once. Por eso en todo el curso verás, por ejemplo, la norma sesenta mil seiscientos setenta sin fecha: no es un olvido, es exactamente como manda el Reglamento. Cuando se revisa una norma, se actualiza ese listado mediante resolución, indicando desde cuándo vale la nueva edición y cuándo deja de valer la antigua.</a:t>
+              <a:t>N1: Si se incumple, ¿dónde están las multas, en el Reglamento?</a:t>
+            </a:r>
+          </a:p>
+          <a:p>
+            <a:r>
+              <a:t>N2: No, y esto es una pregunta con trampa. El Reglamento no inventa las multas: te remite a las dos leyes de las que cuelga. La Ley de industria y la Ley de hidrocarburos son las que fijan qué es una infracción leve, grave o muy grave y cuál es su sanción. Idea para el examen: las sanciones no están en el Reglamento, están en las leyes. Si ves una opción que dice que el propio Reglamento fija las multas, desconfía; lo que hace es enviarte al régimen sancionador de esas dos leyes.</a:t>
             </a:r>
           </a:p>
         </p:txBody>
@@ -816,12 +816,12 @@
           <a:lstStyle/>
           <a:p>
             <a:r>
-              <a:t>N1: ¿Dónde están las multas del gas?</a:t>
-            </a:r>
-          </a:p>
-          <a:p>
-            <a:r>
-              <a:t>N2: El Reglamento no inventa las sanciones: te remite a las dos leyes de las que cuelga. La Ley de industria y la Ley del sector de hidrocarburos son las que fijan qué es infracción leve, grave o muy grave y qué sanción le corresponde. Idea para el examen: las sanciones no están en el Reglamento, están en las leyes. Es un despiste típico buscar la multa en el articulado del Reglamento y no encontrarla.</a:t>
+              <a:t>N1: Ante un accidente grave, ¿qué protocolo y qué plazos?</a:t>
+            </a:r>
+          </a:p>
+          <a:p>
+            <a:r>
+              <a:t>N2: Dos plazos que caen juntos. Cuando un accidente causa daños importantes o víctimas, el suministrador lo notifica a la Comunidad Autónoma lo antes posible y en no más de veinticuatro horas, y después remite un informe completo en un plazo máximo de siete días. El truco: primero llamo, veinticuatro horas, luego escribo, siete días. Y memoriza las cuatro clases de accidente como lista cerrada: deflagración, explosión, intoxicación e incendio. Un matiz: en la deflagración el frente de llama avanza más despacio que el sonido, un fogonazo rápido; en la explosión avanza más rápido que el sonido y es mucho más destructiva. En gas doméstico lo habitual es la deflagración, pero el Reglamento las lista por separado.</a:t>
             </a:r>
           </a:p>
         </p:txBody>
@@ -891,12 +891,12 @@
           <a:lstStyle/>
           <a:p>
             <a:r>
-              <a:t>N1: ¿Qué se hace ante un accidente grave?</a:t>
-            </a:r>
-          </a:p>
-          <a:p>
-            <a:r>
-              <a:t>N2: Cuando un accidente causa daños importantes o víctimas, el suministrador lo notifica a la Comunidad Autónoma lo antes posible y en no más de veinticuatro horas, y remite después un informe en un plazo máximo de siete días. El truco es 'primero llamo, en veinticuatro horas, y luego escribo, en siete días'. Y memoriza las cuatro clases de accidente como lista cerrada: deflagración, explosión, intoxicación e incendio. Un matiz: en la deflagración el frente de llama avanza más despacio que el sonido, un fogonazo; en la explosión avanza más rápido que el sonido y es mucho más destructiva. En gas doméstico lo habitual es la deflagración.</a:t>
+              <a:t>N1: Repaso rápido de todo el bloque. ¿Tienes los cuatro pilares?</a:t>
+            </a:r>
+          </a:p>
+          <a:p>
+            <a:r>
+              <a:t>N2: Uno, la pregunta estrella: conectada a la red de distribución es inspección; por tu cuenta, revisión; y si obliga organismo de control, inspección siempre. Dos, mantener la instalación es obligación del titular, no tuya. Tres, el Reglamento marca mínimos obligatorios, el suelo y nunca el techo, y para no cumplir a la letra existen la técnica equivalente y la excepción, siempre antes del artículo quinto y firmadas por técnico competente. Y cuatro, ante accidente grave, veinticuatro horas para llamar y siete días para el informe, con las cuatro clases cerradas. Recítalos y pasamos al gran cierre.</a:t>
             </a:r>
           </a:p>
         </p:txBody>
@@ -966,12 +966,22 @@
           <a:lstStyle/>
           <a:p>
             <a:r>
-              <a:t>N1: ¿Qué te llevas de este último vídeo y del tema?</a:t>
-            </a:r>
-          </a:p>
-          <a:p>
-            <a:r>
-              <a:t>N2: Primero, la obligación de mantener es del titular, o en su defecto del usuario; tú ejecutas y adviertes por escrito. Segundo, la joya del tema: inspección o revisión se decide con una pregunta, ¿está conectada a la red de distribución?; si sí, inspección; si no, revisión; y si obliga un organismo de control, inspección siempre. Y tercero, el protocolo de accidente grave: veinticuatro horas para avisar, siete días para el informe, y cuatro clases, deflagración, explosión, intoxicación e incendio. Con esto cierras el articulado del Reglamento: ya tienes el mapa completo, del objeto a los accidentes, para entrar con paso firme en las ITC.</a:t>
+              <a:t>N1: Este es el gran final del tema. ¿Qué has conquistado en estos tres vídeos?</a:t>
+            </a:r>
+          </a:p>
+          <a:p>
+            <a:r>
+              <a:t>N2: Piénsalo como logros, no como resumen. Hoy distingues inspección de revisión con una sola pregunta, la de si está conectada a la red, y esa es la pregunta más repetida de todo el bloque. Sabes que la obligación de mantener es del titular, y que tú ejecutas y adviertes. Manejas las reglas finales: el Reglamento como mínimos obligatorios, la técnica equivalente y la excepción como salidas firmadas por técnico competente, las UNE citadas sin año con su listado en la ITC-ICG once, y las sanciones que viven en las dos leyes. Y llevas de memoria el protocolo de accidente: veinticuatro horas para avisar, siete días para el informe, cuatro clases cerradas.</a:t>
+            </a:r>
+          </a:p>
+          <a:p>
+            <a:r>
+              <a:t>N1: ¿Y por qué esto te hace mejor gasista y no solo mejor examinando?</a:t>
+            </a:r>
+          </a:p>
+          <a:p>
+            <a:r>
+              <a:t>N2: Porque en el examen te lo preguntan tal cual: inspección o revisión, quién comunica, qué plazos de accidente; y ahora lo resuelves sin pestañear. Pero en la obra vale todavía más: cada vez que haces un control periódico de verdad, cazas la rejilla tapada o el conducto obstruido que mata despacio, y evitas la intoxicación por monóxido antes de que ocurra. Ahí tu firma protege a una familia. Con esto cierras el Tema cero: ya no solo tocas tubos, entiendes de dónde sale cada norma, de qué respondes y por qué. Has completado el marco normativo entero; hoy ya piensas como un gasista. A partir de aquí saltamos a las instalaciones de verdad, con todo este mapa en la cabeza. Enhorabuena, y a por el siguiente tema.</a:t>
             </a:r>
           </a:p>
         </p:txBody>
@@ -1041,12 +1051,12 @@
           <a:lstStyle/>
           <a:p>
             <a:r>
-              <a:t>N1: ¿Qué números tienes que llevarte grabados?</a:t>
-            </a:r>
-          </a:p>
-          <a:p>
-            <a:r>
-              <a:t>N2: Ante un accidente grave, veinticuatro horas para avisar a la Comunidad Autónoma y siete días para remitir el informe completo; y cuatro clases de accidente, que son una lista cerrada. Estos números caen fijo en el examen y, sobre todo, son de los que un profesional serio tiene siempre presentes. El truco es 'primero llamo, luego escribo': veinticuatro horas para la llamada, siete días para el papel.</a:t>
+              <a:t>N1: ¿Qué tres números tienes que llevarte grabados de este vídeo?</a:t>
+            </a:r>
+          </a:p>
+          <a:p>
+            <a:r>
+              <a:t>N2: Veinticuatro horas es el plazo máximo que tiene el suministrador para avisar a la Comunidad Autónoma cuando hay un accidente con daños importantes o víctimas. Siete días es el plazo para remitir después el informe completo. Y cuatro son las clases de accidente que el Reglamento lista como conjunto cerrado: deflagración, explosión, intoxicación e incendio. El truco para el orden es sencillo: primero llamas, en veinticuatro horas, y luego escribes, en siete días.</a:t>
             </a:r>
           </a:p>
         </p:txBody>
@@ -1116,12 +1126,12 @@
           <a:lstStyle/>
           <a:p>
             <a:r>
-              <a:t>N1: ¿Quién tiene que mantener la instalación?</a:t>
-            </a:r>
-          </a:p>
-          <a:p>
-            <a:r>
-              <a:t>N2: La obligación de mantener y usar bien la instalación es del titular, el dueño, y si no, del usuario, quien la gasta. No es del instalador ni de la compañía: ellos ayudan y recomiendan, pero el que responde de que todo esté permanentemente en disposición de servicio, con su nivel de seguridad, es el dueño. Es como el coche: el taller te lo arregla, pero el que tiene que llevarlo a revisión eres tú. Tu papel como gasista es ejecutar el mantenimiento y advertir por escrito de lo que veas.</a:t>
+              <a:t>N1: La instalación hay que mantenerla. ¿Pero de quién es esa obligación?</a:t>
+            </a:r>
+          </a:p>
+          <a:p>
+            <a:r>
+              <a:t>N2: Del titular, el dueño, y en su defecto del usuario, quien la gasta. No es del instalador ni de la compañía: ellos ayudan y recomiendan, pero el que responde de que la instalación esté permanentemente en disposición de servicio, con su nivel de seguridad, es el dueño. Es exactamente como el coche: el taller te lo arregla, pero el que tiene que llevarlo a revisión eres tú. Tu papel como gasista es ejecutar el mantenimiento y advertir por escrito; la responsabilidad última de conservarlo es del titular.</a:t>
             </a:r>
           </a:p>
         </p:txBody>
@@ -1191,12 +1201,12 @@
           <a:lstStyle/>
           <a:p>
             <a:r>
-              <a:t>N1: ¿Cómo decides si es inspección o revisión?</a:t>
-            </a:r>
-          </a:p>
-          <a:p>
-            <a:r>
-              <a:t>N2: Este es el punto estrella del tema, y se decide con una sola pregunta: ¿la instalación está conectada a la red de distribución, la tubería de la compañía en la calle? Si sí lo está, gas natural de ciudad o GLP de red, es inspección. Si no lo está, un depósito de GLP propio en un chalé, unas bombonas, es revisión. Y una segunda regla que gana cualquier empate: si la ley obliga a que venga un organismo de control, es inspección, siempre. Chuleta mental: conectada a red, inspección; por tu cuenta, revisión. Con esto resuelves todas las preguntas de este bloque, que son muchas.</a:t>
+              <a:t>N1: Esta es LA pregunta del tema. ¿Cómo distingues inspección de revisión?</a:t>
+            </a:r>
+          </a:p>
+          <a:p>
+            <a:r>
+              <a:t>N2: Con una sola pregunta: ¿la instalación está conectada a la red de distribución, la tubería de la compañía en la calle? Si sí está conectada, gas natural de ciudad o GLP de red, es inspección. Si no está conectada, un depósito de GLP propio de un chalé, unas bombonas, es revisión. Y una segunda regla que gana cualquier empate: si la ley obliga a que venga un organismo de control, es inspección siempre. Chuleta mental: conectada a red, inspección; por tu cuenta, revisión. Con esto resuelves todas las preguntas de este bloque, que son muchas.</a:t>
             </a:r>
           </a:p>
         </p:txBody>
@@ -1266,12 +1276,12 @@
           <a:lstStyle/>
           <a:p>
             <a:r>
-              <a:t>N1: ¿Por qué se distingue el nombre?</a:t>
-            </a:r>
-          </a:p>
-          <a:p>
-            <a:r>
-              <a:t>N2: Porque el riesgo es distinto. La inspección la hace alguien habilitado y ajeno al usuario, una empresa instaladora habilitada o el distribuidor, sobre instalaciones enganchadas a la red, donde un fallo puede afectar a muchos vecinos. La revisión es para instalaciones más privadas, como tu depósito de un chalé. La finalidad es la misma, la seguridad, pero cambia el nombre y cambia el agente según el riesgo. Por eso 'inspección' suena, y es, más serio.</a:t>
+              <a:t>N1: Cuando toca inspección, ¿quién está habilitado para hacerla?</a:t>
+            </a:r>
+          </a:p>
+          <a:p>
+            <a:r>
+              <a:t>N2: Las inspecciones periódicas de las receptoras alimentadas desde redes por canalización las hace una empresa instaladora de gas habilitada o el distribuidor, con medios propios o externos. Y esto incluye también la inspección de la parte común de las receptoras. Fíjate en que es siempre alguien ajeno al usuario, habilitado para ello. Estas inspecciones son pan de tu oficio: cuando tengas tu categoría B y trabajes con una empresa habilitada, es una de las cosas que vas a hacer. Y recuerda que el titular elige libremente la empresa que se la realiza.</a:t>
             </a:r>
           </a:p>
         </p:txBody>
@@ -1341,12 +1351,12 @@
           <a:lstStyle/>
           <a:p>
             <a:r>
-              <a:t>N1: ¿Quién puede hacer las inspecciones y quién elige?</a:t>
-            </a:r>
-          </a:p>
-          <a:p>
-            <a:r>
-              <a:t>N2: Las inspecciones periódicas de receptoras alimentadas desde redes por canalización las hace una empresa instaladora de gas habilitada o el distribuidor, con medios propios o externos; y lo mismo vale para la parte común del edificio. Un detalle importante para el cliente y para ti: el titular tiene libertad de elección de la empresa que haga el control. Y de cada control sale su certificado, con o sin anomalías: ese papel es el que permite mantener o restablecer el suministro, y si hay anomalías, marca lo que hay que corregir. Aquí es donde cazas lo que mata despacio: una rejilla de ventilación tapada, un conducto obstruido, una fuga incipiente.</a:t>
+              <a:t>N1: ¿Y cuándo toca revisión, quién la pide?</a:t>
+            </a:r>
+          </a:p>
+          <a:p>
+            <a:r>
+              <a:t>N2: Las revisiones se hacen en todas las instalaciones que no están conectadas a redes de distribución, por ejemplo un depósito de GLP propio en un chalé. Es obligación del titular, y en su defecto del usuario, solicitar los servicios de una de las entidades que indica la ITC. Fíjate en la diferencia con la inspección: allí manda el hecho de estar enganchado a la red, donde un fallo afecta a muchos, y viene alguien habilitado ajeno; aquí la instalación es más privada, tu depósito, y el propio titular tiene que mover ficha para que se la revisen. Misma finalidad, la seguridad, pero distinto nombre y distinto agente según el riesgo.</a:t>
             </a:r>
           </a:p>
         </p:txBody>
@@ -1416,12 +1426,12 @@
           <a:lstStyle/>
           <a:p>
             <a:r>
-              <a:t>N1: ¿Puede aparecer alguien por encima de las inspecciones?</a:t>
-            </a:r>
-          </a:p>
-          <a:p>
-            <a:r>
-              <a:t>N2: Sí. Por encima de inspecciones y revisiones está la Comunidad Autónoma, que puede comprobar en cualquier momento que todo cumple, por sí misma o mediante un organismo de control, sobre todo si hay riesgo significativo para personas, animales, bienes o medio ambiente. 'De oficio' significa por su propia iniciativa; 'a instancia de parte', porque alguien se ha quejado. Es, digamos, la policía del gas: puede presentarse cuando quiera.</a:t>
+              <a:t>N1: Más allá del papeleo, ¿para qué sirve de verdad el control periódico?</a:t>
+            </a:r>
+          </a:p>
+          <a:p>
+            <a:r>
+              <a:t>N2: Es el momento en que cazas lo que mata despacio, lo que no se ve de un día para otro. Una rejilla de ventilación tapada con un mueble o con pintura. Un conducto de evacuación de humos obstruido. Una fuga incipiente que todavía no huele fuerte. Un aparato que empieza a dar mala combustión y monóxido de carbono. De cada control sale su certificado, con o sin anomalías, y si hay anomalías, ese papel marca lo que hay que corregir. Saltarse el control o firmarlo sin mirar de verdad es dejar que el problema crezca sin que nadie lo vea, hasta el susto. Ahí es donde tu trabajo salva vidas.</a:t>
             </a:r>
           </a:p>
         </p:txBody>
@@ -1491,12 +1501,12 @@
           <a:lstStyle/>
           <a:p>
             <a:r>
-              <a:t>N1: ¿Empresa, instalador y agente son lo mismo?</a:t>
-            </a:r>
-          </a:p>
-          <a:p>
-            <a:r>
-              <a:t>N2: No, son tres papeles distintos. La empresa instaladora es la empresa, la razón social habilitada, con su seguro y sus medios. El instalador es la persona con carné, y tiene categoría A, B o C según la ITC-ICG cero nueve. El agente de puesta en marcha es quien arranca los aparatos, según la ITC-ICG cero ocho. Tú te estás sacando la categoría B: vas a poder trabajar en la mayoría de instalaciones receptoras domésticas y comerciales típicas. Asocia cada papel con su ITC, instalador con la nueve, aparatos con la ocho, porque el examen los cruza.</a:t>
+              <a:t>N1: Por encima de inspecciones y revisiones, ¿hay alguien más que vigile?</a:t>
+            </a:r>
+          </a:p>
+          <a:p>
+            <a:r>
+              <a:t>N2: Sí, y es la Comunidad Autónoma. Por encima de todo, puede comprobar en cualquier momento, por sí misma o mediante un organismo de control, que la instalación cumple, sobre todo si hay riesgo significativo para personas, animales, bienes o medio ambiente. Es la policía del gas: puede aparecer cuando quiera. De oficio significa por su propia iniciativa; a instancia de parte significa porque alguien se ha quejado. No es lo habitual del día a día, pero conviene saber que ese control administrativo existe y está por encima de los controles periódicos.</a:t>
             </a:r>
           </a:p>
         </p:txBody>
@@ -1566,12 +1576,12 @@
           <a:lstStyle/>
           <a:p>
             <a:r>
-              <a:t>N1: ¿El Reglamento es un máximo o un mínimo?</a:t>
-            </a:r>
-          </a:p>
-          <a:p>
-            <a:r>
-              <a:t>N2: Es un mínimo. 'Mínimos obligatorios' quiere decir que el Reglamento marca el suelo, no el techo: puedes hacerlo más seguro, nunca menos. Una instalación cumple por aplicación directa de las prescripciones o por técnicas de seguridad equivalentes, que dan al menos el mismo nivel de seguridad. Pero esa vía alternativa la tiene que justificar el diseñador ante la Comunidad Autónoma y aprobarse antes de empezar el procedimiento del artículo quinto, no después.</a:t>
+              <a:t>N1: Empresa instaladora, instalador, agente de puesta en marcha. ¿Es todo lo mismo?</a:t>
+            </a:r>
+          </a:p>
+          <a:p>
+            <a:r>
+              <a:t>N2: No, son tres papeles distintos y el examen los cruza. La empresa instaladora es la empresa, la razón social habilitada según la ITC-ICG cero nueve, con su seguro y sus medios. El instalador es la persona con carné, y tiene categorías A, B o C según esa misma ITC. Y el agente de puesta en marcha es quien arranca los aparatos, según la ITC-ICG cero ocho. Tú te estás sacando la categoría B: podrás trabajar en la mayoría de instalaciones receptoras domésticas y comerciales típicas. Ve asociando cada papel con su ITC: instalador a la cero nueve, aparatos a la cero ocho.</a:t>
             </a:r>
           </a:p>
         </p:txBody>
@@ -4684,7 +4694,7 @@
                 </a:solidFill>
                 <a:latin typeface="Montserrat"/>
               </a:rPr>
-              <a:t>El Reglamento de Gas</a:t>
+              <a:t>Mantenimiento y control periódico</a:t>
             </a:r>
           </a:p>
           <a:p>
@@ -4695,7 +4705,7 @@
                 </a:solidFill>
                 <a:latin typeface="Montserrat"/>
               </a:rPr>
-              <a:t>Mantenimiento, control periódico y régimen general</a:t>
+              <a:t>Inspección, revisión y régimen general del Reglamento</a:t>
             </a:r>
           </a:p>
         </p:txBody>
@@ -4894,7 +4904,7 @@
                 </a:solidFill>
                 <a:latin typeface="Montserrat"/>
               </a:rPr>
-              <a:t>ARTÍCULO 10 · EXCEPCIONES</a:t>
+              <a:t>ARTÍCULOS 9 Y 10 · CUMPLIMIENTO</a:t>
             </a:r>
           </a:p>
         </p:txBody>
@@ -4928,7 +4938,7 @@
                 </a:solidFill>
                 <a:latin typeface="Montserrat"/>
               </a:rPr>
-              <a:t>Equivalente no es excepción</a:t>
+              <a:t>El suelo, no el techo</a:t>
             </a:r>
           </a:p>
         </p:txBody>
@@ -4976,7 +4986,7 @@
                 </a:solidFill>
                 <a:latin typeface="Montserrat"/>
               </a:rPr>
-              <a:t>Equivalente: distinto pero igual de seguro</a:t>
+              <a:t>Prescripciones: mínimos obligatorios</a:t>
             </a:r>
           </a:p>
           <a:p>
@@ -5001,7 +5011,7 @@
                 </a:solidFill>
                 <a:latin typeface="Montserrat"/>
               </a:rPr>
-              <a:t>Excepción: último recurso, imposible cumplir</a:t>
+              <a:t>Más seguro sí, menos nunca</a:t>
             </a:r>
           </a:p>
           <a:p>
@@ -5026,7 +5036,7 @@
                 </a:solidFill>
                 <a:latin typeface="Montserrat"/>
               </a:rPr>
-              <a:t>Con medidas compensatorias</a:t>
+              <a:t>Técnica equivalente (art. 9)</a:t>
             </a:r>
           </a:p>
           <a:p>
@@ -5051,14 +5061,14 @@
                 </a:solidFill>
                 <a:latin typeface="Montserrat"/>
               </a:rPr>
-              <a:t>Firma técnico competente; aprueba la Administración</a:t>
-            </a:r>
-          </a:p>
-        </p:txBody>
-      </p:sp>
-      <p:sp>
-        <p:nvSpPr>
-          <p:cNvPr id="8" name="imgph" descr="IMGQ:engineer signing technical document"/>
+              <a:t>Excepción, último recurso (art. 10)</a:t>
+            </a:r>
+          </a:p>
+        </p:txBody>
+      </p:sp>
+      <p:sp>
+        <p:nvSpPr>
+          <p:cNvPr id="8" name="imgph" descr="IMGQ:engineer signing safety compliance document"/>
           <p:cNvSpPr/>
           <p:nvPr/>
         </p:nvSpPr>
@@ -5144,7 +5154,7 @@
                 </a:solidFill>
                 <a:latin typeface="Montserrat"/>
               </a:rPr>
-              <a:t>engineer signing technical document</a:t>
+              <a:t>engineer signing safety compliance document</a:t>
             </a:r>
           </a:p>
         </p:txBody>
@@ -5309,7 +5319,7 @@
                 </a:solidFill>
                 <a:latin typeface="Montserrat"/>
               </a:rPr>
-              <a:t>ARTÍCULO 11 · RECONOCIMIENTO MUTUO</a:t>
+              <a:t>ARTÍCULOS 11 Y 12 · NORMAS</a:t>
             </a:r>
           </a:p>
         </p:txBody>
@@ -5343,7 +5353,7 @@
                 </a:solidFill>
                 <a:latin typeface="Montserrat"/>
               </a:rPr>
-              <a:t>Lo europeo vale aquí</a:t>
+              <a:t>Europa vale y las UNE van sin año</a:t>
             </a:r>
           </a:p>
         </p:txBody>
@@ -5391,7 +5401,7 @@
                 </a:solidFill>
                 <a:latin typeface="Montserrat"/>
               </a:rPr>
-              <a:t>Producto legal en otro Estado europeo</a:t>
+              <a:t>Reconocimiento mutuo: material europeo, si es seguro</a:t>
             </a:r>
           </a:p>
           <a:p>
@@ -5416,7 +5426,7 @@
                 </a:solidFill>
                 <a:latin typeface="Montserrat"/>
               </a:rPr>
-              <a:t>Debe ser igual de seguro</a:t>
+              <a:t>Las ITC citan las UNE sin año</a:t>
             </a:r>
           </a:p>
           <a:p>
@@ -5441,14 +5451,14 @@
                 </a:solidFill>
                 <a:latin typeface="Montserrat"/>
               </a:rPr>
-              <a:t>Sin volver a certificar en cada país</a:t>
-            </a:r>
-          </a:p>
-        </p:txBody>
-      </p:sp>
-      <p:sp>
-        <p:nvSpPr>
-          <p:cNvPr id="8" name="imgph" descr="IMGQ:european manufactured gas valve box"/>
+              <a:t>El listado con años, en la ITC-ICG 11</a:t>
+            </a:r>
+          </a:p>
+        </p:txBody>
+      </p:sp>
+      <p:sp>
+        <p:nvSpPr>
+          <p:cNvPr id="8" name="imgph" descr="IMGQ:european standards manual technical book"/>
           <p:cNvSpPr/>
           <p:nvPr/>
         </p:nvSpPr>
@@ -5534,7 +5544,7 @@
                 </a:solidFill>
                 <a:latin typeface="Montserrat"/>
               </a:rPr>
-              <a:t>european manufactured gas valve box</a:t>
+              <a:t>european standards manual technical book</a:t>
             </a:r>
           </a:p>
         </p:txBody>
@@ -5699,7 +5709,7 @@
                 </a:solidFill>
                 <a:latin typeface="Montserrat"/>
               </a:rPr>
-              <a:t>ARTÍCULO 12 · NORMAS</a:t>
+              <a:t>ARTÍCULO 13 · SANCIONES</a:t>
             </a:r>
           </a:p>
         </p:txBody>
@@ -5733,7 +5743,7 @@
                 </a:solidFill>
                 <a:latin typeface="Montserrat"/>
               </a:rPr>
-              <a:t>Las UNE, sin año</a:t>
+              <a:t>Las multas no las pone el Reglamento</a:t>
             </a:r>
           </a:p>
         </p:txBody>
@@ -5781,7 +5791,7 @@
                 </a:solidFill>
                 <a:latin typeface="Montserrat"/>
               </a:rPr>
-              <a:t>Las ITC citan normas sin año de edición</a:t>
+              <a:t>Régimen de infracciones y sanciones</a:t>
             </a:r>
           </a:p>
           <a:p>
@@ -5806,7 +5816,7 @@
                 </a:solidFill>
                 <a:latin typeface="Montserrat"/>
               </a:rPr>
-              <a:t>El listado con años, en la ITC-ICG 11</a:t>
+              <a:t>Ley de industria y ley de hidrocarburos</a:t>
             </a:r>
           </a:p>
           <a:p>
@@ -5831,14 +5841,14 @@
                 </a:solidFill>
                 <a:latin typeface="Montserrat"/>
               </a:rPr>
-              <a:t>Norma revisada: se actualiza el listado</a:t>
-            </a:r>
-          </a:p>
-        </p:txBody>
-      </p:sp>
-      <p:sp>
-        <p:nvSpPr>
-          <p:cNvPr id="8" name="imgph" descr="IMGQ:technical standards manual shelf"/>
+              <a:t>Leve, grave o muy grave</a:t>
+            </a:r>
+          </a:p>
+        </p:txBody>
+      </p:sp>
+      <p:sp>
+        <p:nvSpPr>
+          <p:cNvPr id="8" name="imgph" descr="IMGQ:legal code book gavel table"/>
           <p:cNvSpPr/>
           <p:nvPr/>
         </p:nvSpPr>
@@ -5924,7 +5934,7 @@
                 </a:solidFill>
                 <a:latin typeface="Montserrat"/>
               </a:rPr>
-              <a:t>technical standards manual shelf</a:t>
+              <a:t>legal code book gavel table</a:t>
             </a:r>
           </a:p>
         </p:txBody>
@@ -6089,7 +6099,7 @@
                 </a:solidFill>
                 <a:latin typeface="Montserrat"/>
               </a:rPr>
-              <a:t>ARTÍCULO 13 · INFRACCIONES Y SANCIONES</a:t>
+              <a:t>ARTÍCULO 14 · ACCIDENTES</a:t>
             </a:r>
           </a:p>
         </p:txBody>
@@ -6123,7 +6133,7 @@
                 </a:solidFill>
                 <a:latin typeface="Montserrat"/>
               </a:rPr>
-              <a:t>Las multas no están aquí</a:t>
+              <a:t>Primero llamo, luego escribo</a:t>
             </a:r>
           </a:p>
         </p:txBody>
@@ -6171,7 +6181,7 @@
                 </a:solidFill>
                 <a:latin typeface="Montserrat"/>
               </a:rPr>
-              <a:t>El Reglamento no inventa las sanciones</a:t>
+              <a:t>Suministrador avisa en 24 horas</a:t>
             </a:r>
           </a:p>
           <a:p>
@@ -6196,7 +6206,7 @@
                 </a:solidFill>
                 <a:latin typeface="Montserrat"/>
               </a:rPr>
-              <a:t>Remite a la Ley de industria</a:t>
+              <a:t>Informe completo en 7 días</a:t>
             </a:r>
           </a:p>
           <a:p>
@@ -6221,14 +6231,14 @@
                 </a:solidFill>
                 <a:latin typeface="Montserrat"/>
               </a:rPr>
-              <a:t>Y a la Ley de hidrocarburos</a:t>
-            </a:r>
-          </a:p>
-        </p:txBody>
-      </p:sp>
-      <p:sp>
-        <p:nvSpPr>
-          <p:cNvPr id="8" name="imgph" descr="IMGQ:legal fine notice paperwork"/>
+              <a:t>Clases: deflagración, explosión, intoxicación, incendio</a:t>
+            </a:r>
+          </a:p>
+        </p:txBody>
+      </p:sp>
+      <p:sp>
+        <p:nvSpPr>
+          <p:cNvPr id="8" name="imgph" descr="IMGQ:emergency gas leak warning scene"/>
           <p:cNvSpPr/>
           <p:nvPr/>
         </p:nvSpPr>
@@ -6314,7 +6324,7 @@
                 </a:solidFill>
                 <a:latin typeface="Montserrat"/>
               </a:rPr>
-              <a:t>legal fine notice paperwork</a:t>
+              <a:t>emergency gas leak warning scene</a:t>
             </a:r>
           </a:p>
         </p:txBody>
@@ -6479,7 +6489,7 @@
                 </a:solidFill>
                 <a:latin typeface="Montserrat"/>
               </a:rPr>
-              <a:t>ARTÍCULO 14 · ACCIDENTES</a:t>
+              <a:t>REPASO RELÁMPAGO</a:t>
             </a:r>
           </a:p>
         </p:txBody>
@@ -6513,7 +6523,7 @@
                 </a:solidFill>
                 <a:latin typeface="Montserrat"/>
               </a:rPr>
-              <a:t>Primero llamo, luego escribo</a:t>
+              <a:t>Fíjalo en treinta segundos</a:t>
             </a:r>
           </a:p>
         </p:txBody>
@@ -6561,7 +6571,7 @@
                 </a:solidFill>
                 <a:latin typeface="Montserrat"/>
               </a:rPr>
-              <a:t>Daños importantes o víctimas</a:t>
+              <a:t>Conectada a red → inspección; por tu cuenta → revisión</a:t>
             </a:r>
           </a:p>
           <a:p>
@@ -6586,7 +6596,7 @@
                 </a:solidFill>
                 <a:latin typeface="Montserrat"/>
               </a:rPr>
-              <a:t>Suministrador avisa en 24 horas</a:t>
+              <a:t>Mantener es del titular</a:t>
             </a:r>
           </a:p>
           <a:p>
@@ -6611,7 +6621,7 @@
                 </a:solidFill>
                 <a:latin typeface="Montserrat"/>
               </a:rPr>
-              <a:t>Informe en 7 días</a:t>
+              <a:t>Reglamento: el suelo, nunca el techo</a:t>
             </a:r>
           </a:p>
           <a:p>
@@ -6636,14 +6646,14 @@
                 </a:solidFill>
                 <a:latin typeface="Montserrat"/>
               </a:rPr>
-              <a:t>4 clases: deflagración, explosión, intoxicación, incendio</a:t>
-            </a:r>
-          </a:p>
-        </p:txBody>
-      </p:sp>
-      <p:sp>
-        <p:nvSpPr>
-          <p:cNvPr id="8" name="imgph" descr="IMGQ:emergency gas incident firefighters"/>
+              <a:t>Accidente: 24 h para llamar, 7 días para escribir</a:t>
+            </a:r>
+          </a:p>
+        </p:txBody>
+      </p:sp>
+      <p:sp>
+        <p:nvSpPr>
+          <p:cNvPr id="8" name="imgph" descr="IMGQ:gas safety inspection summary checklist"/>
           <p:cNvSpPr/>
           <p:nvPr/>
         </p:nvSpPr>
@@ -6729,7 +6739,7 @@
                 </a:solidFill>
                 <a:latin typeface="Montserrat"/>
               </a:rPr>
-              <a:t>emergency gas incident firefighters</a:t>
+              <a:t>gas safety inspection summary checklist</a:t>
             </a:r>
           </a:p>
         </p:txBody>
@@ -6767,7 +6777,7 @@
             <a:avLst/>
           </a:prstGeom>
           <a:solidFill>
-            <a:srgbClr val="FFFFFF"/>
+            <a:srgbClr val="1E2761"/>
           </a:solidFill>
           <a:ln>
             <a:noFill/>
@@ -6804,8 +6814,8 @@
         </p:nvSpPr>
         <p:spPr>
           <a:xfrm>
-            <a:off x="10607040" y="320040"/>
-            <a:ext cx="1371600" cy="365760"/>
+            <a:off x="822960" y="640080"/>
+            <a:ext cx="10515600" cy="457200"/>
           </a:xfrm>
           <a:prstGeom prst="rect">
             <a:avLst/>
@@ -6818,15 +6828,14 @@
           </a:bodyPr>
           <a:lstStyle/>
           <a:p>
-            <a:pPr algn="r"/>
-            <a:r>
-              <a:rPr sz="1000" b="1" i="0">
-                <a:solidFill>
-                  <a:srgbClr val="64748B"/>
-                </a:solidFill>
-                <a:latin typeface="Montserrat"/>
-              </a:rPr>
-              <a:t>015 / 015</a:t>
+            <a:r>
+              <a:rPr sz="1400" b="1" i="0">
+                <a:solidFill>
+                  <a:srgbClr val="CADCFC"/>
+                </a:solidFill>
+                <a:latin typeface="Montserrat"/>
+              </a:rPr>
+              <a:t>LO QUE YA DOMINAS</a:t>
             </a:r>
           </a:p>
         </p:txBody>
@@ -6839,8 +6848,8 @@
         </p:nvSpPr>
         <p:spPr>
           <a:xfrm>
-            <a:off x="457200" y="6419088"/>
-            <a:ext cx="8229600" cy="365760"/>
+            <a:off x="822960" y="1143000"/>
+            <a:ext cx="10515600" cy="1097280"/>
           </a:xfrm>
           <a:prstGeom prst="rect">
             <a:avLst/>
@@ -6854,13 +6863,13 @@
           <a:lstStyle/>
           <a:p>
             <a:r>
-              <a:rPr sz="900" b="0" i="0">
-                <a:solidFill>
-                  <a:srgbClr val="64748B"/>
-                </a:solidFill>
-                <a:latin typeface="Montserrat"/>
-              </a:rPr>
-              <a:t>Curso Gas B · Tema 00 · El Reglamento de Gas</a:t>
+              <a:rPr sz="3400" b="1" i="0">
+                <a:solidFill>
+                  <a:srgbClr val="FFFFFF"/>
+                </a:solidFill>
+                <a:latin typeface="Montserrat"/>
+              </a:rPr>
+              <a:t>Cierras el articulado como un profesional</a:t>
             </a:r>
           </a:p>
         </p:txBody>
@@ -6873,8 +6882,8 @@
         </p:nvSpPr>
         <p:spPr>
           <a:xfrm>
-            <a:off x="822960" y="640080"/>
-            <a:ext cx="10058400" cy="914400"/>
+            <a:off x="822960" y="2514600"/>
+            <a:ext cx="10515600" cy="2834640"/>
           </a:xfrm>
           <a:prstGeom prst="rect">
             <a:avLst/>
@@ -6887,28 +6896,161 @@
           </a:bodyPr>
           <a:lstStyle/>
           <a:p>
-            <a:r>
-              <a:rPr sz="3000" b="1" i="0">
-                <a:solidFill>
-                  <a:srgbClr val="1E2761"/>
-                </a:solidFill>
-                <a:latin typeface="Montserrat"/>
-              </a:rPr>
-              <a:t>Qué me llevo</a:t>
-            </a:r>
-          </a:p>
-        </p:txBody>
-      </p:sp>
-      <p:sp>
-        <p:nvSpPr>
-          <p:cNvPr id="6" name="TextBox 5"/>
+            <a:pPr>
+              <a:spcAft>
+                <a:spcPts val="1200"/>
+              </a:spcAft>
+            </a:pPr>
+            <a:r>
+              <a:rPr sz="2000" b="1" i="0">
+                <a:solidFill>
+                  <a:srgbClr val="CADCFC"/>
+                </a:solidFill>
+                <a:latin typeface="Montserrat"/>
+              </a:rPr>
+              <a:t>✓  </a:t>
+            </a:r>
+            <a:r>
+              <a:rPr sz="1900" b="0" i="0">
+                <a:solidFill>
+                  <a:srgbClr val="FFFFFF"/>
+                </a:solidFill>
+                <a:latin typeface="Montserrat"/>
+              </a:rPr>
+              <a:t>Distingues inspección de revisión con una sola pregunta</a:t>
+            </a:r>
+          </a:p>
+          <a:p>
+            <a:pPr>
+              <a:spcAft>
+                <a:spcPts val="1200"/>
+              </a:spcAft>
+            </a:pPr>
+            <a:r>
+              <a:rPr sz="2000" b="1" i="0">
+                <a:solidFill>
+                  <a:srgbClr val="CADCFC"/>
+                </a:solidFill>
+                <a:latin typeface="Montserrat"/>
+              </a:rPr>
+              <a:t>✓  </a:t>
+            </a:r>
+            <a:r>
+              <a:rPr sz="1900" b="0" i="0">
+                <a:solidFill>
+                  <a:srgbClr val="FFFFFF"/>
+                </a:solidFill>
+                <a:latin typeface="Montserrat"/>
+              </a:rPr>
+              <a:t>Sabes que el mantenimiento responde el titular</a:t>
+            </a:r>
+          </a:p>
+          <a:p>
+            <a:pPr>
+              <a:spcAft>
+                <a:spcPts val="1200"/>
+              </a:spcAft>
+            </a:pPr>
+            <a:r>
+              <a:rPr sz="2000" b="1" i="0">
+                <a:solidFill>
+                  <a:srgbClr val="CADCFC"/>
+                </a:solidFill>
+                <a:latin typeface="Montserrat"/>
+              </a:rPr>
+              <a:t>✓  </a:t>
+            </a:r>
+            <a:r>
+              <a:rPr sz="1900" b="0" i="0">
+                <a:solidFill>
+                  <a:srgbClr val="FFFFFF"/>
+                </a:solidFill>
+                <a:latin typeface="Montserrat"/>
+              </a:rPr>
+              <a:t>Manejas mínimos, equivalencias y excepciones</a:t>
+            </a:r>
+          </a:p>
+          <a:p>
+            <a:pPr>
+              <a:spcAft>
+                <a:spcPts val="1200"/>
+              </a:spcAft>
+            </a:pPr>
+            <a:r>
+              <a:rPr sz="2000" b="1" i="0">
+                <a:solidFill>
+                  <a:srgbClr val="CADCFC"/>
+                </a:solidFill>
+                <a:latin typeface="Montserrat"/>
+              </a:rPr>
+              <a:t>✓  </a:t>
+            </a:r>
+            <a:r>
+              <a:rPr sz="1900" b="0" i="0">
+                <a:solidFill>
+                  <a:srgbClr val="FFFFFF"/>
+                </a:solidFill>
+                <a:latin typeface="Montserrat"/>
+              </a:rPr>
+              <a:t>El protocolo de accidente lo tienes de memoria</a:t>
+            </a:r>
+          </a:p>
+        </p:txBody>
+      </p:sp>
+      <p:sp>
+        <p:nvSpPr>
+          <p:cNvPr id="6" name="Rounded Rectangle 5"/>
+          <p:cNvSpPr/>
+          <p:nvPr/>
+        </p:nvSpPr>
+        <p:spPr>
+          <a:xfrm>
+            <a:off x="822960" y="5532120"/>
+            <a:ext cx="10515600" cy="777240"/>
+          </a:xfrm>
+          <a:prstGeom prst="roundRect">
+            <a:avLst/>
+          </a:prstGeom>
+          <a:solidFill>
+            <a:srgbClr val="2E3A80"/>
+          </a:solidFill>
+          <a:ln>
+            <a:noFill/>
+          </a:ln>
+          <a:effectLst/>
+        </p:spPr>
+        <p:style>
+          <a:lnRef idx="1">
+            <a:schemeClr val="accent1"/>
+          </a:lnRef>
+          <a:fillRef idx="3">
+            <a:schemeClr val="accent1"/>
+          </a:fillRef>
+          <a:effectRef idx="2">
+            <a:schemeClr val="accent1"/>
+          </a:effectRef>
+          <a:fontRef idx="minor">
+            <a:schemeClr val="lt1"/>
+          </a:fontRef>
+        </p:style>
+        <p:txBody>
+          <a:bodyPr rtlCol="0" anchor="ctr"/>
+          <a:lstStyle/>
+          <a:p>
+            <a:pPr algn="ctr"/>
+          </a:p>
+        </p:txBody>
+      </p:sp>
+      <p:sp>
+        <p:nvSpPr>
+          <p:cNvPr id="7" name="TextBox 6"/>
           <p:cNvSpPr txBox="1"/>
           <p:nvPr/>
         </p:nvSpPr>
         <p:spPr>
           <a:xfrm>
-            <a:off x="822960" y="2011680"/>
-            <a:ext cx="10058400" cy="3657600"/>
+            <a:off x="1051560" y="5605272"/>
+            <a:ext cx="10058400" cy="640080"/>
           </a:xfrm>
           <a:prstGeom prst="rect">
             <a:avLst/>
@@ -6921,78 +7063,14 @@
           </a:bodyPr>
           <a:lstStyle/>
           <a:p>
-            <a:pPr>
-              <a:spcAft>
-                <a:spcPts val="1400"/>
-              </a:spcAft>
-            </a:pPr>
-            <a:r>
-              <a:rPr sz="2000" b="1" i="0">
-                <a:solidFill>
-                  <a:srgbClr val="2E3A80"/>
-                </a:solidFill>
-                <a:latin typeface="Montserrat"/>
-              </a:rPr>
-              <a:t>✓  </a:t>
-            </a:r>
-            <a:r>
-              <a:rPr sz="2000" b="0" i="0">
-                <a:solidFill>
-                  <a:srgbClr val="1B2330"/>
-                </a:solidFill>
-                <a:latin typeface="Montserrat"/>
-              </a:rPr>
-              <a:t>Mantener = obligación del titular</a:t>
-            </a:r>
-          </a:p>
-          <a:p>
-            <a:pPr>
-              <a:spcAft>
-                <a:spcPts val="1400"/>
-              </a:spcAft>
-            </a:pPr>
-            <a:r>
-              <a:rPr sz="2000" b="1" i="0">
-                <a:solidFill>
-                  <a:srgbClr val="2E3A80"/>
-                </a:solidFill>
-                <a:latin typeface="Montserrat"/>
-              </a:rPr>
-              <a:t>✓  </a:t>
-            </a:r>
-            <a:r>
-              <a:rPr sz="2000" b="0" i="0">
-                <a:solidFill>
-                  <a:srgbClr val="1B2330"/>
-                </a:solidFill>
-                <a:latin typeface="Montserrat"/>
-              </a:rPr>
-              <a:t>¿Conectada a red? Sí, inspección; no, revisión</a:t>
-            </a:r>
-          </a:p>
-          <a:p>
-            <a:pPr>
-              <a:spcAft>
-                <a:spcPts val="1400"/>
-              </a:spcAft>
-            </a:pPr>
-            <a:r>
-              <a:rPr sz="2000" b="1" i="0">
-                <a:solidFill>
-                  <a:srgbClr val="2E3A80"/>
-                </a:solidFill>
-                <a:latin typeface="Montserrat"/>
-              </a:rPr>
-              <a:t>✓  </a:t>
-            </a:r>
-            <a:r>
-              <a:rPr sz="2000" b="0" i="0">
-                <a:solidFill>
-                  <a:srgbClr val="1B2330"/>
-                </a:solidFill>
-                <a:latin typeface="Montserrat"/>
-              </a:rPr>
-              <a:t>Accidente grave: 24 horas y 7 días</a:t>
+            <a:r>
+              <a:rPr sz="1500" b="1" i="1">
+                <a:solidFill>
+                  <a:srgbClr val="CADCFC"/>
+                </a:solidFill>
+                <a:latin typeface="Montserrat"/>
+              </a:rPr>
+              <a:t>Has terminado el marco normativo: ya piensas como gasista. A por las instalaciones.</a:t>
             </a:r>
           </a:p>
         </p:txBody>
@@ -7389,7 +7467,7 @@
                 </a:solidFill>
                 <a:latin typeface="Montserrat"/>
               </a:rPr>
-              <a:t>días para el informe</a:t>
+              <a:t>días para el informe completo</a:t>
             </a:r>
           </a:p>
         </p:txBody>
@@ -7752,7 +7830,7 @@
                 </a:solidFill>
                 <a:latin typeface="Montserrat"/>
               </a:rPr>
-              <a:t>Del titular; en su defecto, del usuario</a:t>
+              <a:t>Titular, y en su defecto el usuario</a:t>
             </a:r>
           </a:p>
           <a:p>
@@ -7777,7 +7855,7 @@
                 </a:solidFill>
                 <a:latin typeface="Montserrat"/>
               </a:rPr>
-              <a:t>Permanentemente en disposición de servicio</a:t>
+              <a:t>En disposición de servicio, siempre</a:t>
             </a:r>
           </a:p>
           <a:p>
@@ -7802,39 +7880,14 @@
                 </a:solidFill>
                 <a:latin typeface="Montserrat"/>
               </a:rPr>
-              <a:t>El instalador ejecuta y advierte</a:t>
-            </a:r>
-          </a:p>
-          <a:p>
-            <a:pPr>
-              <a:spcAft>
-                <a:spcPts val="1000"/>
-              </a:spcAft>
-            </a:pPr>
-            <a:r>
-              <a:rPr sz="1600" b="1" i="0">
-                <a:solidFill>
-                  <a:srgbClr val="2E3A80"/>
-                </a:solidFill>
-                <a:latin typeface="Montserrat"/>
-              </a:rPr>
-              <a:t>•  </a:t>
-            </a:r>
-            <a:r>
-              <a:rPr sz="1600" b="0" i="0">
-                <a:solidFill>
-                  <a:srgbClr val="1B2330"/>
-                </a:solidFill>
-                <a:latin typeface="Montserrat"/>
-              </a:rPr>
-              <a:t>Como el coche: el dueño lo lleva a revisión</a:t>
-            </a:r>
-          </a:p>
-        </p:txBody>
-      </p:sp>
-      <p:sp>
-        <p:nvSpPr>
-          <p:cNvPr id="8" name="imgph" descr="IMGQ:home gas boiler maintenance check"/>
+              <a:t>El instalador ayuda, no responde por él</a:t>
+            </a:r>
+          </a:p>
+        </p:txBody>
+      </p:sp>
+      <p:sp>
+        <p:nvSpPr>
+          <p:cNvPr id="8" name="imgph" descr="IMGQ:homeowner gas boiler maintenance check"/>
           <p:cNvSpPr/>
           <p:nvPr/>
         </p:nvSpPr>
@@ -7920,7 +7973,7 @@
                 </a:solidFill>
                 <a:latin typeface="Montserrat"/>
               </a:rPr>
-              <a:t>home gas boiler maintenance check</a:t>
+              <a:t>homeowner gas boiler maintenance check</a:t>
             </a:r>
           </a:p>
         </p:txBody>
@@ -8085,7 +8138,7 @@
                 </a:solidFill>
                 <a:latin typeface="Montserrat"/>
               </a:rPr>
-              <a:t>ARTÍCULO 7.2 · CONTROL PERIÓDICO</a:t>
+              <a:t>ARTÍCULO 7.2 · LA PREGUNTA ESTRELLA</a:t>
             </a:r>
           </a:p>
         </p:txBody>
@@ -8119,7 +8172,7 @@
                 </a:solidFill>
                 <a:latin typeface="Montserrat"/>
               </a:rPr>
-              <a:t>Inspección o revisión</a:t>
+              <a:t>¿Inspección o revisión?</a:t>
             </a:r>
           </a:p>
         </p:txBody>
@@ -8217,7 +8270,7 @@
                 </a:solidFill>
                 <a:latin typeface="Montserrat"/>
               </a:rPr>
-              <a:t>NO (depósito propio, bombonas) → revisión</a:t>
+              <a:t>NO (depósito propio) → revisión</a:t>
             </a:r>
           </a:p>
           <a:p>
@@ -8242,14 +8295,14 @@
                 </a:solidFill>
                 <a:latin typeface="Montserrat"/>
               </a:rPr>
-              <a:t>Si obliga organismo de control → inspección</a:t>
-            </a:r>
-          </a:p>
-        </p:txBody>
-      </p:sp>
-      <p:sp>
-        <p:nvSpPr>
-          <p:cNvPr id="8" name="imgph" descr="IMGQ:gas inspector checking meter"/>
+              <a:t>Organismo de control obligatorio → inspección</a:t>
+            </a:r>
+          </a:p>
+        </p:txBody>
+      </p:sp>
+      <p:sp>
+        <p:nvSpPr>
+          <p:cNvPr id="8" name="imgph" descr="IMGQ:gas distribution pipeline street valve"/>
           <p:cNvSpPr/>
           <p:nvPr/>
         </p:nvSpPr>
@@ -8335,7 +8388,7 @@
                 </a:solidFill>
                 <a:latin typeface="Montserrat"/>
               </a:rPr>
-              <a:t>gas inspector checking meter</a:t>
+              <a:t>gas distribution pipeline street valve</a:t>
             </a:r>
           </a:p>
         </p:txBody>
@@ -8500,7 +8553,7 @@
                 </a:solidFill>
                 <a:latin typeface="Montserrat"/>
               </a:rPr>
-              <a:t>ARTÍCULO 7.2 · MATICES</a:t>
+              <a:t>ARTÍCULO 7.2.1 · INSPECCIONES</a:t>
             </a:r>
           </a:p>
         </p:txBody>
@@ -8534,7 +8587,7 @@
                 </a:solidFill>
                 <a:latin typeface="Montserrat"/>
               </a:rPr>
-              <a:t>¿Por qué inspección suena más serio?</a:t>
+              <a:t>Inspección: quién la hace</a:t>
             </a:r>
           </a:p>
         </p:txBody>
@@ -8582,7 +8635,7 @@
                 </a:solidFill>
                 <a:latin typeface="Montserrat"/>
               </a:rPr>
-              <a:t>Inspección: agente ajeno al usuario</a:t>
+              <a:t>Receptoras desde red por canalización</a:t>
             </a:r>
           </a:p>
           <a:p>
@@ -8607,7 +8660,7 @@
                 </a:solidFill>
                 <a:latin typeface="Montserrat"/>
               </a:rPr>
-              <a:t>Instalaciones enganchadas a la red</a:t>
+              <a:t>Empresa instaladora habilitada o distribuidor</a:t>
             </a:r>
           </a:p>
           <a:p>
@@ -8632,39 +8685,14 @@
                 </a:solidFill>
                 <a:latin typeface="Montserrat"/>
               </a:rPr>
-              <a:t>Un fallo afecta a muchos</a:t>
-            </a:r>
-          </a:p>
-          <a:p>
-            <a:pPr>
-              <a:spcAft>
-                <a:spcPts val="1000"/>
-              </a:spcAft>
-            </a:pPr>
-            <a:r>
-              <a:rPr sz="1600" b="1" i="0">
-                <a:solidFill>
-                  <a:srgbClr val="2E3A80"/>
-                </a:solidFill>
-                <a:latin typeface="Montserrat"/>
-              </a:rPr>
-              <a:t>•  </a:t>
-            </a:r>
-            <a:r>
-              <a:rPr sz="1600" b="0" i="0">
-                <a:solidFill>
-                  <a:srgbClr val="1B2330"/>
-                </a:solidFill>
-                <a:latin typeface="Montserrat"/>
-              </a:rPr>
-              <a:t>Revisión: instalaciones más privadas</a:t>
-            </a:r>
-          </a:p>
-        </p:txBody>
-      </p:sp>
-      <p:sp>
-        <p:nvSpPr>
-          <p:cNvPr id="8" name="imgph" descr="IMGQ:apartment building gas installation"/>
+              <a:t>También la parte común</a:t>
+            </a:r>
+          </a:p>
+        </p:txBody>
+      </p:sp>
+      <p:sp>
+        <p:nvSpPr>
+          <p:cNvPr id="8" name="imgph" descr="IMGQ:gas technician inspecting meter cabinet"/>
           <p:cNvSpPr/>
           <p:nvPr/>
         </p:nvSpPr>
@@ -8750,7 +8778,7 @@
                 </a:solidFill>
                 <a:latin typeface="Montserrat"/>
               </a:rPr>
-              <a:t>apartment building gas installation</a:t>
+              <a:t>gas technician inspecting meter cabinet</a:t>
             </a:r>
           </a:p>
         </p:txBody>
@@ -8915,7 +8943,7 @@
                 </a:solidFill>
                 <a:latin typeface="Montserrat"/>
               </a:rPr>
-              <a:t>ARTÍCULO 7.2 · QUIÉN Y CÓMO</a:t>
+              <a:t>ARTÍCULO 7.2.2 · REVISIONES</a:t>
             </a:r>
           </a:p>
         </p:txBody>
@@ -8949,7 +8977,7 @@
                 </a:solidFill>
                 <a:latin typeface="Montserrat"/>
               </a:rPr>
-              <a:t>¿Quién hace la inspección?</a:t>
+              <a:t>Revisión: quién la hace</a:t>
             </a:r>
           </a:p>
         </p:txBody>
@@ -8997,7 +9025,7 @@
                 </a:solidFill>
                 <a:latin typeface="Montserrat"/>
               </a:rPr>
-              <a:t>Empresa instaladora habilitada o distribuidor</a:t>
+              <a:t>Instalaciones no conectadas a red</a:t>
             </a:r>
           </a:p>
           <a:p>
@@ -9022,7 +9050,7 @@
                 </a:solidFill>
                 <a:latin typeface="Montserrat"/>
               </a:rPr>
-              <a:t>También la parte común</a:t>
+              <a:t>Obligación del titular o usuario</a:t>
             </a:r>
           </a:p>
           <a:p>
@@ -9047,39 +9075,14 @@
                 </a:solidFill>
                 <a:latin typeface="Montserrat"/>
               </a:rPr>
-              <a:t>El titular elige libremente la empresa</a:t>
-            </a:r>
-          </a:p>
-          <a:p>
-            <a:pPr>
-              <a:spcAft>
-                <a:spcPts val="1000"/>
-              </a:spcAft>
-            </a:pPr>
-            <a:r>
-              <a:rPr sz="1600" b="1" i="0">
-                <a:solidFill>
-                  <a:srgbClr val="2E3A80"/>
-                </a:solidFill>
-                <a:latin typeface="Montserrat"/>
-              </a:rPr>
-              <a:t>•  </a:t>
-            </a:r>
-            <a:r>
-              <a:rPr sz="1600" b="0" i="0">
-                <a:solidFill>
-                  <a:srgbClr val="1B2330"/>
-                </a:solidFill>
-                <a:latin typeface="Montserrat"/>
-              </a:rPr>
-              <a:t>De cada control sale su certificado</a:t>
-            </a:r>
-          </a:p>
-        </p:txBody>
-      </p:sp>
-      <p:sp>
-        <p:nvSpPr>
-          <p:cNvPr id="8" name="imgph" descr="IMGQ:gas company technician van"/>
+              <a:t>Entidades que indique la ITC</a:t>
+            </a:r>
+          </a:p>
+        </p:txBody>
+      </p:sp>
+      <p:sp>
+        <p:nvSpPr>
+          <p:cNvPr id="8" name="imgph" descr="IMGQ:lpg tank house garden inspection"/>
           <p:cNvSpPr/>
           <p:nvPr/>
         </p:nvSpPr>
@@ -9165,7 +9168,7 @@
                 </a:solidFill>
                 <a:latin typeface="Montserrat"/>
               </a:rPr>
-              <a:t>gas company technician van</a:t>
+              <a:t>lpg tank house garden inspection</a:t>
             </a:r>
           </a:p>
         </p:txBody>
@@ -9330,7 +9333,7 @@
                 </a:solidFill>
                 <a:latin typeface="Montserrat"/>
               </a:rPr>
-              <a:t>ARTÍCULO 7.3 · CONTROL ADMINISTRATIVO</a:t>
+              <a:t>CONTROL PERIÓDICO · PARA QUÉ SIRVE</a:t>
             </a:r>
           </a:p>
         </p:txBody>
@@ -9364,7 +9367,7 @@
                 </a:solidFill>
                 <a:latin typeface="Montserrat"/>
               </a:rPr>
-              <a:t>La policía del gas</a:t>
+              <a:t>Cazar lo que mata despacio</a:t>
             </a:r>
           </a:p>
         </p:txBody>
@@ -9412,7 +9415,7 @@
                 </a:solidFill>
                 <a:latin typeface="Montserrat"/>
               </a:rPr>
-              <a:t>La Comunidad Autónoma, en cualquier momento</a:t>
+              <a:t>Rejilla de ventilación tapada</a:t>
             </a:r>
           </a:p>
           <a:p>
@@ -9437,7 +9440,7 @@
                 </a:solidFill>
                 <a:latin typeface="Montserrat"/>
               </a:rPr>
-              <a:t>De oficio o a instancia de parte</a:t>
+              <a:t>Conducto de evacuación obstruido</a:t>
             </a:r>
           </a:p>
           <a:p>
@@ -9462,39 +9465,14 @@
                 </a:solidFill>
                 <a:latin typeface="Montserrat"/>
               </a:rPr>
-              <a:t>Sobre todo si hay riesgo significativo</a:t>
-            </a:r>
-          </a:p>
-          <a:p>
-            <a:pPr>
-              <a:spcAft>
-                <a:spcPts val="1000"/>
-              </a:spcAft>
-            </a:pPr>
-            <a:r>
-              <a:rPr sz="1600" b="1" i="0">
-                <a:solidFill>
-                  <a:srgbClr val="2E3A80"/>
-                </a:solidFill>
-                <a:latin typeface="Montserrat"/>
-              </a:rPr>
-              <a:t>•  </a:t>
-            </a:r>
-            <a:r>
-              <a:rPr sz="1600" b="0" i="0">
-                <a:solidFill>
-                  <a:srgbClr val="1B2330"/>
-                </a:solidFill>
-                <a:latin typeface="Montserrat"/>
-              </a:rPr>
-              <a:t>Por sí misma o con organismo de control</a:t>
-            </a:r>
-          </a:p>
-        </p:txBody>
-      </p:sp>
-      <p:sp>
-        <p:nvSpPr>
-          <p:cNvPr id="8" name="imgph" descr="IMGQ:official inspector safety vest documents"/>
+              <a:t>Fuga incipiente, mala combustión, CO</a:t>
+            </a:r>
+          </a:p>
+        </p:txBody>
+      </p:sp>
+      <p:sp>
+        <p:nvSpPr>
+          <p:cNvPr id="8" name="imgph" descr="IMGQ:blocked ventilation grille wall dust"/>
           <p:cNvSpPr/>
           <p:nvPr/>
         </p:nvSpPr>
@@ -9580,7 +9558,7 @@
                 </a:solidFill>
                 <a:latin typeface="Montserrat"/>
               </a:rPr>
-              <a:t>official inspector safety vest documents</a:t>
+              <a:t>blocked ventilation grille wall dust</a:t>
             </a:r>
           </a:p>
         </p:txBody>
@@ -9745,7 +9723,7 @@
                 </a:solidFill>
                 <a:latin typeface="Montserrat"/>
               </a:rPr>
-              <a:t>ARTÍCULO 8 · HABILITACIÓN</a:t>
+              <a:t>ARTÍCULO 7.3 · CONTROL ADMINISTRATIVO</a:t>
             </a:r>
           </a:p>
         </p:txBody>
@@ -9779,7 +9757,7 @@
                 </a:solidFill>
                 <a:latin typeface="Montserrat"/>
               </a:rPr>
-              <a:t>Tres papeles distintos</a:t>
+              <a:t>La policía del gas</a:t>
             </a:r>
           </a:p>
         </p:txBody>
@@ -9827,7 +9805,7 @@
                 </a:solidFill>
                 <a:latin typeface="Montserrat"/>
               </a:rPr>
-              <a:t>Empresa instaladora: la razón social habilitada</a:t>
+              <a:t>La Comunidad Autónoma, cuando quiera</a:t>
             </a:r>
           </a:p>
           <a:p>
@@ -9852,7 +9830,7 @@
                 </a:solidFill>
                 <a:latin typeface="Montserrat"/>
               </a:rPr>
-              <a:t>Instalador: la persona con carné (A, B, C)</a:t>
+              <a:t>De oficio o a instancia de parte</a:t>
             </a:r>
           </a:p>
           <a:p>
@@ -9877,39 +9855,14 @@
                 </a:solidFill>
                 <a:latin typeface="Montserrat"/>
               </a:rPr>
-              <a:t>Agente de puesta en marcha: arranca aparatos</a:t>
-            </a:r>
-          </a:p>
-          <a:p>
-            <a:pPr>
-              <a:spcAft>
-                <a:spcPts val="1000"/>
-              </a:spcAft>
-            </a:pPr>
-            <a:r>
-              <a:rPr sz="1600" b="1" i="0">
-                <a:solidFill>
-                  <a:srgbClr val="2E3A80"/>
-                </a:solidFill>
-                <a:latin typeface="Montserrat"/>
-              </a:rPr>
-              <a:t>•  </a:t>
-            </a:r>
-            <a:r>
-              <a:rPr sz="1600" b="0" i="0">
-                <a:solidFill>
-                  <a:srgbClr val="1B2330"/>
-                </a:solidFill>
-                <a:latin typeface="Montserrat"/>
-              </a:rPr>
-              <a:t>Instalador → ICG 09; aparatos → ICG 08</a:t>
-            </a:r>
-          </a:p>
-        </p:txBody>
-      </p:sp>
-      <p:sp>
-        <p:nvSpPr>
-          <p:cNvPr id="8" name="imgph" descr="IMGQ:gas fitter license card tools"/>
+              <a:t>Sobre todo si hay riesgo significativo</a:t>
+            </a:r>
+          </a:p>
+        </p:txBody>
+      </p:sp>
+      <p:sp>
+        <p:nvSpPr>
+          <p:cNvPr id="8" name="imgph" descr="IMGQ:government inspector safety vest clipboard"/>
           <p:cNvSpPr/>
           <p:nvPr/>
         </p:nvSpPr>
@@ -9995,7 +9948,7 @@
                 </a:solidFill>
                 <a:latin typeface="Montserrat"/>
               </a:rPr>
-              <a:t>gas fitter license card tools</a:t>
+              <a:t>government inspector safety vest clipboard</a:t>
             </a:r>
           </a:p>
         </p:txBody>
@@ -10160,7 +10113,7 @@
                 </a:solidFill>
                 <a:latin typeface="Montserrat"/>
               </a:rPr>
-              <a:t>ARTÍCULO 9 · CUMPLIMIENTO</a:t>
+              <a:t>ARTÍCULO 8 · HABILITACIÓN</a:t>
             </a:r>
           </a:p>
         </p:txBody>
@@ -10194,7 +10147,7 @@
                 </a:solidFill>
                 <a:latin typeface="Montserrat"/>
               </a:rPr>
-              <a:t>El suelo, no el techo</a:t>
+              <a:t>Tres papeles que no son lo mismo</a:t>
             </a:r>
           </a:p>
         </p:txBody>
@@ -10242,7 +10195,7 @@
                 </a:solidFill>
                 <a:latin typeface="Montserrat"/>
               </a:rPr>
-              <a:t>Prescripciones = mínimos obligatorios</a:t>
+              <a:t>Empresa instaladora: la razón social</a:t>
             </a:r>
           </a:p>
           <a:p>
@@ -10267,7 +10220,7 @@
                 </a:solidFill>
                 <a:latin typeface="Montserrat"/>
               </a:rPr>
-              <a:t>Puedes hacerlo más seguro, nunca menos</a:t>
+              <a:t>Instalador: la persona, categorías A/B/C</a:t>
             </a:r>
           </a:p>
           <a:p>
@@ -10292,7 +10245,7 @@
                 </a:solidFill>
                 <a:latin typeface="Montserrat"/>
               </a:rPr>
-              <a:t>Aplicación directa, o</a:t>
+              <a:t>Agente de puesta en marcha: los aparatos</a:t>
             </a:r>
           </a:p>
           <a:p>
@@ -10317,14 +10270,14 @@
                 </a:solidFill>
                 <a:latin typeface="Montserrat"/>
               </a:rPr>
-              <a:t>Técnicas de seguridad equivalentes</a:t>
-            </a:r>
-          </a:p>
-        </p:txBody>
-      </p:sp>
-      <p:sp>
-        <p:nvSpPr>
-          <p:cNvPr id="8" name="imgph" descr="IMGQ:gas safety equipment installation"/>
+              <a:t>Tú vas a por la categoría B</a:t>
+            </a:r>
+          </a:p>
+        </p:txBody>
+      </p:sp>
+      <p:sp>
+        <p:nvSpPr>
+          <p:cNvPr id="8" name="imgph" descr="IMGQ:gas installer license card uniform"/>
           <p:cNvSpPr/>
           <p:nvPr/>
         </p:nvSpPr>
@@ -10410,7 +10363,7 @@
                 </a:solidFill>
                 <a:latin typeface="Montserrat"/>
               </a:rPr>
-              <a:t>gas safety equipment installation</a:t>
+              <a:t>gas installer license card uniform</a:t>
             </a:r>
           </a:p>
         </p:txBody>

--- a/Curso Gas B/00 - El Reglamento de Gas - estructura, ambito y generalidades/00 - El Reglamento de Gas - Vídeo 3.pptx
+++ b/Curso Gas B/00 - El Reglamento de Gas - estructura, ambito y generalidades/00 - El Reglamento de Gas - Vídeo 3.pptx
@@ -521,7 +521,7 @@
           </a:p>
           <a:p>
             <a:r>
-              <a:t>N2: Ahora hay que mantenerla viva y segura durante años. En este cierre del articulado vemos quién debe mantener y controlar las instalaciones, la diferencia más preguntada de todo el tema, que es inspección contra revisión, quién puede operar en instalaciones de gas y las reglas finales del Reglamento: cumplimiento, excepciones, reconocimiento mutuo, normas UNE, sanciones y accidentes. Es el bloque que convierte al instalador en un profesional que entiende su responsabilidad de verdad.</a:t>
+              <a:t>N2: Ahora viene lo que dura años: mantenerla viva y segura. En este cierre del articulado juntamos varias piezas. Vemos quién debe mantener y controlar las instalaciones, la diferencia más preguntada de todo el tema, que es inspección contra revisión, quién puede operar en instalaciones de gas, y las reglas finales del Reglamento: cumplimiento, excepciones, reconocimiento mutuo europeo, normas UNE, sanciones y accidentes. Parece mucho, pero verás que casi todo se ordena con dos o tres ideas simples. Este es el bloque que convierte a un montador de tubos en un profesional que entiende de qué responde.</a:t>
             </a:r>
           </a:p>
         </p:txBody>
@@ -591,12 +591,12 @@
           <a:lstStyle/>
           <a:p>
             <a:r>
-              <a:t>N1: ¿El Reglamento es lo máximo que puedes hacer, o lo mínimo?</a:t>
-            </a:r>
-          </a:p>
-          <a:p>
-            <a:r>
-              <a:t>N2: Es el mínimo. Sus prescripciones son mínimos obligatorios: marcan el suelo, no el techo. Puedes hacerlo más seguro, nunca menos. Y si por lo que sea no puedes cumplir a la letra, hay dos salidas, siempre antes del procedimiento del artículo quinto y firmadas por técnico competente. La primera es la técnica equivalente, del artículo noveno: lo hago distinto pero demuestro que es igual de seguro o más, y me lo aprueban. La segunda, como último recurso, es la excepción, del artículo décimo: es imposible cumplir y tampoco hay equivalente, así que pido permiso para saltármelo a cambio de medidas compensatorias. No confundas equivalente con excepción: una es otro camino igual de seguro, la otra es el último cartucho.</a:t>
+              <a:t>N1: ¿El Reglamento es lo máximo que puedo hacer, o lo mínimo?</a:t>
+            </a:r>
+          </a:p>
+          <a:p>
+            <a:r>
+              <a:t>N2: Es el mínimo, y este matiz cambia la forma de entenderlo todo. Sus prescripciones son mínimos obligatorios: marcan el suelo, no el techo. Puedes hacerlo más seguro, nunca menos. Y si por lo que sea no puedes cumplir una prescripción a la letra, existen dos salidas, las dos siempre antes del procedimiento del artículo quinto y firmadas por técnico competente. La primera es la técnica equivalente, del artículo noveno: lo hago de otra manera pero demuestro que es igual de seguro o más, y me lo aprueban. La segunda, como último recurso, es la excepción, del artículo décimo: es materialmente imposible cumplir y tampoco hay equivalente, así que pido permiso para saltármelo a cambio de medidas compensatorias. No confundas una con otra: la equivalente es 'otro camino igual de seguro', la excepción es 'el último cartucho cuando no hay otra'. Y ambas se piden antes, nunca después de montar.</a:t>
             </a:r>
           </a:p>
         </p:txBody>
@@ -671,7 +671,7 @@
           </a:p>
           <a:p>
             <a:r>
-              <a:t>N2: Primero, el reconocimiento mutuo del artículo once: un material aprobado legalmente en otro Estado de la Unión Europea, o de la zona asimilada, vale aquí, siempre que garantice un nivel de seguridad equivalente. Es la lógica del mercado único: no hay que volver a certificar en cada país. Y segundo, el artículo doce: las ITC citan las normas UNE sin indicar el año de edición, para no quedarse anticuadas cada vez que se revisa una norma. El listado oficial con los años vive en la ITC-ICG once. Por eso en todo el curso verás, por ejemplo, UNE sesenta mil seiscientos setenta sin fecha: no es un olvido, es exactamente como manda el Reglamento.</a:t>
+              <a:t>N2: Los vemos juntos porque los dos caen. Primero, el reconocimiento mutuo del artículo once: un material aprobado y comercializado legalmente en otro Estado de la Unión Europea, o de la zona asimilada, vale también aquí, siempre que garantice un nivel de seguridad equivalente al que exigimos nosotros. Es la lógica del mercado único europeo: no hace falta volver a certificarlo país por país. Y segundo, el artículo doce, un detalle muy fino: las ITC citan las normas UNE sin indicar el año de edición. ¿Por qué? Para no quedarse anticuadas cada vez que se revisa una norma. El listado oficial, ese sí con los años de cada norma, vive en la ITC-ICG once. Por eso en todo el curso verás, por ejemplo, UNE sesenta mil seiscientos setenta escrita sin fecha: no es un olvido ni una errata, es exactamente como manda el Reglamento.</a:t>
             </a:r>
           </a:p>
         </p:txBody>
@@ -741,12 +741,12 @@
           <a:lstStyle/>
           <a:p>
             <a:r>
-              <a:t>N1: Si se incumple, ¿dónde están las multas, en el Reglamento?</a:t>
-            </a:r>
-          </a:p>
-          <a:p>
-            <a:r>
-              <a:t>N2: No, y esto es una pregunta con trampa. El Reglamento no inventa las multas: te remite a las dos leyes de las que cuelga. La Ley de industria y la Ley de hidrocarburos son las que fijan qué es una infracción leve, grave o muy grave y cuál es su sanción. Idea para el examen: las sanciones no están en el Reglamento, están en las leyes. Si ves una opción que dice que el propio Reglamento fija las multas, desconfía; lo que hace es enviarte al régimen sancionador de esas dos leyes.</a:t>
+              <a:t>N1: Si se incumple, ¿dónde están las multas, en el propio Reglamento?</a:t>
+            </a:r>
+          </a:p>
+          <a:p>
+            <a:r>
+              <a:t>N2: No, y esta es una pregunta con trampa muy típica. El Reglamento no inventa las multas: te remite a las dos leyes de las que cuelga, ¿te acuerdas de ellas del primer vídeo? La Ley de industria y la Ley de hidrocarburos son las que fijan qué es una infracción leve, grave o muy grave, y cuál es la sanción de cada una. La idea para el examen es directa: las sanciones no están en el Reglamento, están en las leyes. Así que si ves una opción que dice que el propio Reglamento fija las multas, desconfía y descártala; lo que hace el Reglamento es enviarte al régimen sancionador de esas dos leyes. Todo cuadra con la idea del tronco: el Reglamento desarrolla las leyes, no las sustituye.</a:t>
             </a:r>
           </a:p>
         </p:txBody>
@@ -821,7 +821,7 @@
           </a:p>
           <a:p>
             <a:r>
-              <a:t>N2: Dos plazos que caen juntos. Cuando un accidente causa daños importantes o víctimas, el suministrador lo notifica a la Comunidad Autónoma lo antes posible y en no más de veinticuatro horas, y después remite un informe completo en un plazo máximo de siete días. El truco: primero llamo, veinticuatro horas, luego escribo, siete días. Y memoriza las cuatro clases de accidente como lista cerrada: deflagración, explosión, intoxicación e incendio. Un matiz: en la deflagración el frente de llama avanza más despacio que el sonido, un fogonazo rápido; en la explosión avanza más rápido que el sonido y es mucho más destructiva. En gas doméstico lo habitual es la deflagración, pero el Reglamento las lista por separado.</a:t>
+              <a:t>N2: Dos plazos que caen siempre juntos, así que apréndelos en pareja. Cuando un accidente causa daños importantes o víctimas, el suministrador lo notifica a la Comunidad Autónoma lo antes posible y en no más de veinticuatro horas; y después remite un informe completo en un plazo máximo de siete días. El truco para no cambiarlos: primero llamo, veinticuatro horas, luego escribo, siete días. Y memoriza las cuatro clases de accidente como lista cerrada: deflagración, explosión, intoxicación e incendio. Un matiz que te da puntos: deflagración y explosión no son lo mismo. En la deflagración el frente de llama avanza más despacio que el sonido, es un fogonazo rápido; en la explosión avanza más rápido que el sonido y es mucho más destructiva. En gas doméstico lo habitual es la deflagración, pero el Reglamento las lista por separado.</a:t>
             </a:r>
           </a:p>
         </p:txBody>
@@ -891,12 +891,12 @@
           <a:lstStyle/>
           <a:p>
             <a:r>
-              <a:t>N1: Repaso rápido de todo el bloque. ¿Tienes los cuatro pilares?</a:t>
-            </a:r>
-          </a:p>
-          <a:p>
-            <a:r>
-              <a:t>N2: Uno, la pregunta estrella: conectada a la red de distribución es inspección; por tu cuenta, revisión; y si obliga organismo de control, inspección siempre. Dos, mantener la instalación es obligación del titular, no tuya. Tres, el Reglamento marca mínimos obligatorios, el suelo y nunca el techo, y para no cumplir a la letra existen la técnica equivalente y la excepción, siempre antes del artículo quinto y firmadas por técnico competente. Y cuatro, ante accidente grave, veinticuatro horas para llamar y siete días para el informe, con las cuatro clases cerradas. Recítalos y pasamos al gran cierre.</a:t>
+              <a:t>N1: Repaso rápido de todo el bloque. ¿Tengo los cuatro pilares?</a:t>
+            </a:r>
+          </a:p>
+          <a:p>
+            <a:r>
+              <a:t>N2: Los fijamos en treinta segundos y en voz alta. Uno, la pregunta estrella: conectada a la red de distribución es inspección; por tu cuenta, sin red, revisión; y si obliga organismo de control, inspección siempre. Dos, mantener la instalación es obligación del titular, no tuya; tú ejecutas y adviertes. Tres, el Reglamento marca mínimos obligatorios, el suelo y nunca el techo, y para no cumplir a la letra existen la técnica equivalente y la excepción, siempre antes del artículo quinto y firmadas por técnico competente. Y cuatro, ante accidente grave, veinticuatro horas para llamar y siete días para el informe, con las cuatro clases cerradas. Recítalos de carrerilla y pasamos al gran cierre del tema.</a:t>
             </a:r>
           </a:p>
         </p:txBody>
@@ -966,22 +966,22 @@
           <a:lstStyle/>
           <a:p>
             <a:r>
-              <a:t>N1: Este es el gran final del tema. ¿Qué has conquistado en estos tres vídeos?</a:t>
-            </a:r>
-          </a:p>
-          <a:p>
-            <a:r>
-              <a:t>N2: Piénsalo como logros, no como resumen. Hoy distingues inspección de revisión con una sola pregunta, la de si está conectada a la red, y esa es la pregunta más repetida de todo el bloque. Sabes que la obligación de mantener es del titular, y que tú ejecutas y adviertes. Manejas las reglas finales: el Reglamento como mínimos obligatorios, la técnica equivalente y la excepción como salidas firmadas por técnico competente, las UNE citadas sin año con su listado en la ITC-ICG once, y las sanciones que viven en las dos leyes. Y llevas de memoria el protocolo de accidente: veinticuatro horas para avisar, siete días para el informe, cuatro clases cerradas.</a:t>
-            </a:r>
-          </a:p>
-          <a:p>
-            <a:r>
-              <a:t>N1: ¿Y por qué esto te hace mejor gasista y no solo mejor examinando?</a:t>
-            </a:r>
-          </a:p>
-          <a:p>
-            <a:r>
-              <a:t>N2: Porque en el examen te lo preguntan tal cual: inspección o revisión, quién comunica, qué plazos de accidente; y ahora lo resuelves sin pestañear. Pero en la obra vale todavía más: cada vez que haces un control periódico de verdad, cazas la rejilla tapada o el conducto obstruido que mata despacio, y evitas la intoxicación por monóxido antes de que ocurra. Ahí tu firma protege a una familia. Con esto cierras el Tema cero: ya no solo tocas tubos, entiendes de dónde sale cada norma, de qué respondes y por qué. Has completado el marco normativo entero; hoy ya piensas como un gasista. A partir de aquí saltamos a las instalaciones de verdad, con todo este mapa en la cabeza. Enhorabuena, y a por el siguiente tema.</a:t>
+              <a:t>N1: Este es el gran final del tema. ¿Qué he conquistado en estos tres vídeos?</a:t>
+            </a:r>
+          </a:p>
+          <a:p>
+            <a:r>
+              <a:t>N2: Vamos a reconstruirlo como logros, no como resumen, porque hoy sabes hacer cosas que al empezar no sabías. Distingues inspección de revisión con una sola pregunta, la de si está conectada a la red, y esa es la pregunta más repetida de todo el bloque. Sabes que la obligación de mantener es del titular, y que tú ejecutas y adviertes por escrito. Manejas las reglas finales sin agobiarte: el Reglamento como mínimos obligatorios, la técnica equivalente y la excepción como salidas firmadas por técnico competente y siempre antes de montar, las UNE citadas sin año con su listado en la ITC-ICG once, y las sanciones que viven en las dos leyes, no en el Reglamento. Y llevas de memoria el protocolo de accidente: veinticuatro horas para avisar, siete días para el informe, cuatro clases cerradas.</a:t>
+            </a:r>
+          </a:p>
+          <a:p>
+            <a:r>
+              <a:t>N1: ¿Y por qué esto me hace mejor gasista, y no solo mejor examinando?</a:t>
+            </a:r>
+          </a:p>
+          <a:p>
+            <a:r>
+              <a:t>N2: Por dos motivos. En el examen te lo preguntan tal cual, inspección o revisión, quién comunica, qué plazos de accidente, y ahora lo resuelves sin pestañear. Pero en la obra vale todavía más, y esto es lo bonito del oficio: cada vez que haces un control periódico de verdad, cazas la rejilla tapada o el conducto obstruido que mata despacio, y evitas una intoxicación por monóxido antes de que ocurra. Ahí tu firma protege a una familia entera. Con esto cierras el Tema cero completo: ya no solo tocas tubos, entiendes de dónde sale cada norma, de qué respondes tú y por qué existe cada regla. Has completado el marco normativo de arriba abajo; hoy, de verdad, ya piensas como un gasista. A partir de aquí saltamos a las instalaciones reales con todo este mapa en la cabeza. Enhorabuena por el tema, y a por el siguiente.</a:t>
             </a:r>
           </a:p>
         </p:txBody>
@@ -1051,12 +1051,12 @@
           <a:lstStyle/>
           <a:p>
             <a:r>
-              <a:t>N1: ¿Qué tres números tienes que llevarte grabados de este vídeo?</a:t>
-            </a:r>
-          </a:p>
-          <a:p>
-            <a:r>
-              <a:t>N2: Veinticuatro horas es el plazo máximo que tiene el suministrador para avisar a la Comunidad Autónoma cuando hay un accidente con daños importantes o víctimas. Siete días es el plazo para remitir después el informe completo. Y cuatro son las clases de accidente que el Reglamento lista como conjunto cerrado: deflagración, explosión, intoxicación e incendio. El truco para el orden es sencillo: primero llamas, en veinticuatro horas, y luego escribes, en siete días.</a:t>
+              <a:t>N1: ¿Qué tres números tengo que llevarme grabados de este vídeo?</a:t>
+            </a:r>
+          </a:p>
+          <a:p>
+            <a:r>
+              <a:t>N2: Estos tres se preguntan y hay que soltarlos sin dudar. Veinticuatro horas es el plazo máximo que tiene el suministrador para avisar a la Comunidad Autónoma cuando hay un accidente con daños importantes o víctimas. Siete días es el plazo para remitir después el informe completo. Y cuatro son las clases de accidente que el Reglamento lista como conjunto cerrado: deflagración, explosión, intoxicación e incendio. El truco para no cambiar el orden de los plazos es muy sencillo, y lo repetiremos: primero llamas, en veinticuatro horas, y luego escribes, en siete días.</a:t>
             </a:r>
           </a:p>
         </p:txBody>
@@ -1126,12 +1126,12 @@
           <a:lstStyle/>
           <a:p>
             <a:r>
-              <a:t>N1: La instalación hay que mantenerla. ¿Pero de quién es esa obligación?</a:t>
-            </a:r>
-          </a:p>
-          <a:p>
-            <a:r>
-              <a:t>N2: Del titular, el dueño, y en su defecto del usuario, quien la gasta. No es del instalador ni de la compañía: ellos ayudan y recomiendan, pero el que responde de que la instalación esté permanentemente en disposición de servicio, con su nivel de seguridad, es el dueño. Es exactamente como el coche: el taller te lo arregla, pero el que tiene que llevarlo a revisión eres tú. Tu papel como gasista es ejecutar el mantenimiento y advertir por escrito; la responsabilidad última de conservarlo es del titular.</a:t>
+              <a:t>N1: La instalación hay que mantenerla, pero ¿de quién es esa obligación?</a:t>
+            </a:r>
+          </a:p>
+          <a:p>
+            <a:r>
+              <a:t>N2: Del titular, el dueño, y en su defecto del usuario, quien la gasta. Que no te confunda que tú seas el que va con las herramientas: la obligación legal de mantener no es del instalador ni de la compañía. Ellos ayudan y recomiendan, pero el que responde de que la instalación esté permanentemente en disposición de servicio, con su nivel de seguridad, es el dueño. La comparación que lo deja clavado: es como el coche. El taller te lo arregla, pero el que está obligado a llevarlo a la revisión y a mantenerlo eres tú, el propietario. Tu papel como gasista es ejecutar el mantenimiento cuando te llaman y advertir por escrito de lo que veas; la responsabilidad última de conservarlo en buen estado es del titular.</a:t>
             </a:r>
           </a:p>
         </p:txBody>
@@ -1201,12 +1201,12 @@
           <a:lstStyle/>
           <a:p>
             <a:r>
-              <a:t>N1: Esta es LA pregunta del tema. ¿Cómo distingues inspección de revisión?</a:t>
-            </a:r>
-          </a:p>
-          <a:p>
-            <a:r>
-              <a:t>N2: Con una sola pregunta: ¿la instalación está conectada a la red de distribución, la tubería de la compañía en la calle? Si sí está conectada, gas natural de ciudad o GLP de red, es inspección. Si no está conectada, un depósito de GLP propio de un chalé, unas bombonas, es revisión. Y una segunda regla que gana cualquier empate: si la ley obliga a que venga un organismo de control, es inspección siempre. Chuleta mental: conectada a red, inspección; por tu cuenta, revisión. Con esto resuelves todas las preguntas de este bloque, que son muchas.</a:t>
+              <a:t>N1: Esta es LA pregunta del tema. ¿Cómo distingo inspección de revisión?</a:t>
+            </a:r>
+          </a:p>
+          <a:p>
+            <a:r>
+              <a:t>N2: Buena noticia: se resuelve con una sola pregunta. Pregúntate si la instalación está conectada a la red de distribución, es decir, a la tubería de la compañía que pasa por la calle. Si la respuesta es sí, gas natural de ciudad o GLP de red, entonces es inspección. Si la respuesta es no, por ejemplo un depósito de GLP propio en un chalé o unas bombonas, entonces es revisión. Y una segunda regla que gana cualquier empate: si la ley obliga a que venga un organismo de control, es inspección siempre, sin discusión. Chuleta mental para toda la vida: conectada a red, inspección; por tu cuenta, revisión. Con esta sola pregunta resuelves todas las cuestiones de este bloque, que en el examen son muchas y parecen difíciles hasta que tienes la clave.</a:t>
             </a:r>
           </a:p>
         </p:txBody>
@@ -1281,7 +1281,7 @@
           </a:p>
           <a:p>
             <a:r>
-              <a:t>N2: Las inspecciones periódicas de las receptoras alimentadas desde redes por canalización las hace una empresa instaladora de gas habilitada o el distribuidor, con medios propios o externos. Y esto incluye también la inspección de la parte común de las receptoras. Fíjate en que es siempre alguien ajeno al usuario, habilitado para ello. Estas inspecciones son pan de tu oficio: cuando tengas tu categoría B y trabajes con una empresa habilitada, es una de las cosas que vas a hacer. Y recuerda que el titular elige libremente la empresa que se la realiza.</a:t>
+              <a:t>N2: La inspección de las receptoras alimentadas desde redes por canalización la hace una empresa instaladora de gas habilitada o el distribuidor, con medios propios o externos. Y fíjate en un detalle práctico: esto incluye también la inspección de la parte común de las receptoras, el montante que comparten los vecinos, no solo lo de cada piso. Lo importante que aquí se repite es que siempre lo hace alguien ajeno al usuario, habilitado para ello; no se autoinspecciona uno solo su instalación de red. Esto no es teoría lejana: cuando tengas tu categoría B y trabajes con una empresa habilitada, hacer estas inspecciones va a ser pan de tu oficio. Y recuerda un derecho del cliente que también cae: el titular elige libremente qué empresa se la realiza.</a:t>
             </a:r>
           </a:p>
         </p:txBody>
@@ -1356,7 +1356,7 @@
           </a:p>
           <a:p>
             <a:r>
-              <a:t>N2: Las revisiones se hacen en todas las instalaciones que no están conectadas a redes de distribución, por ejemplo un depósito de GLP propio en un chalé. Es obligación del titular, y en su defecto del usuario, solicitar los servicios de una de las entidades que indica la ITC. Fíjate en la diferencia con la inspección: allí manda el hecho de estar enganchado a la red, donde un fallo afecta a muchos, y viene alguien habilitado ajeno; aquí la instalación es más privada, tu depósito, y el propio titular tiene que mover ficha para que se la revisen. Misma finalidad, la seguridad, pero distinto nombre y distinto agente según el riesgo.</a:t>
+              <a:t>N2: La revisión es para todas las instalaciones que no están conectadas a redes de distribución; el ejemplo típico es un depósito de GLP propio en un chalé. Aquí cambia quién mueve ficha: es obligación del titular, y en su defecto del usuario, solicitar los servicios de una de las entidades que indica la ITC. Compara con la inspección para entender la lógica: en la inspección mandaba el hecho de estar enganchado a la red, donde un fallo puede afectar a muchos vecinos, y venía alguien habilitado ajeno; en la revisión la instalación es más privada, tu depósito en tu parcela, y es el propio titular quien tiene que pedir que se la revisen. Misma finalidad en las dos, la seguridad; lo que cambia es el nombre y el agente, y cambia según el riesgo.</a:t>
             </a:r>
           </a:p>
         </p:txBody>
@@ -1431,7 +1431,7 @@
           </a:p>
           <a:p>
             <a:r>
-              <a:t>N2: Es el momento en que cazas lo que mata despacio, lo que no se ve de un día para otro. Una rejilla de ventilación tapada con un mueble o con pintura. Un conducto de evacuación de humos obstruido. Una fuga incipiente que todavía no huele fuerte. Un aparato que empieza a dar mala combustión y monóxido de carbono. De cada control sale su certificado, con o sin anomalías, y si hay anomalías, ese papel marca lo que hay que corregir. Saltarse el control o firmarlo sin mirar de verdad es dejar que el problema crezca sin que nadie lo vea, hasta el susto. Ahí es donde tu trabajo salva vidas.</a:t>
+              <a:t>N2: Sirve para cazar lo que mata despacio, esos problemas que no se ven de un día para otro y por eso son tan traicioneros. Piensa en casos reales: una rejilla de ventilación tapada con un mueble o pintada por encima, que ahoga la combustión. Un conducto de evacuación de humos obstruido, que devuelve los gases a la casa. Una fuga incipiente, todavía pequeña, que aún no huele fuerte. O un aparato que empieza a dar mala combustión y monóxido de carbono. De cada control sale su certificado, con o sin anomalías, y si las hay, ese papel marca justo lo que hay que corregir. La conclusión es seria: saltarse el control o firmarlo sin mirar de verdad es dejar que el problema crezca sin que nadie lo vea, hasta el susto o la desgracia. Aquí es donde tu trabajo, bien hecho, salva vidas.</a:t>
             </a:r>
           </a:p>
         </p:txBody>
@@ -1506,7 +1506,7 @@
           </a:p>
           <a:p>
             <a:r>
-              <a:t>N2: Sí, y es la Comunidad Autónoma. Por encima de todo, puede comprobar en cualquier momento, por sí misma o mediante un organismo de control, que la instalación cumple, sobre todo si hay riesgo significativo para personas, animales, bienes o medio ambiente. Es la policía del gas: puede aparecer cuando quiera. De oficio significa por su propia iniciativa; a instancia de parte significa porque alguien se ha quejado. No es lo habitual del día a día, pero conviene saber que ese control administrativo existe y está por encima de los controles periódicos.</a:t>
+              <a:t>N2: Sí, y conviene saberlo. Por encima de todo está la Comunidad Autónoma, que puede comprobar en cualquier momento, por sí misma o mediante un organismo de control, que la instalación cumple; sobre todo si hay un riesgo significativo para personas, animales, bienes o medio ambiente. Es, por decirlo llano, la policía del gas: puede aparecer cuando quiera. Te traduzco dos expresiones legales que salen aquí: 'de oficio' significa que actúa por su propia iniciativa, sin que nadie se lo pida; y 'a instancia de parte' significa que actúa porque alguien lo ha solicitado o se ha quejado. No es lo del día a día, pero es importante que sepas que ese control administrativo existe y está por encima de los controles periódicos normales.</a:t>
             </a:r>
           </a:p>
         </p:txBody>
@@ -1581,7 +1581,7 @@
           </a:p>
           <a:p>
             <a:r>
-              <a:t>N2: No, son tres papeles distintos y el examen los cruza. La empresa instaladora es la empresa, la razón social habilitada según la ITC-ICG cero nueve, con su seguro y sus medios. El instalador es la persona con carné, y tiene categorías A, B o C según esa misma ITC. Y el agente de puesta en marcha es quien arranca los aparatos, según la ITC-ICG cero ocho. Tú te estás sacando la categoría B: podrás trabajar en la mayoría de instalaciones receptoras domésticas y comerciales típicas. Ve asociando cada papel con su ITC: instalador a la cero nueve, aparatos a la cero ocho.</a:t>
+              <a:t>N2: No, son tres figuras distintas y el examen las cruza a propósito, así que vamos a separarlas bien. La empresa instaladora es la empresa, la razón social habilitada según la ITC-ICG cero nueve, con su seguro y sus medios. El instalador es la persona con carné, tú, y tiene categorías A, B o C según esa misma ITC. Y el agente de puesta en marcha es quien arranca los aparatos, según la ITC-ICG cero ocho. Tú te estás sacando ahora mismo la categoría B: con ella podrás trabajar en la mayoría de instalaciones receptoras domésticas y comerciales típicas, que son la inmensa mayoría de las que verás. Un consejo para el examen: ve asociando cada figura con su ITC, el instalador a la cero nueve y los aparatos a la cero ocho, y no las mezclarás.</a:t>
             </a:r>
           </a:p>
         </p:txBody>
@@ -5401,7 +5401,7 @@
                 </a:solidFill>
                 <a:latin typeface="Montserrat"/>
               </a:rPr>
-              <a:t>Reconocimiento mutuo: material europeo, si es seguro</a:t>
+              <a:t>Reconocimiento mutuo: material europeo si es seguro</a:t>
             </a:r>
           </a:p>
           <a:p>
@@ -6571,7 +6571,7 @@
                 </a:solidFill>
                 <a:latin typeface="Montserrat"/>
               </a:rPr>
-              <a:t>Conectada a red → inspección; por tu cuenta → revisión</a:t>
+              <a:t>Conectada a red → inspección; sin red → revisión</a:t>
             </a:r>
           </a:p>
           <a:p>
@@ -6917,7 +6917,7 @@
                 </a:solidFill>
                 <a:latin typeface="Montserrat"/>
               </a:rPr>
-              <a:t>Distingues inspección de revisión con una sola pregunta</a:t>
+              <a:t>Distingues inspección de revisión con una pregunta</a:t>
             </a:r>
           </a:p>
           <a:p>
@@ -7351,7 +7351,7 @@
                 </a:solidFill>
                 <a:latin typeface="Montserrat"/>
               </a:rPr>
-              <a:t>horas para avisar de un accidente</a:t>
+              <a:t>horas para avisar del accidente</a:t>
             </a:r>
           </a:p>
         </p:txBody>

--- a/Curso Gas B/00 - El Reglamento de Gas - estructura, ambito y generalidades/00 - El Reglamento de Gas - Vídeo 3.pptx
+++ b/Curso Gas B/00 - El Reglamento de Gas - estructura, ambito y generalidades/00 - El Reglamento de Gas - Vídeo 3.pptx
@@ -20,6 +20,7 @@
     <p:sldId id="268" r:id="rId20"/>
     <p:sldId id="269" r:id="rId21"/>
     <p:sldId id="270" r:id="rId22"/>
+    <p:sldId id="271" r:id="rId23"/>
   </p:sldIdLst>
   <p:sldSz cx="12191695" cy="6858000" type="screen4x3"/>
   <p:notesSz cx="6858000" cy="9144000"/>
@@ -591,12 +592,12 @@
           <a:lstStyle/>
           <a:p>
             <a:r>
-              <a:t>N1: ¿El Reglamento es lo máximo que puedo hacer, o lo mínimo?</a:t>
-            </a:r>
-          </a:p>
-          <a:p>
-            <a:r>
-              <a:t>N2: Es el mínimo, y este matiz cambia la forma de entenderlo todo. Sus prescripciones son mínimos obligatorios: marcan el suelo, no el techo. Puedes hacerlo más seguro, nunca menos. Y si por lo que sea no puedes cumplir una prescripción a la letra, existen dos salidas, las dos siempre antes del procedimiento del artículo quinto y firmadas por técnico competente. La primera es la técnica equivalente, del artículo noveno: lo hago de otra manera pero demuestro que es igual de seguro o más, y me lo aprueban. La segunda, como último recurso, es la excepción, del artículo décimo: es materialmente imposible cumplir y tampoco hay equivalente, así que pido permiso para saltármelo a cambio de medidas compensatorias. No confundas una con otra: la equivalente es 'otro camino igual de seguro', la excepción es 'el último cartucho cuando no hay otra'. Y ambas se piden antes, nunca después de montar.</a:t>
+              <a:t>N1: Empresa instaladora, instalador, agente de puesta en marcha. ¿Es todo lo mismo?</a:t>
+            </a:r>
+          </a:p>
+          <a:p>
+            <a:r>
+              <a:t>N2: No, son tres figuras distintas y el examen las cruza a propósito, así que vamos a separarlas bien. La empresa instaladora es la empresa, la razón social habilitada según la ITC-ICG cero nueve, con su seguro y sus medios. El instalador es la persona con carné, tú, y tiene categorías A, B o C según esa misma ITC. Y el agente de puesta en marcha es quien arranca los aparatos, según la ITC-ICG cero ocho. Tú te estás sacando ahora mismo la categoría B: con ella podrás trabajar en la mayoría de instalaciones receptoras domésticas y comerciales típicas, que son la inmensa mayoría de las que verás. Un consejo para el examen: ve asociando cada figura con su ITC, el instalador a la cero nueve y los aparatos a la cero ocho, y no las mezclarás.</a:t>
             </a:r>
           </a:p>
         </p:txBody>
@@ -666,12 +667,12 @@
           <a:lstStyle/>
           <a:p>
             <a:r>
-              <a:t>N1: Dos detalles finos pero preguntados: material extranjero y normas UNE.</a:t>
-            </a:r>
-          </a:p>
-          <a:p>
-            <a:r>
-              <a:t>N2: Los vemos juntos porque los dos caen. Primero, el reconocimiento mutuo del artículo once: un material aprobado y comercializado legalmente en otro Estado de la Unión Europea, o de la zona asimilada, vale también aquí, siempre que garantice un nivel de seguridad equivalente al que exigimos nosotros. Es la lógica del mercado único europeo: no hace falta volver a certificarlo país por país. Y segundo, el artículo doce, un detalle muy fino: las ITC citan las normas UNE sin indicar el año de edición. ¿Por qué? Para no quedarse anticuadas cada vez que se revisa una norma. El listado oficial, ese sí con los años de cada norma, vive en la ITC-ICG once. Por eso en todo el curso verás, por ejemplo, UNE sesenta mil seiscientos setenta escrita sin fecha: no es un olvido ni una errata, es exactamente como manda el Reglamento.</a:t>
+              <a:t>N1: ¿El Reglamento es lo máximo que puedo hacer, o lo mínimo?</a:t>
+            </a:r>
+          </a:p>
+          <a:p>
+            <a:r>
+              <a:t>N2: Es el mínimo, y este matiz cambia la forma de entenderlo todo. Sus prescripciones son mínimos obligatorios: marcan el suelo, no el techo. Puedes hacerlo más seguro, nunca menos. Y si por lo que sea no puedes cumplir una prescripción a la letra, existen dos salidas, las dos siempre antes del procedimiento del artículo quinto y firmadas por técnico competente. La primera es la técnica equivalente, del artículo noveno: lo hago de otra manera pero demuestro que es igual de seguro o más, y me lo aprueban. La segunda, como último recurso, es la excepción, del artículo décimo: es materialmente imposible cumplir y tampoco hay equivalente, así que pido permiso para saltármelo a cambio de medidas compensatorias. No confundas una con otra: la equivalente es 'otro camino igual de seguro', la excepción es 'el último cartucho cuando no hay otra'. Y ambas se piden antes, nunca después de montar.</a:t>
             </a:r>
           </a:p>
         </p:txBody>
@@ -741,12 +742,12 @@
           <a:lstStyle/>
           <a:p>
             <a:r>
-              <a:t>N1: Si se incumple, ¿dónde están las multas, en el propio Reglamento?</a:t>
-            </a:r>
-          </a:p>
-          <a:p>
-            <a:r>
-              <a:t>N2: No, y esta es una pregunta con trampa muy típica. El Reglamento no inventa las multas: te remite a las dos leyes de las que cuelga, ¿te acuerdas de ellas del primer vídeo? La Ley de industria y la Ley de hidrocarburos son las que fijan qué es una infracción leve, grave o muy grave, y cuál es la sanción de cada una. La idea para el examen es directa: las sanciones no están en el Reglamento, están en las leyes. Así que si ves una opción que dice que el propio Reglamento fija las multas, desconfía y descártala; lo que hace el Reglamento es enviarte al régimen sancionador de esas dos leyes. Todo cuadra con la idea del tronco: el Reglamento desarrolla las leyes, no las sustituye.</a:t>
+              <a:t>N1: Dos detalles finos pero preguntados: material extranjero y normas UNE.</a:t>
+            </a:r>
+          </a:p>
+          <a:p>
+            <a:r>
+              <a:t>N2: Los vemos juntos porque los dos caen. Primero, el reconocimiento mutuo del artículo once: un material aprobado y comercializado legalmente en otro Estado de la Unión Europea, o de la zona asimilada, vale también aquí, siempre que garantice un nivel de seguridad equivalente al que exigimos nosotros. Es la lógica del mercado único europeo: no hace falta volver a certificarlo país por país. Y segundo, el artículo doce, un detalle muy fino: las ITC citan las normas UNE sin indicar el año de edición. ¿Por qué? Para no quedarse anticuadas cada vez que se revisa una norma. El listado oficial, ese sí con los años de cada norma, vive en la ITC-ICG once. Por eso en todo el curso verás, por ejemplo, UNE sesenta mil seiscientos setenta escrita sin fecha: no es un olvido ni una errata, es exactamente como manda el Reglamento.</a:t>
             </a:r>
           </a:p>
         </p:txBody>
@@ -816,12 +817,12 @@
           <a:lstStyle/>
           <a:p>
             <a:r>
-              <a:t>N1: Ante un accidente grave, ¿qué protocolo y qué plazos?</a:t>
-            </a:r>
-          </a:p>
-          <a:p>
-            <a:r>
-              <a:t>N2: Dos plazos que caen siempre juntos, así que apréndelos en pareja. Cuando un accidente causa daños importantes o víctimas, el suministrador lo notifica a la Comunidad Autónoma lo antes posible y en no más de veinticuatro horas; y después remite un informe completo en un plazo máximo de siete días. El truco para no cambiarlos: primero llamo, veinticuatro horas, luego escribo, siete días. Y memoriza las cuatro clases de accidente como lista cerrada: deflagración, explosión, intoxicación e incendio. Un matiz que te da puntos: deflagración y explosión no son lo mismo. En la deflagración el frente de llama avanza más despacio que el sonido, es un fogonazo rápido; en la explosión avanza más rápido que el sonido y es mucho más destructiva. En gas doméstico lo habitual es la deflagración, pero el Reglamento las lista por separado.</a:t>
+              <a:t>N1: Si se incumple, ¿dónde están las multas, en el propio Reglamento?</a:t>
+            </a:r>
+          </a:p>
+          <a:p>
+            <a:r>
+              <a:t>N2: No, y esta es una pregunta con trampa muy típica. El Reglamento no inventa las multas: te remite a las dos leyes de las que cuelga, ¿te acuerdas de ellas del primer vídeo? La Ley de industria y la Ley de hidrocarburos son las que fijan qué es una infracción leve, grave o muy grave, y cuál es la sanción de cada una. La idea para el examen es directa: las sanciones no están en el Reglamento, están en las leyes. Así que si ves una opción que dice que el propio Reglamento fija las multas, desconfía y descártala; lo que hace el Reglamento es enviarte al régimen sancionador de esas dos leyes. Todo cuadra con la idea del tronco: el Reglamento desarrolla las leyes, no las sustituye.</a:t>
             </a:r>
           </a:p>
         </p:txBody>
@@ -891,12 +892,12 @@
           <a:lstStyle/>
           <a:p>
             <a:r>
-              <a:t>N1: Repaso rápido de todo el bloque. ¿Tengo los cuatro pilares?</a:t>
-            </a:r>
-          </a:p>
-          <a:p>
-            <a:r>
-              <a:t>N2: Los fijamos en treinta segundos y en voz alta. Uno, la pregunta estrella: conectada a la red de distribución es inspección; por tu cuenta, sin red, revisión; y si obliga organismo de control, inspección siempre. Dos, mantener la instalación es obligación del titular, no tuya; tú ejecutas y adviertes. Tres, el Reglamento marca mínimos obligatorios, el suelo y nunca el techo, y para no cumplir a la letra existen la técnica equivalente y la excepción, siempre antes del artículo quinto y firmadas por técnico competente. Y cuatro, ante accidente grave, veinticuatro horas para llamar y siete días para el informe, con las cuatro clases cerradas. Recítalos de carrerilla y pasamos al gran cierre del tema.</a:t>
+              <a:t>N1: Ante un accidente grave, ¿qué protocolo y qué plazos?</a:t>
+            </a:r>
+          </a:p>
+          <a:p>
+            <a:r>
+              <a:t>N2: Dos plazos que caen siempre juntos, así que apréndelos en pareja. Cuando un accidente causa daños importantes o víctimas, el suministrador lo notifica a la Comunidad Autónoma lo antes posible y en no más de veinticuatro horas; y después remite un informe completo en un plazo máximo de siete días. El truco para no cambiarlos: primero llamo, veinticuatro horas, luego escribo, siete días. Y memoriza las cuatro clases de accidente como lista cerrada: deflagración, explosión, intoxicación e incendio. Un matiz que te da puntos: deflagración y explosión no son lo mismo. En la deflagración el frente de llama avanza más despacio que el sonido, es un fogonazo rápido; en la explosión avanza más rápido que el sonido y es mucho más destructiva. En gas doméstico lo habitual es la deflagración, pero el Reglamento las lista por separado.</a:t>
             </a:r>
           </a:p>
         </p:txBody>
@@ -966,6 +967,81 @@
           <a:lstStyle/>
           <a:p>
             <a:r>
+              <a:t>N1: Repaso rápido de todo el bloque. ¿Tengo los cuatro pilares?</a:t>
+            </a:r>
+          </a:p>
+          <a:p>
+            <a:r>
+              <a:t>N2: Los fijamos en treinta segundos y en voz alta. Uno, la pregunta estrella: conectada a la red de distribución es inspección; por tu cuenta, sin red, revisión; y si obliga organismo de control, inspección siempre. Dos, mantener la instalación es obligación del titular, no tuya; tú ejecutas y adviertes. Tres, el Reglamento marca mínimos obligatorios, el suelo y nunca el techo, y para no cumplir a la letra existen la técnica equivalente y la excepción, siempre antes del artículo quinto y firmadas por técnico competente. Y cuatro, ante accidente grave, veinticuatro horas para llamar y siete días para el informe, con las cuatro clases cerradas. Recítalos de carrerilla y pasamos al gran cierre del tema.</a:t>
+            </a:r>
+          </a:p>
+        </p:txBody>
+      </p:sp>
+      <p:sp>
+        <p:nvSpPr>
+          <p:cNvPr id="4" name="Slide Number Placeholder 3"/>
+          <p:cNvSpPr>
+            <a:spLocks noGrp="1"/>
+          </p:cNvSpPr>
+          <p:nvPr>
+            <p:ph type="sldNum" idx="5" sz="quarter"/>
+          </p:nvPr>
+        </p:nvSpPr>
+        <p:spPr/>
+      </p:sp>
+    </p:spTree>
+  </p:cSld>
+  <p:clrMapOvr>
+    <a:masterClrMapping/>
+  </p:clrMapOvr>
+</p:notes>
+</file>
+
+<file path=ppt/notesSlides/notesSlide16.xml><?xml version="1.0" encoding="utf-8"?>
+<p:notes xmlns:a="http://schemas.openxmlformats.org/drawingml/2006/main" xmlns:p="http://schemas.openxmlformats.org/presentationml/2006/main" xmlns:r="http://schemas.openxmlformats.org/officeDocument/2006/relationships">
+  <p:cSld>
+    <p:spTree>
+      <p:nvGrpSpPr>
+        <p:cNvPr id="1" name=""/>
+        <p:cNvGrpSpPr/>
+        <p:nvPr/>
+      </p:nvGrpSpPr>
+      <p:grpSpPr>
+        <a:xfrm>
+          <a:off x="0" y="0"/>
+          <a:ext cx="0" cy="0"/>
+          <a:chOff x="0" y="0"/>
+          <a:chExt cx="0" cy="0"/>
+        </a:xfrm>
+      </p:grpSpPr>
+      <p:sp>
+        <p:nvSpPr>
+          <p:cNvPr id="2" name="Slide Image Placeholder 1"/>
+          <p:cNvSpPr>
+            <a:spLocks noGrp="1"/>
+          </p:cNvSpPr>
+          <p:nvPr>
+            <p:ph type="sldImg" idx="2"/>
+          </p:nvPr>
+        </p:nvSpPr>
+        <p:spPr/>
+      </p:sp>
+      <p:sp>
+        <p:nvSpPr>
+          <p:cNvPr id="3" name="Notes Placeholder 2"/>
+          <p:cNvSpPr>
+            <a:spLocks noGrp="1"/>
+          </p:cNvSpPr>
+          <p:nvPr>
+            <p:ph type="body" idx="3" sz="quarter"/>
+          </p:nvPr>
+        </p:nvSpPr>
+        <p:spPr/>
+        <p:txBody>
+          <a:bodyPr/>
+          <a:lstStyle/>
+          <a:p>
+            <a:r>
               <a:t>N1: Este es el gran final del tema. ¿Qué he conquistado en estos tres vídeos?</a:t>
             </a:r>
           </a:p>
@@ -1124,16 +1200,7 @@
         <p:txBody>
           <a:bodyPr/>
           <a:lstStyle/>
-          <a:p>
-            <a:r>
-              <a:t>N1: La instalación hay que mantenerla, pero ¿de quién es esa obligación?</a:t>
-            </a:r>
-          </a:p>
-          <a:p>
-            <a:r>
-              <a:t>N2: Del titular, el dueño, y en su defecto del usuario, quien la gasta. Que no te confunda que tú seas el que va con las herramientas: la obligación legal de mantener no es del instalador ni de la compañía. Ellos ayudan y recomiendan, pero el que responde de que la instalación esté permanentemente en disposición de servicio, con su nivel de seguridad, es el dueño. La comparación que lo deja clavado: es como el coche. El taller te lo arregla, pero el que está obligado a llevarlo a la revisión y a mantenerlo eres tú, el propietario. Tu papel como gasista es ejecutar el mantenimiento cuando te llaman y advertir por escrito de lo que veas; la responsabilidad última de conservarlo en buen estado es del titular.</a:t>
-            </a:r>
-          </a:p>
+          <a:p/>
         </p:txBody>
       </p:sp>
       <p:sp>
@@ -1201,12 +1268,12 @@
           <a:lstStyle/>
           <a:p>
             <a:r>
-              <a:t>N1: Esta es LA pregunta del tema. ¿Cómo distingo inspección de revisión?</a:t>
-            </a:r>
-          </a:p>
-          <a:p>
-            <a:r>
-              <a:t>N2: Buena noticia: se resuelve con una sola pregunta. Pregúntate si la instalación está conectada a la red de distribución, es decir, a la tubería de la compañía que pasa por la calle. Si la respuesta es sí, gas natural de ciudad o GLP de red, entonces es inspección. Si la respuesta es no, por ejemplo un depósito de GLP propio en un chalé o unas bombonas, entonces es revisión. Y una segunda regla que gana cualquier empate: si la ley obliga a que venga un organismo de control, es inspección siempre, sin discusión. Chuleta mental para toda la vida: conectada a red, inspección; por tu cuenta, revisión. Con esta sola pregunta resuelves todas las cuestiones de este bloque, que en el examen son muchas y parecen difíciles hasta que tienes la clave.</a:t>
+              <a:t>N1: La instalación hay que mantenerla, pero ¿de quién es esa obligación?</a:t>
+            </a:r>
+          </a:p>
+          <a:p>
+            <a:r>
+              <a:t>N2: Del titular, el dueño, y en su defecto del usuario, quien la gasta. Que no te confunda que tú seas el que va con las herramientas: la obligación legal de mantener no es del instalador ni de la compañía. Ellos ayudan y recomiendan, pero el que responde de que la instalación esté permanentemente en disposición de servicio, con su nivel de seguridad, es el dueño. La comparación que lo deja clavado: es como el coche. El taller te lo arregla, pero el que está obligado a llevarlo a la revisión y a mantenerlo eres tú, el propietario. Tu papel como gasista es ejecutar el mantenimiento cuando te llaman y advertir por escrito de lo que veas; la responsabilidad última de conservarlo en buen estado es del titular.</a:t>
             </a:r>
           </a:p>
         </p:txBody>
@@ -1276,12 +1343,12 @@
           <a:lstStyle/>
           <a:p>
             <a:r>
-              <a:t>N1: Cuando toca inspección, ¿quién está habilitado para hacerla?</a:t>
-            </a:r>
-          </a:p>
-          <a:p>
-            <a:r>
-              <a:t>N2: La inspección de las receptoras alimentadas desde redes por canalización la hace una empresa instaladora de gas habilitada o el distribuidor, con medios propios o externos. Y fíjate en un detalle práctico: esto incluye también la inspección de la parte común de las receptoras, el montante que comparten los vecinos, no solo lo de cada piso. Lo importante que aquí se repite es que siempre lo hace alguien ajeno al usuario, habilitado para ello; no se autoinspecciona uno solo su instalación de red. Esto no es teoría lejana: cuando tengas tu categoría B y trabajes con una empresa habilitada, hacer estas inspecciones va a ser pan de tu oficio. Y recuerda un derecho del cliente que también cae: el titular elige libremente qué empresa se la realiza.</a:t>
+              <a:t>N1: Esta es LA pregunta del tema. ¿Cómo distingo inspección de revisión?</a:t>
+            </a:r>
+          </a:p>
+          <a:p>
+            <a:r>
+              <a:t>N2: Buena noticia: se resuelve con una sola pregunta. Pregúntate si la instalación está conectada a la red de distribución, es decir, a la tubería de la compañía que pasa por la calle. Si la respuesta es sí, gas natural de ciudad o GLP de red, entonces es inspección. Si la respuesta es no, por ejemplo un depósito de GLP propio en un chalé o unas bombonas, entonces es revisión. Y una segunda regla que gana cualquier empate: si la ley obliga a que venga un organismo de control, es inspección siempre, sin discusión. Chuleta mental para toda la vida: conectada a red, inspección; por tu cuenta, revisión. Con esta sola pregunta resuelves todas las cuestiones de este bloque, que en el examen son muchas y parecen difíciles hasta que tienes la clave.</a:t>
             </a:r>
           </a:p>
         </p:txBody>
@@ -1351,12 +1418,12 @@
           <a:lstStyle/>
           <a:p>
             <a:r>
-              <a:t>N1: ¿Y cuándo toca revisión, quién la pide?</a:t>
-            </a:r>
-          </a:p>
-          <a:p>
-            <a:r>
-              <a:t>N2: La revisión es para todas las instalaciones que no están conectadas a redes de distribución; el ejemplo típico es un depósito de GLP propio en un chalé. Aquí cambia quién mueve ficha: es obligación del titular, y en su defecto del usuario, solicitar los servicios de una de las entidades que indica la ITC. Compara con la inspección para entender la lógica: en la inspección mandaba el hecho de estar enganchado a la red, donde un fallo puede afectar a muchos vecinos, y venía alguien habilitado ajeno; en la revisión la instalación es más privada, tu depósito en tu parcela, y es el propio titular quien tiene que pedir que se la revisen. Misma finalidad en las dos, la seguridad; lo que cambia es el nombre y el agente, y cambia según el riesgo.</a:t>
+              <a:t>N1: Cuando toca inspección, ¿quién está habilitado para hacerla?</a:t>
+            </a:r>
+          </a:p>
+          <a:p>
+            <a:r>
+              <a:t>N2: La inspección de las receptoras alimentadas desde redes por canalización la hace una empresa instaladora de gas habilitada o el distribuidor, con medios propios o externos. Y fíjate en un detalle práctico: esto incluye también la inspección de la parte común de las receptoras, el montante que comparten los vecinos, no solo lo de cada piso. Lo importante que aquí se repite es que siempre lo hace alguien ajeno al usuario, habilitado para ello; no se autoinspecciona uno solo su instalación de red. Esto no es teoría lejana: cuando tengas tu categoría B y trabajes con una empresa habilitada, hacer estas inspecciones va a ser pan de tu oficio. Y recuerda un derecho del cliente que también cae: el titular elige libremente qué empresa se la realiza.</a:t>
             </a:r>
           </a:p>
         </p:txBody>
@@ -1426,12 +1493,12 @@
           <a:lstStyle/>
           <a:p>
             <a:r>
-              <a:t>N1: Más allá del papeleo, ¿para qué sirve de verdad el control periódico?</a:t>
-            </a:r>
-          </a:p>
-          <a:p>
-            <a:r>
-              <a:t>N2: Sirve para cazar lo que mata despacio, esos problemas que no se ven de un día para otro y por eso son tan traicioneros. Piensa en casos reales: una rejilla de ventilación tapada con un mueble o pintada por encima, que ahoga la combustión. Un conducto de evacuación de humos obstruido, que devuelve los gases a la casa. Una fuga incipiente, todavía pequeña, que aún no huele fuerte. O un aparato que empieza a dar mala combustión y monóxido de carbono. De cada control sale su certificado, con o sin anomalías, y si las hay, ese papel marca justo lo que hay que corregir. La conclusión es seria: saltarse el control o firmarlo sin mirar de verdad es dejar que el problema crezca sin que nadie lo vea, hasta el susto o la desgracia. Aquí es donde tu trabajo, bien hecho, salva vidas.</a:t>
+              <a:t>N1: ¿Y cuándo toca revisión, quién la pide?</a:t>
+            </a:r>
+          </a:p>
+          <a:p>
+            <a:r>
+              <a:t>N2: La revisión es para todas las instalaciones que no están conectadas a redes de distribución; el ejemplo típico es un depósito de GLP propio en un chalé. Aquí cambia quién mueve ficha: es obligación del titular, y en su defecto del usuario, solicitar los servicios de una de las entidades que indica la ITC. Compara con la inspección para entender la lógica: en la inspección mandaba el hecho de estar enganchado a la red, donde un fallo puede afectar a muchos vecinos, y venía alguien habilitado ajeno; en la revisión la instalación es más privada, tu depósito en tu parcela, y es el propio titular quien tiene que pedir que se la revisen. Misma finalidad en las dos, la seguridad; lo que cambia es el nombre y el agente, y cambia según el riesgo.</a:t>
             </a:r>
           </a:p>
         </p:txBody>
@@ -1501,12 +1568,12 @@
           <a:lstStyle/>
           <a:p>
             <a:r>
-              <a:t>N1: Por encima de inspecciones y revisiones, ¿hay alguien más que vigile?</a:t>
-            </a:r>
-          </a:p>
-          <a:p>
-            <a:r>
-              <a:t>N2: Sí, y conviene saberlo. Por encima de todo está la Comunidad Autónoma, que puede comprobar en cualquier momento, por sí misma o mediante un organismo de control, que la instalación cumple; sobre todo si hay un riesgo significativo para personas, animales, bienes o medio ambiente. Es, por decirlo llano, la policía del gas: puede aparecer cuando quiera. Te traduzco dos expresiones legales que salen aquí: 'de oficio' significa que actúa por su propia iniciativa, sin que nadie se lo pida; y 'a instancia de parte' significa que actúa porque alguien lo ha solicitado o se ha quejado. No es lo del día a día, pero es importante que sepas que ese control administrativo existe y está por encima de los controles periódicos normales.</a:t>
+              <a:t>N1: Más allá del papeleo, ¿para qué sirve de verdad el control periódico?</a:t>
+            </a:r>
+          </a:p>
+          <a:p>
+            <a:r>
+              <a:t>N2: Sirve para cazar lo que mata despacio, esos problemas que no se ven de un día para otro y por eso son tan traicioneros. Piensa en casos reales: una rejilla de ventilación tapada con un mueble o pintada por encima, que ahoga la combustión. Un conducto de evacuación de humos obstruido, que devuelve los gases a la casa. Una fuga incipiente, todavía pequeña, que aún no huele fuerte. O un aparato que empieza a dar mala combustión y monóxido de carbono. De cada control sale su certificado, con o sin anomalías, y si las hay, ese papel marca justo lo que hay que corregir. La conclusión es seria: saltarse el control o firmarlo sin mirar de verdad es dejar que el problema crezca sin que nadie lo vea, hasta el susto o la desgracia. Aquí es donde tu trabajo, bien hecho, salva vidas.</a:t>
             </a:r>
           </a:p>
         </p:txBody>
@@ -1576,12 +1643,12 @@
           <a:lstStyle/>
           <a:p>
             <a:r>
-              <a:t>N1: Empresa instaladora, instalador, agente de puesta en marcha. ¿Es todo lo mismo?</a:t>
-            </a:r>
-          </a:p>
-          <a:p>
-            <a:r>
-              <a:t>N2: No, son tres figuras distintas y el examen las cruza a propósito, así que vamos a separarlas bien. La empresa instaladora es la empresa, la razón social habilitada según la ITC-ICG cero nueve, con su seguro y sus medios. El instalador es la persona con carné, tú, y tiene categorías A, B o C según esa misma ITC. Y el agente de puesta en marcha es quien arranca los aparatos, según la ITC-ICG cero ocho. Tú te estás sacando ahora mismo la categoría B: con ella podrás trabajar en la mayoría de instalaciones receptoras domésticas y comerciales típicas, que son la inmensa mayoría de las que verás. Un consejo para el examen: ve asociando cada figura con su ITC, el instalador a la cero nueve y los aparatos a la cero ocho, y no las mezclarás.</a:t>
+              <a:t>N1: Por encima de inspecciones y revisiones, ¿hay alguien más que vigile?</a:t>
+            </a:r>
+          </a:p>
+          <a:p>
+            <a:r>
+              <a:t>N2: Sí, y conviene saberlo. Por encima de todo está la Comunidad Autónoma, que puede comprobar en cualquier momento, por sí misma o mediante un organismo de control, que la instalación cumple; sobre todo si hay un riesgo significativo para personas, animales, bienes o medio ambiente. Es, por decirlo llano, la policía del gas: puede aparecer cuando quiera. Te traduzco dos expresiones legales que salen aquí: 'de oficio' significa que actúa por su propia iniciativa, sin que nadie se lo pida; y 'a instancia de parte' significa que actúa porque alguien lo ha solicitado o se ha quejado. No es lo del día a día, pero es importante que sepas que ese control administrativo existe y está por encima de los controles periódicos normales.</a:t>
             </a:r>
           </a:p>
         </p:txBody>
@@ -4656,7 +4723,7 @@
             <a:r>
               <a:rPr sz="1400" b="1" i="0">
                 <a:solidFill>
-                  <a:srgbClr val="CADCFC"/>
+                  <a:srgbClr val="F4A24C"/>
                 </a:solidFill>
                 <a:latin typeface="Montserrat"/>
               </a:rPr>
@@ -4667,13 +4734,57 @@
       </p:sp>
       <p:sp>
         <p:nvSpPr>
-          <p:cNvPr id="4" name="TextBox 3"/>
+          <p:cNvPr id="4" name="Rounded Rectangle 3"/>
+          <p:cNvSpPr/>
+          <p:nvPr/>
+        </p:nvSpPr>
+        <p:spPr>
+          <a:xfrm>
+            <a:off x="868680" y="2057400"/>
+            <a:ext cx="1463040" cy="82296"/>
+          </a:xfrm>
+          <a:prstGeom prst="roundRect">
+            <a:avLst/>
+          </a:prstGeom>
+          <a:solidFill>
+            <a:srgbClr val="E8801A"/>
+          </a:solidFill>
+          <a:ln>
+            <a:noFill/>
+          </a:ln>
+          <a:effectLst/>
+        </p:spPr>
+        <p:style>
+          <a:lnRef idx="1">
+            <a:schemeClr val="accent1"/>
+          </a:lnRef>
+          <a:fillRef idx="3">
+            <a:schemeClr val="accent1"/>
+          </a:fillRef>
+          <a:effectRef idx="2">
+            <a:schemeClr val="accent1"/>
+          </a:effectRef>
+          <a:fontRef idx="minor">
+            <a:schemeClr val="lt1"/>
+          </a:fontRef>
+        </p:style>
+        <p:txBody>
+          <a:bodyPr rtlCol="0" anchor="ctr"/>
+          <a:lstStyle/>
+          <a:p>
+            <a:pPr algn="ctr"/>
+          </a:p>
+        </p:txBody>
+      </p:sp>
+      <p:sp>
+        <p:nvSpPr>
+          <p:cNvPr id="5" name="TextBox 4"/>
           <p:cNvSpPr txBox="1"/>
           <p:nvPr/>
         </p:nvSpPr>
         <p:spPr>
           <a:xfrm>
-            <a:off x="822960" y="2194560"/>
+            <a:off x="822960" y="2286000"/>
             <a:ext cx="10515600" cy="2011680"/>
           </a:xfrm>
           <a:prstGeom prst="rect">
@@ -4712,7 +4823,7 @@
       </p:sp>
       <p:sp>
         <p:nvSpPr>
-          <p:cNvPr id="5" name="TextBox 4"/>
+          <p:cNvPr id="6" name="TextBox 5"/>
           <p:cNvSpPr txBox="1"/>
           <p:nvPr/>
         </p:nvSpPr>
@@ -4836,7 +4947,7 @@
                 </a:solidFill>
                 <a:latin typeface="Montserrat"/>
               </a:rPr>
-              <a:t>010 / 015</a:t>
+              <a:t>010 / 016</a:t>
             </a:r>
           </a:p>
         </p:txBody>
@@ -4884,7 +4995,7 @@
         <p:spPr>
           <a:xfrm>
             <a:off x="822960" y="457200"/>
-            <a:ext cx="8229600" cy="365760"/>
+            <a:ext cx="10058400" cy="365760"/>
           </a:xfrm>
           <a:prstGeom prst="rect">
             <a:avLst/>
@@ -4898,13 +5009,13 @@
           <a:lstStyle/>
           <a:p>
             <a:r>
-              <a:rPr sz="1200" b="1" i="0">
-                <a:solidFill>
-                  <a:srgbClr val="64748B"/>
-                </a:solidFill>
-                <a:latin typeface="Montserrat"/>
-              </a:rPr>
-              <a:t>ARTÍCULOS 9 Y 10 · CUMPLIMIENTO</a:t>
+              <a:rPr sz="1300" b="1" i="0">
+                <a:solidFill>
+                  <a:srgbClr val="E8801A"/>
+                </a:solidFill>
+                <a:latin typeface="Montserrat"/>
+              </a:rPr>
+              <a:t>ARTÍCULO 8 · HABILITACIÓN</a:t>
             </a:r>
           </a:p>
         </p:txBody>
@@ -4932,26 +5043,70 @@
           <a:lstStyle/>
           <a:p>
             <a:r>
-              <a:rPr sz="2700" b="1" i="0">
+              <a:rPr sz="2800" b="1" i="0">
                 <a:solidFill>
                   <a:srgbClr val="1E2761"/>
                 </a:solidFill>
                 <a:latin typeface="Montserrat"/>
               </a:rPr>
-              <a:t>El suelo, no el techo</a:t>
-            </a:r>
-          </a:p>
-        </p:txBody>
-      </p:sp>
-      <p:sp>
-        <p:nvSpPr>
-          <p:cNvPr id="7" name="TextBox 6"/>
+              <a:t>Tres papeles que no son lo mismo</a:t>
+            </a:r>
+          </a:p>
+        </p:txBody>
+      </p:sp>
+      <p:sp>
+        <p:nvSpPr>
+          <p:cNvPr id="7" name="Rounded Rectangle 6"/>
+          <p:cNvSpPr/>
+          <p:nvPr/>
+        </p:nvSpPr>
+        <p:spPr>
+          <a:xfrm>
+            <a:off x="868680" y="1627632"/>
+            <a:ext cx="2011680" cy="73152"/>
+          </a:xfrm>
+          <a:prstGeom prst="roundRect">
+            <a:avLst/>
+          </a:prstGeom>
+          <a:solidFill>
+            <a:srgbClr val="E8801A"/>
+          </a:solidFill>
+          <a:ln>
+            <a:noFill/>
+          </a:ln>
+          <a:effectLst/>
+        </p:spPr>
+        <p:style>
+          <a:lnRef idx="1">
+            <a:schemeClr val="accent1"/>
+          </a:lnRef>
+          <a:fillRef idx="3">
+            <a:schemeClr val="accent1"/>
+          </a:fillRef>
+          <a:effectRef idx="2">
+            <a:schemeClr val="accent1"/>
+          </a:effectRef>
+          <a:fontRef idx="minor">
+            <a:schemeClr val="lt1"/>
+          </a:fontRef>
+        </p:style>
+        <p:txBody>
+          <a:bodyPr rtlCol="0" anchor="ctr"/>
+          <a:lstStyle/>
+          <a:p>
+            <a:pPr algn="ctr"/>
+          </a:p>
+        </p:txBody>
+      </p:sp>
+      <p:sp>
+        <p:nvSpPr>
+          <p:cNvPr id="8" name="TextBox 7"/>
           <p:cNvSpPr txBox="1"/>
           <p:nvPr/>
         </p:nvSpPr>
         <p:spPr>
           <a:xfrm>
-            <a:off x="822960" y="1920240"/>
+            <a:off x="822960" y="1965960"/>
             <a:ext cx="4983480" cy="4206240"/>
           </a:xfrm>
           <a:prstGeom prst="rect">
@@ -4967,17 +5122,17 @@
           <a:p>
             <a:pPr>
               <a:spcAft>
-                <a:spcPts val="1000"/>
+                <a:spcPts val="1100"/>
               </a:spcAft>
             </a:pPr>
             <a:r>
               <a:rPr sz="1600" b="1" i="0">
                 <a:solidFill>
-                  <a:srgbClr val="2E3A80"/>
-                </a:solidFill>
-                <a:latin typeface="Montserrat"/>
-              </a:rPr>
-              <a:t>•  </a:t>
+                  <a:srgbClr val="E8801A"/>
+                </a:solidFill>
+                <a:latin typeface="Montserrat"/>
+              </a:rPr>
+              <a:t>▸  </a:t>
             </a:r>
             <a:r>
               <a:rPr sz="1600" b="0" i="0">
@@ -4986,23 +5141,23 @@
                 </a:solidFill>
                 <a:latin typeface="Montserrat"/>
               </a:rPr>
-              <a:t>Prescripciones: mínimos obligatorios</a:t>
+              <a:t>Empresa instaladora: la razón social</a:t>
             </a:r>
           </a:p>
           <a:p>
             <a:pPr>
               <a:spcAft>
-                <a:spcPts val="1000"/>
+                <a:spcPts val="1100"/>
               </a:spcAft>
             </a:pPr>
             <a:r>
               <a:rPr sz="1600" b="1" i="0">
                 <a:solidFill>
-                  <a:srgbClr val="2E3A80"/>
-                </a:solidFill>
-                <a:latin typeface="Montserrat"/>
-              </a:rPr>
-              <a:t>•  </a:t>
+                  <a:srgbClr val="E8801A"/>
+                </a:solidFill>
+                <a:latin typeface="Montserrat"/>
+              </a:rPr>
+              <a:t>▸  </a:t>
             </a:r>
             <a:r>
               <a:rPr sz="1600" b="0" i="0">
@@ -5011,23 +5166,23 @@
                 </a:solidFill>
                 <a:latin typeface="Montserrat"/>
               </a:rPr>
-              <a:t>Más seguro sí, menos nunca</a:t>
+              <a:t>Instalador: la persona, categorías A/B/C</a:t>
             </a:r>
           </a:p>
           <a:p>
             <a:pPr>
               <a:spcAft>
-                <a:spcPts val="1000"/>
+                <a:spcPts val="1100"/>
               </a:spcAft>
             </a:pPr>
             <a:r>
               <a:rPr sz="1600" b="1" i="0">
                 <a:solidFill>
-                  <a:srgbClr val="2E3A80"/>
-                </a:solidFill>
-                <a:latin typeface="Montserrat"/>
-              </a:rPr>
-              <a:t>•  </a:t>
+                  <a:srgbClr val="E8801A"/>
+                </a:solidFill>
+                <a:latin typeface="Montserrat"/>
+              </a:rPr>
+              <a:t>▸  </a:t>
             </a:r>
             <a:r>
               <a:rPr sz="1600" b="0" i="0">
@@ -5036,23 +5191,23 @@
                 </a:solidFill>
                 <a:latin typeface="Montserrat"/>
               </a:rPr>
-              <a:t>Técnica equivalente (art. 9)</a:t>
+              <a:t>Agente de puesta en marcha: los aparatos</a:t>
             </a:r>
           </a:p>
           <a:p>
             <a:pPr>
               <a:spcAft>
-                <a:spcPts val="1000"/>
+                <a:spcPts val="1100"/>
               </a:spcAft>
             </a:pPr>
             <a:r>
               <a:rPr sz="1600" b="1" i="0">
                 <a:solidFill>
-                  <a:srgbClr val="2E3A80"/>
-                </a:solidFill>
-                <a:latin typeface="Montserrat"/>
-              </a:rPr>
-              <a:t>•  </a:t>
+                  <a:srgbClr val="E8801A"/>
+                </a:solidFill>
+                <a:latin typeface="Montserrat"/>
+              </a:rPr>
+              <a:t>▸  </a:t>
             </a:r>
             <a:r>
               <a:rPr sz="1600" b="0" i="0">
@@ -5061,14 +5216,14 @@
                 </a:solidFill>
                 <a:latin typeface="Montserrat"/>
               </a:rPr>
-              <a:t>Excepción, último recurso (art. 10)</a:t>
-            </a:r>
-          </a:p>
-        </p:txBody>
-      </p:sp>
-      <p:sp>
-        <p:nvSpPr>
-          <p:cNvPr id="8" name="imgph" descr="IMGQ:engineer signing safety compliance document"/>
+              <a:t>Tú vas a por la categoría B</a:t>
+            </a:r>
+          </a:p>
+        </p:txBody>
+      </p:sp>
+      <p:sp>
+        <p:nvSpPr>
+          <p:cNvPr id="9" name="imgph" descr="IMGQ:gas installer license card uniform"/>
           <p:cNvSpPr/>
           <p:nvPr/>
         </p:nvSpPr>
@@ -5114,7 +5269,7 @@
       </p:sp>
       <p:sp>
         <p:nvSpPr>
-          <p:cNvPr id="9" name="TextBox 8"/>
+          <p:cNvPr id="10" name="TextBox 9"/>
           <p:cNvSpPr txBox="1"/>
           <p:nvPr/>
         </p:nvSpPr>
@@ -5154,7 +5309,7 @@
                 </a:solidFill>
                 <a:latin typeface="Montserrat"/>
               </a:rPr>
-              <a:t>engineer signing safety compliance document</a:t>
+              <a:t>gas installer license card uniform</a:t>
             </a:r>
           </a:p>
         </p:txBody>
@@ -5251,7 +5406,7 @@
                 </a:solidFill>
                 <a:latin typeface="Montserrat"/>
               </a:rPr>
-              <a:t>011 / 015</a:t>
+              <a:t>011 / 016</a:t>
             </a:r>
           </a:p>
         </p:txBody>
@@ -5299,7 +5454,7 @@
         <p:spPr>
           <a:xfrm>
             <a:off x="822960" y="457200"/>
-            <a:ext cx="8229600" cy="365760"/>
+            <a:ext cx="10058400" cy="365760"/>
           </a:xfrm>
           <a:prstGeom prst="rect">
             <a:avLst/>
@@ -5313,13 +5468,13 @@
           <a:lstStyle/>
           <a:p>
             <a:r>
-              <a:rPr sz="1200" b="1" i="0">
-                <a:solidFill>
-                  <a:srgbClr val="64748B"/>
-                </a:solidFill>
-                <a:latin typeface="Montserrat"/>
-              </a:rPr>
-              <a:t>ARTÍCULOS 11 Y 12 · NORMAS</a:t>
+              <a:rPr sz="1300" b="1" i="0">
+                <a:solidFill>
+                  <a:srgbClr val="E8801A"/>
+                </a:solidFill>
+                <a:latin typeface="Montserrat"/>
+              </a:rPr>
+              <a:t>ARTÍCULOS 9 Y 10 · CUMPLIMIENTO</a:t>
             </a:r>
           </a:p>
         </p:txBody>
@@ -5347,26 +5502,70 @@
           <a:lstStyle/>
           <a:p>
             <a:r>
-              <a:rPr sz="2700" b="1" i="0">
+              <a:rPr sz="2800" b="1" i="0">
                 <a:solidFill>
                   <a:srgbClr val="1E2761"/>
                 </a:solidFill>
                 <a:latin typeface="Montserrat"/>
               </a:rPr>
-              <a:t>Europa vale y las UNE van sin año</a:t>
-            </a:r>
-          </a:p>
-        </p:txBody>
-      </p:sp>
-      <p:sp>
-        <p:nvSpPr>
-          <p:cNvPr id="7" name="TextBox 6"/>
+              <a:t>El suelo, no el techo</a:t>
+            </a:r>
+          </a:p>
+        </p:txBody>
+      </p:sp>
+      <p:sp>
+        <p:nvSpPr>
+          <p:cNvPr id="7" name="Rounded Rectangle 6"/>
+          <p:cNvSpPr/>
+          <p:nvPr/>
+        </p:nvSpPr>
+        <p:spPr>
+          <a:xfrm>
+            <a:off x="868680" y="1627632"/>
+            <a:ext cx="2011680" cy="73152"/>
+          </a:xfrm>
+          <a:prstGeom prst="roundRect">
+            <a:avLst/>
+          </a:prstGeom>
+          <a:solidFill>
+            <a:srgbClr val="E8801A"/>
+          </a:solidFill>
+          <a:ln>
+            <a:noFill/>
+          </a:ln>
+          <a:effectLst/>
+        </p:spPr>
+        <p:style>
+          <a:lnRef idx="1">
+            <a:schemeClr val="accent1"/>
+          </a:lnRef>
+          <a:fillRef idx="3">
+            <a:schemeClr val="accent1"/>
+          </a:fillRef>
+          <a:effectRef idx="2">
+            <a:schemeClr val="accent1"/>
+          </a:effectRef>
+          <a:fontRef idx="minor">
+            <a:schemeClr val="lt1"/>
+          </a:fontRef>
+        </p:style>
+        <p:txBody>
+          <a:bodyPr rtlCol="0" anchor="ctr"/>
+          <a:lstStyle/>
+          <a:p>
+            <a:pPr algn="ctr"/>
+          </a:p>
+        </p:txBody>
+      </p:sp>
+      <p:sp>
+        <p:nvSpPr>
+          <p:cNvPr id="8" name="TextBox 7"/>
           <p:cNvSpPr txBox="1"/>
           <p:nvPr/>
         </p:nvSpPr>
         <p:spPr>
           <a:xfrm>
-            <a:off x="822960" y="1920240"/>
+            <a:off x="822960" y="1965960"/>
             <a:ext cx="4983480" cy="4206240"/>
           </a:xfrm>
           <a:prstGeom prst="rect">
@@ -5382,17 +5581,17 @@
           <a:p>
             <a:pPr>
               <a:spcAft>
-                <a:spcPts val="1000"/>
+                <a:spcPts val="1100"/>
               </a:spcAft>
             </a:pPr>
             <a:r>
               <a:rPr sz="1600" b="1" i="0">
                 <a:solidFill>
-                  <a:srgbClr val="2E3A80"/>
-                </a:solidFill>
-                <a:latin typeface="Montserrat"/>
-              </a:rPr>
-              <a:t>•  </a:t>
+                  <a:srgbClr val="E8801A"/>
+                </a:solidFill>
+                <a:latin typeface="Montserrat"/>
+              </a:rPr>
+              <a:t>▸  </a:t>
             </a:r>
             <a:r>
               <a:rPr sz="1600" b="0" i="0">
@@ -5401,23 +5600,23 @@
                 </a:solidFill>
                 <a:latin typeface="Montserrat"/>
               </a:rPr>
-              <a:t>Reconocimiento mutuo: material europeo si es seguro</a:t>
+              <a:t>Prescripciones: mínimos obligatorios</a:t>
             </a:r>
           </a:p>
           <a:p>
             <a:pPr>
               <a:spcAft>
-                <a:spcPts val="1000"/>
+                <a:spcPts val="1100"/>
               </a:spcAft>
             </a:pPr>
             <a:r>
               <a:rPr sz="1600" b="1" i="0">
                 <a:solidFill>
-                  <a:srgbClr val="2E3A80"/>
-                </a:solidFill>
-                <a:latin typeface="Montserrat"/>
-              </a:rPr>
-              <a:t>•  </a:t>
+                  <a:srgbClr val="E8801A"/>
+                </a:solidFill>
+                <a:latin typeface="Montserrat"/>
+              </a:rPr>
+              <a:t>▸  </a:t>
             </a:r>
             <a:r>
               <a:rPr sz="1600" b="0" i="0">
@@ -5426,23 +5625,23 @@
                 </a:solidFill>
                 <a:latin typeface="Montserrat"/>
               </a:rPr>
-              <a:t>Las ITC citan las UNE sin año</a:t>
+              <a:t>Más seguro sí, menos nunca</a:t>
             </a:r>
           </a:p>
           <a:p>
             <a:pPr>
               <a:spcAft>
-                <a:spcPts val="1000"/>
+                <a:spcPts val="1100"/>
               </a:spcAft>
             </a:pPr>
             <a:r>
               <a:rPr sz="1600" b="1" i="0">
                 <a:solidFill>
-                  <a:srgbClr val="2E3A80"/>
-                </a:solidFill>
-                <a:latin typeface="Montserrat"/>
-              </a:rPr>
-              <a:t>•  </a:t>
+                  <a:srgbClr val="E8801A"/>
+                </a:solidFill>
+                <a:latin typeface="Montserrat"/>
+              </a:rPr>
+              <a:t>▸  </a:t>
             </a:r>
             <a:r>
               <a:rPr sz="1600" b="0" i="0">
@@ -5451,14 +5650,39 @@
                 </a:solidFill>
                 <a:latin typeface="Montserrat"/>
               </a:rPr>
-              <a:t>El listado con años, en la ITC-ICG 11</a:t>
-            </a:r>
-          </a:p>
-        </p:txBody>
-      </p:sp>
-      <p:sp>
-        <p:nvSpPr>
-          <p:cNvPr id="8" name="imgph" descr="IMGQ:european standards manual technical book"/>
+              <a:t>Técnica equivalente (art. 9)</a:t>
+            </a:r>
+          </a:p>
+          <a:p>
+            <a:pPr>
+              <a:spcAft>
+                <a:spcPts val="1100"/>
+              </a:spcAft>
+            </a:pPr>
+            <a:r>
+              <a:rPr sz="1600" b="1" i="0">
+                <a:solidFill>
+                  <a:srgbClr val="E8801A"/>
+                </a:solidFill>
+                <a:latin typeface="Montserrat"/>
+              </a:rPr>
+              <a:t>▸  </a:t>
+            </a:r>
+            <a:r>
+              <a:rPr sz="1600" b="0" i="0">
+                <a:solidFill>
+                  <a:srgbClr val="1B2330"/>
+                </a:solidFill>
+                <a:latin typeface="Montserrat"/>
+              </a:rPr>
+              <a:t>Excepción, último recurso (art. 10)</a:t>
+            </a:r>
+          </a:p>
+        </p:txBody>
+      </p:sp>
+      <p:sp>
+        <p:nvSpPr>
+          <p:cNvPr id="9" name="imgph" descr="IMGQ:engineer signing safety compliance document"/>
           <p:cNvSpPr/>
           <p:nvPr/>
         </p:nvSpPr>
@@ -5504,7 +5728,7 @@
       </p:sp>
       <p:sp>
         <p:nvSpPr>
-          <p:cNvPr id="9" name="TextBox 8"/>
+          <p:cNvPr id="10" name="TextBox 9"/>
           <p:cNvSpPr txBox="1"/>
           <p:nvPr/>
         </p:nvSpPr>
@@ -5544,7 +5768,7 @@
                 </a:solidFill>
                 <a:latin typeface="Montserrat"/>
               </a:rPr>
-              <a:t>european standards manual technical book</a:t>
+              <a:t>engineer signing safety compliance document</a:t>
             </a:r>
           </a:p>
         </p:txBody>
@@ -5641,7 +5865,7 @@
                 </a:solidFill>
                 <a:latin typeface="Montserrat"/>
               </a:rPr>
-              <a:t>012 / 015</a:t>
+              <a:t>012 / 016</a:t>
             </a:r>
           </a:p>
         </p:txBody>
@@ -5689,7 +5913,7 @@
         <p:spPr>
           <a:xfrm>
             <a:off x="822960" y="457200"/>
-            <a:ext cx="8229600" cy="365760"/>
+            <a:ext cx="10058400" cy="365760"/>
           </a:xfrm>
           <a:prstGeom prst="rect">
             <a:avLst/>
@@ -5703,13 +5927,13 @@
           <a:lstStyle/>
           <a:p>
             <a:r>
-              <a:rPr sz="1200" b="1" i="0">
-                <a:solidFill>
-                  <a:srgbClr val="64748B"/>
-                </a:solidFill>
-                <a:latin typeface="Montserrat"/>
-              </a:rPr>
-              <a:t>ARTÍCULO 13 · SANCIONES</a:t>
+              <a:rPr sz="1300" b="1" i="0">
+                <a:solidFill>
+                  <a:srgbClr val="E8801A"/>
+                </a:solidFill>
+                <a:latin typeface="Montserrat"/>
+              </a:rPr>
+              <a:t>ARTÍCULOS 11 Y 12 · NORMAS</a:t>
             </a:r>
           </a:p>
         </p:txBody>
@@ -5737,26 +5961,70 @@
           <a:lstStyle/>
           <a:p>
             <a:r>
-              <a:rPr sz="2700" b="1" i="0">
+              <a:rPr sz="2800" b="1" i="0">
                 <a:solidFill>
                   <a:srgbClr val="1E2761"/>
                 </a:solidFill>
                 <a:latin typeface="Montserrat"/>
               </a:rPr>
-              <a:t>Las multas no las pone el Reglamento</a:t>
-            </a:r>
-          </a:p>
-        </p:txBody>
-      </p:sp>
-      <p:sp>
-        <p:nvSpPr>
-          <p:cNvPr id="7" name="TextBox 6"/>
+              <a:t>Europa vale y las UNE van sin año</a:t>
+            </a:r>
+          </a:p>
+        </p:txBody>
+      </p:sp>
+      <p:sp>
+        <p:nvSpPr>
+          <p:cNvPr id="7" name="Rounded Rectangle 6"/>
+          <p:cNvSpPr/>
+          <p:nvPr/>
+        </p:nvSpPr>
+        <p:spPr>
+          <a:xfrm>
+            <a:off x="868680" y="1627632"/>
+            <a:ext cx="2011680" cy="73152"/>
+          </a:xfrm>
+          <a:prstGeom prst="roundRect">
+            <a:avLst/>
+          </a:prstGeom>
+          <a:solidFill>
+            <a:srgbClr val="E8801A"/>
+          </a:solidFill>
+          <a:ln>
+            <a:noFill/>
+          </a:ln>
+          <a:effectLst/>
+        </p:spPr>
+        <p:style>
+          <a:lnRef idx="1">
+            <a:schemeClr val="accent1"/>
+          </a:lnRef>
+          <a:fillRef idx="3">
+            <a:schemeClr val="accent1"/>
+          </a:fillRef>
+          <a:effectRef idx="2">
+            <a:schemeClr val="accent1"/>
+          </a:effectRef>
+          <a:fontRef idx="minor">
+            <a:schemeClr val="lt1"/>
+          </a:fontRef>
+        </p:style>
+        <p:txBody>
+          <a:bodyPr rtlCol="0" anchor="ctr"/>
+          <a:lstStyle/>
+          <a:p>
+            <a:pPr algn="ctr"/>
+          </a:p>
+        </p:txBody>
+      </p:sp>
+      <p:sp>
+        <p:nvSpPr>
+          <p:cNvPr id="8" name="TextBox 7"/>
           <p:cNvSpPr txBox="1"/>
           <p:nvPr/>
         </p:nvSpPr>
         <p:spPr>
           <a:xfrm>
-            <a:off x="822960" y="1920240"/>
+            <a:off x="822960" y="1965960"/>
             <a:ext cx="4983480" cy="4206240"/>
           </a:xfrm>
           <a:prstGeom prst="rect">
@@ -5772,17 +6040,17 @@
           <a:p>
             <a:pPr>
               <a:spcAft>
-                <a:spcPts val="1000"/>
+                <a:spcPts val="1100"/>
               </a:spcAft>
             </a:pPr>
             <a:r>
               <a:rPr sz="1600" b="1" i="0">
                 <a:solidFill>
-                  <a:srgbClr val="2E3A80"/>
-                </a:solidFill>
-                <a:latin typeface="Montserrat"/>
-              </a:rPr>
-              <a:t>•  </a:t>
+                  <a:srgbClr val="E8801A"/>
+                </a:solidFill>
+                <a:latin typeface="Montserrat"/>
+              </a:rPr>
+              <a:t>▸  </a:t>
             </a:r>
             <a:r>
               <a:rPr sz="1600" b="0" i="0">
@@ -5791,23 +6059,23 @@
                 </a:solidFill>
                 <a:latin typeface="Montserrat"/>
               </a:rPr>
-              <a:t>Régimen de infracciones y sanciones</a:t>
+              <a:t>Reconocimiento mutuo: material europeo si es seguro</a:t>
             </a:r>
           </a:p>
           <a:p>
             <a:pPr>
               <a:spcAft>
-                <a:spcPts val="1000"/>
+                <a:spcPts val="1100"/>
               </a:spcAft>
             </a:pPr>
             <a:r>
               <a:rPr sz="1600" b="1" i="0">
                 <a:solidFill>
-                  <a:srgbClr val="2E3A80"/>
-                </a:solidFill>
-                <a:latin typeface="Montserrat"/>
-              </a:rPr>
-              <a:t>•  </a:t>
+                  <a:srgbClr val="E8801A"/>
+                </a:solidFill>
+                <a:latin typeface="Montserrat"/>
+              </a:rPr>
+              <a:t>▸  </a:t>
             </a:r>
             <a:r>
               <a:rPr sz="1600" b="0" i="0">
@@ -5816,23 +6084,23 @@
                 </a:solidFill>
                 <a:latin typeface="Montserrat"/>
               </a:rPr>
-              <a:t>Ley de industria y ley de hidrocarburos</a:t>
+              <a:t>Las ITC citan las UNE sin año</a:t>
             </a:r>
           </a:p>
           <a:p>
             <a:pPr>
               <a:spcAft>
-                <a:spcPts val="1000"/>
+                <a:spcPts val="1100"/>
               </a:spcAft>
             </a:pPr>
             <a:r>
               <a:rPr sz="1600" b="1" i="0">
                 <a:solidFill>
-                  <a:srgbClr val="2E3A80"/>
-                </a:solidFill>
-                <a:latin typeface="Montserrat"/>
-              </a:rPr>
-              <a:t>•  </a:t>
+                  <a:srgbClr val="E8801A"/>
+                </a:solidFill>
+                <a:latin typeface="Montserrat"/>
+              </a:rPr>
+              <a:t>▸  </a:t>
             </a:r>
             <a:r>
               <a:rPr sz="1600" b="0" i="0">
@@ -5841,14 +6109,14 @@
                 </a:solidFill>
                 <a:latin typeface="Montserrat"/>
               </a:rPr>
-              <a:t>Leve, grave o muy grave</a:t>
-            </a:r>
-          </a:p>
-        </p:txBody>
-      </p:sp>
-      <p:sp>
-        <p:nvSpPr>
-          <p:cNvPr id="8" name="imgph" descr="IMGQ:legal code book gavel table"/>
+              <a:t>El listado con años, en la ITC-ICG 11</a:t>
+            </a:r>
+          </a:p>
+        </p:txBody>
+      </p:sp>
+      <p:sp>
+        <p:nvSpPr>
+          <p:cNvPr id="9" name="imgph" descr="IMGQ:european standards manual technical book"/>
           <p:cNvSpPr/>
           <p:nvPr/>
         </p:nvSpPr>
@@ -5894,7 +6162,7 @@
       </p:sp>
       <p:sp>
         <p:nvSpPr>
-          <p:cNvPr id="9" name="TextBox 8"/>
+          <p:cNvPr id="10" name="TextBox 9"/>
           <p:cNvSpPr txBox="1"/>
           <p:nvPr/>
         </p:nvSpPr>
@@ -5934,7 +6202,7 @@
                 </a:solidFill>
                 <a:latin typeface="Montserrat"/>
               </a:rPr>
-              <a:t>legal code book gavel table</a:t>
+              <a:t>european standards manual technical book</a:t>
             </a:r>
           </a:p>
         </p:txBody>
@@ -6031,7 +6299,7 @@
                 </a:solidFill>
                 <a:latin typeface="Montserrat"/>
               </a:rPr>
-              <a:t>013 / 015</a:t>
+              <a:t>013 / 016</a:t>
             </a:r>
           </a:p>
         </p:txBody>
@@ -6079,7 +6347,7 @@
         <p:spPr>
           <a:xfrm>
             <a:off x="822960" y="457200"/>
-            <a:ext cx="8229600" cy="365760"/>
+            <a:ext cx="10058400" cy="365760"/>
           </a:xfrm>
           <a:prstGeom prst="rect">
             <a:avLst/>
@@ -6093,13 +6361,13 @@
           <a:lstStyle/>
           <a:p>
             <a:r>
-              <a:rPr sz="1200" b="1" i="0">
-                <a:solidFill>
-                  <a:srgbClr val="64748B"/>
-                </a:solidFill>
-                <a:latin typeface="Montserrat"/>
-              </a:rPr>
-              <a:t>ARTÍCULO 14 · ACCIDENTES</a:t>
+              <a:rPr sz="1300" b="1" i="0">
+                <a:solidFill>
+                  <a:srgbClr val="E8801A"/>
+                </a:solidFill>
+                <a:latin typeface="Montserrat"/>
+              </a:rPr>
+              <a:t>ARTÍCULO 13 · SANCIONES</a:t>
             </a:r>
           </a:p>
         </p:txBody>
@@ -6127,26 +6395,70 @@
           <a:lstStyle/>
           <a:p>
             <a:r>
-              <a:rPr sz="2700" b="1" i="0">
+              <a:rPr sz="2800" b="1" i="0">
                 <a:solidFill>
                   <a:srgbClr val="1E2761"/>
                 </a:solidFill>
                 <a:latin typeface="Montserrat"/>
               </a:rPr>
-              <a:t>Primero llamo, luego escribo</a:t>
-            </a:r>
-          </a:p>
-        </p:txBody>
-      </p:sp>
-      <p:sp>
-        <p:nvSpPr>
-          <p:cNvPr id="7" name="TextBox 6"/>
+              <a:t>Las multas no las pone el Reglamento</a:t>
+            </a:r>
+          </a:p>
+        </p:txBody>
+      </p:sp>
+      <p:sp>
+        <p:nvSpPr>
+          <p:cNvPr id="7" name="Rounded Rectangle 6"/>
+          <p:cNvSpPr/>
+          <p:nvPr/>
+        </p:nvSpPr>
+        <p:spPr>
+          <a:xfrm>
+            <a:off x="868680" y="1627632"/>
+            <a:ext cx="2011680" cy="73152"/>
+          </a:xfrm>
+          <a:prstGeom prst="roundRect">
+            <a:avLst/>
+          </a:prstGeom>
+          <a:solidFill>
+            <a:srgbClr val="E8801A"/>
+          </a:solidFill>
+          <a:ln>
+            <a:noFill/>
+          </a:ln>
+          <a:effectLst/>
+        </p:spPr>
+        <p:style>
+          <a:lnRef idx="1">
+            <a:schemeClr val="accent1"/>
+          </a:lnRef>
+          <a:fillRef idx="3">
+            <a:schemeClr val="accent1"/>
+          </a:fillRef>
+          <a:effectRef idx="2">
+            <a:schemeClr val="accent1"/>
+          </a:effectRef>
+          <a:fontRef idx="minor">
+            <a:schemeClr val="lt1"/>
+          </a:fontRef>
+        </p:style>
+        <p:txBody>
+          <a:bodyPr rtlCol="0" anchor="ctr"/>
+          <a:lstStyle/>
+          <a:p>
+            <a:pPr algn="ctr"/>
+          </a:p>
+        </p:txBody>
+      </p:sp>
+      <p:sp>
+        <p:nvSpPr>
+          <p:cNvPr id="8" name="TextBox 7"/>
           <p:cNvSpPr txBox="1"/>
           <p:nvPr/>
         </p:nvSpPr>
         <p:spPr>
           <a:xfrm>
-            <a:off x="822960" y="1920240"/>
+            <a:off x="822960" y="1965960"/>
             <a:ext cx="4983480" cy="4206240"/>
           </a:xfrm>
           <a:prstGeom prst="rect">
@@ -6162,17 +6474,17 @@
           <a:p>
             <a:pPr>
               <a:spcAft>
-                <a:spcPts val="1000"/>
+                <a:spcPts val="1100"/>
               </a:spcAft>
             </a:pPr>
             <a:r>
               <a:rPr sz="1600" b="1" i="0">
                 <a:solidFill>
-                  <a:srgbClr val="2E3A80"/>
-                </a:solidFill>
-                <a:latin typeface="Montserrat"/>
-              </a:rPr>
-              <a:t>•  </a:t>
+                  <a:srgbClr val="E8801A"/>
+                </a:solidFill>
+                <a:latin typeface="Montserrat"/>
+              </a:rPr>
+              <a:t>▸  </a:t>
             </a:r>
             <a:r>
               <a:rPr sz="1600" b="0" i="0">
@@ -6181,23 +6493,23 @@
                 </a:solidFill>
                 <a:latin typeface="Montserrat"/>
               </a:rPr>
-              <a:t>Suministrador avisa en 24 horas</a:t>
+              <a:t>Régimen de infracciones y sanciones</a:t>
             </a:r>
           </a:p>
           <a:p>
             <a:pPr>
               <a:spcAft>
-                <a:spcPts val="1000"/>
+                <a:spcPts val="1100"/>
               </a:spcAft>
             </a:pPr>
             <a:r>
               <a:rPr sz="1600" b="1" i="0">
                 <a:solidFill>
-                  <a:srgbClr val="2E3A80"/>
-                </a:solidFill>
-                <a:latin typeface="Montserrat"/>
-              </a:rPr>
-              <a:t>•  </a:t>
+                  <a:srgbClr val="E8801A"/>
+                </a:solidFill>
+                <a:latin typeface="Montserrat"/>
+              </a:rPr>
+              <a:t>▸  </a:t>
             </a:r>
             <a:r>
               <a:rPr sz="1600" b="0" i="0">
@@ -6206,23 +6518,23 @@
                 </a:solidFill>
                 <a:latin typeface="Montserrat"/>
               </a:rPr>
-              <a:t>Informe completo en 7 días</a:t>
+              <a:t>Ley de industria y ley de hidrocarburos</a:t>
             </a:r>
           </a:p>
           <a:p>
             <a:pPr>
               <a:spcAft>
-                <a:spcPts val="1000"/>
+                <a:spcPts val="1100"/>
               </a:spcAft>
             </a:pPr>
             <a:r>
               <a:rPr sz="1600" b="1" i="0">
                 <a:solidFill>
-                  <a:srgbClr val="2E3A80"/>
-                </a:solidFill>
-                <a:latin typeface="Montserrat"/>
-              </a:rPr>
-              <a:t>•  </a:t>
+                  <a:srgbClr val="E8801A"/>
+                </a:solidFill>
+                <a:latin typeface="Montserrat"/>
+              </a:rPr>
+              <a:t>▸  </a:t>
             </a:r>
             <a:r>
               <a:rPr sz="1600" b="0" i="0">
@@ -6231,14 +6543,14 @@
                 </a:solidFill>
                 <a:latin typeface="Montserrat"/>
               </a:rPr>
-              <a:t>Clases: deflagración, explosión, intoxicación, incendio</a:t>
-            </a:r>
-          </a:p>
-        </p:txBody>
-      </p:sp>
-      <p:sp>
-        <p:nvSpPr>
-          <p:cNvPr id="8" name="imgph" descr="IMGQ:emergency gas leak warning scene"/>
+              <a:t>Leve, grave o muy grave</a:t>
+            </a:r>
+          </a:p>
+        </p:txBody>
+      </p:sp>
+      <p:sp>
+        <p:nvSpPr>
+          <p:cNvPr id="9" name="imgph" descr="IMGQ:legal code book gavel table"/>
           <p:cNvSpPr/>
           <p:nvPr/>
         </p:nvSpPr>
@@ -6284,7 +6596,7 @@
       </p:sp>
       <p:sp>
         <p:nvSpPr>
-          <p:cNvPr id="9" name="TextBox 8"/>
+          <p:cNvPr id="10" name="TextBox 9"/>
           <p:cNvSpPr txBox="1"/>
           <p:nvPr/>
         </p:nvSpPr>
@@ -6324,7 +6636,7 @@
                 </a:solidFill>
                 <a:latin typeface="Montserrat"/>
               </a:rPr>
-              <a:t>emergency gas leak warning scene</a:t>
+              <a:t>legal code book gavel table</a:t>
             </a:r>
           </a:p>
         </p:txBody>
@@ -6421,7 +6733,7 @@
                 </a:solidFill>
                 <a:latin typeface="Montserrat"/>
               </a:rPr>
-              <a:t>014 / 015</a:t>
+              <a:t>014 / 016</a:t>
             </a:r>
           </a:p>
         </p:txBody>
@@ -6469,7 +6781,7 @@
         <p:spPr>
           <a:xfrm>
             <a:off x="822960" y="457200"/>
-            <a:ext cx="8229600" cy="365760"/>
+            <a:ext cx="10058400" cy="365760"/>
           </a:xfrm>
           <a:prstGeom prst="rect">
             <a:avLst/>
@@ -6483,13 +6795,13 @@
           <a:lstStyle/>
           <a:p>
             <a:r>
-              <a:rPr sz="1200" b="1" i="0">
-                <a:solidFill>
-                  <a:srgbClr val="64748B"/>
-                </a:solidFill>
-                <a:latin typeface="Montserrat"/>
-              </a:rPr>
-              <a:t>REPASO RELÁMPAGO</a:t>
+              <a:rPr sz="1300" b="1" i="0">
+                <a:solidFill>
+                  <a:srgbClr val="E8801A"/>
+                </a:solidFill>
+                <a:latin typeface="Montserrat"/>
+              </a:rPr>
+              <a:t>ARTÍCULO 14 · ACCIDENTES</a:t>
             </a:r>
           </a:p>
         </p:txBody>
@@ -6517,26 +6829,70 @@
           <a:lstStyle/>
           <a:p>
             <a:r>
-              <a:rPr sz="2700" b="1" i="0">
+              <a:rPr sz="2800" b="1" i="0">
                 <a:solidFill>
                   <a:srgbClr val="1E2761"/>
                 </a:solidFill>
                 <a:latin typeface="Montserrat"/>
               </a:rPr>
-              <a:t>Fíjalo en treinta segundos</a:t>
-            </a:r>
-          </a:p>
-        </p:txBody>
-      </p:sp>
-      <p:sp>
-        <p:nvSpPr>
-          <p:cNvPr id="7" name="TextBox 6"/>
+              <a:t>Primero llamo, luego escribo</a:t>
+            </a:r>
+          </a:p>
+        </p:txBody>
+      </p:sp>
+      <p:sp>
+        <p:nvSpPr>
+          <p:cNvPr id="7" name="Rounded Rectangle 6"/>
+          <p:cNvSpPr/>
+          <p:nvPr/>
+        </p:nvSpPr>
+        <p:spPr>
+          <a:xfrm>
+            <a:off x="868680" y="1627632"/>
+            <a:ext cx="2011680" cy="73152"/>
+          </a:xfrm>
+          <a:prstGeom prst="roundRect">
+            <a:avLst/>
+          </a:prstGeom>
+          <a:solidFill>
+            <a:srgbClr val="E8801A"/>
+          </a:solidFill>
+          <a:ln>
+            <a:noFill/>
+          </a:ln>
+          <a:effectLst/>
+        </p:spPr>
+        <p:style>
+          <a:lnRef idx="1">
+            <a:schemeClr val="accent1"/>
+          </a:lnRef>
+          <a:fillRef idx="3">
+            <a:schemeClr val="accent1"/>
+          </a:fillRef>
+          <a:effectRef idx="2">
+            <a:schemeClr val="accent1"/>
+          </a:effectRef>
+          <a:fontRef idx="minor">
+            <a:schemeClr val="lt1"/>
+          </a:fontRef>
+        </p:style>
+        <p:txBody>
+          <a:bodyPr rtlCol="0" anchor="ctr"/>
+          <a:lstStyle/>
+          <a:p>
+            <a:pPr algn="ctr"/>
+          </a:p>
+        </p:txBody>
+      </p:sp>
+      <p:sp>
+        <p:nvSpPr>
+          <p:cNvPr id="8" name="TextBox 7"/>
           <p:cNvSpPr txBox="1"/>
           <p:nvPr/>
         </p:nvSpPr>
         <p:spPr>
           <a:xfrm>
-            <a:off x="822960" y="1920240"/>
+            <a:off x="822960" y="1965960"/>
             <a:ext cx="4983480" cy="4206240"/>
           </a:xfrm>
           <a:prstGeom prst="rect">
@@ -6552,17 +6908,17 @@
           <a:p>
             <a:pPr>
               <a:spcAft>
-                <a:spcPts val="1000"/>
+                <a:spcPts val="1100"/>
               </a:spcAft>
             </a:pPr>
             <a:r>
               <a:rPr sz="1600" b="1" i="0">
                 <a:solidFill>
-                  <a:srgbClr val="2E3A80"/>
-                </a:solidFill>
-                <a:latin typeface="Montserrat"/>
-              </a:rPr>
-              <a:t>•  </a:t>
+                  <a:srgbClr val="E8801A"/>
+                </a:solidFill>
+                <a:latin typeface="Montserrat"/>
+              </a:rPr>
+              <a:t>▸  </a:t>
             </a:r>
             <a:r>
               <a:rPr sz="1600" b="0" i="0">
@@ -6571,23 +6927,23 @@
                 </a:solidFill>
                 <a:latin typeface="Montserrat"/>
               </a:rPr>
-              <a:t>Conectada a red → inspección; sin red → revisión</a:t>
+              <a:t>Suministrador avisa en 24 horas</a:t>
             </a:r>
           </a:p>
           <a:p>
             <a:pPr>
               <a:spcAft>
-                <a:spcPts val="1000"/>
+                <a:spcPts val="1100"/>
               </a:spcAft>
             </a:pPr>
             <a:r>
               <a:rPr sz="1600" b="1" i="0">
                 <a:solidFill>
-                  <a:srgbClr val="2E3A80"/>
-                </a:solidFill>
-                <a:latin typeface="Montserrat"/>
-              </a:rPr>
-              <a:t>•  </a:t>
+                  <a:srgbClr val="E8801A"/>
+                </a:solidFill>
+                <a:latin typeface="Montserrat"/>
+              </a:rPr>
+              <a:t>▸  </a:t>
             </a:r>
             <a:r>
               <a:rPr sz="1600" b="0" i="0">
@@ -6596,23 +6952,23 @@
                 </a:solidFill>
                 <a:latin typeface="Montserrat"/>
               </a:rPr>
-              <a:t>Mantener es del titular</a:t>
+              <a:t>Informe completo en 7 días</a:t>
             </a:r>
           </a:p>
           <a:p>
             <a:pPr>
               <a:spcAft>
-                <a:spcPts val="1000"/>
+                <a:spcPts val="1100"/>
               </a:spcAft>
             </a:pPr>
             <a:r>
               <a:rPr sz="1600" b="1" i="0">
                 <a:solidFill>
-                  <a:srgbClr val="2E3A80"/>
-                </a:solidFill>
-                <a:latin typeface="Montserrat"/>
-              </a:rPr>
-              <a:t>•  </a:t>
+                  <a:srgbClr val="E8801A"/>
+                </a:solidFill>
+                <a:latin typeface="Montserrat"/>
+              </a:rPr>
+              <a:t>▸  </a:t>
             </a:r>
             <a:r>
               <a:rPr sz="1600" b="0" i="0">
@@ -6621,39 +6977,14 @@
                 </a:solidFill>
                 <a:latin typeface="Montserrat"/>
               </a:rPr>
-              <a:t>Reglamento: el suelo, nunca el techo</a:t>
-            </a:r>
-          </a:p>
-          <a:p>
-            <a:pPr>
-              <a:spcAft>
-                <a:spcPts val="1000"/>
-              </a:spcAft>
-            </a:pPr>
-            <a:r>
-              <a:rPr sz="1600" b="1" i="0">
-                <a:solidFill>
-                  <a:srgbClr val="2E3A80"/>
-                </a:solidFill>
-                <a:latin typeface="Montserrat"/>
-              </a:rPr>
-              <a:t>•  </a:t>
-            </a:r>
-            <a:r>
-              <a:rPr sz="1600" b="0" i="0">
-                <a:solidFill>
-                  <a:srgbClr val="1B2330"/>
-                </a:solidFill>
-                <a:latin typeface="Montserrat"/>
-              </a:rPr>
-              <a:t>Accidente: 24 h para llamar, 7 días para escribir</a:t>
-            </a:r>
-          </a:p>
-        </p:txBody>
-      </p:sp>
-      <p:sp>
-        <p:nvSpPr>
-          <p:cNvPr id="8" name="imgph" descr="IMGQ:gas safety inspection summary checklist"/>
+              <a:t>Clases: deflagración, explosión, intoxicación, incendio</a:t>
+            </a:r>
+          </a:p>
+        </p:txBody>
+      </p:sp>
+      <p:sp>
+        <p:nvSpPr>
+          <p:cNvPr id="9" name="imgph" descr="IMGQ:emergency gas leak warning scene"/>
           <p:cNvSpPr/>
           <p:nvPr/>
         </p:nvSpPr>
@@ -6699,7 +7030,7 @@
       </p:sp>
       <p:sp>
         <p:nvSpPr>
-          <p:cNvPr id="9" name="TextBox 8"/>
+          <p:cNvPr id="10" name="TextBox 9"/>
           <p:cNvSpPr txBox="1"/>
           <p:nvPr/>
         </p:nvSpPr>
@@ -6739,7 +7070,7 @@
                 </a:solidFill>
                 <a:latin typeface="Montserrat"/>
               </a:rPr>
-              <a:t>gas safety inspection summary checklist</a:t>
+              <a:t>emergency gas leak warning scene</a:t>
             </a:r>
           </a:p>
         </p:txBody>
@@ -6777,6 +7108,465 @@
             <a:avLst/>
           </a:prstGeom>
           <a:solidFill>
+            <a:srgbClr val="FFFFFF"/>
+          </a:solidFill>
+          <a:ln>
+            <a:noFill/>
+          </a:ln>
+          <a:effectLst/>
+        </p:spPr>
+        <p:style>
+          <a:lnRef idx="1">
+            <a:schemeClr val="accent1"/>
+          </a:lnRef>
+          <a:fillRef idx="3">
+            <a:schemeClr val="accent1"/>
+          </a:fillRef>
+          <a:effectRef idx="2">
+            <a:schemeClr val="accent1"/>
+          </a:effectRef>
+          <a:fontRef idx="minor">
+            <a:schemeClr val="lt1"/>
+          </a:fontRef>
+        </p:style>
+        <p:txBody>
+          <a:bodyPr rtlCol="0" anchor="ctr"/>
+          <a:lstStyle/>
+          <a:p>
+            <a:pPr algn="ctr"/>
+          </a:p>
+        </p:txBody>
+      </p:sp>
+      <p:sp>
+        <p:nvSpPr>
+          <p:cNvPr id="3" name="TextBox 2"/>
+          <p:cNvSpPr txBox="1"/>
+          <p:nvPr/>
+        </p:nvSpPr>
+        <p:spPr>
+          <a:xfrm>
+            <a:off x="10607040" y="320040"/>
+            <a:ext cx="1371600" cy="365760"/>
+          </a:xfrm>
+          <a:prstGeom prst="rect">
+            <a:avLst/>
+          </a:prstGeom>
+          <a:noFill/>
+        </p:spPr>
+        <p:txBody>
+          <a:bodyPr wrap="square">
+            <a:spAutoFit/>
+          </a:bodyPr>
+          <a:lstStyle/>
+          <a:p>
+            <a:pPr algn="r"/>
+            <a:r>
+              <a:rPr sz="1000" b="1" i="0">
+                <a:solidFill>
+                  <a:srgbClr val="64748B"/>
+                </a:solidFill>
+                <a:latin typeface="Montserrat"/>
+              </a:rPr>
+              <a:t>015 / 016</a:t>
+            </a:r>
+          </a:p>
+        </p:txBody>
+      </p:sp>
+      <p:sp>
+        <p:nvSpPr>
+          <p:cNvPr id="4" name="TextBox 3"/>
+          <p:cNvSpPr txBox="1"/>
+          <p:nvPr/>
+        </p:nvSpPr>
+        <p:spPr>
+          <a:xfrm>
+            <a:off x="457200" y="6419088"/>
+            <a:ext cx="8229600" cy="365760"/>
+          </a:xfrm>
+          <a:prstGeom prst="rect">
+            <a:avLst/>
+          </a:prstGeom>
+          <a:noFill/>
+        </p:spPr>
+        <p:txBody>
+          <a:bodyPr wrap="square">
+            <a:spAutoFit/>
+          </a:bodyPr>
+          <a:lstStyle/>
+          <a:p>
+            <a:r>
+              <a:rPr sz="900" b="0" i="0">
+                <a:solidFill>
+                  <a:srgbClr val="64748B"/>
+                </a:solidFill>
+                <a:latin typeface="Montserrat"/>
+              </a:rPr>
+              <a:t>Curso Gas B · Tema 00 · El Reglamento de Gas</a:t>
+            </a:r>
+          </a:p>
+        </p:txBody>
+      </p:sp>
+      <p:sp>
+        <p:nvSpPr>
+          <p:cNvPr id="5" name="TextBox 4"/>
+          <p:cNvSpPr txBox="1"/>
+          <p:nvPr/>
+        </p:nvSpPr>
+        <p:spPr>
+          <a:xfrm>
+            <a:off x="822960" y="457200"/>
+            <a:ext cx="10058400" cy="365760"/>
+          </a:xfrm>
+          <a:prstGeom prst="rect">
+            <a:avLst/>
+          </a:prstGeom>
+          <a:noFill/>
+        </p:spPr>
+        <p:txBody>
+          <a:bodyPr wrap="square">
+            <a:spAutoFit/>
+          </a:bodyPr>
+          <a:lstStyle/>
+          <a:p>
+            <a:r>
+              <a:rPr sz="1300" b="1" i="0">
+                <a:solidFill>
+                  <a:srgbClr val="E8801A"/>
+                </a:solidFill>
+                <a:latin typeface="Montserrat"/>
+              </a:rPr>
+              <a:t>REPASO RELÁMPAGO</a:t>
+            </a:r>
+          </a:p>
+        </p:txBody>
+      </p:sp>
+      <p:sp>
+        <p:nvSpPr>
+          <p:cNvPr id="6" name="TextBox 5"/>
+          <p:cNvSpPr txBox="1"/>
+          <p:nvPr/>
+        </p:nvSpPr>
+        <p:spPr>
+          <a:xfrm>
+            <a:off x="822960" y="868680"/>
+            <a:ext cx="10515600" cy="914400"/>
+          </a:xfrm>
+          <a:prstGeom prst="rect">
+            <a:avLst/>
+          </a:prstGeom>
+          <a:noFill/>
+        </p:spPr>
+        <p:txBody>
+          <a:bodyPr wrap="square">
+            <a:spAutoFit/>
+          </a:bodyPr>
+          <a:lstStyle/>
+          <a:p>
+            <a:r>
+              <a:rPr sz="2800" b="1" i="0">
+                <a:solidFill>
+                  <a:srgbClr val="1E2761"/>
+                </a:solidFill>
+                <a:latin typeface="Montserrat"/>
+              </a:rPr>
+              <a:t>Fíjalo en treinta segundos</a:t>
+            </a:r>
+          </a:p>
+        </p:txBody>
+      </p:sp>
+      <p:sp>
+        <p:nvSpPr>
+          <p:cNvPr id="7" name="Rounded Rectangle 6"/>
+          <p:cNvSpPr/>
+          <p:nvPr/>
+        </p:nvSpPr>
+        <p:spPr>
+          <a:xfrm>
+            <a:off x="868680" y="1627632"/>
+            <a:ext cx="2011680" cy="73152"/>
+          </a:xfrm>
+          <a:prstGeom prst="roundRect">
+            <a:avLst/>
+          </a:prstGeom>
+          <a:solidFill>
+            <a:srgbClr val="E8801A"/>
+          </a:solidFill>
+          <a:ln>
+            <a:noFill/>
+          </a:ln>
+          <a:effectLst/>
+        </p:spPr>
+        <p:style>
+          <a:lnRef idx="1">
+            <a:schemeClr val="accent1"/>
+          </a:lnRef>
+          <a:fillRef idx="3">
+            <a:schemeClr val="accent1"/>
+          </a:fillRef>
+          <a:effectRef idx="2">
+            <a:schemeClr val="accent1"/>
+          </a:effectRef>
+          <a:fontRef idx="minor">
+            <a:schemeClr val="lt1"/>
+          </a:fontRef>
+        </p:style>
+        <p:txBody>
+          <a:bodyPr rtlCol="0" anchor="ctr"/>
+          <a:lstStyle/>
+          <a:p>
+            <a:pPr algn="ctr"/>
+          </a:p>
+        </p:txBody>
+      </p:sp>
+      <p:sp>
+        <p:nvSpPr>
+          <p:cNvPr id="8" name="TextBox 7"/>
+          <p:cNvSpPr txBox="1"/>
+          <p:nvPr/>
+        </p:nvSpPr>
+        <p:spPr>
+          <a:xfrm>
+            <a:off x="822960" y="1965960"/>
+            <a:ext cx="4983480" cy="4206240"/>
+          </a:xfrm>
+          <a:prstGeom prst="rect">
+            <a:avLst/>
+          </a:prstGeom>
+          <a:noFill/>
+        </p:spPr>
+        <p:txBody>
+          <a:bodyPr wrap="square">
+            <a:spAutoFit/>
+          </a:bodyPr>
+          <a:lstStyle/>
+          <a:p>
+            <a:pPr>
+              <a:spcAft>
+                <a:spcPts val="1100"/>
+              </a:spcAft>
+            </a:pPr>
+            <a:r>
+              <a:rPr sz="1600" b="1" i="0">
+                <a:solidFill>
+                  <a:srgbClr val="E8801A"/>
+                </a:solidFill>
+                <a:latin typeface="Montserrat"/>
+              </a:rPr>
+              <a:t>▸  </a:t>
+            </a:r>
+            <a:r>
+              <a:rPr sz="1600" b="0" i="0">
+                <a:solidFill>
+                  <a:srgbClr val="1B2330"/>
+                </a:solidFill>
+                <a:latin typeface="Montserrat"/>
+              </a:rPr>
+              <a:t>Conectada a red → inspección; sin red → revisión</a:t>
+            </a:r>
+          </a:p>
+          <a:p>
+            <a:pPr>
+              <a:spcAft>
+                <a:spcPts val="1100"/>
+              </a:spcAft>
+            </a:pPr>
+            <a:r>
+              <a:rPr sz="1600" b="1" i="0">
+                <a:solidFill>
+                  <a:srgbClr val="E8801A"/>
+                </a:solidFill>
+                <a:latin typeface="Montserrat"/>
+              </a:rPr>
+              <a:t>▸  </a:t>
+            </a:r>
+            <a:r>
+              <a:rPr sz="1600" b="0" i="0">
+                <a:solidFill>
+                  <a:srgbClr val="1B2330"/>
+                </a:solidFill>
+                <a:latin typeface="Montserrat"/>
+              </a:rPr>
+              <a:t>Mantener es del titular</a:t>
+            </a:r>
+          </a:p>
+          <a:p>
+            <a:pPr>
+              <a:spcAft>
+                <a:spcPts val="1100"/>
+              </a:spcAft>
+            </a:pPr>
+            <a:r>
+              <a:rPr sz="1600" b="1" i="0">
+                <a:solidFill>
+                  <a:srgbClr val="E8801A"/>
+                </a:solidFill>
+                <a:latin typeface="Montserrat"/>
+              </a:rPr>
+              <a:t>▸  </a:t>
+            </a:r>
+            <a:r>
+              <a:rPr sz="1600" b="0" i="0">
+                <a:solidFill>
+                  <a:srgbClr val="1B2330"/>
+                </a:solidFill>
+                <a:latin typeface="Montserrat"/>
+              </a:rPr>
+              <a:t>Reglamento: el suelo, nunca el techo</a:t>
+            </a:r>
+          </a:p>
+          <a:p>
+            <a:pPr>
+              <a:spcAft>
+                <a:spcPts val="1100"/>
+              </a:spcAft>
+            </a:pPr>
+            <a:r>
+              <a:rPr sz="1600" b="1" i="0">
+                <a:solidFill>
+                  <a:srgbClr val="E8801A"/>
+                </a:solidFill>
+                <a:latin typeface="Montserrat"/>
+              </a:rPr>
+              <a:t>▸  </a:t>
+            </a:r>
+            <a:r>
+              <a:rPr sz="1600" b="0" i="0">
+                <a:solidFill>
+                  <a:srgbClr val="1B2330"/>
+                </a:solidFill>
+                <a:latin typeface="Montserrat"/>
+              </a:rPr>
+              <a:t>Accidente: 24 h para llamar, 7 días para escribir</a:t>
+            </a:r>
+          </a:p>
+        </p:txBody>
+      </p:sp>
+      <p:sp>
+        <p:nvSpPr>
+          <p:cNvPr id="9" name="imgph" descr="IMGQ:gas safety inspection summary checklist"/>
+          <p:cNvSpPr/>
+          <p:nvPr/>
+        </p:nvSpPr>
+        <p:spPr>
+          <a:xfrm>
+            <a:off x="5806440" y="1051560"/>
+            <a:ext cx="5298947" cy="4629150"/>
+          </a:xfrm>
+          <a:prstGeom prst="roundRect">
+            <a:avLst/>
+          </a:prstGeom>
+          <a:solidFill>
+            <a:srgbClr val="F3F6FB"/>
+          </a:solidFill>
+          <a:ln w="12700">
+            <a:solidFill>
+              <a:srgbClr val="C7D2E6"/>
+            </a:solidFill>
+          </a:ln>
+          <a:effectLst/>
+        </p:spPr>
+        <p:style>
+          <a:lnRef idx="1">
+            <a:schemeClr val="accent1"/>
+          </a:lnRef>
+          <a:fillRef idx="3">
+            <a:schemeClr val="accent1"/>
+          </a:fillRef>
+          <a:effectRef idx="2">
+            <a:schemeClr val="accent1"/>
+          </a:effectRef>
+          <a:fontRef idx="minor">
+            <a:schemeClr val="lt1"/>
+          </a:fontRef>
+        </p:style>
+        <p:txBody>
+          <a:bodyPr rtlCol="0" anchor="ctr"/>
+          <a:lstStyle/>
+          <a:p>
+            <a:pPr algn="ctr"/>
+          </a:p>
+        </p:txBody>
+      </p:sp>
+      <p:sp>
+        <p:nvSpPr>
+          <p:cNvPr id="10" name="TextBox 9"/>
+          <p:cNvSpPr txBox="1"/>
+          <p:nvPr/>
+        </p:nvSpPr>
+        <p:spPr>
+          <a:xfrm>
+            <a:off x="6080760" y="2726055"/>
+            <a:ext cx="4750307" cy="1280160"/>
+          </a:xfrm>
+          <a:prstGeom prst="rect">
+            <a:avLst/>
+          </a:prstGeom>
+          <a:noFill/>
+        </p:spPr>
+        <p:txBody>
+          <a:bodyPr wrap="square">
+            <a:spAutoFit/>
+          </a:bodyPr>
+          <a:lstStyle/>
+          <a:p>
+            <a:pPr algn="ctr"/>
+            <a:r>
+              <a:rPr sz="1400" b="1" i="0">
+                <a:solidFill>
+                  <a:srgbClr val="64748B"/>
+                </a:solidFill>
+                <a:latin typeface="Montserrat"/>
+              </a:rPr>
+              <a:t>IMAGEN REALISTA</a:t>
+            </a:r>
+          </a:p>
+          <a:p>
+            <a:pPr algn="ctr"/>
+            <a:r>
+              <a:rPr sz="1100" b="0" i="1">
+                <a:solidFill>
+                  <a:srgbClr val="64748B"/>
+                </a:solidFill>
+                <a:latin typeface="Montserrat"/>
+              </a:rPr>
+              <a:t>gas safety inspection summary checklist</a:t>
+            </a:r>
+          </a:p>
+        </p:txBody>
+      </p:sp>
+    </p:spTree>
+  </p:cSld>
+  <p:clrMapOvr>
+    <a:masterClrMapping/>
+  </p:clrMapOvr>
+</p:sld>
+</file>
+
+<file path=ppt/slides/slide16.xml><?xml version="1.0" encoding="utf-8"?>
+<p:sld xmlns:a="http://schemas.openxmlformats.org/drawingml/2006/main" xmlns:p="http://schemas.openxmlformats.org/presentationml/2006/main" xmlns:r="http://schemas.openxmlformats.org/officeDocument/2006/relationships">
+  <p:cSld>
+    <p:spTree>
+      <p:nvGrpSpPr>
+        <p:cNvPr id="1" name=""/>
+        <p:cNvGrpSpPr/>
+        <p:nvPr/>
+      </p:nvGrpSpPr>
+      <p:grpSpPr/>
+      <p:sp>
+        <p:nvSpPr>
+          <p:cNvPr id="2" name="Rectangle 1"/>
+          <p:cNvSpPr/>
+          <p:nvPr/>
+        </p:nvSpPr>
+        <p:spPr>
+          <a:xfrm>
+            <a:off x="0" y="0"/>
+            <a:ext cx="12191695" cy="6858000"/>
+          </a:xfrm>
+          <a:prstGeom prst="rect">
+            <a:avLst/>
+          </a:prstGeom>
+          <a:solidFill>
             <a:srgbClr val="1E2761"/>
           </a:solidFill>
           <a:ln>
@@ -6831,7 +7621,7 @@
             <a:r>
               <a:rPr sz="1400" b="1" i="0">
                 <a:solidFill>
-                  <a:srgbClr val="CADCFC"/>
+                  <a:srgbClr val="F4A24C"/>
                 </a:solidFill>
                 <a:latin typeface="Montserrat"/>
               </a:rPr>
@@ -6842,13 +7632,57 @@
       </p:sp>
       <p:sp>
         <p:nvSpPr>
-          <p:cNvPr id="4" name="TextBox 3"/>
+          <p:cNvPr id="4" name="Rounded Rectangle 3"/>
+          <p:cNvSpPr/>
+          <p:nvPr/>
+        </p:nvSpPr>
+        <p:spPr>
+          <a:xfrm>
+            <a:off x="868680" y="1051560"/>
+            <a:ext cx="1463040" cy="82296"/>
+          </a:xfrm>
+          <a:prstGeom prst="roundRect">
+            <a:avLst/>
+          </a:prstGeom>
+          <a:solidFill>
+            <a:srgbClr val="E8801A"/>
+          </a:solidFill>
+          <a:ln>
+            <a:noFill/>
+          </a:ln>
+          <a:effectLst/>
+        </p:spPr>
+        <p:style>
+          <a:lnRef idx="1">
+            <a:schemeClr val="accent1"/>
+          </a:lnRef>
+          <a:fillRef idx="3">
+            <a:schemeClr val="accent1"/>
+          </a:fillRef>
+          <a:effectRef idx="2">
+            <a:schemeClr val="accent1"/>
+          </a:effectRef>
+          <a:fontRef idx="minor">
+            <a:schemeClr val="lt1"/>
+          </a:fontRef>
+        </p:style>
+        <p:txBody>
+          <a:bodyPr rtlCol="0" anchor="ctr"/>
+          <a:lstStyle/>
+          <a:p>
+            <a:pPr algn="ctr"/>
+          </a:p>
+        </p:txBody>
+      </p:sp>
+      <p:sp>
+        <p:nvSpPr>
+          <p:cNvPr id="5" name="TextBox 4"/>
           <p:cNvSpPr txBox="1"/>
           <p:nvPr/>
         </p:nvSpPr>
         <p:spPr>
           <a:xfrm>
-            <a:off x="822960" y="1143000"/>
+            <a:off x="822960" y="1234440"/>
             <a:ext cx="10515600" cy="1097280"/>
           </a:xfrm>
           <a:prstGeom prst="rect">
@@ -6876,14 +7710,14 @@
       </p:sp>
       <p:sp>
         <p:nvSpPr>
-          <p:cNvPr id="5" name="TextBox 4"/>
+          <p:cNvPr id="6" name="TextBox 5"/>
           <p:cNvSpPr txBox="1"/>
           <p:nvPr/>
         </p:nvSpPr>
         <p:spPr>
           <a:xfrm>
-            <a:off x="822960" y="2514600"/>
-            <a:ext cx="10515600" cy="2834640"/>
+            <a:off x="822960" y="2606040"/>
+            <a:ext cx="10515600" cy="2743200"/>
           </a:xfrm>
           <a:prstGeom prst="rect">
             <a:avLst/>
@@ -6904,7 +7738,7 @@
             <a:r>
               <a:rPr sz="2000" b="1" i="0">
                 <a:solidFill>
-                  <a:srgbClr val="CADCFC"/>
+                  <a:srgbClr val="F4A24C"/>
                 </a:solidFill>
                 <a:latin typeface="Montserrat"/>
               </a:rPr>
@@ -6929,7 +7763,7 @@
             <a:r>
               <a:rPr sz="2000" b="1" i="0">
                 <a:solidFill>
-                  <a:srgbClr val="CADCFC"/>
+                  <a:srgbClr val="F4A24C"/>
                 </a:solidFill>
                 <a:latin typeface="Montserrat"/>
               </a:rPr>
@@ -6954,7 +7788,7 @@
             <a:r>
               <a:rPr sz="2000" b="1" i="0">
                 <a:solidFill>
-                  <a:srgbClr val="CADCFC"/>
+                  <a:srgbClr val="F4A24C"/>
                 </a:solidFill>
                 <a:latin typeface="Montserrat"/>
               </a:rPr>
@@ -6979,7 +7813,7 @@
             <a:r>
               <a:rPr sz="2000" b="1" i="0">
                 <a:solidFill>
-                  <a:srgbClr val="CADCFC"/>
+                  <a:srgbClr val="F4A24C"/>
                 </a:solidFill>
                 <a:latin typeface="Montserrat"/>
               </a:rPr>
@@ -6999,20 +7833,20 @@
       </p:sp>
       <p:sp>
         <p:nvSpPr>
-          <p:cNvPr id="6" name="Rounded Rectangle 5"/>
+          <p:cNvPr id="7" name="Rounded Rectangle 6"/>
           <p:cNvSpPr/>
           <p:nvPr/>
         </p:nvSpPr>
         <p:spPr>
           <a:xfrm>
             <a:off x="822960" y="5532120"/>
-            <a:ext cx="10515600" cy="777240"/>
+            <a:ext cx="10515600" cy="822960"/>
           </a:xfrm>
           <a:prstGeom prst="roundRect">
             <a:avLst/>
           </a:prstGeom>
           <a:solidFill>
-            <a:srgbClr val="2E3A80"/>
+            <a:srgbClr val="E8801A"/>
           </a:solidFill>
           <a:ln>
             <a:noFill/>
@@ -7043,13 +7877,13 @@
       </p:sp>
       <p:sp>
         <p:nvSpPr>
-          <p:cNvPr id="7" name="TextBox 6"/>
+          <p:cNvPr id="8" name="TextBox 7"/>
           <p:cNvSpPr txBox="1"/>
           <p:nvPr/>
         </p:nvSpPr>
         <p:spPr>
           <a:xfrm>
-            <a:off x="1051560" y="5605272"/>
+            <a:off x="1051560" y="5623560"/>
             <a:ext cx="10058400" cy="640080"/>
           </a:xfrm>
           <a:prstGeom prst="rect">
@@ -7066,7 +7900,7 @@
             <a:r>
               <a:rPr sz="1500" b="1" i="1">
                 <a:solidFill>
-                  <a:srgbClr val="CADCFC"/>
+                  <a:srgbClr val="1E2761"/>
                 </a:solidFill>
                 <a:latin typeface="Montserrat"/>
               </a:rPr>
@@ -7167,7 +8001,7 @@
                 </a:solidFill>
                 <a:latin typeface="Montserrat"/>
               </a:rPr>
-              <a:t>002 / 015</a:t>
+              <a:t>002 / 016</a:t>
             </a:r>
           </a:p>
         </p:txBody>
@@ -7231,7 +8065,7 @@
             <a:r>
               <a:rPr sz="2700" b="1" i="0">
                 <a:solidFill>
-                  <a:srgbClr val="1E2761"/>
+                  <a:srgbClr val="E8801A"/>
                 </a:solidFill>
                 <a:latin typeface="Montserrat"/>
               </a:rPr>
@@ -7243,6 +8077,50 @@
       <p:sp>
         <p:nvSpPr>
           <p:cNvPr id="6" name="Rounded Rectangle 5"/>
+          <p:cNvSpPr/>
+          <p:nvPr/>
+        </p:nvSpPr>
+        <p:spPr>
+          <a:xfrm>
+            <a:off x="868680" y="1234440"/>
+            <a:ext cx="1463040" cy="73152"/>
+          </a:xfrm>
+          <a:prstGeom prst="roundRect">
+            <a:avLst/>
+          </a:prstGeom>
+          <a:solidFill>
+            <a:srgbClr val="1E2761"/>
+          </a:solidFill>
+          <a:ln>
+            <a:noFill/>
+          </a:ln>
+          <a:effectLst/>
+        </p:spPr>
+        <p:style>
+          <a:lnRef idx="1">
+            <a:schemeClr val="accent1"/>
+          </a:lnRef>
+          <a:fillRef idx="3">
+            <a:schemeClr val="accent1"/>
+          </a:fillRef>
+          <a:effectRef idx="2">
+            <a:schemeClr val="accent1"/>
+          </a:effectRef>
+          <a:fontRef idx="minor">
+            <a:schemeClr val="lt1"/>
+          </a:fontRef>
+        </p:style>
+        <p:txBody>
+          <a:bodyPr rtlCol="0" anchor="ctr"/>
+          <a:lstStyle/>
+          <a:p>
+            <a:pPr algn="ctr"/>
+          </a:p>
+        </p:txBody>
+      </p:sp>
+      <p:sp>
+        <p:nvSpPr>
+          <p:cNvPr id="7" name="Rounded Rectangle 6"/>
           <p:cNvSpPr/>
           <p:nvPr/>
         </p:nvSpPr>
@@ -7288,7 +8166,7 @@
       </p:sp>
       <p:sp>
         <p:nvSpPr>
-          <p:cNvPr id="7" name="TextBox 6"/>
+          <p:cNvPr id="8" name="TextBox 7"/>
           <p:cNvSpPr txBox="1"/>
           <p:nvPr/>
         </p:nvSpPr>
@@ -7323,7 +8201,7 @@
       </p:sp>
       <p:sp>
         <p:nvSpPr>
-          <p:cNvPr id="8" name="TextBox 7"/>
+          <p:cNvPr id="9" name="TextBox 8"/>
           <p:cNvSpPr txBox="1"/>
           <p:nvPr/>
         </p:nvSpPr>
@@ -7358,7 +8236,7 @@
       </p:sp>
       <p:sp>
         <p:nvSpPr>
-          <p:cNvPr id="9" name="Rounded Rectangle 8"/>
+          <p:cNvPr id="10" name="Rounded Rectangle 9"/>
           <p:cNvSpPr/>
           <p:nvPr/>
         </p:nvSpPr>
@@ -7404,7 +8282,7 @@
       </p:sp>
       <p:sp>
         <p:nvSpPr>
-          <p:cNvPr id="10" name="TextBox 9"/>
+          <p:cNvPr id="11" name="TextBox 10"/>
           <p:cNvSpPr txBox="1"/>
           <p:nvPr/>
         </p:nvSpPr>
@@ -7439,7 +8317,7 @@
       </p:sp>
       <p:sp>
         <p:nvSpPr>
-          <p:cNvPr id="11" name="TextBox 10"/>
+          <p:cNvPr id="12" name="TextBox 11"/>
           <p:cNvSpPr txBox="1"/>
           <p:nvPr/>
         </p:nvSpPr>
@@ -7474,7 +8352,7 @@
       </p:sp>
       <p:sp>
         <p:nvSpPr>
-          <p:cNvPr id="12" name="Rounded Rectangle 11"/>
+          <p:cNvPr id="13" name="Rounded Rectangle 12"/>
           <p:cNvSpPr/>
           <p:nvPr/>
         </p:nvSpPr>
@@ -7520,7 +8398,7 @@
       </p:sp>
       <p:sp>
         <p:nvSpPr>
-          <p:cNvPr id="13" name="TextBox 12"/>
+          <p:cNvPr id="14" name="TextBox 13"/>
           <p:cNvSpPr txBox="1"/>
           <p:nvPr/>
         </p:nvSpPr>
@@ -7555,7 +8433,7 @@
       </p:sp>
       <p:sp>
         <p:nvSpPr>
-          <p:cNvPr id="14" name="TextBox 13"/>
+          <p:cNvPr id="15" name="TextBox 14"/>
           <p:cNvSpPr txBox="1"/>
           <p:nvPr/>
         </p:nvSpPr>
@@ -7680,7 +8558,7 @@
                 </a:solidFill>
                 <a:latin typeface="Montserrat"/>
               </a:rPr>
-              <a:t>003 / 015</a:t>
+              <a:t>003 / 016</a:t>
             </a:r>
           </a:p>
         </p:txBody>
@@ -7727,7 +8605,7 @@
         </p:nvSpPr>
         <p:spPr>
           <a:xfrm>
-            <a:off x="822960" y="457200"/>
+            <a:off x="822960" y="502920"/>
             <a:ext cx="8229600" cy="365760"/>
           </a:xfrm>
           <a:prstGeom prst="rect">
@@ -7742,13 +8620,13 @@
           <a:lstStyle/>
           <a:p>
             <a:r>
-              <a:rPr sz="1200" b="1" i="0">
-                <a:solidFill>
-                  <a:srgbClr val="64748B"/>
-                </a:solidFill>
-                <a:latin typeface="Montserrat"/>
-              </a:rPr>
-              <a:t>ARTÍCULO 7.1 · MANTENIMIENTO</a:t>
+              <a:rPr sz="1300" b="1" i="0">
+                <a:solidFill>
+                  <a:srgbClr val="E8801A"/>
+                </a:solidFill>
+                <a:latin typeface="Montserrat"/>
+              </a:rPr>
+              <a:t>PARTES DE ESTE VÍDEO</a:t>
             </a:r>
           </a:p>
         </p:txBody>
@@ -7761,7 +8639,7 @@
         </p:nvSpPr>
         <p:spPr>
           <a:xfrm>
-            <a:off x="822960" y="868680"/>
+            <a:off x="822960" y="914400"/>
             <a:ext cx="10515600" cy="914400"/>
           </a:xfrm>
           <a:prstGeom prst="rect">
@@ -7782,130 +8660,30 @@
                 </a:solidFill>
                 <a:latin typeface="Montserrat"/>
               </a:rPr>
-              <a:t>¿De quién es la obligación?</a:t>
-            </a:r>
-          </a:p>
-        </p:txBody>
-      </p:sp>
-      <p:sp>
-        <p:nvSpPr>
-          <p:cNvPr id="7" name="TextBox 6"/>
-          <p:cNvSpPr txBox="1"/>
-          <p:nvPr/>
-        </p:nvSpPr>
-        <p:spPr>
-          <a:xfrm>
-            <a:off x="822960" y="1920240"/>
-            <a:ext cx="4983480" cy="4206240"/>
-          </a:xfrm>
-          <a:prstGeom prst="rect">
-            <a:avLst/>
-          </a:prstGeom>
-          <a:noFill/>
-        </p:spPr>
-        <p:txBody>
-          <a:bodyPr wrap="square">
-            <a:spAutoFit/>
-          </a:bodyPr>
-          <a:lstStyle/>
-          <a:p>
-            <a:pPr>
-              <a:spcAft>
-                <a:spcPts val="1000"/>
-              </a:spcAft>
-            </a:pPr>
-            <a:r>
-              <a:rPr sz="1600" b="1" i="0">
-                <a:solidFill>
-                  <a:srgbClr val="2E3A80"/>
-                </a:solidFill>
-                <a:latin typeface="Montserrat"/>
-              </a:rPr>
-              <a:t>•  </a:t>
-            </a:r>
-            <a:r>
-              <a:rPr sz="1600" b="0" i="0">
-                <a:solidFill>
-                  <a:srgbClr val="1B2330"/>
-                </a:solidFill>
-                <a:latin typeface="Montserrat"/>
-              </a:rPr>
-              <a:t>Titular, y en su defecto el usuario</a:t>
-            </a:r>
-          </a:p>
-          <a:p>
-            <a:pPr>
-              <a:spcAft>
-                <a:spcPts val="1000"/>
-              </a:spcAft>
-            </a:pPr>
-            <a:r>
-              <a:rPr sz="1600" b="1" i="0">
-                <a:solidFill>
-                  <a:srgbClr val="2E3A80"/>
-                </a:solidFill>
-                <a:latin typeface="Montserrat"/>
-              </a:rPr>
-              <a:t>•  </a:t>
-            </a:r>
-            <a:r>
-              <a:rPr sz="1600" b="0" i="0">
-                <a:solidFill>
-                  <a:srgbClr val="1B2330"/>
-                </a:solidFill>
-                <a:latin typeface="Montserrat"/>
-              </a:rPr>
-              <a:t>En disposición de servicio, siempre</a:t>
-            </a:r>
-          </a:p>
-          <a:p>
-            <a:pPr>
-              <a:spcAft>
-                <a:spcPts val="1000"/>
-              </a:spcAft>
-            </a:pPr>
-            <a:r>
-              <a:rPr sz="1600" b="1" i="0">
-                <a:solidFill>
-                  <a:srgbClr val="2E3A80"/>
-                </a:solidFill>
-                <a:latin typeface="Montserrat"/>
-              </a:rPr>
-              <a:t>•  </a:t>
-            </a:r>
-            <a:r>
-              <a:rPr sz="1600" b="0" i="0">
-                <a:solidFill>
-                  <a:srgbClr val="1B2330"/>
-                </a:solidFill>
-                <a:latin typeface="Montserrat"/>
-              </a:rPr>
-              <a:t>El instalador ayuda, no responde por él</a:t>
-            </a:r>
-          </a:p>
-        </p:txBody>
-      </p:sp>
-      <p:sp>
-        <p:nvSpPr>
-          <p:cNvPr id="8" name="imgph" descr="IMGQ:homeowner gas boiler maintenance check"/>
+              <a:t>En este vídeo</a:t>
+            </a:r>
+          </a:p>
+        </p:txBody>
+      </p:sp>
+      <p:sp>
+        <p:nvSpPr>
+          <p:cNvPr id="7" name="Rounded Rectangle 6"/>
           <p:cNvSpPr/>
           <p:nvPr/>
         </p:nvSpPr>
         <p:spPr>
           <a:xfrm>
-            <a:off x="5806440" y="1051560"/>
-            <a:ext cx="5298947" cy="4629150"/>
+            <a:off x="868680" y="1673352"/>
+            <a:ext cx="2011680" cy="73152"/>
           </a:xfrm>
           <a:prstGeom prst="roundRect">
             <a:avLst/>
           </a:prstGeom>
           <a:solidFill>
-            <a:srgbClr val="F3F6FB"/>
+            <a:srgbClr val="E8801A"/>
           </a:solidFill>
-          <a:ln w="12700">
-            <a:solidFill>
-              <a:srgbClr val="C7D2E6"/>
-            </a:solidFill>
+          <a:ln>
+            <a:noFill/>
           </a:ln>
           <a:effectLst/>
         </p:spPr>
@@ -7933,14 +8711,14 @@
       </p:sp>
       <p:sp>
         <p:nvSpPr>
-          <p:cNvPr id="9" name="TextBox 8"/>
+          <p:cNvPr id="8" name="TextBox 7"/>
           <p:cNvSpPr txBox="1"/>
           <p:nvPr/>
         </p:nvSpPr>
         <p:spPr>
           <a:xfrm>
-            <a:off x="6080760" y="2726055"/>
-            <a:ext cx="4750307" cy="1280160"/>
+            <a:off x="822960" y="2103120"/>
+            <a:ext cx="10515600" cy="4023360"/>
           </a:xfrm>
           <a:prstGeom prst="rect">
             <a:avLst/>
@@ -7953,27 +8731,228 @@
           </a:bodyPr>
           <a:lstStyle/>
           <a:p>
-            <a:pPr algn="ctr"/>
-            <a:r>
-              <a:rPr sz="1400" b="1" i="0">
-                <a:solidFill>
-                  <a:srgbClr val="64748B"/>
-                </a:solidFill>
-                <a:latin typeface="Montserrat"/>
-              </a:rPr>
-              <a:t>IMAGEN REALISTA</a:t>
-            </a:r>
-          </a:p>
-          <a:p>
-            <a:pPr algn="ctr"/>
-            <a:r>
-              <a:rPr sz="1100" b="0" i="1">
-                <a:solidFill>
-                  <a:srgbClr val="64748B"/>
-                </a:solidFill>
-                <a:latin typeface="Montserrat"/>
-              </a:rPr>
-              <a:t>homeowner gas boiler maintenance check</a:t>
+            <a:pPr>
+              <a:spcAft>
+                <a:spcPts val="900"/>
+              </a:spcAft>
+            </a:pPr>
+            <a:r>
+              <a:rPr sz="1800" b="1" i="0">
+                <a:solidFill>
+                  <a:srgbClr val="E8801A"/>
+                </a:solidFill>
+                <a:latin typeface="Montserrat"/>
+              </a:rPr>
+              <a:t>01   </a:t>
+            </a:r>
+            <a:r>
+              <a:rPr sz="1700" b="0" i="0">
+                <a:solidFill>
+                  <a:srgbClr val="1B2330"/>
+                </a:solidFill>
+                <a:latin typeface="Montserrat"/>
+              </a:rPr>
+              <a:t>Artículo 7.1</a:t>
+            </a:r>
+          </a:p>
+          <a:p>
+            <a:pPr>
+              <a:spcAft>
+                <a:spcPts val="900"/>
+              </a:spcAft>
+            </a:pPr>
+            <a:r>
+              <a:rPr sz="1800" b="1" i="0">
+                <a:solidFill>
+                  <a:srgbClr val="E8801A"/>
+                </a:solidFill>
+                <a:latin typeface="Montserrat"/>
+              </a:rPr>
+              <a:t>02   </a:t>
+            </a:r>
+            <a:r>
+              <a:rPr sz="1700" b="0" i="0">
+                <a:solidFill>
+                  <a:srgbClr val="1B2330"/>
+                </a:solidFill>
+                <a:latin typeface="Montserrat"/>
+              </a:rPr>
+              <a:t>Artículo 7.2</a:t>
+            </a:r>
+          </a:p>
+          <a:p>
+            <a:pPr>
+              <a:spcAft>
+                <a:spcPts val="900"/>
+              </a:spcAft>
+            </a:pPr>
+            <a:r>
+              <a:rPr sz="1800" b="1" i="0">
+                <a:solidFill>
+                  <a:srgbClr val="E8801A"/>
+                </a:solidFill>
+                <a:latin typeface="Montserrat"/>
+              </a:rPr>
+              <a:t>03   </a:t>
+            </a:r>
+            <a:r>
+              <a:rPr sz="1700" b="0" i="0">
+                <a:solidFill>
+                  <a:srgbClr val="1B2330"/>
+                </a:solidFill>
+                <a:latin typeface="Montserrat"/>
+              </a:rPr>
+              <a:t>Artículo 7.2.1</a:t>
+            </a:r>
+          </a:p>
+          <a:p>
+            <a:pPr>
+              <a:spcAft>
+                <a:spcPts val="900"/>
+              </a:spcAft>
+            </a:pPr>
+            <a:r>
+              <a:rPr sz="1800" b="1" i="0">
+                <a:solidFill>
+                  <a:srgbClr val="E8801A"/>
+                </a:solidFill>
+                <a:latin typeface="Montserrat"/>
+              </a:rPr>
+              <a:t>04   </a:t>
+            </a:r>
+            <a:r>
+              <a:rPr sz="1700" b="0" i="0">
+                <a:solidFill>
+                  <a:srgbClr val="1B2330"/>
+                </a:solidFill>
+                <a:latin typeface="Montserrat"/>
+              </a:rPr>
+              <a:t>Artículo 7.2.2</a:t>
+            </a:r>
+          </a:p>
+          <a:p>
+            <a:pPr>
+              <a:spcAft>
+                <a:spcPts val="900"/>
+              </a:spcAft>
+            </a:pPr>
+            <a:r>
+              <a:rPr sz="1800" b="1" i="0">
+                <a:solidFill>
+                  <a:srgbClr val="E8801A"/>
+                </a:solidFill>
+                <a:latin typeface="Montserrat"/>
+              </a:rPr>
+              <a:t>05   </a:t>
+            </a:r>
+            <a:r>
+              <a:rPr sz="1700" b="0" i="0">
+                <a:solidFill>
+                  <a:srgbClr val="1B2330"/>
+                </a:solidFill>
+                <a:latin typeface="Montserrat"/>
+              </a:rPr>
+              <a:t>Control periódico</a:t>
+            </a:r>
+          </a:p>
+          <a:p>
+            <a:pPr>
+              <a:spcAft>
+                <a:spcPts val="900"/>
+              </a:spcAft>
+            </a:pPr>
+            <a:r>
+              <a:rPr sz="1800" b="1" i="0">
+                <a:solidFill>
+                  <a:srgbClr val="E8801A"/>
+                </a:solidFill>
+                <a:latin typeface="Montserrat"/>
+              </a:rPr>
+              <a:t>06   </a:t>
+            </a:r>
+            <a:r>
+              <a:rPr sz="1700" b="0" i="0">
+                <a:solidFill>
+                  <a:srgbClr val="1B2330"/>
+                </a:solidFill>
+                <a:latin typeface="Montserrat"/>
+              </a:rPr>
+              <a:t>Artículo 7.3</a:t>
+            </a:r>
+          </a:p>
+          <a:p>
+            <a:pPr>
+              <a:spcAft>
+                <a:spcPts val="900"/>
+              </a:spcAft>
+            </a:pPr>
+            <a:r>
+              <a:rPr sz="1800" b="1" i="0">
+                <a:solidFill>
+                  <a:srgbClr val="E8801A"/>
+                </a:solidFill>
+                <a:latin typeface="Montserrat"/>
+              </a:rPr>
+              <a:t>07   </a:t>
+            </a:r>
+            <a:r>
+              <a:rPr sz="1700" b="0" i="0">
+                <a:solidFill>
+                  <a:srgbClr val="1B2330"/>
+                </a:solidFill>
+                <a:latin typeface="Montserrat"/>
+              </a:rPr>
+              <a:t>Artículo 8</a:t>
+            </a:r>
+          </a:p>
+          <a:p>
+            <a:pPr>
+              <a:spcAft>
+                <a:spcPts val="900"/>
+              </a:spcAft>
+            </a:pPr>
+            <a:r>
+              <a:rPr sz="1800" b="1" i="0">
+                <a:solidFill>
+                  <a:srgbClr val="E8801A"/>
+                </a:solidFill>
+                <a:latin typeface="Montserrat"/>
+              </a:rPr>
+              <a:t>08   </a:t>
+            </a:r>
+            <a:r>
+              <a:rPr sz="1700" b="0" i="0">
+                <a:solidFill>
+                  <a:srgbClr val="1B2330"/>
+                </a:solidFill>
+                <a:latin typeface="Montserrat"/>
+              </a:rPr>
+              <a:t>Artículos 9 y 10</a:t>
+            </a:r>
+          </a:p>
+          <a:p>
+            <a:pPr>
+              <a:spcAft>
+                <a:spcPts val="900"/>
+              </a:spcAft>
+            </a:pPr>
+            <a:r>
+              <a:rPr sz="1800" b="1" i="0">
+                <a:solidFill>
+                  <a:srgbClr val="E8801A"/>
+                </a:solidFill>
+                <a:latin typeface="Montserrat"/>
+              </a:rPr>
+              <a:t>09   </a:t>
+            </a:r>
+            <a:r>
+              <a:rPr sz="1700" b="0" i="0">
+                <a:solidFill>
+                  <a:srgbClr val="1B2330"/>
+                </a:solidFill>
+                <a:latin typeface="Montserrat"/>
+              </a:rPr>
+              <a:t>Artículos 11 y 12</a:t>
             </a:r>
           </a:p>
         </p:txBody>
@@ -8070,7 +9049,7 @@
                 </a:solidFill>
                 <a:latin typeface="Montserrat"/>
               </a:rPr>
-              <a:t>004 / 015</a:t>
+              <a:t>004 / 016</a:t>
             </a:r>
           </a:p>
         </p:txBody>
@@ -8118,7 +9097,7 @@
         <p:spPr>
           <a:xfrm>
             <a:off x="822960" y="457200"/>
-            <a:ext cx="8229600" cy="365760"/>
+            <a:ext cx="10058400" cy="365760"/>
           </a:xfrm>
           <a:prstGeom prst="rect">
             <a:avLst/>
@@ -8132,13 +9111,13 @@
           <a:lstStyle/>
           <a:p>
             <a:r>
-              <a:rPr sz="1200" b="1" i="0">
-                <a:solidFill>
-                  <a:srgbClr val="64748B"/>
-                </a:solidFill>
-                <a:latin typeface="Montserrat"/>
-              </a:rPr>
-              <a:t>ARTÍCULO 7.2 · LA PREGUNTA ESTRELLA</a:t>
+              <a:rPr sz="1300" b="1" i="0">
+                <a:solidFill>
+                  <a:srgbClr val="E8801A"/>
+                </a:solidFill>
+                <a:latin typeface="Montserrat"/>
+              </a:rPr>
+              <a:t>ARTÍCULO 7.1 · MANTENIMIENTO</a:t>
             </a:r>
           </a:p>
         </p:txBody>
@@ -8166,26 +9145,70 @@
           <a:lstStyle/>
           <a:p>
             <a:r>
-              <a:rPr sz="2700" b="1" i="0">
+              <a:rPr sz="2800" b="1" i="0">
                 <a:solidFill>
                   <a:srgbClr val="1E2761"/>
                 </a:solidFill>
                 <a:latin typeface="Montserrat"/>
               </a:rPr>
-              <a:t>¿Inspección o revisión?</a:t>
-            </a:r>
-          </a:p>
-        </p:txBody>
-      </p:sp>
-      <p:sp>
-        <p:nvSpPr>
-          <p:cNvPr id="7" name="TextBox 6"/>
+              <a:t>¿De quién es la obligación?</a:t>
+            </a:r>
+          </a:p>
+        </p:txBody>
+      </p:sp>
+      <p:sp>
+        <p:nvSpPr>
+          <p:cNvPr id="7" name="Rounded Rectangle 6"/>
+          <p:cNvSpPr/>
+          <p:nvPr/>
+        </p:nvSpPr>
+        <p:spPr>
+          <a:xfrm>
+            <a:off x="868680" y="1627632"/>
+            <a:ext cx="2011680" cy="73152"/>
+          </a:xfrm>
+          <a:prstGeom prst="roundRect">
+            <a:avLst/>
+          </a:prstGeom>
+          <a:solidFill>
+            <a:srgbClr val="E8801A"/>
+          </a:solidFill>
+          <a:ln>
+            <a:noFill/>
+          </a:ln>
+          <a:effectLst/>
+        </p:spPr>
+        <p:style>
+          <a:lnRef idx="1">
+            <a:schemeClr val="accent1"/>
+          </a:lnRef>
+          <a:fillRef idx="3">
+            <a:schemeClr val="accent1"/>
+          </a:fillRef>
+          <a:effectRef idx="2">
+            <a:schemeClr val="accent1"/>
+          </a:effectRef>
+          <a:fontRef idx="minor">
+            <a:schemeClr val="lt1"/>
+          </a:fontRef>
+        </p:style>
+        <p:txBody>
+          <a:bodyPr rtlCol="0" anchor="ctr"/>
+          <a:lstStyle/>
+          <a:p>
+            <a:pPr algn="ctr"/>
+          </a:p>
+        </p:txBody>
+      </p:sp>
+      <p:sp>
+        <p:nvSpPr>
+          <p:cNvPr id="8" name="TextBox 7"/>
           <p:cNvSpPr txBox="1"/>
           <p:nvPr/>
         </p:nvSpPr>
         <p:spPr>
           <a:xfrm>
-            <a:off x="822960" y="1920240"/>
+            <a:off x="822960" y="1965960"/>
             <a:ext cx="4983480" cy="4206240"/>
           </a:xfrm>
           <a:prstGeom prst="rect">
@@ -8201,17 +9224,17 @@
           <a:p>
             <a:pPr>
               <a:spcAft>
-                <a:spcPts val="1000"/>
+                <a:spcPts val="1100"/>
               </a:spcAft>
             </a:pPr>
             <a:r>
               <a:rPr sz="1600" b="1" i="0">
                 <a:solidFill>
-                  <a:srgbClr val="2E3A80"/>
-                </a:solidFill>
-                <a:latin typeface="Montserrat"/>
-              </a:rPr>
-              <a:t>•  </a:t>
+                  <a:srgbClr val="E8801A"/>
+                </a:solidFill>
+                <a:latin typeface="Montserrat"/>
+              </a:rPr>
+              <a:t>▸  </a:t>
             </a:r>
             <a:r>
               <a:rPr sz="1600" b="0" i="0">
@@ -8220,23 +9243,23 @@
                 </a:solidFill>
                 <a:latin typeface="Montserrat"/>
               </a:rPr>
-              <a:t>¿Conectada a la red de distribución?</a:t>
+              <a:t>Titular, y en su defecto el usuario</a:t>
             </a:r>
           </a:p>
           <a:p>
             <a:pPr>
               <a:spcAft>
-                <a:spcPts val="1000"/>
+                <a:spcPts val="1100"/>
               </a:spcAft>
             </a:pPr>
             <a:r>
               <a:rPr sz="1600" b="1" i="0">
                 <a:solidFill>
-                  <a:srgbClr val="2E3A80"/>
-                </a:solidFill>
-                <a:latin typeface="Montserrat"/>
-              </a:rPr>
-              <a:t>•  </a:t>
+                  <a:srgbClr val="E8801A"/>
+                </a:solidFill>
+                <a:latin typeface="Montserrat"/>
+              </a:rPr>
+              <a:t>▸  </a:t>
             </a:r>
             <a:r>
               <a:rPr sz="1600" b="0" i="0">
@@ -8245,23 +9268,23 @@
                 </a:solidFill>
                 <a:latin typeface="Montserrat"/>
               </a:rPr>
-              <a:t>SÍ (red) → inspección</a:t>
+              <a:t>En disposición de servicio, siempre</a:t>
             </a:r>
           </a:p>
           <a:p>
             <a:pPr>
               <a:spcAft>
-                <a:spcPts val="1000"/>
+                <a:spcPts val="1100"/>
               </a:spcAft>
             </a:pPr>
             <a:r>
               <a:rPr sz="1600" b="1" i="0">
                 <a:solidFill>
-                  <a:srgbClr val="2E3A80"/>
-                </a:solidFill>
-                <a:latin typeface="Montserrat"/>
-              </a:rPr>
-              <a:t>•  </a:t>
+                  <a:srgbClr val="E8801A"/>
+                </a:solidFill>
+                <a:latin typeface="Montserrat"/>
+              </a:rPr>
+              <a:t>▸  </a:t>
             </a:r>
             <a:r>
               <a:rPr sz="1600" b="0" i="0">
@@ -8270,39 +9293,14 @@
                 </a:solidFill>
                 <a:latin typeface="Montserrat"/>
               </a:rPr>
-              <a:t>NO (depósito propio) → revisión</a:t>
-            </a:r>
-          </a:p>
-          <a:p>
-            <a:pPr>
-              <a:spcAft>
-                <a:spcPts val="1000"/>
-              </a:spcAft>
-            </a:pPr>
-            <a:r>
-              <a:rPr sz="1600" b="1" i="0">
-                <a:solidFill>
-                  <a:srgbClr val="2E3A80"/>
-                </a:solidFill>
-                <a:latin typeface="Montserrat"/>
-              </a:rPr>
-              <a:t>•  </a:t>
-            </a:r>
-            <a:r>
-              <a:rPr sz="1600" b="0" i="0">
-                <a:solidFill>
-                  <a:srgbClr val="1B2330"/>
-                </a:solidFill>
-                <a:latin typeface="Montserrat"/>
-              </a:rPr>
-              <a:t>Organismo de control obligatorio → inspección</a:t>
-            </a:r>
-          </a:p>
-        </p:txBody>
-      </p:sp>
-      <p:sp>
-        <p:nvSpPr>
-          <p:cNvPr id="8" name="imgph" descr="IMGQ:gas distribution pipeline street valve"/>
+              <a:t>El instalador ayuda, no responde por él</a:t>
+            </a:r>
+          </a:p>
+        </p:txBody>
+      </p:sp>
+      <p:sp>
+        <p:nvSpPr>
+          <p:cNvPr id="9" name="imgph" descr="IMGQ:homeowner gas boiler maintenance check"/>
           <p:cNvSpPr/>
           <p:nvPr/>
         </p:nvSpPr>
@@ -8348,7 +9346,7 @@
       </p:sp>
       <p:sp>
         <p:nvSpPr>
-          <p:cNvPr id="9" name="TextBox 8"/>
+          <p:cNvPr id="10" name="TextBox 9"/>
           <p:cNvSpPr txBox="1"/>
           <p:nvPr/>
         </p:nvSpPr>
@@ -8388,7 +9386,7 @@
                 </a:solidFill>
                 <a:latin typeface="Montserrat"/>
               </a:rPr>
-              <a:t>gas distribution pipeline street valve</a:t>
+              <a:t>homeowner gas boiler maintenance check</a:t>
             </a:r>
           </a:p>
         </p:txBody>
@@ -8485,7 +9483,7 @@
                 </a:solidFill>
                 <a:latin typeface="Montserrat"/>
               </a:rPr>
-              <a:t>005 / 015</a:t>
+              <a:t>005 / 016</a:t>
             </a:r>
           </a:p>
         </p:txBody>
@@ -8533,7 +9531,7 @@
         <p:spPr>
           <a:xfrm>
             <a:off x="822960" y="457200"/>
-            <a:ext cx="8229600" cy="365760"/>
+            <a:ext cx="10058400" cy="365760"/>
           </a:xfrm>
           <a:prstGeom prst="rect">
             <a:avLst/>
@@ -8547,13 +9545,13 @@
           <a:lstStyle/>
           <a:p>
             <a:r>
-              <a:rPr sz="1200" b="1" i="0">
-                <a:solidFill>
-                  <a:srgbClr val="64748B"/>
-                </a:solidFill>
-                <a:latin typeface="Montserrat"/>
-              </a:rPr>
-              <a:t>ARTÍCULO 7.2.1 · INSPECCIONES</a:t>
+              <a:rPr sz="1300" b="1" i="0">
+                <a:solidFill>
+                  <a:srgbClr val="E8801A"/>
+                </a:solidFill>
+                <a:latin typeface="Montserrat"/>
+              </a:rPr>
+              <a:t>ARTÍCULO 7.2 · LA PREGUNTA ESTRELLA</a:t>
             </a:r>
           </a:p>
         </p:txBody>
@@ -8581,26 +9579,70 @@
           <a:lstStyle/>
           <a:p>
             <a:r>
-              <a:rPr sz="2700" b="1" i="0">
+              <a:rPr sz="2800" b="1" i="0">
                 <a:solidFill>
                   <a:srgbClr val="1E2761"/>
                 </a:solidFill>
                 <a:latin typeface="Montserrat"/>
               </a:rPr>
-              <a:t>Inspección: quién la hace</a:t>
-            </a:r>
-          </a:p>
-        </p:txBody>
-      </p:sp>
-      <p:sp>
-        <p:nvSpPr>
-          <p:cNvPr id="7" name="TextBox 6"/>
+              <a:t>¿Inspección o revisión?</a:t>
+            </a:r>
+          </a:p>
+        </p:txBody>
+      </p:sp>
+      <p:sp>
+        <p:nvSpPr>
+          <p:cNvPr id="7" name="Rounded Rectangle 6"/>
+          <p:cNvSpPr/>
+          <p:nvPr/>
+        </p:nvSpPr>
+        <p:spPr>
+          <a:xfrm>
+            <a:off x="868680" y="1627632"/>
+            <a:ext cx="2011680" cy="73152"/>
+          </a:xfrm>
+          <a:prstGeom prst="roundRect">
+            <a:avLst/>
+          </a:prstGeom>
+          <a:solidFill>
+            <a:srgbClr val="E8801A"/>
+          </a:solidFill>
+          <a:ln>
+            <a:noFill/>
+          </a:ln>
+          <a:effectLst/>
+        </p:spPr>
+        <p:style>
+          <a:lnRef idx="1">
+            <a:schemeClr val="accent1"/>
+          </a:lnRef>
+          <a:fillRef idx="3">
+            <a:schemeClr val="accent1"/>
+          </a:fillRef>
+          <a:effectRef idx="2">
+            <a:schemeClr val="accent1"/>
+          </a:effectRef>
+          <a:fontRef idx="minor">
+            <a:schemeClr val="lt1"/>
+          </a:fontRef>
+        </p:style>
+        <p:txBody>
+          <a:bodyPr rtlCol="0" anchor="ctr"/>
+          <a:lstStyle/>
+          <a:p>
+            <a:pPr algn="ctr"/>
+          </a:p>
+        </p:txBody>
+      </p:sp>
+      <p:sp>
+        <p:nvSpPr>
+          <p:cNvPr id="8" name="TextBox 7"/>
           <p:cNvSpPr txBox="1"/>
           <p:nvPr/>
         </p:nvSpPr>
         <p:spPr>
           <a:xfrm>
-            <a:off x="822960" y="1920240"/>
+            <a:off x="822960" y="1965960"/>
             <a:ext cx="4983480" cy="4206240"/>
           </a:xfrm>
           <a:prstGeom prst="rect">
@@ -8616,17 +9658,17 @@
           <a:p>
             <a:pPr>
               <a:spcAft>
-                <a:spcPts val="1000"/>
+                <a:spcPts val="1100"/>
               </a:spcAft>
             </a:pPr>
             <a:r>
               <a:rPr sz="1600" b="1" i="0">
                 <a:solidFill>
-                  <a:srgbClr val="2E3A80"/>
-                </a:solidFill>
-                <a:latin typeface="Montserrat"/>
-              </a:rPr>
-              <a:t>•  </a:t>
+                  <a:srgbClr val="E8801A"/>
+                </a:solidFill>
+                <a:latin typeface="Montserrat"/>
+              </a:rPr>
+              <a:t>▸  </a:t>
             </a:r>
             <a:r>
               <a:rPr sz="1600" b="0" i="0">
@@ -8635,23 +9677,23 @@
                 </a:solidFill>
                 <a:latin typeface="Montserrat"/>
               </a:rPr>
-              <a:t>Receptoras desde red por canalización</a:t>
+              <a:t>¿Conectada a la red de distribución?</a:t>
             </a:r>
           </a:p>
           <a:p>
             <a:pPr>
               <a:spcAft>
-                <a:spcPts val="1000"/>
+                <a:spcPts val="1100"/>
               </a:spcAft>
             </a:pPr>
             <a:r>
               <a:rPr sz="1600" b="1" i="0">
                 <a:solidFill>
-                  <a:srgbClr val="2E3A80"/>
-                </a:solidFill>
-                <a:latin typeface="Montserrat"/>
-              </a:rPr>
-              <a:t>•  </a:t>
+                  <a:srgbClr val="E8801A"/>
+                </a:solidFill>
+                <a:latin typeface="Montserrat"/>
+              </a:rPr>
+              <a:t>▸  </a:t>
             </a:r>
             <a:r>
               <a:rPr sz="1600" b="0" i="0">
@@ -8660,23 +9702,23 @@
                 </a:solidFill>
                 <a:latin typeface="Montserrat"/>
               </a:rPr>
-              <a:t>Empresa instaladora habilitada o distribuidor</a:t>
+              <a:t>SÍ (red) → inspección</a:t>
             </a:r>
           </a:p>
           <a:p>
             <a:pPr>
               <a:spcAft>
-                <a:spcPts val="1000"/>
+                <a:spcPts val="1100"/>
               </a:spcAft>
             </a:pPr>
             <a:r>
               <a:rPr sz="1600" b="1" i="0">
                 <a:solidFill>
-                  <a:srgbClr val="2E3A80"/>
-                </a:solidFill>
-                <a:latin typeface="Montserrat"/>
-              </a:rPr>
-              <a:t>•  </a:t>
+                  <a:srgbClr val="E8801A"/>
+                </a:solidFill>
+                <a:latin typeface="Montserrat"/>
+              </a:rPr>
+              <a:t>▸  </a:t>
             </a:r>
             <a:r>
               <a:rPr sz="1600" b="0" i="0">
@@ -8685,14 +9727,39 @@
                 </a:solidFill>
                 <a:latin typeface="Montserrat"/>
               </a:rPr>
-              <a:t>También la parte común</a:t>
-            </a:r>
-          </a:p>
-        </p:txBody>
-      </p:sp>
-      <p:sp>
-        <p:nvSpPr>
-          <p:cNvPr id="8" name="imgph" descr="IMGQ:gas technician inspecting meter cabinet"/>
+              <a:t>NO (depósito propio) → revisión</a:t>
+            </a:r>
+          </a:p>
+          <a:p>
+            <a:pPr>
+              <a:spcAft>
+                <a:spcPts val="1100"/>
+              </a:spcAft>
+            </a:pPr>
+            <a:r>
+              <a:rPr sz="1600" b="1" i="0">
+                <a:solidFill>
+                  <a:srgbClr val="E8801A"/>
+                </a:solidFill>
+                <a:latin typeface="Montserrat"/>
+              </a:rPr>
+              <a:t>▸  </a:t>
+            </a:r>
+            <a:r>
+              <a:rPr sz="1600" b="0" i="0">
+                <a:solidFill>
+                  <a:srgbClr val="1B2330"/>
+                </a:solidFill>
+                <a:latin typeface="Montserrat"/>
+              </a:rPr>
+              <a:t>Organismo de control obligatorio → inspección</a:t>
+            </a:r>
+          </a:p>
+        </p:txBody>
+      </p:sp>
+      <p:sp>
+        <p:nvSpPr>
+          <p:cNvPr id="9" name="imgph" descr="IMGQ:gas distribution pipeline street valve"/>
           <p:cNvSpPr/>
           <p:nvPr/>
         </p:nvSpPr>
@@ -8738,7 +9805,7 @@
       </p:sp>
       <p:sp>
         <p:nvSpPr>
-          <p:cNvPr id="9" name="TextBox 8"/>
+          <p:cNvPr id="10" name="TextBox 9"/>
           <p:cNvSpPr txBox="1"/>
           <p:nvPr/>
         </p:nvSpPr>
@@ -8778,7 +9845,7 @@
                 </a:solidFill>
                 <a:latin typeface="Montserrat"/>
               </a:rPr>
-              <a:t>gas technician inspecting meter cabinet</a:t>
+              <a:t>gas distribution pipeline street valve</a:t>
             </a:r>
           </a:p>
         </p:txBody>
@@ -8875,7 +9942,7 @@
                 </a:solidFill>
                 <a:latin typeface="Montserrat"/>
               </a:rPr>
-              <a:t>006 / 015</a:t>
+              <a:t>006 / 016</a:t>
             </a:r>
           </a:p>
         </p:txBody>
@@ -8923,7 +9990,7 @@
         <p:spPr>
           <a:xfrm>
             <a:off x="822960" y="457200"/>
-            <a:ext cx="8229600" cy="365760"/>
+            <a:ext cx="10058400" cy="365760"/>
           </a:xfrm>
           <a:prstGeom prst="rect">
             <a:avLst/>
@@ -8937,13 +10004,13 @@
           <a:lstStyle/>
           <a:p>
             <a:r>
-              <a:rPr sz="1200" b="1" i="0">
-                <a:solidFill>
-                  <a:srgbClr val="64748B"/>
-                </a:solidFill>
-                <a:latin typeface="Montserrat"/>
-              </a:rPr>
-              <a:t>ARTÍCULO 7.2.2 · REVISIONES</a:t>
+              <a:rPr sz="1300" b="1" i="0">
+                <a:solidFill>
+                  <a:srgbClr val="E8801A"/>
+                </a:solidFill>
+                <a:latin typeface="Montserrat"/>
+              </a:rPr>
+              <a:t>ARTÍCULO 7.2.1 · INSPECCIONES</a:t>
             </a:r>
           </a:p>
         </p:txBody>
@@ -8971,26 +10038,70 @@
           <a:lstStyle/>
           <a:p>
             <a:r>
-              <a:rPr sz="2700" b="1" i="0">
+              <a:rPr sz="2800" b="1" i="0">
                 <a:solidFill>
                   <a:srgbClr val="1E2761"/>
                 </a:solidFill>
                 <a:latin typeface="Montserrat"/>
               </a:rPr>
-              <a:t>Revisión: quién la hace</a:t>
-            </a:r>
-          </a:p>
-        </p:txBody>
-      </p:sp>
-      <p:sp>
-        <p:nvSpPr>
-          <p:cNvPr id="7" name="TextBox 6"/>
+              <a:t>Inspección: quién la hace</a:t>
+            </a:r>
+          </a:p>
+        </p:txBody>
+      </p:sp>
+      <p:sp>
+        <p:nvSpPr>
+          <p:cNvPr id="7" name="Rounded Rectangle 6"/>
+          <p:cNvSpPr/>
+          <p:nvPr/>
+        </p:nvSpPr>
+        <p:spPr>
+          <a:xfrm>
+            <a:off x="868680" y="1627632"/>
+            <a:ext cx="2011680" cy="73152"/>
+          </a:xfrm>
+          <a:prstGeom prst="roundRect">
+            <a:avLst/>
+          </a:prstGeom>
+          <a:solidFill>
+            <a:srgbClr val="E8801A"/>
+          </a:solidFill>
+          <a:ln>
+            <a:noFill/>
+          </a:ln>
+          <a:effectLst/>
+        </p:spPr>
+        <p:style>
+          <a:lnRef idx="1">
+            <a:schemeClr val="accent1"/>
+          </a:lnRef>
+          <a:fillRef idx="3">
+            <a:schemeClr val="accent1"/>
+          </a:fillRef>
+          <a:effectRef idx="2">
+            <a:schemeClr val="accent1"/>
+          </a:effectRef>
+          <a:fontRef idx="minor">
+            <a:schemeClr val="lt1"/>
+          </a:fontRef>
+        </p:style>
+        <p:txBody>
+          <a:bodyPr rtlCol="0" anchor="ctr"/>
+          <a:lstStyle/>
+          <a:p>
+            <a:pPr algn="ctr"/>
+          </a:p>
+        </p:txBody>
+      </p:sp>
+      <p:sp>
+        <p:nvSpPr>
+          <p:cNvPr id="8" name="TextBox 7"/>
           <p:cNvSpPr txBox="1"/>
           <p:nvPr/>
         </p:nvSpPr>
         <p:spPr>
           <a:xfrm>
-            <a:off x="822960" y="1920240"/>
+            <a:off x="822960" y="1965960"/>
             <a:ext cx="4983480" cy="4206240"/>
           </a:xfrm>
           <a:prstGeom prst="rect">
@@ -9006,17 +10117,17 @@
           <a:p>
             <a:pPr>
               <a:spcAft>
-                <a:spcPts val="1000"/>
+                <a:spcPts val="1100"/>
               </a:spcAft>
             </a:pPr>
             <a:r>
               <a:rPr sz="1600" b="1" i="0">
                 <a:solidFill>
-                  <a:srgbClr val="2E3A80"/>
-                </a:solidFill>
-                <a:latin typeface="Montserrat"/>
-              </a:rPr>
-              <a:t>•  </a:t>
+                  <a:srgbClr val="E8801A"/>
+                </a:solidFill>
+                <a:latin typeface="Montserrat"/>
+              </a:rPr>
+              <a:t>▸  </a:t>
             </a:r>
             <a:r>
               <a:rPr sz="1600" b="0" i="0">
@@ -9025,23 +10136,23 @@
                 </a:solidFill>
                 <a:latin typeface="Montserrat"/>
               </a:rPr>
-              <a:t>Instalaciones no conectadas a red</a:t>
+              <a:t>Receptoras desde red por canalización</a:t>
             </a:r>
           </a:p>
           <a:p>
             <a:pPr>
               <a:spcAft>
-                <a:spcPts val="1000"/>
+                <a:spcPts val="1100"/>
               </a:spcAft>
             </a:pPr>
             <a:r>
               <a:rPr sz="1600" b="1" i="0">
                 <a:solidFill>
-                  <a:srgbClr val="2E3A80"/>
-                </a:solidFill>
-                <a:latin typeface="Montserrat"/>
-              </a:rPr>
-              <a:t>•  </a:t>
+                  <a:srgbClr val="E8801A"/>
+                </a:solidFill>
+                <a:latin typeface="Montserrat"/>
+              </a:rPr>
+              <a:t>▸  </a:t>
             </a:r>
             <a:r>
               <a:rPr sz="1600" b="0" i="0">
@@ -9050,23 +10161,23 @@
                 </a:solidFill>
                 <a:latin typeface="Montserrat"/>
               </a:rPr>
-              <a:t>Obligación del titular o usuario</a:t>
+              <a:t>Empresa instaladora habilitada o distribuidor</a:t>
             </a:r>
           </a:p>
           <a:p>
             <a:pPr>
               <a:spcAft>
-                <a:spcPts val="1000"/>
+                <a:spcPts val="1100"/>
               </a:spcAft>
             </a:pPr>
             <a:r>
               <a:rPr sz="1600" b="1" i="0">
                 <a:solidFill>
-                  <a:srgbClr val="2E3A80"/>
-                </a:solidFill>
-                <a:latin typeface="Montserrat"/>
-              </a:rPr>
-              <a:t>•  </a:t>
+                  <a:srgbClr val="E8801A"/>
+                </a:solidFill>
+                <a:latin typeface="Montserrat"/>
+              </a:rPr>
+              <a:t>▸  </a:t>
             </a:r>
             <a:r>
               <a:rPr sz="1600" b="0" i="0">
@@ -9075,14 +10186,14 @@
                 </a:solidFill>
                 <a:latin typeface="Montserrat"/>
               </a:rPr>
-              <a:t>Entidades que indique la ITC</a:t>
-            </a:r>
-          </a:p>
-        </p:txBody>
-      </p:sp>
-      <p:sp>
-        <p:nvSpPr>
-          <p:cNvPr id="8" name="imgph" descr="IMGQ:lpg tank house garden inspection"/>
+              <a:t>También la parte común</a:t>
+            </a:r>
+          </a:p>
+        </p:txBody>
+      </p:sp>
+      <p:sp>
+        <p:nvSpPr>
+          <p:cNvPr id="9" name="imgph" descr="IMGQ:gas technician inspecting meter cabinet"/>
           <p:cNvSpPr/>
           <p:nvPr/>
         </p:nvSpPr>
@@ -9128,7 +10239,7 @@
       </p:sp>
       <p:sp>
         <p:nvSpPr>
-          <p:cNvPr id="9" name="TextBox 8"/>
+          <p:cNvPr id="10" name="TextBox 9"/>
           <p:cNvSpPr txBox="1"/>
           <p:nvPr/>
         </p:nvSpPr>
@@ -9168,7 +10279,7 @@
                 </a:solidFill>
                 <a:latin typeface="Montserrat"/>
               </a:rPr>
-              <a:t>lpg tank house garden inspection</a:t>
+              <a:t>gas technician inspecting meter cabinet</a:t>
             </a:r>
           </a:p>
         </p:txBody>
@@ -9265,7 +10376,7 @@
                 </a:solidFill>
                 <a:latin typeface="Montserrat"/>
               </a:rPr>
-              <a:t>007 / 015</a:t>
+              <a:t>007 / 016</a:t>
             </a:r>
           </a:p>
         </p:txBody>
@@ -9313,7 +10424,7 @@
         <p:spPr>
           <a:xfrm>
             <a:off x="822960" y="457200"/>
-            <a:ext cx="8229600" cy="365760"/>
+            <a:ext cx="10058400" cy="365760"/>
           </a:xfrm>
           <a:prstGeom prst="rect">
             <a:avLst/>
@@ -9327,13 +10438,13 @@
           <a:lstStyle/>
           <a:p>
             <a:r>
-              <a:rPr sz="1200" b="1" i="0">
-                <a:solidFill>
-                  <a:srgbClr val="64748B"/>
-                </a:solidFill>
-                <a:latin typeface="Montserrat"/>
-              </a:rPr>
-              <a:t>CONTROL PERIÓDICO · PARA QUÉ SIRVE</a:t>
+              <a:rPr sz="1300" b="1" i="0">
+                <a:solidFill>
+                  <a:srgbClr val="E8801A"/>
+                </a:solidFill>
+                <a:latin typeface="Montserrat"/>
+              </a:rPr>
+              <a:t>ARTÍCULO 7.2.2 · REVISIONES</a:t>
             </a:r>
           </a:p>
         </p:txBody>
@@ -9361,26 +10472,70 @@
           <a:lstStyle/>
           <a:p>
             <a:r>
-              <a:rPr sz="2700" b="1" i="0">
+              <a:rPr sz="2800" b="1" i="0">
                 <a:solidFill>
                   <a:srgbClr val="1E2761"/>
                 </a:solidFill>
                 <a:latin typeface="Montserrat"/>
               </a:rPr>
-              <a:t>Cazar lo que mata despacio</a:t>
-            </a:r>
-          </a:p>
-        </p:txBody>
-      </p:sp>
-      <p:sp>
-        <p:nvSpPr>
-          <p:cNvPr id="7" name="TextBox 6"/>
+              <a:t>Revisión: quién la hace</a:t>
+            </a:r>
+          </a:p>
+        </p:txBody>
+      </p:sp>
+      <p:sp>
+        <p:nvSpPr>
+          <p:cNvPr id="7" name="Rounded Rectangle 6"/>
+          <p:cNvSpPr/>
+          <p:nvPr/>
+        </p:nvSpPr>
+        <p:spPr>
+          <a:xfrm>
+            <a:off x="868680" y="1627632"/>
+            <a:ext cx="2011680" cy="73152"/>
+          </a:xfrm>
+          <a:prstGeom prst="roundRect">
+            <a:avLst/>
+          </a:prstGeom>
+          <a:solidFill>
+            <a:srgbClr val="E8801A"/>
+          </a:solidFill>
+          <a:ln>
+            <a:noFill/>
+          </a:ln>
+          <a:effectLst/>
+        </p:spPr>
+        <p:style>
+          <a:lnRef idx="1">
+            <a:schemeClr val="accent1"/>
+          </a:lnRef>
+          <a:fillRef idx="3">
+            <a:schemeClr val="accent1"/>
+          </a:fillRef>
+          <a:effectRef idx="2">
+            <a:schemeClr val="accent1"/>
+          </a:effectRef>
+          <a:fontRef idx="minor">
+            <a:schemeClr val="lt1"/>
+          </a:fontRef>
+        </p:style>
+        <p:txBody>
+          <a:bodyPr rtlCol="0" anchor="ctr"/>
+          <a:lstStyle/>
+          <a:p>
+            <a:pPr algn="ctr"/>
+          </a:p>
+        </p:txBody>
+      </p:sp>
+      <p:sp>
+        <p:nvSpPr>
+          <p:cNvPr id="8" name="TextBox 7"/>
           <p:cNvSpPr txBox="1"/>
           <p:nvPr/>
         </p:nvSpPr>
         <p:spPr>
           <a:xfrm>
-            <a:off x="822960" y="1920240"/>
+            <a:off x="822960" y="1965960"/>
             <a:ext cx="4983480" cy="4206240"/>
           </a:xfrm>
           <a:prstGeom prst="rect">
@@ -9396,17 +10551,17 @@
           <a:p>
             <a:pPr>
               <a:spcAft>
-                <a:spcPts val="1000"/>
+                <a:spcPts val="1100"/>
               </a:spcAft>
             </a:pPr>
             <a:r>
               <a:rPr sz="1600" b="1" i="0">
                 <a:solidFill>
-                  <a:srgbClr val="2E3A80"/>
-                </a:solidFill>
-                <a:latin typeface="Montserrat"/>
-              </a:rPr>
-              <a:t>•  </a:t>
+                  <a:srgbClr val="E8801A"/>
+                </a:solidFill>
+                <a:latin typeface="Montserrat"/>
+              </a:rPr>
+              <a:t>▸  </a:t>
             </a:r>
             <a:r>
               <a:rPr sz="1600" b="0" i="0">
@@ -9415,23 +10570,23 @@
                 </a:solidFill>
                 <a:latin typeface="Montserrat"/>
               </a:rPr>
-              <a:t>Rejilla de ventilación tapada</a:t>
+              <a:t>Instalaciones no conectadas a red</a:t>
             </a:r>
           </a:p>
           <a:p>
             <a:pPr>
               <a:spcAft>
-                <a:spcPts val="1000"/>
+                <a:spcPts val="1100"/>
               </a:spcAft>
             </a:pPr>
             <a:r>
               <a:rPr sz="1600" b="1" i="0">
                 <a:solidFill>
-                  <a:srgbClr val="2E3A80"/>
-                </a:solidFill>
-                <a:latin typeface="Montserrat"/>
-              </a:rPr>
-              <a:t>•  </a:t>
+                  <a:srgbClr val="E8801A"/>
+                </a:solidFill>
+                <a:latin typeface="Montserrat"/>
+              </a:rPr>
+              <a:t>▸  </a:t>
             </a:r>
             <a:r>
               <a:rPr sz="1600" b="0" i="0">
@@ -9440,23 +10595,23 @@
                 </a:solidFill>
                 <a:latin typeface="Montserrat"/>
               </a:rPr>
-              <a:t>Conducto de evacuación obstruido</a:t>
+              <a:t>Obligación del titular o usuario</a:t>
             </a:r>
           </a:p>
           <a:p>
             <a:pPr>
               <a:spcAft>
-                <a:spcPts val="1000"/>
+                <a:spcPts val="1100"/>
               </a:spcAft>
             </a:pPr>
             <a:r>
               <a:rPr sz="1600" b="1" i="0">
                 <a:solidFill>
-                  <a:srgbClr val="2E3A80"/>
-                </a:solidFill>
-                <a:latin typeface="Montserrat"/>
-              </a:rPr>
-              <a:t>•  </a:t>
+                  <a:srgbClr val="E8801A"/>
+                </a:solidFill>
+                <a:latin typeface="Montserrat"/>
+              </a:rPr>
+              <a:t>▸  </a:t>
             </a:r>
             <a:r>
               <a:rPr sz="1600" b="0" i="0">
@@ -9465,14 +10620,14 @@
                 </a:solidFill>
                 <a:latin typeface="Montserrat"/>
               </a:rPr>
-              <a:t>Fuga incipiente, mala combustión, CO</a:t>
-            </a:r>
-          </a:p>
-        </p:txBody>
-      </p:sp>
-      <p:sp>
-        <p:nvSpPr>
-          <p:cNvPr id="8" name="imgph" descr="IMGQ:blocked ventilation grille wall dust"/>
+              <a:t>Entidades que indique la ITC</a:t>
+            </a:r>
+          </a:p>
+        </p:txBody>
+      </p:sp>
+      <p:sp>
+        <p:nvSpPr>
+          <p:cNvPr id="9" name="imgph" descr="IMGQ:lpg tank house garden inspection"/>
           <p:cNvSpPr/>
           <p:nvPr/>
         </p:nvSpPr>
@@ -9518,7 +10673,7 @@
       </p:sp>
       <p:sp>
         <p:nvSpPr>
-          <p:cNvPr id="9" name="TextBox 8"/>
+          <p:cNvPr id="10" name="TextBox 9"/>
           <p:cNvSpPr txBox="1"/>
           <p:nvPr/>
         </p:nvSpPr>
@@ -9558,7 +10713,7 @@
                 </a:solidFill>
                 <a:latin typeface="Montserrat"/>
               </a:rPr>
-              <a:t>blocked ventilation grille wall dust</a:t>
+              <a:t>lpg tank house garden inspection</a:t>
             </a:r>
           </a:p>
         </p:txBody>
@@ -9655,7 +10810,7 @@
                 </a:solidFill>
                 <a:latin typeface="Montserrat"/>
               </a:rPr>
-              <a:t>008 / 015</a:t>
+              <a:t>008 / 016</a:t>
             </a:r>
           </a:p>
         </p:txBody>
@@ -9703,7 +10858,7 @@
         <p:spPr>
           <a:xfrm>
             <a:off x="822960" y="457200"/>
-            <a:ext cx="8229600" cy="365760"/>
+            <a:ext cx="10058400" cy="365760"/>
           </a:xfrm>
           <a:prstGeom prst="rect">
             <a:avLst/>
@@ -9717,13 +10872,13 @@
           <a:lstStyle/>
           <a:p>
             <a:r>
-              <a:rPr sz="1200" b="1" i="0">
-                <a:solidFill>
-                  <a:srgbClr val="64748B"/>
-                </a:solidFill>
-                <a:latin typeface="Montserrat"/>
-              </a:rPr>
-              <a:t>ARTÍCULO 7.3 · CONTROL ADMINISTRATIVO</a:t>
+              <a:rPr sz="1300" b="1" i="0">
+                <a:solidFill>
+                  <a:srgbClr val="E8801A"/>
+                </a:solidFill>
+                <a:latin typeface="Montserrat"/>
+              </a:rPr>
+              <a:t>CONTROL PERIÓDICO · PARA QUÉ SIRVE</a:t>
             </a:r>
           </a:p>
         </p:txBody>
@@ -9751,26 +10906,70 @@
           <a:lstStyle/>
           <a:p>
             <a:r>
-              <a:rPr sz="2700" b="1" i="0">
+              <a:rPr sz="2800" b="1" i="0">
                 <a:solidFill>
                   <a:srgbClr val="1E2761"/>
                 </a:solidFill>
                 <a:latin typeface="Montserrat"/>
               </a:rPr>
-              <a:t>La policía del gas</a:t>
-            </a:r>
-          </a:p>
-        </p:txBody>
-      </p:sp>
-      <p:sp>
-        <p:nvSpPr>
-          <p:cNvPr id="7" name="TextBox 6"/>
+              <a:t>Cazar lo que mata despacio</a:t>
+            </a:r>
+          </a:p>
+        </p:txBody>
+      </p:sp>
+      <p:sp>
+        <p:nvSpPr>
+          <p:cNvPr id="7" name="Rounded Rectangle 6"/>
+          <p:cNvSpPr/>
+          <p:nvPr/>
+        </p:nvSpPr>
+        <p:spPr>
+          <a:xfrm>
+            <a:off x="868680" y="1627632"/>
+            <a:ext cx="2011680" cy="73152"/>
+          </a:xfrm>
+          <a:prstGeom prst="roundRect">
+            <a:avLst/>
+          </a:prstGeom>
+          <a:solidFill>
+            <a:srgbClr val="E8801A"/>
+          </a:solidFill>
+          <a:ln>
+            <a:noFill/>
+          </a:ln>
+          <a:effectLst/>
+        </p:spPr>
+        <p:style>
+          <a:lnRef idx="1">
+            <a:schemeClr val="accent1"/>
+          </a:lnRef>
+          <a:fillRef idx="3">
+            <a:schemeClr val="accent1"/>
+          </a:fillRef>
+          <a:effectRef idx="2">
+            <a:schemeClr val="accent1"/>
+          </a:effectRef>
+          <a:fontRef idx="minor">
+            <a:schemeClr val="lt1"/>
+          </a:fontRef>
+        </p:style>
+        <p:txBody>
+          <a:bodyPr rtlCol="0" anchor="ctr"/>
+          <a:lstStyle/>
+          <a:p>
+            <a:pPr algn="ctr"/>
+          </a:p>
+        </p:txBody>
+      </p:sp>
+      <p:sp>
+        <p:nvSpPr>
+          <p:cNvPr id="8" name="TextBox 7"/>
           <p:cNvSpPr txBox="1"/>
           <p:nvPr/>
         </p:nvSpPr>
         <p:spPr>
           <a:xfrm>
-            <a:off x="822960" y="1920240"/>
+            <a:off x="822960" y="1965960"/>
             <a:ext cx="4983480" cy="4206240"/>
           </a:xfrm>
           <a:prstGeom prst="rect">
@@ -9786,17 +10985,17 @@
           <a:p>
             <a:pPr>
               <a:spcAft>
-                <a:spcPts val="1000"/>
+                <a:spcPts val="1100"/>
               </a:spcAft>
             </a:pPr>
             <a:r>
               <a:rPr sz="1600" b="1" i="0">
                 <a:solidFill>
-                  <a:srgbClr val="2E3A80"/>
-                </a:solidFill>
-                <a:latin typeface="Montserrat"/>
-              </a:rPr>
-              <a:t>•  </a:t>
+                  <a:srgbClr val="E8801A"/>
+                </a:solidFill>
+                <a:latin typeface="Montserrat"/>
+              </a:rPr>
+              <a:t>▸  </a:t>
             </a:r>
             <a:r>
               <a:rPr sz="1600" b="0" i="0">
@@ -9805,23 +11004,23 @@
                 </a:solidFill>
                 <a:latin typeface="Montserrat"/>
               </a:rPr>
-              <a:t>La Comunidad Autónoma, cuando quiera</a:t>
+              <a:t>Rejilla de ventilación tapada</a:t>
             </a:r>
           </a:p>
           <a:p>
             <a:pPr>
               <a:spcAft>
-                <a:spcPts val="1000"/>
+                <a:spcPts val="1100"/>
               </a:spcAft>
             </a:pPr>
             <a:r>
               <a:rPr sz="1600" b="1" i="0">
                 <a:solidFill>
-                  <a:srgbClr val="2E3A80"/>
-                </a:solidFill>
-                <a:latin typeface="Montserrat"/>
-              </a:rPr>
-              <a:t>•  </a:t>
+                  <a:srgbClr val="E8801A"/>
+                </a:solidFill>
+                <a:latin typeface="Montserrat"/>
+              </a:rPr>
+              <a:t>▸  </a:t>
             </a:r>
             <a:r>
               <a:rPr sz="1600" b="0" i="0">
@@ -9830,23 +11029,23 @@
                 </a:solidFill>
                 <a:latin typeface="Montserrat"/>
               </a:rPr>
-              <a:t>De oficio o a instancia de parte</a:t>
+              <a:t>Conducto de evacuación obstruido</a:t>
             </a:r>
           </a:p>
           <a:p>
             <a:pPr>
               <a:spcAft>
-                <a:spcPts val="1000"/>
+                <a:spcPts val="1100"/>
               </a:spcAft>
             </a:pPr>
             <a:r>
               <a:rPr sz="1600" b="1" i="0">
                 <a:solidFill>
-                  <a:srgbClr val="2E3A80"/>
-                </a:solidFill>
-                <a:latin typeface="Montserrat"/>
-              </a:rPr>
-              <a:t>•  </a:t>
+                  <a:srgbClr val="E8801A"/>
+                </a:solidFill>
+                <a:latin typeface="Montserrat"/>
+              </a:rPr>
+              <a:t>▸  </a:t>
             </a:r>
             <a:r>
               <a:rPr sz="1600" b="0" i="0">
@@ -9855,14 +11054,14 @@
                 </a:solidFill>
                 <a:latin typeface="Montserrat"/>
               </a:rPr>
-              <a:t>Sobre todo si hay riesgo significativo</a:t>
-            </a:r>
-          </a:p>
-        </p:txBody>
-      </p:sp>
-      <p:sp>
-        <p:nvSpPr>
-          <p:cNvPr id="8" name="imgph" descr="IMGQ:government inspector safety vest clipboard"/>
+              <a:t>Fuga incipiente, mala combustión, CO</a:t>
+            </a:r>
+          </a:p>
+        </p:txBody>
+      </p:sp>
+      <p:sp>
+        <p:nvSpPr>
+          <p:cNvPr id="9" name="imgph" descr="IMGQ:blocked ventilation grille wall dust"/>
           <p:cNvSpPr/>
           <p:nvPr/>
         </p:nvSpPr>
@@ -9908,7 +11107,7 @@
       </p:sp>
       <p:sp>
         <p:nvSpPr>
-          <p:cNvPr id="9" name="TextBox 8"/>
+          <p:cNvPr id="10" name="TextBox 9"/>
           <p:cNvSpPr txBox="1"/>
           <p:nvPr/>
         </p:nvSpPr>
@@ -9948,7 +11147,7 @@
                 </a:solidFill>
                 <a:latin typeface="Montserrat"/>
               </a:rPr>
-              <a:t>government inspector safety vest clipboard</a:t>
+              <a:t>blocked ventilation grille wall dust</a:t>
             </a:r>
           </a:p>
         </p:txBody>
@@ -10045,7 +11244,7 @@
                 </a:solidFill>
                 <a:latin typeface="Montserrat"/>
               </a:rPr>
-              <a:t>009 / 015</a:t>
+              <a:t>009 / 016</a:t>
             </a:r>
           </a:p>
         </p:txBody>
@@ -10093,7 +11292,7 @@
         <p:spPr>
           <a:xfrm>
             <a:off x="822960" y="457200"/>
-            <a:ext cx="8229600" cy="365760"/>
+            <a:ext cx="10058400" cy="365760"/>
           </a:xfrm>
           <a:prstGeom prst="rect">
             <a:avLst/>
@@ -10107,13 +11306,13 @@
           <a:lstStyle/>
           <a:p>
             <a:r>
-              <a:rPr sz="1200" b="1" i="0">
-                <a:solidFill>
-                  <a:srgbClr val="64748B"/>
-                </a:solidFill>
-                <a:latin typeface="Montserrat"/>
-              </a:rPr>
-              <a:t>ARTÍCULO 8 · HABILITACIÓN</a:t>
+              <a:rPr sz="1300" b="1" i="0">
+                <a:solidFill>
+                  <a:srgbClr val="E8801A"/>
+                </a:solidFill>
+                <a:latin typeface="Montserrat"/>
+              </a:rPr>
+              <a:t>ARTÍCULO 7.3 · CONTROL ADMINISTRATIVO</a:t>
             </a:r>
           </a:p>
         </p:txBody>
@@ -10141,26 +11340,70 @@
           <a:lstStyle/>
           <a:p>
             <a:r>
-              <a:rPr sz="2700" b="1" i="0">
+              <a:rPr sz="2800" b="1" i="0">
                 <a:solidFill>
                   <a:srgbClr val="1E2761"/>
                 </a:solidFill>
                 <a:latin typeface="Montserrat"/>
               </a:rPr>
-              <a:t>Tres papeles que no son lo mismo</a:t>
-            </a:r>
-          </a:p>
-        </p:txBody>
-      </p:sp>
-      <p:sp>
-        <p:nvSpPr>
-          <p:cNvPr id="7" name="TextBox 6"/>
+              <a:t>La policía del gas</a:t>
+            </a:r>
+          </a:p>
+        </p:txBody>
+      </p:sp>
+      <p:sp>
+        <p:nvSpPr>
+          <p:cNvPr id="7" name="Rounded Rectangle 6"/>
+          <p:cNvSpPr/>
+          <p:nvPr/>
+        </p:nvSpPr>
+        <p:spPr>
+          <a:xfrm>
+            <a:off x="868680" y="1627632"/>
+            <a:ext cx="2011680" cy="73152"/>
+          </a:xfrm>
+          <a:prstGeom prst="roundRect">
+            <a:avLst/>
+          </a:prstGeom>
+          <a:solidFill>
+            <a:srgbClr val="E8801A"/>
+          </a:solidFill>
+          <a:ln>
+            <a:noFill/>
+          </a:ln>
+          <a:effectLst/>
+        </p:spPr>
+        <p:style>
+          <a:lnRef idx="1">
+            <a:schemeClr val="accent1"/>
+          </a:lnRef>
+          <a:fillRef idx="3">
+            <a:schemeClr val="accent1"/>
+          </a:fillRef>
+          <a:effectRef idx="2">
+            <a:schemeClr val="accent1"/>
+          </a:effectRef>
+          <a:fontRef idx="minor">
+            <a:schemeClr val="lt1"/>
+          </a:fontRef>
+        </p:style>
+        <p:txBody>
+          <a:bodyPr rtlCol="0" anchor="ctr"/>
+          <a:lstStyle/>
+          <a:p>
+            <a:pPr algn="ctr"/>
+          </a:p>
+        </p:txBody>
+      </p:sp>
+      <p:sp>
+        <p:nvSpPr>
+          <p:cNvPr id="8" name="TextBox 7"/>
           <p:cNvSpPr txBox="1"/>
           <p:nvPr/>
         </p:nvSpPr>
         <p:spPr>
           <a:xfrm>
-            <a:off x="822960" y="1920240"/>
+            <a:off x="822960" y="1965960"/>
             <a:ext cx="4983480" cy="4206240"/>
           </a:xfrm>
           <a:prstGeom prst="rect">
@@ -10176,17 +11419,17 @@
           <a:p>
             <a:pPr>
               <a:spcAft>
-                <a:spcPts val="1000"/>
+                <a:spcPts val="1100"/>
               </a:spcAft>
             </a:pPr>
             <a:r>
               <a:rPr sz="1600" b="1" i="0">
                 <a:solidFill>
-                  <a:srgbClr val="2E3A80"/>
-                </a:solidFill>
-                <a:latin typeface="Montserrat"/>
-              </a:rPr>
-              <a:t>•  </a:t>
+                  <a:srgbClr val="E8801A"/>
+                </a:solidFill>
+                <a:latin typeface="Montserrat"/>
+              </a:rPr>
+              <a:t>▸  </a:t>
             </a:r>
             <a:r>
               <a:rPr sz="1600" b="0" i="0">
@@ -10195,23 +11438,23 @@
                 </a:solidFill>
                 <a:latin typeface="Montserrat"/>
               </a:rPr>
-              <a:t>Empresa instaladora: la razón social</a:t>
+              <a:t>La Comunidad Autónoma, cuando quiera</a:t>
             </a:r>
           </a:p>
           <a:p>
             <a:pPr>
               <a:spcAft>
-                <a:spcPts val="1000"/>
+                <a:spcPts val="1100"/>
               </a:spcAft>
             </a:pPr>
             <a:r>
               <a:rPr sz="1600" b="1" i="0">
                 <a:solidFill>
-                  <a:srgbClr val="2E3A80"/>
-                </a:solidFill>
-                <a:latin typeface="Montserrat"/>
-              </a:rPr>
-              <a:t>•  </a:t>
+                  <a:srgbClr val="E8801A"/>
+                </a:solidFill>
+                <a:latin typeface="Montserrat"/>
+              </a:rPr>
+              <a:t>▸  </a:t>
             </a:r>
             <a:r>
               <a:rPr sz="1600" b="0" i="0">
@@ -10220,23 +11463,23 @@
                 </a:solidFill>
                 <a:latin typeface="Montserrat"/>
               </a:rPr>
-              <a:t>Instalador: la persona, categorías A/B/C</a:t>
+              <a:t>De oficio o a instancia de parte</a:t>
             </a:r>
           </a:p>
           <a:p>
             <a:pPr>
               <a:spcAft>
-                <a:spcPts val="1000"/>
+                <a:spcPts val="1100"/>
               </a:spcAft>
             </a:pPr>
             <a:r>
               <a:rPr sz="1600" b="1" i="0">
                 <a:solidFill>
-                  <a:srgbClr val="2E3A80"/>
-                </a:solidFill>
-                <a:latin typeface="Montserrat"/>
-              </a:rPr>
-              <a:t>•  </a:t>
+                  <a:srgbClr val="E8801A"/>
+                </a:solidFill>
+                <a:latin typeface="Montserrat"/>
+              </a:rPr>
+              <a:t>▸  </a:t>
             </a:r>
             <a:r>
               <a:rPr sz="1600" b="0" i="0">
@@ -10245,39 +11488,14 @@
                 </a:solidFill>
                 <a:latin typeface="Montserrat"/>
               </a:rPr>
-              <a:t>Agente de puesta en marcha: los aparatos</a:t>
-            </a:r>
-          </a:p>
-          <a:p>
-            <a:pPr>
-              <a:spcAft>
-                <a:spcPts val="1000"/>
-              </a:spcAft>
-            </a:pPr>
-            <a:r>
-              <a:rPr sz="1600" b="1" i="0">
-                <a:solidFill>
-                  <a:srgbClr val="2E3A80"/>
-                </a:solidFill>
-                <a:latin typeface="Montserrat"/>
-              </a:rPr>
-              <a:t>•  </a:t>
-            </a:r>
-            <a:r>
-              <a:rPr sz="1600" b="0" i="0">
-                <a:solidFill>
-                  <a:srgbClr val="1B2330"/>
-                </a:solidFill>
-                <a:latin typeface="Montserrat"/>
-              </a:rPr>
-              <a:t>Tú vas a por la categoría B</a:t>
-            </a:r>
-          </a:p>
-        </p:txBody>
-      </p:sp>
-      <p:sp>
-        <p:nvSpPr>
-          <p:cNvPr id="8" name="imgph" descr="IMGQ:gas installer license card uniform"/>
+              <a:t>Sobre todo si hay riesgo significativo</a:t>
+            </a:r>
+          </a:p>
+        </p:txBody>
+      </p:sp>
+      <p:sp>
+        <p:nvSpPr>
+          <p:cNvPr id="9" name="imgph" descr="IMGQ:government inspector safety vest clipboard"/>
           <p:cNvSpPr/>
           <p:nvPr/>
         </p:nvSpPr>
@@ -10323,7 +11541,7 @@
       </p:sp>
       <p:sp>
         <p:nvSpPr>
-          <p:cNvPr id="9" name="TextBox 8"/>
+          <p:cNvPr id="10" name="TextBox 9"/>
           <p:cNvSpPr txBox="1"/>
           <p:nvPr/>
         </p:nvSpPr>
@@ -10363,7 +11581,7 @@
                 </a:solidFill>
                 <a:latin typeface="Montserrat"/>
               </a:rPr>
-              <a:t>gas installer license card uniform</a:t>
+              <a:t>government inspector safety vest clipboard</a:t>
             </a:r>
           </a:p>
         </p:txBody>

--- a/Curso Gas B/00 - El Reglamento de Gas - estructura, ambito y generalidades/00 - El Reglamento de Gas - Vídeo 3.pptx
+++ b/Curso Gas B/00 - El Reglamento de Gas - estructura, ambito y generalidades/00 - El Reglamento de Gas - Vídeo 3.pptx
@@ -21,6 +21,12 @@
     <p:sldId id="269" r:id="rId21"/>
     <p:sldId id="270" r:id="rId22"/>
     <p:sldId id="271" r:id="rId23"/>
+    <p:sldId id="272" r:id="rId24"/>
+    <p:sldId id="273" r:id="rId25"/>
+    <p:sldId id="274" r:id="rId26"/>
+    <p:sldId id="275" r:id="rId27"/>
+    <p:sldId id="276" r:id="rId28"/>
+    <p:sldId id="277" r:id="rId29"/>
   </p:sldIdLst>
   <p:sldSz cx="12191695" cy="6858000" type="screen4x3"/>
   <p:notesSz cx="6858000" cy="9144000"/>
@@ -592,12 +598,12 @@
           <a:lstStyle/>
           <a:p>
             <a:r>
-              <a:t>N1: Empresa instaladora, instalador, agente de puesta en marcha. ¿Es todo lo mismo?</a:t>
-            </a:r>
-          </a:p>
-          <a:p>
-            <a:r>
-              <a:t>N2: No, son tres figuras distintas y el examen las cruza a propósito, así que vamos a separarlas bien. La empresa instaladora es la empresa, la razón social habilitada según la ITC-ICG cero nueve, con su seguro y sus medios. El instalador es la persona con carné, tú, y tiene categorías A, B o C según esa misma ITC. Y el agente de puesta en marcha es quien arranca los aparatos, según la ITC-ICG cero ocho. Tú te estás sacando ahora mismo la categoría B: con ella podrás trabajar en la mayoría de instalaciones receptoras domésticas y comerciales típicas, que son la inmensa mayoría de las que verás. Un consejo para el examen: ve asociando cada figura con su ITC, el instalador a la cero nueve y los aparatos a la cero ocho, y no las mezclarás.</a:t>
+              <a:t>N1: Cuando toca inspección, ¿quién está habilitado para hacerla?</a:t>
+            </a:r>
+          </a:p>
+          <a:p>
+            <a:r>
+              <a:t>N2: La inspección de las receptoras alimentadas desde redes por canalización la hace una empresa instaladora de gas habilitada o el distribuidor, con medios propios o externos. Y fíjate en un detalle práctico: esto incluye también la inspección de la parte común de las receptoras, el montante que comparten los vecinos, no solo lo de cada piso. Lo importante que aquí se repite es que siempre lo hace alguien ajeno al usuario, habilitado para ello; no se autoinspecciona uno solo su instalación de red. Esto no es teoría lejana: cuando tengas tu categoría B y trabajes con una empresa habilitada, hacer estas inspecciones va a ser pan de tu oficio. Y recuerda un derecho del cliente que también cae: el titular elige libremente qué empresa se la realiza.</a:t>
             </a:r>
           </a:p>
         </p:txBody>
@@ -667,12 +673,12 @@
           <a:lstStyle/>
           <a:p>
             <a:r>
-              <a:t>N1: ¿El Reglamento es lo máximo que puedo hacer, o lo mínimo?</a:t>
-            </a:r>
-          </a:p>
-          <a:p>
-            <a:r>
-              <a:t>N2: Es el mínimo, y este matiz cambia la forma de entenderlo todo. Sus prescripciones son mínimos obligatorios: marcan el suelo, no el techo. Puedes hacerlo más seguro, nunca menos. Y si por lo que sea no puedes cumplir una prescripción a la letra, existen dos salidas, las dos siempre antes del procedimiento del artículo quinto y firmadas por técnico competente. La primera es la técnica equivalente, del artículo noveno: lo hago de otra manera pero demuestro que es igual de seguro o más, y me lo aprueban. La segunda, como último recurso, es la excepción, del artículo décimo: es materialmente imposible cumplir y tampoco hay equivalente, así que pido permiso para saltármelo a cambio de medidas compensatorias. No confundas una con otra: la equivalente es 'otro camino igual de seguro', la excepción es 'el último cartucho cuando no hay otra'. Y ambas se piden antes, nunca después de montar.</a:t>
+              <a:t>N1: ¿Y cuándo toca revisión, quién la pide?</a:t>
+            </a:r>
+          </a:p>
+          <a:p>
+            <a:r>
+              <a:t>N2: La revisión es para todas las instalaciones que no están conectadas a redes de distribución; el ejemplo típico es un depósito de GLP propio en un chalé. Aquí cambia quién mueve ficha: es obligación del titular, y en su defecto del usuario, solicitar los servicios de una de las entidades que indica la ITC. Compara con la inspección para entender la lógica: en la inspección mandaba el hecho de estar enganchado a la red, donde un fallo puede afectar a muchos vecinos, y venía alguien habilitado ajeno; en la revisión la instalación es más privada, tu depósito en tu parcela, y es el propio titular quien tiene que pedir que se la revisen. Misma finalidad en las dos, la seguridad; lo que cambia es el nombre y el agente, y cambia según el riesgo.</a:t>
             </a:r>
           </a:p>
         </p:txBody>
@@ -742,12 +748,12 @@
           <a:lstStyle/>
           <a:p>
             <a:r>
-              <a:t>N1: Dos detalles finos pero preguntados: material extranjero y normas UNE.</a:t>
-            </a:r>
-          </a:p>
-          <a:p>
-            <a:r>
-              <a:t>N2: Los vemos juntos porque los dos caen. Primero, el reconocimiento mutuo del artículo once: un material aprobado y comercializado legalmente en otro Estado de la Unión Europea, o de la zona asimilada, vale también aquí, siempre que garantice un nivel de seguridad equivalente al que exigimos nosotros. Es la lógica del mercado único europeo: no hace falta volver a certificarlo país por país. Y segundo, el artículo doce, un detalle muy fino: las ITC citan las normas UNE sin indicar el año de edición. ¿Por qué? Para no quedarse anticuadas cada vez que se revisa una norma. El listado oficial, ese sí con los años de cada norma, vive en la ITC-ICG once. Por eso en todo el curso verás, por ejemplo, UNE sesenta mil seiscientos setenta escrita sin fecha: no es un olvido ni una errata, es exactamente como manda el Reglamento.</a:t>
+              <a:t>N1: Más allá del papeleo, ¿para qué sirve de verdad el control periódico?</a:t>
+            </a:r>
+          </a:p>
+          <a:p>
+            <a:r>
+              <a:t>N2: Sirve para cazar lo que mata despacio, esos problemas que no se ven de un día para otro y por eso son tan traicioneros. Piensa en casos reales: una rejilla de ventilación tapada con un mueble o pintada por encima, que ahoga la combustión. Un conducto de evacuación de humos obstruido, que devuelve los gases a la casa. Una fuga incipiente, todavía pequeña, que aún no huele fuerte. O un aparato que empieza a dar mala combustión y monóxido de carbono. De cada control sale su certificado, con o sin anomalías, y si las hay, ese papel marca justo lo que hay que corregir. La conclusión es seria: saltarse el control o firmarlo sin mirar de verdad es dejar que el problema crezca sin que nadie lo vea, hasta el susto o la desgracia. Aquí es donde tu trabajo, bien hecho, salva vidas.</a:t>
             </a:r>
           </a:p>
         </p:txBody>
@@ -817,12 +823,12 @@
           <a:lstStyle/>
           <a:p>
             <a:r>
-              <a:t>N1: Si se incumple, ¿dónde están las multas, en el propio Reglamento?</a:t>
-            </a:r>
-          </a:p>
-          <a:p>
-            <a:r>
-              <a:t>N2: No, y esta es una pregunta con trampa muy típica. El Reglamento no inventa las multas: te remite a las dos leyes de las que cuelga, ¿te acuerdas de ellas del primer vídeo? La Ley de industria y la Ley de hidrocarburos son las que fijan qué es una infracción leve, grave o muy grave, y cuál es la sanción de cada una. La idea para el examen es directa: las sanciones no están en el Reglamento, están en las leyes. Así que si ves una opción que dice que el propio Reglamento fija las multas, desconfía y descártala; lo que hace el Reglamento es enviarte al régimen sancionador de esas dos leyes. Todo cuadra con la idea del tronco: el Reglamento desarrolla las leyes, no las sustituye.</a:t>
+              <a:t>N1: Por encima de inspecciones y revisiones, ¿hay alguien más que vigile?</a:t>
+            </a:r>
+          </a:p>
+          <a:p>
+            <a:r>
+              <a:t>N2: Sí, y conviene saberlo. Por encima de todo está la Comunidad Autónoma, que puede comprobar en cualquier momento, por sí misma o mediante un organismo de control, que la instalación cumple; sobre todo si hay un riesgo significativo para personas, animales, bienes o medio ambiente. Es, por decirlo llano, la policía del gas: puede aparecer cuando quiera. Te traduzco dos expresiones legales que salen aquí: 'de oficio' significa que actúa por su propia iniciativa, sin que nadie se lo pida; y 'a instancia de parte' significa que actúa porque alguien lo ha solicitado o se ha quejado. No es lo del día a día, pero es importante que sepas que ese control administrativo existe y está por encima de los controles periódicos normales.</a:t>
             </a:r>
           </a:p>
         </p:txBody>
@@ -892,12 +898,12 @@
           <a:lstStyle/>
           <a:p>
             <a:r>
-              <a:t>N1: Ante un accidente grave, ¿qué protocolo y qué plazos?</a:t>
-            </a:r>
-          </a:p>
-          <a:p>
-            <a:r>
-              <a:t>N2: Dos plazos que caen siempre juntos, así que apréndelos en pareja. Cuando un accidente causa daños importantes o víctimas, el suministrador lo notifica a la Comunidad Autónoma lo antes posible y en no más de veinticuatro horas; y después remite un informe completo en un plazo máximo de siete días. El truco para no cambiarlos: primero llamo, veinticuatro horas, luego escribo, siete días. Y memoriza las cuatro clases de accidente como lista cerrada: deflagración, explosión, intoxicación e incendio. Un matiz que te da puntos: deflagración y explosión no son lo mismo. En la deflagración el frente de llama avanza más despacio que el sonido, es un fogonazo rápido; en la explosión avanza más rápido que el sonido y es mucho más destructiva. En gas doméstico lo habitual es la deflagración, pero el Reglamento las lista por separado.</a:t>
+              <a:t>N1: Empresa instaladora, instalador, agente de puesta en marcha. ¿Es todo lo mismo?</a:t>
+            </a:r>
+          </a:p>
+          <a:p>
+            <a:r>
+              <a:t>N2: No, son tres figuras distintas y el examen las cruza a propósito, así que vamos a separarlas bien. La empresa instaladora es la empresa, la razón social habilitada según la ITC-ICG cero nueve, con su seguro y sus medios. El instalador es la persona con carné, tú, y tiene categorías A, B o C según esa misma ITC. Y el agente de puesta en marcha es quien arranca los aparatos, según la ITC-ICG cero ocho. Tú te estás sacando ahora mismo la categoría B: con ella podrás trabajar en la mayoría de instalaciones receptoras domésticas y comerciales típicas, que son la inmensa mayoría de las que verás. Un consejo para el examen: ve asociando cada figura con su ITC, el instalador a la cero nueve y los aparatos a la cero ocho, y no las mezclarás.</a:t>
             </a:r>
           </a:p>
         </p:txBody>
@@ -967,12 +973,12 @@
           <a:lstStyle/>
           <a:p>
             <a:r>
-              <a:t>N1: Repaso rápido de todo el bloque. ¿Tengo los cuatro pilares?</a:t>
-            </a:r>
-          </a:p>
-          <a:p>
-            <a:r>
-              <a:t>N2: Los fijamos en treinta segundos y en voz alta. Uno, la pregunta estrella: conectada a la red de distribución es inspección; por tu cuenta, sin red, revisión; y si obliga organismo de control, inspección siempre. Dos, mantener la instalación es obligación del titular, no tuya; tú ejecutas y adviertes. Tres, el Reglamento marca mínimos obligatorios, el suelo y nunca el techo, y para no cumplir a la letra existen la técnica equivalente y la excepción, siempre antes del artículo quinto y firmadas por técnico competente. Y cuatro, ante accidente grave, veinticuatro horas para llamar y siete días para el informe, con las cuatro clases cerradas. Recítalos de carrerilla y pasamos al gran cierre del tema.</a:t>
+              <a:t>N1: ¿El Reglamento es lo máximo que puedo hacer, o lo mínimo?</a:t>
+            </a:r>
+          </a:p>
+          <a:p>
+            <a:r>
+              <a:t>N2: Es el mínimo, y este matiz cambia la forma de entenderlo todo. Sus prescripciones son mínimos obligatorios: marcan el suelo, no el techo. Puedes hacerlo más seguro, nunca menos. Y si por lo que sea no puedes cumplir una prescripción a la letra, existen dos salidas, las dos siempre antes del procedimiento del artículo quinto y firmadas por técnico competente. La primera es la técnica equivalente, del artículo noveno: lo hago de otra manera pero demuestro que es igual de seguro o más, y me lo aprueban. La segunda, como último recurso, es la excepción, del artículo décimo: es materialmente imposible cumplir y tampoco hay equivalente, así que pido permiso para saltármelo a cambio de medidas compensatorias. No confundas una con otra: la equivalente es 'otro camino igual de seguro', la excepción es 'el último cartucho cuando no hay otra'. Y ambas se piden antes, nunca después de montar.</a:t>
             </a:r>
           </a:p>
         </p:txBody>
@@ -1042,22 +1048,237 @@
           <a:lstStyle/>
           <a:p>
             <a:r>
-              <a:t>N1: Este es el gran final del tema. ¿Qué he conquistado en estos tres vídeos?</a:t>
-            </a:r>
-          </a:p>
-          <a:p>
-            <a:r>
-              <a:t>N2: Vamos a reconstruirlo como logros, no como resumen, porque hoy sabes hacer cosas que al empezar no sabías. Distingues inspección de revisión con una sola pregunta, la de si está conectada a la red, y esa es la pregunta más repetida de todo el bloque. Sabes que la obligación de mantener es del titular, y que tú ejecutas y adviertes por escrito. Manejas las reglas finales sin agobiarte: el Reglamento como mínimos obligatorios, la técnica equivalente y la excepción como salidas firmadas por técnico competente y siempre antes de montar, las UNE citadas sin año con su listado en la ITC-ICG once, y las sanciones que viven en las dos leyes, no en el Reglamento. Y llevas de memoria el protocolo de accidente: veinticuatro horas para avisar, siete días para el informe, cuatro clases cerradas.</a:t>
-            </a:r>
-          </a:p>
-          <a:p>
-            <a:r>
-              <a:t>N1: ¿Y por qué esto me hace mejor gasista, y no solo mejor examinando?</a:t>
-            </a:r>
-          </a:p>
-          <a:p>
-            <a:r>
-              <a:t>N2: Por dos motivos. En el examen te lo preguntan tal cual, inspección o revisión, quién comunica, qué plazos de accidente, y ahora lo resuelves sin pestañear. Pero en la obra vale todavía más, y esto es lo bonito del oficio: cada vez que haces un control periódico de verdad, cazas la rejilla tapada o el conducto obstruido que mata despacio, y evitas una intoxicación por monóxido antes de que ocurra. Ahí tu firma protege a una familia entera. Con esto cierras el Tema cero completo: ya no solo tocas tubos, entiendes de dónde sale cada norma, de qué respondes tú y por qué existe cada regla. Has completado el marco normativo de arriba abajo; hoy, de verdad, ya piensas como un gasista. A partir de aquí saltamos a las instalaciones reales con todo este mapa en la cabeza. Enhorabuena por el tema, y a por el siguiente.</a:t>
+              <a:t>N1: Dos detalles finos pero preguntados: material extranjero y normas UNE.</a:t>
+            </a:r>
+          </a:p>
+          <a:p>
+            <a:r>
+              <a:t>N2: Los vemos juntos porque los dos caen. Primero, el reconocimiento mutuo del artículo once: un material aprobado y comercializado legalmente en otro Estado de la Unión Europea, o de la zona asimilada, vale también aquí, siempre que garantice un nivel de seguridad equivalente al que exigimos nosotros. Es la lógica del mercado único europeo: no hace falta volver a certificarlo país por país. Y segundo, el artículo doce, un detalle muy fino: las ITC citan las normas UNE sin indicar el año de edición. ¿Por qué? Para no quedarse anticuadas cada vez que se revisa una norma. El listado oficial, ese sí con los años de cada norma, vive en la ITC-ICG once. Por eso en todo el curso verás, por ejemplo, UNE sesenta mil seiscientos setenta escrita sin fecha: no es un olvido ni una errata, es exactamente como manda el Reglamento.</a:t>
+            </a:r>
+          </a:p>
+        </p:txBody>
+      </p:sp>
+      <p:sp>
+        <p:nvSpPr>
+          <p:cNvPr id="4" name="Slide Number Placeholder 3"/>
+          <p:cNvSpPr>
+            <a:spLocks noGrp="1"/>
+          </p:cNvSpPr>
+          <p:nvPr>
+            <p:ph type="sldNum" idx="5" sz="quarter"/>
+          </p:nvPr>
+        </p:nvSpPr>
+        <p:spPr/>
+      </p:sp>
+    </p:spTree>
+  </p:cSld>
+  <p:clrMapOvr>
+    <a:masterClrMapping/>
+  </p:clrMapOvr>
+</p:notes>
+</file>
+
+<file path=ppt/notesSlides/notesSlide17.xml><?xml version="1.0" encoding="utf-8"?>
+<p:notes xmlns:a="http://schemas.openxmlformats.org/drawingml/2006/main" xmlns:p="http://schemas.openxmlformats.org/presentationml/2006/main" xmlns:r="http://schemas.openxmlformats.org/officeDocument/2006/relationships">
+  <p:cSld>
+    <p:spTree>
+      <p:nvGrpSpPr>
+        <p:cNvPr id="1" name=""/>
+        <p:cNvGrpSpPr/>
+        <p:nvPr/>
+      </p:nvGrpSpPr>
+      <p:grpSpPr>
+        <a:xfrm>
+          <a:off x="0" y="0"/>
+          <a:ext cx="0" cy="0"/>
+          <a:chOff x="0" y="0"/>
+          <a:chExt cx="0" cy="0"/>
+        </a:xfrm>
+      </p:grpSpPr>
+      <p:sp>
+        <p:nvSpPr>
+          <p:cNvPr id="2" name="Slide Image Placeholder 1"/>
+          <p:cNvSpPr>
+            <a:spLocks noGrp="1"/>
+          </p:cNvSpPr>
+          <p:nvPr>
+            <p:ph type="sldImg" idx="2"/>
+          </p:nvPr>
+        </p:nvSpPr>
+        <p:spPr/>
+      </p:sp>
+      <p:sp>
+        <p:nvSpPr>
+          <p:cNvPr id="3" name="Notes Placeholder 2"/>
+          <p:cNvSpPr>
+            <a:spLocks noGrp="1"/>
+          </p:cNvSpPr>
+          <p:nvPr>
+            <p:ph type="body" idx="3" sz="quarter"/>
+          </p:nvPr>
+        </p:nvSpPr>
+        <p:spPr/>
+        <p:txBody>
+          <a:bodyPr/>
+          <a:lstStyle/>
+          <a:p>
+            <a:r>
+              <a:t>N1: Si se incumple, ¿dónde están las multas, en el propio Reglamento?</a:t>
+            </a:r>
+          </a:p>
+          <a:p>
+            <a:r>
+              <a:t>N2: No, y esta es una pregunta con trampa muy típica. El Reglamento no inventa las multas: te remite a las dos leyes de las que cuelga, ¿te acuerdas de ellas del primer vídeo? La Ley de industria y la Ley de hidrocarburos son las que fijan qué es una infracción leve, grave o muy grave, y cuál es la sanción de cada una. La idea para el examen es directa: las sanciones no están en el Reglamento, están en las leyes. Así que si ves una opción que dice que el propio Reglamento fija las multas, desconfía y descártala; lo que hace el Reglamento es enviarte al régimen sancionador de esas dos leyes. Todo cuadra con la idea del tronco: el Reglamento desarrolla las leyes, no las sustituye.</a:t>
+            </a:r>
+          </a:p>
+        </p:txBody>
+      </p:sp>
+      <p:sp>
+        <p:nvSpPr>
+          <p:cNvPr id="4" name="Slide Number Placeholder 3"/>
+          <p:cNvSpPr>
+            <a:spLocks noGrp="1"/>
+          </p:cNvSpPr>
+          <p:nvPr>
+            <p:ph type="sldNum" idx="5" sz="quarter"/>
+          </p:nvPr>
+        </p:nvSpPr>
+        <p:spPr/>
+      </p:sp>
+    </p:spTree>
+  </p:cSld>
+  <p:clrMapOvr>
+    <a:masterClrMapping/>
+  </p:clrMapOvr>
+</p:notes>
+</file>
+
+<file path=ppt/notesSlides/notesSlide18.xml><?xml version="1.0" encoding="utf-8"?>
+<p:notes xmlns:a="http://schemas.openxmlformats.org/drawingml/2006/main" xmlns:p="http://schemas.openxmlformats.org/presentationml/2006/main" xmlns:r="http://schemas.openxmlformats.org/officeDocument/2006/relationships">
+  <p:cSld>
+    <p:spTree>
+      <p:nvGrpSpPr>
+        <p:cNvPr id="1" name=""/>
+        <p:cNvGrpSpPr/>
+        <p:nvPr/>
+      </p:nvGrpSpPr>
+      <p:grpSpPr>
+        <a:xfrm>
+          <a:off x="0" y="0"/>
+          <a:ext cx="0" cy="0"/>
+          <a:chOff x="0" y="0"/>
+          <a:chExt cx="0" cy="0"/>
+        </a:xfrm>
+      </p:grpSpPr>
+      <p:sp>
+        <p:nvSpPr>
+          <p:cNvPr id="2" name="Slide Image Placeholder 1"/>
+          <p:cNvSpPr>
+            <a:spLocks noGrp="1"/>
+          </p:cNvSpPr>
+          <p:nvPr>
+            <p:ph type="sldImg" idx="2"/>
+          </p:nvPr>
+        </p:nvSpPr>
+        <p:spPr/>
+      </p:sp>
+      <p:sp>
+        <p:nvSpPr>
+          <p:cNvPr id="3" name="Notes Placeholder 2"/>
+          <p:cNvSpPr>
+            <a:spLocks noGrp="1"/>
+          </p:cNvSpPr>
+          <p:nvPr>
+            <p:ph type="body" idx="3" sz="quarter"/>
+          </p:nvPr>
+        </p:nvSpPr>
+        <p:spPr/>
+        <p:txBody>
+          <a:bodyPr/>
+          <a:lstStyle/>
+          <a:p>
+            <a:r>
+              <a:t>N1: Ante un accidente grave, ¿qué protocolo y qué plazos?</a:t>
+            </a:r>
+          </a:p>
+          <a:p>
+            <a:r>
+              <a:t>N2: Dos plazos que caen siempre juntos, así que apréndelos en pareja. Cuando un accidente causa daños importantes o víctimas, el suministrador lo notifica a la Comunidad Autónoma lo antes posible y en no más de veinticuatro horas; y después remite un informe completo en un plazo máximo de siete días. El truco para no cambiarlos: primero llamo, veinticuatro horas, luego escribo, siete días. Y memoriza las cuatro clases de accidente como lista cerrada: deflagración, explosión, intoxicación e incendio. Un matiz que te da puntos: deflagración y explosión no son lo mismo. En la deflagración el frente de llama avanza más despacio que el sonido, es un fogonazo rápido; en la explosión avanza más rápido que el sonido y es mucho más destructiva. En gas doméstico lo habitual es la deflagración, pero el Reglamento las lista por separado.</a:t>
+            </a:r>
+          </a:p>
+        </p:txBody>
+      </p:sp>
+      <p:sp>
+        <p:nvSpPr>
+          <p:cNvPr id="4" name="Slide Number Placeholder 3"/>
+          <p:cNvSpPr>
+            <a:spLocks noGrp="1"/>
+          </p:cNvSpPr>
+          <p:nvPr>
+            <p:ph type="sldNum" idx="5" sz="quarter"/>
+          </p:nvPr>
+        </p:nvSpPr>
+        <p:spPr/>
+      </p:sp>
+    </p:spTree>
+  </p:cSld>
+  <p:clrMapOvr>
+    <a:masterClrMapping/>
+  </p:clrMapOvr>
+</p:notes>
+</file>
+
+<file path=ppt/notesSlides/notesSlide19.xml><?xml version="1.0" encoding="utf-8"?>
+<p:notes xmlns:a="http://schemas.openxmlformats.org/drawingml/2006/main" xmlns:p="http://schemas.openxmlformats.org/presentationml/2006/main" xmlns:r="http://schemas.openxmlformats.org/officeDocument/2006/relationships">
+  <p:cSld>
+    <p:spTree>
+      <p:nvGrpSpPr>
+        <p:cNvPr id="1" name=""/>
+        <p:cNvGrpSpPr/>
+        <p:nvPr/>
+      </p:nvGrpSpPr>
+      <p:grpSpPr>
+        <a:xfrm>
+          <a:off x="0" y="0"/>
+          <a:ext cx="0" cy="0"/>
+          <a:chOff x="0" y="0"/>
+          <a:chExt cx="0" cy="0"/>
+        </a:xfrm>
+      </p:grpSpPr>
+      <p:sp>
+        <p:nvSpPr>
+          <p:cNvPr id="2" name="Slide Image Placeholder 1"/>
+          <p:cNvSpPr>
+            <a:spLocks noGrp="1"/>
+          </p:cNvSpPr>
+          <p:nvPr>
+            <p:ph type="sldImg" idx="2"/>
+          </p:nvPr>
+        </p:nvSpPr>
+        <p:spPr/>
+      </p:sp>
+      <p:sp>
+        <p:nvSpPr>
+          <p:cNvPr id="3" name="Notes Placeholder 2"/>
+          <p:cNvSpPr>
+            <a:spLocks noGrp="1"/>
+          </p:cNvSpPr>
+          <p:nvPr>
+            <p:ph type="body" idx="3" sz="quarter"/>
+          </p:nvPr>
+        </p:nvSpPr>
+        <p:spPr/>
+        <p:txBody>
+          <a:bodyPr/>
+          <a:lstStyle/>
+          <a:p>
+            <a:r>
+              <a:t>N1: Dos plazos que van en pareja. ¿Cuáles son ante un accidente grave?</a:t>
+            </a:r>
+          </a:p>
+          <a:p>
+            <a:r>
+              <a:t>N2: El truco es el orden: primero llamas, luego escribes.</a:t>
             </a:r>
           </a:p>
         </p:txBody>
@@ -1157,6 +1378,241 @@
 </p:notes>
 </file>
 
+<file path=ppt/notesSlides/notesSlide20.xml><?xml version="1.0" encoding="utf-8"?>
+<p:notes xmlns:a="http://schemas.openxmlformats.org/drawingml/2006/main" xmlns:p="http://schemas.openxmlformats.org/presentationml/2006/main" xmlns:r="http://schemas.openxmlformats.org/officeDocument/2006/relationships">
+  <p:cSld>
+    <p:spTree>
+      <p:nvGrpSpPr>
+        <p:cNvPr id="1" name=""/>
+        <p:cNvGrpSpPr/>
+        <p:nvPr/>
+      </p:nvGrpSpPr>
+      <p:grpSpPr>
+        <a:xfrm>
+          <a:off x="0" y="0"/>
+          <a:ext cx="0" cy="0"/>
+          <a:chOff x="0" y="0"/>
+          <a:chExt cx="0" cy="0"/>
+        </a:xfrm>
+      </p:grpSpPr>
+      <p:sp>
+        <p:nvSpPr>
+          <p:cNvPr id="2" name="Slide Image Placeholder 1"/>
+          <p:cNvSpPr>
+            <a:spLocks noGrp="1"/>
+          </p:cNvSpPr>
+          <p:nvPr>
+            <p:ph type="sldImg" idx="2"/>
+          </p:nvPr>
+        </p:nvSpPr>
+        <p:spPr/>
+      </p:sp>
+      <p:sp>
+        <p:nvSpPr>
+          <p:cNvPr id="3" name="Notes Placeholder 2"/>
+          <p:cNvSpPr>
+            <a:spLocks noGrp="1"/>
+          </p:cNvSpPr>
+          <p:nvPr>
+            <p:ph type="body" idx="3" sz="quarter"/>
+          </p:nvPr>
+        </p:nvSpPr>
+        <p:spPr/>
+        <p:txBody>
+          <a:bodyPr/>
+          <a:lstStyle/>
+          <a:p>
+            <a:r>
+              <a:t>N1: ¿Por qué esos plazos?</a:t>
+            </a:r>
+          </a:p>
+          <a:p>
+            <a:r>
+              <a:t>N2: Porque lo urgente es avisar cuanto antes, en no más de veinticuatro horas, y el informe detallado puede esperar un poco, hasta siete días. Recuerda además las cuatro clases cerradas: deflagración, explosión, intoxicación e incendio.</a:t>
+            </a:r>
+          </a:p>
+        </p:txBody>
+      </p:sp>
+      <p:sp>
+        <p:nvSpPr>
+          <p:cNvPr id="4" name="Slide Number Placeholder 3"/>
+          <p:cNvSpPr>
+            <a:spLocks noGrp="1"/>
+          </p:cNvSpPr>
+          <p:nvPr>
+            <p:ph type="sldNum" idx="5" sz="quarter"/>
+          </p:nvPr>
+        </p:nvSpPr>
+        <p:spPr/>
+      </p:sp>
+    </p:spTree>
+  </p:cSld>
+  <p:clrMapOvr>
+    <a:masterClrMapping/>
+  </p:clrMapOvr>
+</p:notes>
+</file>
+
+<file path=ppt/notesSlides/notesSlide21.xml><?xml version="1.0" encoding="utf-8"?>
+<p:notes xmlns:a="http://schemas.openxmlformats.org/drawingml/2006/main" xmlns:p="http://schemas.openxmlformats.org/presentationml/2006/main" xmlns:r="http://schemas.openxmlformats.org/officeDocument/2006/relationships">
+  <p:cSld>
+    <p:spTree>
+      <p:nvGrpSpPr>
+        <p:cNvPr id="1" name=""/>
+        <p:cNvGrpSpPr/>
+        <p:nvPr/>
+      </p:nvGrpSpPr>
+      <p:grpSpPr>
+        <a:xfrm>
+          <a:off x="0" y="0"/>
+          <a:ext cx="0" cy="0"/>
+          <a:chOff x="0" y="0"/>
+          <a:chExt cx="0" cy="0"/>
+        </a:xfrm>
+      </p:grpSpPr>
+      <p:sp>
+        <p:nvSpPr>
+          <p:cNvPr id="2" name="Slide Image Placeholder 1"/>
+          <p:cNvSpPr>
+            <a:spLocks noGrp="1"/>
+          </p:cNvSpPr>
+          <p:nvPr>
+            <p:ph type="sldImg" idx="2"/>
+          </p:nvPr>
+        </p:nvSpPr>
+        <p:spPr/>
+      </p:sp>
+      <p:sp>
+        <p:nvSpPr>
+          <p:cNvPr id="3" name="Notes Placeholder 2"/>
+          <p:cNvSpPr>
+            <a:spLocks noGrp="1"/>
+          </p:cNvSpPr>
+          <p:nvPr>
+            <p:ph type="body" idx="3" sz="quarter"/>
+          </p:nvPr>
+        </p:nvSpPr>
+        <p:spPr/>
+        <p:txBody>
+          <a:bodyPr/>
+          <a:lstStyle/>
+          <a:p>
+            <a:r>
+              <a:t>N1: Repaso rápido de todo el bloque. ¿Tengo los cuatro pilares?</a:t>
+            </a:r>
+          </a:p>
+          <a:p>
+            <a:r>
+              <a:t>N2: Los fijamos en treinta segundos y en voz alta. Uno, la pregunta estrella: conectada a la red de distribución es inspección; por tu cuenta, sin red, revisión; y si obliga organismo de control, inspección siempre. Dos, mantener la instalación es obligación del titular, no tuya; tú ejecutas y adviertes. Tres, el Reglamento marca mínimos obligatorios, el suelo y nunca el techo, y para no cumplir a la letra existen la técnica equivalente y la excepción, siempre antes del artículo quinto y firmadas por técnico competente. Y cuatro, ante accidente grave, veinticuatro horas para llamar y siete días para el informe, con las cuatro clases cerradas. Recítalos de carrerilla y pasamos al gran cierre del tema.</a:t>
+            </a:r>
+          </a:p>
+        </p:txBody>
+      </p:sp>
+      <p:sp>
+        <p:nvSpPr>
+          <p:cNvPr id="4" name="Slide Number Placeholder 3"/>
+          <p:cNvSpPr>
+            <a:spLocks noGrp="1"/>
+          </p:cNvSpPr>
+          <p:nvPr>
+            <p:ph type="sldNum" idx="5" sz="quarter"/>
+          </p:nvPr>
+        </p:nvSpPr>
+        <p:spPr/>
+      </p:sp>
+    </p:spTree>
+  </p:cSld>
+  <p:clrMapOvr>
+    <a:masterClrMapping/>
+  </p:clrMapOvr>
+</p:notes>
+</file>
+
+<file path=ppt/notesSlides/notesSlide22.xml><?xml version="1.0" encoding="utf-8"?>
+<p:notes xmlns:a="http://schemas.openxmlformats.org/drawingml/2006/main" xmlns:p="http://schemas.openxmlformats.org/presentationml/2006/main" xmlns:r="http://schemas.openxmlformats.org/officeDocument/2006/relationships">
+  <p:cSld>
+    <p:spTree>
+      <p:nvGrpSpPr>
+        <p:cNvPr id="1" name=""/>
+        <p:cNvGrpSpPr/>
+        <p:nvPr/>
+      </p:nvGrpSpPr>
+      <p:grpSpPr>
+        <a:xfrm>
+          <a:off x="0" y="0"/>
+          <a:ext cx="0" cy="0"/>
+          <a:chOff x="0" y="0"/>
+          <a:chExt cx="0" cy="0"/>
+        </a:xfrm>
+      </p:grpSpPr>
+      <p:sp>
+        <p:nvSpPr>
+          <p:cNvPr id="2" name="Slide Image Placeholder 1"/>
+          <p:cNvSpPr>
+            <a:spLocks noGrp="1"/>
+          </p:cNvSpPr>
+          <p:nvPr>
+            <p:ph type="sldImg" idx="2"/>
+          </p:nvPr>
+        </p:nvSpPr>
+        <p:spPr/>
+      </p:sp>
+      <p:sp>
+        <p:nvSpPr>
+          <p:cNvPr id="3" name="Notes Placeholder 2"/>
+          <p:cNvSpPr>
+            <a:spLocks noGrp="1"/>
+          </p:cNvSpPr>
+          <p:nvPr>
+            <p:ph type="body" idx="3" sz="quarter"/>
+          </p:nvPr>
+        </p:nvSpPr>
+        <p:spPr/>
+        <p:txBody>
+          <a:bodyPr/>
+          <a:lstStyle/>
+          <a:p>
+            <a:r>
+              <a:t>N1: Este es el gran final del tema. ¿Qué he conquistado en estos tres vídeos?</a:t>
+            </a:r>
+          </a:p>
+          <a:p>
+            <a:r>
+              <a:t>N2: Vamos a reconstruirlo como logros, no como resumen, porque hoy sabes hacer cosas que al empezar no sabías. Distingues inspección de revisión con una sola pregunta, la de si está conectada a la red, y esa es la pregunta más repetida de todo el bloque. Sabes que la obligación de mantener es del titular, y que tú ejecutas y adviertes por escrito. Manejas las reglas finales sin agobiarte: el Reglamento como mínimos obligatorios, la técnica equivalente y la excepción como salidas firmadas por técnico competente y siempre antes de montar, las UNE citadas sin año con su listado en la ITC-ICG once, y las sanciones que viven en las dos leyes, no en el Reglamento. Y llevas de memoria el protocolo de accidente: veinticuatro horas para avisar, siete días para el informe, cuatro clases cerradas.</a:t>
+            </a:r>
+          </a:p>
+          <a:p>
+            <a:r>
+              <a:t>N1: ¿Y por qué esto me hace mejor gasista, y no solo mejor examinando?</a:t>
+            </a:r>
+          </a:p>
+          <a:p>
+            <a:r>
+              <a:t>N2: Por dos motivos. En el examen te lo preguntan tal cual, inspección o revisión, quién comunica, qué plazos de accidente, y ahora lo resuelves sin pestañear. Pero en la obra vale todavía más, y esto es lo bonito del oficio: cada vez que haces un control periódico de verdad, cazas la rejilla tapada o el conducto obstruido que mata despacio, y evitas una intoxicación por monóxido antes de que ocurra. Ahí tu firma protege a una familia entera. Con esto cierras el Tema cero completo: ya no solo tocas tubos, entiendes de dónde sale cada norma, de qué respondes tú y por qué existe cada regla. Has completado el marco normativo de arriba abajo; hoy, de verdad, ya piensas como un gasista. A partir de aquí saltamos a las instalaciones reales con todo este mapa en la cabeza. Enhorabuena por el tema, y a por el siguiente.</a:t>
+            </a:r>
+          </a:p>
+        </p:txBody>
+      </p:sp>
+      <p:sp>
+        <p:nvSpPr>
+          <p:cNvPr id="4" name="Slide Number Placeholder 3"/>
+          <p:cNvSpPr>
+            <a:spLocks noGrp="1"/>
+          </p:cNvSpPr>
+          <p:nvPr>
+            <p:ph type="sldNum" idx="5" sz="quarter"/>
+          </p:nvPr>
+        </p:nvSpPr>
+        <p:spPr/>
+      </p:sp>
+    </p:spTree>
+  </p:cSld>
+  <p:clrMapOvr>
+    <a:masterClrMapping/>
+  </p:clrMapOvr>
+</p:notes>
+</file>
+
 <file path=ppt/notesSlides/notesSlide3.xml><?xml version="1.0" encoding="utf-8"?>
 <p:notes xmlns:a="http://schemas.openxmlformats.org/drawingml/2006/main" xmlns:p="http://schemas.openxmlformats.org/presentationml/2006/main" xmlns:r="http://schemas.openxmlformats.org/officeDocument/2006/relationships">
   <p:cSld>
@@ -1343,12 +1799,12 @@
           <a:lstStyle/>
           <a:p>
             <a:r>
-              <a:t>N1: Esta es LA pregunta del tema. ¿Cómo distingo inspección de revisión?</a:t>
-            </a:r>
-          </a:p>
-          <a:p>
-            <a:r>
-              <a:t>N2: Buena noticia: se resuelve con una sola pregunta. Pregúntate si la instalación está conectada a la red de distribución, es decir, a la tubería de la compañía que pasa por la calle. Si la respuesta es sí, gas natural de ciudad o GLP de red, entonces es inspección. Si la respuesta es no, por ejemplo un depósito de GLP propio en un chalé o unas bombonas, entonces es revisión. Y una segunda regla que gana cualquier empate: si la ley obliga a que venga un organismo de control, es inspección siempre, sin discusión. Chuleta mental para toda la vida: conectada a red, inspección; por tu cuenta, revisión. Con esta sola pregunta resuelves todas las cuestiones de este bloque, que en el examen son muchas y parecen difíciles hasta que tienes la clave.</a:t>
+              <a:t>N1: Que tú vayas con las herramientas no te hace el obligado. ¿De quién es el deber de mantener?</a:t>
+            </a:r>
+          </a:p>
+          <a:p>
+            <a:r>
+              <a:t>N2: Piénsalo como el coche: el taller lo arregla, pero ¿quién debe llevarlo a revisión?</a:t>
             </a:r>
           </a:p>
         </p:txBody>
@@ -1418,12 +1874,12 @@
           <a:lstStyle/>
           <a:p>
             <a:r>
-              <a:t>N1: Cuando toca inspección, ¿quién está habilitado para hacerla?</a:t>
-            </a:r>
-          </a:p>
-          <a:p>
-            <a:r>
-              <a:t>N2: La inspección de las receptoras alimentadas desde redes por canalización la hace una empresa instaladora de gas habilitada o el distribuidor, con medios propios o externos. Y fíjate en un detalle práctico: esto incluye también la inspección de la parte común de las receptoras, el montante que comparten los vecinos, no solo lo de cada piso. Lo importante que aquí se repite es que siempre lo hace alguien ajeno al usuario, habilitado para ello; no se autoinspecciona uno solo su instalación de red. Esto no es teoría lejana: cuando tengas tu categoría B y trabajes con una empresa habilitada, hacer estas inspecciones va a ser pan de tu oficio. Y recuerda un derecho del cliente que también cae: el titular elige libremente qué empresa se la realiza.</a:t>
+              <a:t>N1: ¿Por qué el titular?</a:t>
+            </a:r>
+          </a:p>
+          <a:p>
+            <a:r>
+              <a:t>N2: Porque la ley pone el deber de conservación en el dueño y, si no, en quien usa la instalación. El instalador y la compañía ayudan y recomiendan, pero la responsabilidad última de que esté en disposición de servicio es del titular.</a:t>
             </a:r>
           </a:p>
         </p:txBody>
@@ -1493,12 +1949,12 @@
           <a:lstStyle/>
           <a:p>
             <a:r>
-              <a:t>N1: ¿Y cuándo toca revisión, quién la pide?</a:t>
-            </a:r>
-          </a:p>
-          <a:p>
-            <a:r>
-              <a:t>N2: La revisión es para todas las instalaciones que no están conectadas a redes de distribución; el ejemplo típico es un depósito de GLP propio en un chalé. Aquí cambia quién mueve ficha: es obligación del titular, y en su defecto del usuario, solicitar los servicios de una de las entidades que indica la ITC. Compara con la inspección para entender la lógica: en la inspección mandaba el hecho de estar enganchado a la red, donde un fallo puede afectar a muchos vecinos, y venía alguien habilitado ajeno; en la revisión la instalación es más privada, tu depósito en tu parcela, y es el propio titular quien tiene que pedir que se la revisen. Misma finalidad en las dos, la seguridad; lo que cambia es el nombre y el agente, y cambia según el riesgo.</a:t>
+              <a:t>N1: Esta es LA pregunta del tema. ¿Cómo distingo inspección de revisión?</a:t>
+            </a:r>
+          </a:p>
+          <a:p>
+            <a:r>
+              <a:t>N2: Buena noticia: se resuelve con una sola pregunta. Pregúntate si la instalación está conectada a la red de distribución, es decir, a la tubería de la compañía que pasa por la calle. Si la respuesta es sí, gas natural de ciudad o GLP de red, entonces es inspección. Si la respuesta es no, por ejemplo un depósito de GLP propio en un chalé o unas bombonas, entonces es revisión. Y una segunda regla que gana cualquier empate: si la ley obliga a que venga un organismo de control, es inspección siempre, sin discusión. Chuleta mental para toda la vida: conectada a red, inspección; por tu cuenta, revisión. Con esta sola pregunta resuelves todas las cuestiones de este bloque, que en el examen son muchas y parecen difíciles hasta que tienes la clave.</a:t>
             </a:r>
           </a:p>
         </p:txBody>
@@ -1568,12 +2024,12 @@
           <a:lstStyle/>
           <a:p>
             <a:r>
-              <a:t>N1: Más allá del papeleo, ¿para qué sirve de verdad el control periódico?</a:t>
-            </a:r>
-          </a:p>
-          <a:p>
-            <a:r>
-              <a:t>N2: Sirve para cazar lo que mata despacio, esos problemas que no se ven de un día para otro y por eso son tan traicioneros. Piensa en casos reales: una rejilla de ventilación tapada con un mueble o pintada por encima, que ahoga la combustión. Un conducto de evacuación de humos obstruido, que devuelve los gases a la casa. Una fuga incipiente, todavía pequeña, que aún no huele fuerte. O un aparato que empieza a dar mala combustión y monóxido de carbono. De cada control sale su certificado, con o sin anomalías, y si las hay, ese papel marca justo lo que hay que corregir. La conclusión es seria: saltarse el control o firmarlo sin mirar de verdad es dejar que el problema crezca sin que nadie lo vea, hasta el susto o la desgracia. Aquí es donde tu trabajo, bien hecho, salva vidas.</a:t>
+              <a:t>N1: La pregunta estrella del tema. ¿Con qué se decide inspección o revisión?</a:t>
+            </a:r>
+          </a:p>
+          <a:p>
+            <a:r>
+              <a:t>N2: Solo necesitas hacerte una pregunta, la de la tubería de la calle.</a:t>
             </a:r>
           </a:p>
         </p:txBody>
@@ -1643,12 +2099,12 @@
           <a:lstStyle/>
           <a:p>
             <a:r>
-              <a:t>N1: Por encima de inspecciones y revisiones, ¿hay alguien más que vigile?</a:t>
-            </a:r>
-          </a:p>
-          <a:p>
-            <a:r>
-              <a:t>N2: Sí, y conviene saberlo. Por encima de todo está la Comunidad Autónoma, que puede comprobar en cualquier momento, por sí misma o mediante un organismo de control, que la instalación cumple; sobre todo si hay un riesgo significativo para personas, animales, bienes o medio ambiente. Es, por decirlo llano, la policía del gas: puede aparecer cuando quiera. Te traduzco dos expresiones legales que salen aquí: 'de oficio' significa que actúa por su propia iniciativa, sin que nadie se lo pida; y 'a instancia de parte' significa que actúa porque alguien lo ha solicitado o se ha quejado. No es lo del día a día, pero es importante que sepas que ese control administrativo existe y está por encima de los controles periódicos normales.</a:t>
+              <a:t>N1: ¿Por qué la conexión a la red?</a:t>
+            </a:r>
+          </a:p>
+          <a:p>
+            <a:r>
+              <a:t>N2: Porque un fallo en una instalación de red afecta a muchos, así que la vigila alguien habilitado ajeno: eso es inspección. Lo privado, tu depósito, es revisión. Y si la ley obliga a organismo de control, gana esa regla: inspección siempre.</a:t>
             </a:r>
           </a:p>
         </p:txBody>
@@ -4734,7 +5190,7 @@
       </p:sp>
       <p:sp>
         <p:nvSpPr>
-          <p:cNvPr id="4" name="Rounded Rectangle 3"/>
+          <p:cNvPr id="4" name="Rectangle 3"/>
           <p:cNvSpPr/>
           <p:nvPr/>
         </p:nvSpPr>
@@ -4743,7 +5199,7 @@
             <a:off x="868680" y="2057400"/>
             <a:ext cx="1463040" cy="82296"/>
           </a:xfrm>
-          <a:prstGeom prst="roundRect">
+          <a:prstGeom prst="rect">
             <a:avLst/>
           </a:prstGeom>
           <a:solidFill>
@@ -4860,6 +5316,18 @@
   <p:clrMapOvr>
     <a:masterClrMapping/>
   </p:clrMapOvr>
+  <mc:AlternateContent xmlns:mc="http://schemas.openxmlformats.org/markup-compatibility/2006">
+    <mc:Choice xmlns:p14="http://schemas.microsoft.com/office/powerpoint/2010/main" Requires="p14">
+      <p:transition spd="med" p14:dur="700">
+        <p14:cube dir="l"/>
+      </p:transition>
+    </mc:Choice>
+    <mc:Fallback>
+      <p:transition spd="med">
+        <p:push dir="l"/>
+      </p:transition>
+    </mc:Fallback>
+  </mc:AlternateContent>
 </p:sld>
 </file>
 
@@ -4947,7 +5415,7 @@
                 </a:solidFill>
                 <a:latin typeface="Montserrat"/>
               </a:rPr>
-              <a:t>010 / 016</a:t>
+              <a:t>010 / 022</a:t>
             </a:r>
           </a:p>
         </p:txBody>
@@ -5015,7 +5483,7 @@
                 </a:solidFill>
                 <a:latin typeface="Montserrat"/>
               </a:rPr>
-              <a:t>ARTÍCULO 8 · HABILITACIÓN</a:t>
+              <a:t>ARTÍCULO 7.2.1 · INSPECCIONES</a:t>
             </a:r>
           </a:p>
         </p:txBody>
@@ -5049,14 +5517,14 @@
                 </a:solidFill>
                 <a:latin typeface="Montserrat"/>
               </a:rPr>
-              <a:t>Tres papeles que no son lo mismo</a:t>
-            </a:r>
-          </a:p>
-        </p:txBody>
-      </p:sp>
-      <p:sp>
-        <p:nvSpPr>
-          <p:cNvPr id="7" name="Rounded Rectangle 6"/>
+              <a:t>Inspección: quién la hace</a:t>
+            </a:r>
+          </a:p>
+        </p:txBody>
+      </p:sp>
+      <p:sp>
+        <p:nvSpPr>
+          <p:cNvPr id="7" name="Rectangle 6"/>
           <p:cNvSpPr/>
           <p:nvPr/>
         </p:nvSpPr>
@@ -5065,7 +5533,7 @@
             <a:off x="868680" y="1627632"/>
             <a:ext cx="2011680" cy="73152"/>
           </a:xfrm>
-          <a:prstGeom prst="roundRect">
+          <a:prstGeom prst="rect">
             <a:avLst/>
           </a:prstGeom>
           <a:solidFill>
@@ -5107,7 +5575,7 @@
         <p:spPr>
           <a:xfrm>
             <a:off x="822960" y="1965960"/>
-            <a:ext cx="4983480" cy="4206240"/>
+            <a:ext cx="5029200" cy="4206240"/>
           </a:xfrm>
           <a:prstGeom prst="rect">
             <a:avLst/>
@@ -5141,7 +5609,7 @@
                 </a:solidFill>
                 <a:latin typeface="Montserrat"/>
               </a:rPr>
-              <a:t>Empresa instaladora: la razón social</a:t>
+              <a:t>Receptoras desde red por canalización</a:t>
             </a:r>
           </a:p>
           <a:p>
@@ -5166,7 +5634,7 @@
                 </a:solidFill>
                 <a:latin typeface="Montserrat"/>
               </a:rPr>
-              <a:t>Instalador: la persona, categorías A/B/C</a:t>
+              <a:t>Empresa instaladora habilitada o distribuidor</a:t>
             </a:r>
           </a:p>
           <a:p>
@@ -5191,46 +5659,21 @@
                 </a:solidFill>
                 <a:latin typeface="Montserrat"/>
               </a:rPr>
-              <a:t>Agente de puesta en marcha: los aparatos</a:t>
-            </a:r>
-          </a:p>
-          <a:p>
-            <a:pPr>
-              <a:spcAft>
-                <a:spcPts val="1100"/>
-              </a:spcAft>
-            </a:pPr>
-            <a:r>
-              <a:rPr sz="1600" b="1" i="0">
-                <a:solidFill>
-                  <a:srgbClr val="E8801A"/>
-                </a:solidFill>
-                <a:latin typeface="Montserrat"/>
-              </a:rPr>
-              <a:t>▸  </a:t>
-            </a:r>
-            <a:r>
-              <a:rPr sz="1600" b="0" i="0">
-                <a:solidFill>
-                  <a:srgbClr val="1B2330"/>
-                </a:solidFill>
-                <a:latin typeface="Montserrat"/>
-              </a:rPr>
-              <a:t>Tú vas a por la categoría B</a:t>
-            </a:r>
-          </a:p>
-        </p:txBody>
-      </p:sp>
-      <p:sp>
-        <p:nvSpPr>
-          <p:cNvPr id="9" name="imgph" descr="IMGQ:gas installer license card uniform"/>
+              <a:t>También la parte común</a:t>
+            </a:r>
+          </a:p>
+        </p:txBody>
+      </p:sp>
+      <p:sp>
+        <p:nvSpPr>
+          <p:cNvPr id="9" name="imgph" descr="IMGQ:gas technician inspecting meter cabinet"/>
           <p:cNvSpPr/>
           <p:nvPr/>
         </p:nvSpPr>
         <p:spPr>
           <a:xfrm>
-            <a:off x="5806440" y="1051560"/>
-            <a:ext cx="5298947" cy="4629150"/>
+            <a:off x="6080760" y="1965960"/>
+            <a:ext cx="5303520" cy="4572000"/>
           </a:xfrm>
           <a:prstGeom prst="roundRect">
             <a:avLst/>
@@ -5275,8 +5718,8 @@
         </p:nvSpPr>
         <p:spPr>
           <a:xfrm>
-            <a:off x="6080760" y="2726055"/>
-            <a:ext cx="4750307" cy="1280160"/>
+            <a:off x="6355080" y="3611880"/>
+            <a:ext cx="4754880" cy="1280160"/>
           </a:xfrm>
           <a:prstGeom prst="rect">
             <a:avLst/>
@@ -5297,7 +5740,7 @@
                 </a:solidFill>
                 <a:latin typeface="Montserrat"/>
               </a:rPr>
-              <a:t>IMAGEN REALISTA</a:t>
+              <a:t>IMAGEN</a:t>
             </a:r>
           </a:p>
           <a:p>
@@ -5309,7 +5752,7 @@
                 </a:solidFill>
                 <a:latin typeface="Montserrat"/>
               </a:rPr>
-              <a:t>gas installer license card uniform</a:t>
+              <a:t>gas technician inspecting meter cabinet</a:t>
             </a:r>
           </a:p>
         </p:txBody>
@@ -5319,6 +5762,18 @@
   <p:clrMapOvr>
     <a:masterClrMapping/>
   </p:clrMapOvr>
+  <mc:AlternateContent xmlns:mc="http://schemas.openxmlformats.org/markup-compatibility/2006">
+    <mc:Choice xmlns:p14="http://schemas.microsoft.com/office/powerpoint/2010/main" Requires="p14">
+      <p:transition spd="med" p14:dur="700">
+        <p14:cube dir="r"/>
+      </p:transition>
+    </mc:Choice>
+    <mc:Fallback>
+      <p:transition spd="med">
+        <p:push dir="r"/>
+      </p:transition>
+    </mc:Fallback>
+  </mc:AlternateContent>
 </p:sld>
 </file>
 
@@ -5406,7 +5861,7 @@
                 </a:solidFill>
                 <a:latin typeface="Montserrat"/>
               </a:rPr>
-              <a:t>011 / 016</a:t>
+              <a:t>011 / 022</a:t>
             </a:r>
           </a:p>
         </p:txBody>
@@ -5474,7 +5929,7 @@
                 </a:solidFill>
                 <a:latin typeface="Montserrat"/>
               </a:rPr>
-              <a:t>ARTÍCULOS 9 Y 10 · CUMPLIMIENTO</a:t>
+              <a:t>ARTÍCULO 7.2.2 · REVISIONES</a:t>
             </a:r>
           </a:p>
         </p:txBody>
@@ -5508,14 +5963,14 @@
                 </a:solidFill>
                 <a:latin typeface="Montserrat"/>
               </a:rPr>
-              <a:t>El suelo, no el techo</a:t>
-            </a:r>
-          </a:p>
-        </p:txBody>
-      </p:sp>
-      <p:sp>
-        <p:nvSpPr>
-          <p:cNvPr id="7" name="Rounded Rectangle 6"/>
+              <a:t>Revisión: quién la hace</a:t>
+            </a:r>
+          </a:p>
+        </p:txBody>
+      </p:sp>
+      <p:sp>
+        <p:nvSpPr>
+          <p:cNvPr id="7" name="Rectangle 6"/>
           <p:cNvSpPr/>
           <p:nvPr/>
         </p:nvSpPr>
@@ -5524,7 +5979,7 @@
             <a:off x="868680" y="1627632"/>
             <a:ext cx="2011680" cy="73152"/>
           </a:xfrm>
-          <a:prstGeom prst="roundRect">
+          <a:prstGeom prst="rect">
             <a:avLst/>
           </a:prstGeom>
           <a:solidFill>
@@ -5565,8 +6020,8 @@
         </p:nvSpPr>
         <p:spPr>
           <a:xfrm>
-            <a:off x="822960" y="1965960"/>
-            <a:ext cx="4983480" cy="4206240"/>
+            <a:off x="6355080" y="1965960"/>
+            <a:ext cx="5029200" cy="4206240"/>
           </a:xfrm>
           <a:prstGeom prst="rect">
             <a:avLst/>
@@ -5600,7 +6055,7 @@
                 </a:solidFill>
                 <a:latin typeface="Montserrat"/>
               </a:rPr>
-              <a:t>Prescripciones: mínimos obligatorios</a:t>
+              <a:t>Instalaciones no conectadas a red</a:t>
             </a:r>
           </a:p>
           <a:p>
@@ -5625,7 +6080,7 @@
                 </a:solidFill>
                 <a:latin typeface="Montserrat"/>
               </a:rPr>
-              <a:t>Más seguro sí, menos nunca</a:t>
+              <a:t>Obligación del titular o usuario</a:t>
             </a:r>
           </a:p>
           <a:p>
@@ -5650,46 +6105,21 @@
                 </a:solidFill>
                 <a:latin typeface="Montserrat"/>
               </a:rPr>
-              <a:t>Técnica equivalente (art. 9)</a:t>
-            </a:r>
-          </a:p>
-          <a:p>
-            <a:pPr>
-              <a:spcAft>
-                <a:spcPts val="1100"/>
-              </a:spcAft>
-            </a:pPr>
-            <a:r>
-              <a:rPr sz="1600" b="1" i="0">
-                <a:solidFill>
-                  <a:srgbClr val="E8801A"/>
-                </a:solidFill>
-                <a:latin typeface="Montserrat"/>
-              </a:rPr>
-              <a:t>▸  </a:t>
-            </a:r>
-            <a:r>
-              <a:rPr sz="1600" b="0" i="0">
-                <a:solidFill>
-                  <a:srgbClr val="1B2330"/>
-                </a:solidFill>
-                <a:latin typeface="Montserrat"/>
-              </a:rPr>
-              <a:t>Excepción, último recurso (art. 10)</a:t>
-            </a:r>
-          </a:p>
-        </p:txBody>
-      </p:sp>
-      <p:sp>
-        <p:nvSpPr>
-          <p:cNvPr id="9" name="imgph" descr="IMGQ:engineer signing safety compliance document"/>
+              <a:t>Entidades que indique la ITC</a:t>
+            </a:r>
+          </a:p>
+        </p:txBody>
+      </p:sp>
+      <p:sp>
+        <p:nvSpPr>
+          <p:cNvPr id="9" name="imgph" descr="IMGQ:lpg tank house garden inspection"/>
           <p:cNvSpPr/>
           <p:nvPr/>
         </p:nvSpPr>
         <p:spPr>
           <a:xfrm>
-            <a:off x="5806440" y="1051560"/>
-            <a:ext cx="5298947" cy="4629150"/>
+            <a:off x="822960" y="1965960"/>
+            <a:ext cx="5303520" cy="4572000"/>
           </a:xfrm>
           <a:prstGeom prst="roundRect">
             <a:avLst/>
@@ -5734,8 +6164,8 @@
         </p:nvSpPr>
         <p:spPr>
           <a:xfrm>
-            <a:off x="6080760" y="2726055"/>
-            <a:ext cx="4750307" cy="1280160"/>
+            <a:off x="1097280" y="3611880"/>
+            <a:ext cx="4754880" cy="1280160"/>
           </a:xfrm>
           <a:prstGeom prst="rect">
             <a:avLst/>
@@ -5756,7 +6186,7 @@
                 </a:solidFill>
                 <a:latin typeface="Montserrat"/>
               </a:rPr>
-              <a:t>IMAGEN REALISTA</a:t>
+              <a:t>IMAGEN</a:t>
             </a:r>
           </a:p>
           <a:p>
@@ -5768,7 +6198,7 @@
                 </a:solidFill>
                 <a:latin typeface="Montserrat"/>
               </a:rPr>
-              <a:t>engineer signing safety compliance document</a:t>
+              <a:t>lpg tank house garden inspection</a:t>
             </a:r>
           </a:p>
         </p:txBody>
@@ -5778,6 +6208,18 @@
   <p:clrMapOvr>
     <a:masterClrMapping/>
   </p:clrMapOvr>
+  <mc:AlternateContent xmlns:mc="http://schemas.openxmlformats.org/markup-compatibility/2006">
+    <mc:Choice xmlns:p14="http://schemas.microsoft.com/office/powerpoint/2010/main" Requires="p14">
+      <p:transition spd="med" p14:dur="700">
+        <p14:cube dir="l"/>
+      </p:transition>
+    </mc:Choice>
+    <mc:Fallback>
+      <p:transition spd="med">
+        <p:push dir="l"/>
+      </p:transition>
+    </mc:Fallback>
+  </mc:AlternateContent>
 </p:sld>
 </file>
 
@@ -5865,7 +6307,7 @@
                 </a:solidFill>
                 <a:latin typeface="Montserrat"/>
               </a:rPr>
-              <a:t>012 / 016</a:t>
+              <a:t>012 / 022</a:t>
             </a:r>
           </a:p>
         </p:txBody>
@@ -5933,7 +6375,7 @@
                 </a:solidFill>
                 <a:latin typeface="Montserrat"/>
               </a:rPr>
-              <a:t>ARTÍCULOS 11 Y 12 · NORMAS</a:t>
+              <a:t>CONTROL PERIÓDICO · PARA QUÉ SIRVE</a:t>
             </a:r>
           </a:p>
         </p:txBody>
@@ -5967,14 +6409,14 @@
                 </a:solidFill>
                 <a:latin typeface="Montserrat"/>
               </a:rPr>
-              <a:t>Europa vale y las UNE van sin año</a:t>
-            </a:r>
-          </a:p>
-        </p:txBody>
-      </p:sp>
-      <p:sp>
-        <p:nvSpPr>
-          <p:cNvPr id="7" name="Rounded Rectangle 6"/>
+              <a:t>Cazar lo que mata despacio</a:t>
+            </a:r>
+          </a:p>
+        </p:txBody>
+      </p:sp>
+      <p:sp>
+        <p:nvSpPr>
+          <p:cNvPr id="7" name="Rectangle 6"/>
           <p:cNvSpPr/>
           <p:nvPr/>
         </p:nvSpPr>
@@ -5983,7 +6425,7 @@
             <a:off x="868680" y="1627632"/>
             <a:ext cx="2011680" cy="73152"/>
           </a:xfrm>
-          <a:prstGeom prst="roundRect">
+          <a:prstGeom prst="rect">
             <a:avLst/>
           </a:prstGeom>
           <a:solidFill>
@@ -6025,7 +6467,7 @@
         <p:spPr>
           <a:xfrm>
             <a:off x="822960" y="1965960"/>
-            <a:ext cx="4983480" cy="4206240"/>
+            <a:ext cx="5029200" cy="4206240"/>
           </a:xfrm>
           <a:prstGeom prst="rect">
             <a:avLst/>
@@ -6059,7 +6501,7 @@
                 </a:solidFill>
                 <a:latin typeface="Montserrat"/>
               </a:rPr>
-              <a:t>Reconocimiento mutuo: material europeo si es seguro</a:t>
+              <a:t>Rejilla de ventilación tapada</a:t>
             </a:r>
           </a:p>
           <a:p>
@@ -6084,7 +6526,7 @@
                 </a:solidFill>
                 <a:latin typeface="Montserrat"/>
               </a:rPr>
-              <a:t>Las ITC citan las UNE sin año</a:t>
+              <a:t>Conducto de evacuación obstruido</a:t>
             </a:r>
           </a:p>
           <a:p>
@@ -6109,21 +6551,21 @@
                 </a:solidFill>
                 <a:latin typeface="Montserrat"/>
               </a:rPr>
-              <a:t>El listado con años, en la ITC-ICG 11</a:t>
-            </a:r>
-          </a:p>
-        </p:txBody>
-      </p:sp>
-      <p:sp>
-        <p:nvSpPr>
-          <p:cNvPr id="9" name="imgph" descr="IMGQ:european standards manual technical book"/>
+              <a:t>Fuga incipiente, mala combustión, CO</a:t>
+            </a:r>
+          </a:p>
+        </p:txBody>
+      </p:sp>
+      <p:sp>
+        <p:nvSpPr>
+          <p:cNvPr id="9" name="imgph" descr="IMGQ:blocked ventilation grille wall dust"/>
           <p:cNvSpPr/>
           <p:nvPr/>
         </p:nvSpPr>
         <p:spPr>
           <a:xfrm>
-            <a:off x="5806440" y="1051560"/>
-            <a:ext cx="5298947" cy="4629150"/>
+            <a:off x="6080760" y="1965960"/>
+            <a:ext cx="5303520" cy="4572000"/>
           </a:xfrm>
           <a:prstGeom prst="roundRect">
             <a:avLst/>
@@ -6168,8 +6610,8 @@
         </p:nvSpPr>
         <p:spPr>
           <a:xfrm>
-            <a:off x="6080760" y="2726055"/>
-            <a:ext cx="4750307" cy="1280160"/>
+            <a:off x="6355080" y="3611880"/>
+            <a:ext cx="4754880" cy="1280160"/>
           </a:xfrm>
           <a:prstGeom prst="rect">
             <a:avLst/>
@@ -6190,7 +6632,7 @@
                 </a:solidFill>
                 <a:latin typeface="Montserrat"/>
               </a:rPr>
-              <a:t>IMAGEN REALISTA</a:t>
+              <a:t>IMAGEN</a:t>
             </a:r>
           </a:p>
           <a:p>
@@ -6202,7 +6644,7 @@
                 </a:solidFill>
                 <a:latin typeface="Montserrat"/>
               </a:rPr>
-              <a:t>european standards manual technical book</a:t>
+              <a:t>blocked ventilation grille wall dust</a:t>
             </a:r>
           </a:p>
         </p:txBody>
@@ -6212,6 +6654,18 @@
   <p:clrMapOvr>
     <a:masterClrMapping/>
   </p:clrMapOvr>
+  <mc:AlternateContent xmlns:mc="http://schemas.openxmlformats.org/markup-compatibility/2006">
+    <mc:Choice xmlns:p14="http://schemas.microsoft.com/office/powerpoint/2010/main" Requires="p14">
+      <p:transition spd="med" p14:dur="700">
+        <p14:cube dir="r"/>
+      </p:transition>
+    </mc:Choice>
+    <mc:Fallback>
+      <p:transition spd="med">
+        <p:push dir="r"/>
+      </p:transition>
+    </mc:Fallback>
+  </mc:AlternateContent>
 </p:sld>
 </file>
 
@@ -6299,7 +6753,7 @@
                 </a:solidFill>
                 <a:latin typeface="Montserrat"/>
               </a:rPr>
-              <a:t>013 / 016</a:t>
+              <a:t>013 / 022</a:t>
             </a:r>
           </a:p>
         </p:txBody>
@@ -6367,7 +6821,7 @@
                 </a:solidFill>
                 <a:latin typeface="Montserrat"/>
               </a:rPr>
-              <a:t>ARTÍCULO 13 · SANCIONES</a:t>
+              <a:t>ARTÍCULO 7.3 · CONTROL ADMINISTRATIVO</a:t>
             </a:r>
           </a:p>
         </p:txBody>
@@ -6401,14 +6855,14 @@
                 </a:solidFill>
                 <a:latin typeface="Montserrat"/>
               </a:rPr>
-              <a:t>Las multas no las pone el Reglamento</a:t>
-            </a:r>
-          </a:p>
-        </p:txBody>
-      </p:sp>
-      <p:sp>
-        <p:nvSpPr>
-          <p:cNvPr id="7" name="Rounded Rectangle 6"/>
+              <a:t>La policía del gas</a:t>
+            </a:r>
+          </a:p>
+        </p:txBody>
+      </p:sp>
+      <p:sp>
+        <p:nvSpPr>
+          <p:cNvPr id="7" name="Rectangle 6"/>
           <p:cNvSpPr/>
           <p:nvPr/>
         </p:nvSpPr>
@@ -6417,7 +6871,7 @@
             <a:off x="868680" y="1627632"/>
             <a:ext cx="2011680" cy="73152"/>
           </a:xfrm>
-          <a:prstGeom prst="roundRect">
+          <a:prstGeom prst="rect">
             <a:avLst/>
           </a:prstGeom>
           <a:solidFill>
@@ -6458,8 +6912,8 @@
         </p:nvSpPr>
         <p:spPr>
           <a:xfrm>
-            <a:off x="822960" y="1965960"/>
-            <a:ext cx="4983480" cy="4206240"/>
+            <a:off x="6355080" y="1965960"/>
+            <a:ext cx="5029200" cy="4206240"/>
           </a:xfrm>
           <a:prstGeom prst="rect">
             <a:avLst/>
@@ -6493,7 +6947,7 @@
                 </a:solidFill>
                 <a:latin typeface="Montserrat"/>
               </a:rPr>
-              <a:t>Régimen de infracciones y sanciones</a:t>
+              <a:t>La Comunidad Autónoma, cuando quiera</a:t>
             </a:r>
           </a:p>
           <a:p>
@@ -6518,7 +6972,7 @@
                 </a:solidFill>
                 <a:latin typeface="Montserrat"/>
               </a:rPr>
-              <a:t>Ley de industria y ley de hidrocarburos</a:t>
+              <a:t>De oficio o a instancia de parte</a:t>
             </a:r>
           </a:p>
           <a:p>
@@ -6543,21 +6997,21 @@
                 </a:solidFill>
                 <a:latin typeface="Montserrat"/>
               </a:rPr>
-              <a:t>Leve, grave o muy grave</a:t>
-            </a:r>
-          </a:p>
-        </p:txBody>
-      </p:sp>
-      <p:sp>
-        <p:nvSpPr>
-          <p:cNvPr id="9" name="imgph" descr="IMGQ:legal code book gavel table"/>
+              <a:t>Sobre todo si hay riesgo significativo</a:t>
+            </a:r>
+          </a:p>
+        </p:txBody>
+      </p:sp>
+      <p:sp>
+        <p:nvSpPr>
+          <p:cNvPr id="9" name="imgph" descr="IMGQ:government inspector safety vest clipboard"/>
           <p:cNvSpPr/>
           <p:nvPr/>
         </p:nvSpPr>
         <p:spPr>
           <a:xfrm>
-            <a:off x="5806440" y="1051560"/>
-            <a:ext cx="5298947" cy="4629150"/>
+            <a:off x="822960" y="1965960"/>
+            <a:ext cx="5303520" cy="4572000"/>
           </a:xfrm>
           <a:prstGeom prst="roundRect">
             <a:avLst/>
@@ -6602,8 +7056,8 @@
         </p:nvSpPr>
         <p:spPr>
           <a:xfrm>
-            <a:off x="6080760" y="2726055"/>
-            <a:ext cx="4750307" cy="1280160"/>
+            <a:off x="1097280" y="3611880"/>
+            <a:ext cx="4754880" cy="1280160"/>
           </a:xfrm>
           <a:prstGeom prst="rect">
             <a:avLst/>
@@ -6624,7 +7078,7 @@
                 </a:solidFill>
                 <a:latin typeface="Montserrat"/>
               </a:rPr>
-              <a:t>IMAGEN REALISTA</a:t>
+              <a:t>IMAGEN</a:t>
             </a:r>
           </a:p>
           <a:p>
@@ -6636,7 +7090,7 @@
                 </a:solidFill>
                 <a:latin typeface="Montserrat"/>
               </a:rPr>
-              <a:t>legal code book gavel table</a:t>
+              <a:t>government inspector safety vest clipboard</a:t>
             </a:r>
           </a:p>
         </p:txBody>
@@ -6646,6 +7100,18 @@
   <p:clrMapOvr>
     <a:masterClrMapping/>
   </p:clrMapOvr>
+  <mc:AlternateContent xmlns:mc="http://schemas.openxmlformats.org/markup-compatibility/2006">
+    <mc:Choice xmlns:p14="http://schemas.microsoft.com/office/powerpoint/2010/main" Requires="p14">
+      <p:transition spd="med" p14:dur="700">
+        <p14:cube dir="l"/>
+      </p:transition>
+    </mc:Choice>
+    <mc:Fallback>
+      <p:transition spd="med">
+        <p:push dir="l"/>
+      </p:transition>
+    </mc:Fallback>
+  </mc:AlternateContent>
 </p:sld>
 </file>
 
@@ -6733,7 +7199,7 @@
                 </a:solidFill>
                 <a:latin typeface="Montserrat"/>
               </a:rPr>
-              <a:t>014 / 016</a:t>
+              <a:t>014 / 022</a:t>
             </a:r>
           </a:p>
         </p:txBody>
@@ -6801,7 +7267,7 @@
                 </a:solidFill>
                 <a:latin typeface="Montserrat"/>
               </a:rPr>
-              <a:t>ARTÍCULO 14 · ACCIDENTES</a:t>
+              <a:t>ARTÍCULO 8 · HABILITACIÓN</a:t>
             </a:r>
           </a:p>
         </p:txBody>
@@ -6835,14 +7301,14 @@
                 </a:solidFill>
                 <a:latin typeface="Montserrat"/>
               </a:rPr>
-              <a:t>Primero llamo, luego escribo</a:t>
-            </a:r>
-          </a:p>
-        </p:txBody>
-      </p:sp>
-      <p:sp>
-        <p:nvSpPr>
-          <p:cNvPr id="7" name="Rounded Rectangle 6"/>
+              <a:t>Tres papeles que no son lo mismo</a:t>
+            </a:r>
+          </a:p>
+        </p:txBody>
+      </p:sp>
+      <p:sp>
+        <p:nvSpPr>
+          <p:cNvPr id="7" name="Rectangle 6"/>
           <p:cNvSpPr/>
           <p:nvPr/>
         </p:nvSpPr>
@@ -6851,7 +7317,7 @@
             <a:off x="868680" y="1627632"/>
             <a:ext cx="2011680" cy="73152"/>
           </a:xfrm>
-          <a:prstGeom prst="roundRect">
+          <a:prstGeom prst="rect">
             <a:avLst/>
           </a:prstGeom>
           <a:solidFill>
@@ -6893,7 +7359,7 @@
         <p:spPr>
           <a:xfrm>
             <a:off x="822960" y="1965960"/>
-            <a:ext cx="4983480" cy="4206240"/>
+            <a:ext cx="5029200" cy="4206240"/>
           </a:xfrm>
           <a:prstGeom prst="rect">
             <a:avLst/>
@@ -6927,7 +7393,7 @@
                 </a:solidFill>
                 <a:latin typeface="Montserrat"/>
               </a:rPr>
-              <a:t>Suministrador avisa en 24 horas</a:t>
+              <a:t>Empresa instaladora: la razón social</a:t>
             </a:r>
           </a:p>
           <a:p>
@@ -6952,7 +7418,7 @@
                 </a:solidFill>
                 <a:latin typeface="Montserrat"/>
               </a:rPr>
-              <a:t>Informe completo en 7 días</a:t>
+              <a:t>Instalador: la persona, categorías A/B/C</a:t>
             </a:r>
           </a:p>
           <a:p>
@@ -6977,21 +7443,46 @@
                 </a:solidFill>
                 <a:latin typeface="Montserrat"/>
               </a:rPr>
-              <a:t>Clases: deflagración, explosión, intoxicación, incendio</a:t>
-            </a:r>
-          </a:p>
-        </p:txBody>
-      </p:sp>
-      <p:sp>
-        <p:nvSpPr>
-          <p:cNvPr id="9" name="imgph" descr="IMGQ:emergency gas leak warning scene"/>
+              <a:t>Agente de puesta en marcha: los aparatos</a:t>
+            </a:r>
+          </a:p>
+          <a:p>
+            <a:pPr>
+              <a:spcAft>
+                <a:spcPts val="1100"/>
+              </a:spcAft>
+            </a:pPr>
+            <a:r>
+              <a:rPr sz="1600" b="1" i="0">
+                <a:solidFill>
+                  <a:srgbClr val="E8801A"/>
+                </a:solidFill>
+                <a:latin typeface="Montserrat"/>
+              </a:rPr>
+              <a:t>▸  </a:t>
+            </a:r>
+            <a:r>
+              <a:rPr sz="1600" b="0" i="0">
+                <a:solidFill>
+                  <a:srgbClr val="1B2330"/>
+                </a:solidFill>
+                <a:latin typeface="Montserrat"/>
+              </a:rPr>
+              <a:t>Tú vas a por la categoría B</a:t>
+            </a:r>
+          </a:p>
+        </p:txBody>
+      </p:sp>
+      <p:sp>
+        <p:nvSpPr>
+          <p:cNvPr id="9" name="imgph" descr="IMGQ:gas installer license card uniform"/>
           <p:cNvSpPr/>
           <p:nvPr/>
         </p:nvSpPr>
         <p:spPr>
           <a:xfrm>
-            <a:off x="5806440" y="1051560"/>
-            <a:ext cx="5298947" cy="4629150"/>
+            <a:off x="6080760" y="1965960"/>
+            <a:ext cx="5303520" cy="4572000"/>
           </a:xfrm>
           <a:prstGeom prst="roundRect">
             <a:avLst/>
@@ -7036,8 +7527,8 @@
         </p:nvSpPr>
         <p:spPr>
           <a:xfrm>
-            <a:off x="6080760" y="2726055"/>
-            <a:ext cx="4750307" cy="1280160"/>
+            <a:off x="6355080" y="3611880"/>
+            <a:ext cx="4754880" cy="1280160"/>
           </a:xfrm>
           <a:prstGeom prst="rect">
             <a:avLst/>
@@ -7058,7 +7549,7 @@
                 </a:solidFill>
                 <a:latin typeface="Montserrat"/>
               </a:rPr>
-              <a:t>IMAGEN REALISTA</a:t>
+              <a:t>IMAGEN</a:t>
             </a:r>
           </a:p>
           <a:p>
@@ -7070,7 +7561,7 @@
                 </a:solidFill>
                 <a:latin typeface="Montserrat"/>
               </a:rPr>
-              <a:t>emergency gas leak warning scene</a:t>
+              <a:t>gas installer license card uniform</a:t>
             </a:r>
           </a:p>
         </p:txBody>
@@ -7080,6 +7571,18 @@
   <p:clrMapOvr>
     <a:masterClrMapping/>
   </p:clrMapOvr>
+  <mc:AlternateContent xmlns:mc="http://schemas.openxmlformats.org/markup-compatibility/2006">
+    <mc:Choice xmlns:p14="http://schemas.microsoft.com/office/powerpoint/2010/main" Requires="p14">
+      <p:transition spd="med" p14:dur="700">
+        <p14:cube dir="r"/>
+      </p:transition>
+    </mc:Choice>
+    <mc:Fallback>
+      <p:transition spd="med">
+        <p:push dir="r"/>
+      </p:transition>
+    </mc:Fallback>
+  </mc:AlternateContent>
 </p:sld>
 </file>
 
@@ -7167,7 +7670,7 @@
                 </a:solidFill>
                 <a:latin typeface="Montserrat"/>
               </a:rPr>
-              <a:t>015 / 016</a:t>
+              <a:t>015 / 022</a:t>
             </a:r>
           </a:p>
         </p:txBody>
@@ -7235,7 +7738,7 @@
                 </a:solidFill>
                 <a:latin typeface="Montserrat"/>
               </a:rPr>
-              <a:t>REPASO RELÁMPAGO</a:t>
+              <a:t>ARTÍCULOS 9 Y 10 · CUMPLIMIENTO</a:t>
             </a:r>
           </a:p>
         </p:txBody>
@@ -7269,14 +7772,14 @@
                 </a:solidFill>
                 <a:latin typeface="Montserrat"/>
               </a:rPr>
-              <a:t>Fíjalo en treinta segundos</a:t>
-            </a:r>
-          </a:p>
-        </p:txBody>
-      </p:sp>
-      <p:sp>
-        <p:nvSpPr>
-          <p:cNvPr id="7" name="Rounded Rectangle 6"/>
+              <a:t>El suelo, no el techo</a:t>
+            </a:r>
+          </a:p>
+        </p:txBody>
+      </p:sp>
+      <p:sp>
+        <p:nvSpPr>
+          <p:cNvPr id="7" name="Rectangle 6"/>
           <p:cNvSpPr/>
           <p:nvPr/>
         </p:nvSpPr>
@@ -7285,7 +7788,7 @@
             <a:off x="868680" y="1627632"/>
             <a:ext cx="2011680" cy="73152"/>
           </a:xfrm>
-          <a:prstGeom prst="roundRect">
+          <a:prstGeom prst="rect">
             <a:avLst/>
           </a:prstGeom>
           <a:solidFill>
@@ -7326,8 +7829,8 @@
         </p:nvSpPr>
         <p:spPr>
           <a:xfrm>
-            <a:off x="822960" y="1965960"/>
-            <a:ext cx="4983480" cy="4206240"/>
+            <a:off x="6355080" y="1965960"/>
+            <a:ext cx="5029200" cy="4206240"/>
           </a:xfrm>
           <a:prstGeom prst="rect">
             <a:avLst/>
@@ -7361,7 +7864,7 @@
                 </a:solidFill>
                 <a:latin typeface="Montserrat"/>
               </a:rPr>
-              <a:t>Conectada a red → inspección; sin red → revisión</a:t>
+              <a:t>Prescripciones: mínimos obligatorios</a:t>
             </a:r>
           </a:p>
           <a:p>
@@ -7386,7 +7889,7 @@
                 </a:solidFill>
                 <a:latin typeface="Montserrat"/>
               </a:rPr>
-              <a:t>Mantener es del titular</a:t>
+              <a:t>Más seguro sí, menos nunca</a:t>
             </a:r>
           </a:p>
           <a:p>
@@ -7411,7 +7914,7 @@
                 </a:solidFill>
                 <a:latin typeface="Montserrat"/>
               </a:rPr>
-              <a:t>Reglamento: el suelo, nunca el techo</a:t>
+              <a:t>Técnica equivalente (art. 9)</a:t>
             </a:r>
           </a:p>
           <a:p>
@@ -7436,21 +7939,21 @@
                 </a:solidFill>
                 <a:latin typeface="Montserrat"/>
               </a:rPr>
-              <a:t>Accidente: 24 h para llamar, 7 días para escribir</a:t>
-            </a:r>
-          </a:p>
-        </p:txBody>
-      </p:sp>
-      <p:sp>
-        <p:nvSpPr>
-          <p:cNvPr id="9" name="imgph" descr="IMGQ:gas safety inspection summary checklist"/>
+              <a:t>Excepción, último recurso (art. 10)</a:t>
+            </a:r>
+          </a:p>
+        </p:txBody>
+      </p:sp>
+      <p:sp>
+        <p:nvSpPr>
+          <p:cNvPr id="9" name="imgph" descr="IMGQ:engineer signing safety compliance document"/>
           <p:cNvSpPr/>
           <p:nvPr/>
         </p:nvSpPr>
         <p:spPr>
           <a:xfrm>
-            <a:off x="5806440" y="1051560"/>
-            <a:ext cx="5298947" cy="4629150"/>
+            <a:off x="822960" y="1965960"/>
+            <a:ext cx="5303520" cy="4572000"/>
           </a:xfrm>
           <a:prstGeom prst="roundRect">
             <a:avLst/>
@@ -7495,8 +7998,8 @@
         </p:nvSpPr>
         <p:spPr>
           <a:xfrm>
-            <a:off x="6080760" y="2726055"/>
-            <a:ext cx="4750307" cy="1280160"/>
+            <a:off x="1097280" y="3611880"/>
+            <a:ext cx="4754880" cy="1280160"/>
           </a:xfrm>
           <a:prstGeom prst="rect">
             <a:avLst/>
@@ -7517,7 +8020,7 @@
                 </a:solidFill>
                 <a:latin typeface="Montserrat"/>
               </a:rPr>
-              <a:t>IMAGEN REALISTA</a:t>
+              <a:t>IMAGEN</a:t>
             </a:r>
           </a:p>
           <a:p>
@@ -7529,7 +8032,7 @@
                 </a:solidFill>
                 <a:latin typeface="Montserrat"/>
               </a:rPr>
-              <a:t>gas safety inspection summary checklist</a:t>
+              <a:t>engineer signing safety compliance document</a:t>
             </a:r>
           </a:p>
         </p:txBody>
@@ -7539,6 +8042,18 @@
   <p:clrMapOvr>
     <a:masterClrMapping/>
   </p:clrMapOvr>
+  <mc:AlternateContent xmlns:mc="http://schemas.openxmlformats.org/markup-compatibility/2006">
+    <mc:Choice xmlns:p14="http://schemas.microsoft.com/office/powerpoint/2010/main" Requires="p14">
+      <p:transition spd="med" p14:dur="700">
+        <p14:cube dir="l"/>
+      </p:transition>
+    </mc:Choice>
+    <mc:Fallback>
+      <p:transition spd="med">
+        <p:push dir="l"/>
+      </p:transition>
+    </mc:Fallback>
+  </mc:AlternateContent>
 </p:sld>
 </file>
 
@@ -7567,7 +8082,7 @@
             <a:avLst/>
           </a:prstGeom>
           <a:solidFill>
-            <a:srgbClr val="1E2761"/>
+            <a:srgbClr val="FFFFFF"/>
           </a:solidFill>
           <a:ln>
             <a:noFill/>
@@ -7604,8 +8119,8 @@
         </p:nvSpPr>
         <p:spPr>
           <a:xfrm>
-            <a:off x="822960" y="640080"/>
-            <a:ext cx="10515600" cy="457200"/>
+            <a:off x="10607040" y="320040"/>
+            <a:ext cx="1371600" cy="365760"/>
           </a:xfrm>
           <a:prstGeom prst="rect">
             <a:avLst/>
@@ -7618,30 +8133,133 @@
           </a:bodyPr>
           <a:lstStyle/>
           <a:p>
-            <a:r>
-              <a:rPr sz="1400" b="1" i="0">
-                <a:solidFill>
-                  <a:srgbClr val="F4A24C"/>
-                </a:solidFill>
-                <a:latin typeface="Montserrat"/>
-              </a:rPr>
-              <a:t>LO QUE YA DOMINAS</a:t>
-            </a:r>
-          </a:p>
-        </p:txBody>
-      </p:sp>
-      <p:sp>
-        <p:nvSpPr>
-          <p:cNvPr id="4" name="Rounded Rectangle 3"/>
+            <a:pPr algn="r"/>
+            <a:r>
+              <a:rPr sz="1000" b="1" i="0">
+                <a:solidFill>
+                  <a:srgbClr val="64748B"/>
+                </a:solidFill>
+                <a:latin typeface="Montserrat"/>
+              </a:rPr>
+              <a:t>016 / 022</a:t>
+            </a:r>
+          </a:p>
+        </p:txBody>
+      </p:sp>
+      <p:sp>
+        <p:nvSpPr>
+          <p:cNvPr id="4" name="TextBox 3"/>
+          <p:cNvSpPr txBox="1"/>
+          <p:nvPr/>
+        </p:nvSpPr>
+        <p:spPr>
+          <a:xfrm>
+            <a:off x="457200" y="6419088"/>
+            <a:ext cx="8229600" cy="365760"/>
+          </a:xfrm>
+          <a:prstGeom prst="rect">
+            <a:avLst/>
+          </a:prstGeom>
+          <a:noFill/>
+        </p:spPr>
+        <p:txBody>
+          <a:bodyPr wrap="square">
+            <a:spAutoFit/>
+          </a:bodyPr>
+          <a:lstStyle/>
+          <a:p>
+            <a:r>
+              <a:rPr sz="900" b="0" i="0">
+                <a:solidFill>
+                  <a:srgbClr val="64748B"/>
+                </a:solidFill>
+                <a:latin typeface="Montserrat"/>
+              </a:rPr>
+              <a:t>Curso Gas B · Tema 00 · El Reglamento de Gas</a:t>
+            </a:r>
+          </a:p>
+        </p:txBody>
+      </p:sp>
+      <p:sp>
+        <p:nvSpPr>
+          <p:cNvPr id="5" name="TextBox 4"/>
+          <p:cNvSpPr txBox="1"/>
+          <p:nvPr/>
+        </p:nvSpPr>
+        <p:spPr>
+          <a:xfrm>
+            <a:off x="822960" y="457200"/>
+            <a:ext cx="10058400" cy="365760"/>
+          </a:xfrm>
+          <a:prstGeom prst="rect">
+            <a:avLst/>
+          </a:prstGeom>
+          <a:noFill/>
+        </p:spPr>
+        <p:txBody>
+          <a:bodyPr wrap="square">
+            <a:spAutoFit/>
+          </a:bodyPr>
+          <a:lstStyle/>
+          <a:p>
+            <a:r>
+              <a:rPr sz="1300" b="1" i="0">
+                <a:solidFill>
+                  <a:srgbClr val="E8801A"/>
+                </a:solidFill>
+                <a:latin typeface="Montserrat"/>
+              </a:rPr>
+              <a:t>ARTÍCULOS 11 Y 12 · NORMAS</a:t>
+            </a:r>
+          </a:p>
+        </p:txBody>
+      </p:sp>
+      <p:sp>
+        <p:nvSpPr>
+          <p:cNvPr id="6" name="TextBox 5"/>
+          <p:cNvSpPr txBox="1"/>
+          <p:nvPr/>
+        </p:nvSpPr>
+        <p:spPr>
+          <a:xfrm>
+            <a:off x="822960" y="868680"/>
+            <a:ext cx="10515600" cy="914400"/>
+          </a:xfrm>
+          <a:prstGeom prst="rect">
+            <a:avLst/>
+          </a:prstGeom>
+          <a:noFill/>
+        </p:spPr>
+        <p:txBody>
+          <a:bodyPr wrap="square">
+            <a:spAutoFit/>
+          </a:bodyPr>
+          <a:lstStyle/>
+          <a:p>
+            <a:r>
+              <a:rPr sz="2800" b="1" i="0">
+                <a:solidFill>
+                  <a:srgbClr val="1E2761"/>
+                </a:solidFill>
+                <a:latin typeface="Montserrat"/>
+              </a:rPr>
+              <a:t>Europa vale y las UNE van sin año</a:t>
+            </a:r>
+          </a:p>
+        </p:txBody>
+      </p:sp>
+      <p:sp>
+        <p:nvSpPr>
+          <p:cNvPr id="7" name="Rectangle 6"/>
           <p:cNvSpPr/>
           <p:nvPr/>
         </p:nvSpPr>
         <p:spPr>
           <a:xfrm>
-            <a:off x="868680" y="1051560"/>
-            <a:ext cx="1463040" cy="82296"/>
-          </a:xfrm>
-          <a:prstGeom prst="roundRect">
+            <a:off x="868680" y="1627632"/>
+            <a:ext cx="2011680" cy="73152"/>
+          </a:xfrm>
+          <a:prstGeom prst="rect">
             <a:avLst/>
           </a:prstGeom>
           <a:solidFill>
@@ -7676,14 +8294,14 @@
       </p:sp>
       <p:sp>
         <p:nvSpPr>
-          <p:cNvPr id="5" name="TextBox 4"/>
+          <p:cNvPr id="8" name="TextBox 7"/>
           <p:cNvSpPr txBox="1"/>
           <p:nvPr/>
         </p:nvSpPr>
         <p:spPr>
           <a:xfrm>
-            <a:off x="822960" y="1234440"/>
-            <a:ext cx="10515600" cy="1097280"/>
+            <a:off x="822960" y="1965960"/>
+            <a:ext cx="5029200" cy="4206240"/>
           </a:xfrm>
           <a:prstGeom prst="rect">
             <a:avLst/>
@@ -7696,28 +8314,138 @@
           </a:bodyPr>
           <a:lstStyle/>
           <a:p>
-            <a:r>
-              <a:rPr sz="3400" b="1" i="0">
-                <a:solidFill>
-                  <a:srgbClr val="FFFFFF"/>
-                </a:solidFill>
-                <a:latin typeface="Montserrat"/>
-              </a:rPr>
-              <a:t>Cierras el articulado como un profesional</a:t>
-            </a:r>
-          </a:p>
-        </p:txBody>
-      </p:sp>
-      <p:sp>
-        <p:nvSpPr>
-          <p:cNvPr id="6" name="TextBox 5"/>
+            <a:pPr>
+              <a:spcAft>
+                <a:spcPts val="1100"/>
+              </a:spcAft>
+            </a:pPr>
+            <a:r>
+              <a:rPr sz="1600" b="1" i="0">
+                <a:solidFill>
+                  <a:srgbClr val="E8801A"/>
+                </a:solidFill>
+                <a:latin typeface="Montserrat"/>
+              </a:rPr>
+              <a:t>▸  </a:t>
+            </a:r>
+            <a:r>
+              <a:rPr sz="1600" b="0" i="0">
+                <a:solidFill>
+                  <a:srgbClr val="1B2330"/>
+                </a:solidFill>
+                <a:latin typeface="Montserrat"/>
+              </a:rPr>
+              <a:t>Reconocimiento mutuo: material europeo si es seguro</a:t>
+            </a:r>
+          </a:p>
+          <a:p>
+            <a:pPr>
+              <a:spcAft>
+                <a:spcPts val="1100"/>
+              </a:spcAft>
+            </a:pPr>
+            <a:r>
+              <a:rPr sz="1600" b="1" i="0">
+                <a:solidFill>
+                  <a:srgbClr val="E8801A"/>
+                </a:solidFill>
+                <a:latin typeface="Montserrat"/>
+              </a:rPr>
+              <a:t>▸  </a:t>
+            </a:r>
+            <a:r>
+              <a:rPr sz="1600" b="0" i="0">
+                <a:solidFill>
+                  <a:srgbClr val="1B2330"/>
+                </a:solidFill>
+                <a:latin typeface="Montserrat"/>
+              </a:rPr>
+              <a:t>Las ITC citan las UNE sin año</a:t>
+            </a:r>
+          </a:p>
+          <a:p>
+            <a:pPr>
+              <a:spcAft>
+                <a:spcPts val="1100"/>
+              </a:spcAft>
+            </a:pPr>
+            <a:r>
+              <a:rPr sz="1600" b="1" i="0">
+                <a:solidFill>
+                  <a:srgbClr val="E8801A"/>
+                </a:solidFill>
+                <a:latin typeface="Montserrat"/>
+              </a:rPr>
+              <a:t>▸  </a:t>
+            </a:r>
+            <a:r>
+              <a:rPr sz="1600" b="0" i="0">
+                <a:solidFill>
+                  <a:srgbClr val="1B2330"/>
+                </a:solidFill>
+                <a:latin typeface="Montserrat"/>
+              </a:rPr>
+              <a:t>El listado con años, en la ITC-ICG 11</a:t>
+            </a:r>
+          </a:p>
+        </p:txBody>
+      </p:sp>
+      <p:sp>
+        <p:nvSpPr>
+          <p:cNvPr id="9" name="imgph" descr="IMGQ:european standards manual technical book"/>
+          <p:cNvSpPr/>
+          <p:nvPr/>
+        </p:nvSpPr>
+        <p:spPr>
+          <a:xfrm>
+            <a:off x="6080760" y="1965960"/>
+            <a:ext cx="5303520" cy="4572000"/>
+          </a:xfrm>
+          <a:prstGeom prst="roundRect">
+            <a:avLst/>
+          </a:prstGeom>
+          <a:solidFill>
+            <a:srgbClr val="F3F6FB"/>
+          </a:solidFill>
+          <a:ln w="12700">
+            <a:solidFill>
+              <a:srgbClr val="C7D2E6"/>
+            </a:solidFill>
+          </a:ln>
+          <a:effectLst/>
+        </p:spPr>
+        <p:style>
+          <a:lnRef idx="1">
+            <a:schemeClr val="accent1"/>
+          </a:lnRef>
+          <a:fillRef idx="3">
+            <a:schemeClr val="accent1"/>
+          </a:fillRef>
+          <a:effectRef idx="2">
+            <a:schemeClr val="accent1"/>
+          </a:effectRef>
+          <a:fontRef idx="minor">
+            <a:schemeClr val="lt1"/>
+          </a:fontRef>
+        </p:style>
+        <p:txBody>
+          <a:bodyPr rtlCol="0" anchor="ctr"/>
+          <a:lstStyle/>
+          <a:p>
+            <a:pPr algn="ctr"/>
+          </a:p>
+        </p:txBody>
+      </p:sp>
+      <p:sp>
+        <p:nvSpPr>
+          <p:cNvPr id="10" name="TextBox 9"/>
           <p:cNvSpPr txBox="1"/>
           <p:nvPr/>
         </p:nvSpPr>
         <p:spPr>
           <a:xfrm>
-            <a:off x="822960" y="2606040"/>
-            <a:ext cx="10515600" cy="2743200"/>
+            <a:off x="6355080" y="3611880"/>
+            <a:ext cx="4754880" cy="1280160"/>
           </a:xfrm>
           <a:prstGeom prst="rect">
             <a:avLst/>
@@ -7730,119 +8458,254 @@
           </a:bodyPr>
           <a:lstStyle/>
           <a:p>
-            <a:pPr>
-              <a:spcAft>
-                <a:spcPts val="1200"/>
-              </a:spcAft>
-            </a:pPr>
-            <a:r>
-              <a:rPr sz="2000" b="1" i="0">
-                <a:solidFill>
-                  <a:srgbClr val="F4A24C"/>
-                </a:solidFill>
-                <a:latin typeface="Montserrat"/>
-              </a:rPr>
-              <a:t>✓  </a:t>
-            </a:r>
-            <a:r>
-              <a:rPr sz="1900" b="0" i="0">
-                <a:solidFill>
-                  <a:srgbClr val="FFFFFF"/>
-                </a:solidFill>
-                <a:latin typeface="Montserrat"/>
-              </a:rPr>
-              <a:t>Distingues inspección de revisión con una pregunta</a:t>
-            </a:r>
-          </a:p>
-          <a:p>
-            <a:pPr>
-              <a:spcAft>
-                <a:spcPts val="1200"/>
-              </a:spcAft>
-            </a:pPr>
-            <a:r>
-              <a:rPr sz="2000" b="1" i="0">
-                <a:solidFill>
-                  <a:srgbClr val="F4A24C"/>
-                </a:solidFill>
-                <a:latin typeface="Montserrat"/>
-              </a:rPr>
-              <a:t>✓  </a:t>
-            </a:r>
-            <a:r>
-              <a:rPr sz="1900" b="0" i="0">
-                <a:solidFill>
-                  <a:srgbClr val="FFFFFF"/>
-                </a:solidFill>
-                <a:latin typeface="Montserrat"/>
-              </a:rPr>
-              <a:t>Sabes que el mantenimiento responde el titular</a:t>
-            </a:r>
-          </a:p>
-          <a:p>
-            <a:pPr>
-              <a:spcAft>
-                <a:spcPts val="1200"/>
-              </a:spcAft>
-            </a:pPr>
-            <a:r>
-              <a:rPr sz="2000" b="1" i="0">
-                <a:solidFill>
-                  <a:srgbClr val="F4A24C"/>
-                </a:solidFill>
-                <a:latin typeface="Montserrat"/>
-              </a:rPr>
-              <a:t>✓  </a:t>
-            </a:r>
-            <a:r>
-              <a:rPr sz="1900" b="0" i="0">
-                <a:solidFill>
-                  <a:srgbClr val="FFFFFF"/>
-                </a:solidFill>
-                <a:latin typeface="Montserrat"/>
-              </a:rPr>
-              <a:t>Manejas mínimos, equivalencias y excepciones</a:t>
-            </a:r>
-          </a:p>
-          <a:p>
-            <a:pPr>
-              <a:spcAft>
-                <a:spcPts val="1200"/>
-              </a:spcAft>
-            </a:pPr>
-            <a:r>
-              <a:rPr sz="2000" b="1" i="0">
-                <a:solidFill>
-                  <a:srgbClr val="F4A24C"/>
-                </a:solidFill>
-                <a:latin typeface="Montserrat"/>
-              </a:rPr>
-              <a:t>✓  </a:t>
-            </a:r>
-            <a:r>
-              <a:rPr sz="1900" b="0" i="0">
-                <a:solidFill>
-                  <a:srgbClr val="FFFFFF"/>
-                </a:solidFill>
-                <a:latin typeface="Montserrat"/>
-              </a:rPr>
-              <a:t>El protocolo de accidente lo tienes de memoria</a:t>
-            </a:r>
-          </a:p>
-        </p:txBody>
-      </p:sp>
-      <p:sp>
-        <p:nvSpPr>
-          <p:cNvPr id="7" name="Rounded Rectangle 6"/>
+            <a:pPr algn="ctr"/>
+            <a:r>
+              <a:rPr sz="1400" b="1" i="0">
+                <a:solidFill>
+                  <a:srgbClr val="64748B"/>
+                </a:solidFill>
+                <a:latin typeface="Montserrat"/>
+              </a:rPr>
+              <a:t>IMAGEN</a:t>
+            </a:r>
+          </a:p>
+          <a:p>
+            <a:pPr algn="ctr"/>
+            <a:r>
+              <a:rPr sz="1100" b="0" i="1">
+                <a:solidFill>
+                  <a:srgbClr val="64748B"/>
+                </a:solidFill>
+                <a:latin typeface="Montserrat"/>
+              </a:rPr>
+              <a:t>european standards manual technical book</a:t>
+            </a:r>
+          </a:p>
+        </p:txBody>
+      </p:sp>
+    </p:spTree>
+  </p:cSld>
+  <p:clrMapOvr>
+    <a:masterClrMapping/>
+  </p:clrMapOvr>
+  <mc:AlternateContent xmlns:mc="http://schemas.openxmlformats.org/markup-compatibility/2006">
+    <mc:Choice xmlns:p14="http://schemas.microsoft.com/office/powerpoint/2010/main" Requires="p14">
+      <p:transition spd="med" p14:dur="700">
+        <p14:cube dir="r"/>
+      </p:transition>
+    </mc:Choice>
+    <mc:Fallback>
+      <p:transition spd="med">
+        <p:push dir="r"/>
+      </p:transition>
+    </mc:Fallback>
+  </mc:AlternateContent>
+</p:sld>
+</file>
+
+<file path=ppt/slides/slide17.xml><?xml version="1.0" encoding="utf-8"?>
+<p:sld xmlns:a="http://schemas.openxmlformats.org/drawingml/2006/main" xmlns:p="http://schemas.openxmlformats.org/presentationml/2006/main" xmlns:r="http://schemas.openxmlformats.org/officeDocument/2006/relationships">
+  <p:cSld>
+    <p:spTree>
+      <p:nvGrpSpPr>
+        <p:cNvPr id="1" name=""/>
+        <p:cNvGrpSpPr/>
+        <p:nvPr/>
+      </p:nvGrpSpPr>
+      <p:grpSpPr/>
+      <p:sp>
+        <p:nvSpPr>
+          <p:cNvPr id="2" name="Rectangle 1"/>
           <p:cNvSpPr/>
           <p:nvPr/>
         </p:nvSpPr>
         <p:spPr>
           <a:xfrm>
-            <a:off x="822960" y="5532120"/>
-            <a:ext cx="10515600" cy="822960"/>
-          </a:xfrm>
-          <a:prstGeom prst="roundRect">
+            <a:off x="0" y="0"/>
+            <a:ext cx="12191695" cy="6858000"/>
+          </a:xfrm>
+          <a:prstGeom prst="rect">
+            <a:avLst/>
+          </a:prstGeom>
+          <a:solidFill>
+            <a:srgbClr val="FFFFFF"/>
+          </a:solidFill>
+          <a:ln>
+            <a:noFill/>
+          </a:ln>
+          <a:effectLst/>
+        </p:spPr>
+        <p:style>
+          <a:lnRef idx="1">
+            <a:schemeClr val="accent1"/>
+          </a:lnRef>
+          <a:fillRef idx="3">
+            <a:schemeClr val="accent1"/>
+          </a:fillRef>
+          <a:effectRef idx="2">
+            <a:schemeClr val="accent1"/>
+          </a:effectRef>
+          <a:fontRef idx="minor">
+            <a:schemeClr val="lt1"/>
+          </a:fontRef>
+        </p:style>
+        <p:txBody>
+          <a:bodyPr rtlCol="0" anchor="ctr"/>
+          <a:lstStyle/>
+          <a:p>
+            <a:pPr algn="ctr"/>
+          </a:p>
+        </p:txBody>
+      </p:sp>
+      <p:sp>
+        <p:nvSpPr>
+          <p:cNvPr id="3" name="TextBox 2"/>
+          <p:cNvSpPr txBox="1"/>
+          <p:nvPr/>
+        </p:nvSpPr>
+        <p:spPr>
+          <a:xfrm>
+            <a:off x="10607040" y="320040"/>
+            <a:ext cx="1371600" cy="365760"/>
+          </a:xfrm>
+          <a:prstGeom prst="rect">
+            <a:avLst/>
+          </a:prstGeom>
+          <a:noFill/>
+        </p:spPr>
+        <p:txBody>
+          <a:bodyPr wrap="square">
+            <a:spAutoFit/>
+          </a:bodyPr>
+          <a:lstStyle/>
+          <a:p>
+            <a:pPr algn="r"/>
+            <a:r>
+              <a:rPr sz="1000" b="1" i="0">
+                <a:solidFill>
+                  <a:srgbClr val="64748B"/>
+                </a:solidFill>
+                <a:latin typeface="Montserrat"/>
+              </a:rPr>
+              <a:t>017 / 022</a:t>
+            </a:r>
+          </a:p>
+        </p:txBody>
+      </p:sp>
+      <p:sp>
+        <p:nvSpPr>
+          <p:cNvPr id="4" name="TextBox 3"/>
+          <p:cNvSpPr txBox="1"/>
+          <p:nvPr/>
+        </p:nvSpPr>
+        <p:spPr>
+          <a:xfrm>
+            <a:off x="457200" y="6419088"/>
+            <a:ext cx="8229600" cy="365760"/>
+          </a:xfrm>
+          <a:prstGeom prst="rect">
+            <a:avLst/>
+          </a:prstGeom>
+          <a:noFill/>
+        </p:spPr>
+        <p:txBody>
+          <a:bodyPr wrap="square">
+            <a:spAutoFit/>
+          </a:bodyPr>
+          <a:lstStyle/>
+          <a:p>
+            <a:r>
+              <a:rPr sz="900" b="0" i="0">
+                <a:solidFill>
+                  <a:srgbClr val="64748B"/>
+                </a:solidFill>
+                <a:latin typeface="Montserrat"/>
+              </a:rPr>
+              <a:t>Curso Gas B · Tema 00 · El Reglamento de Gas</a:t>
+            </a:r>
+          </a:p>
+        </p:txBody>
+      </p:sp>
+      <p:sp>
+        <p:nvSpPr>
+          <p:cNvPr id="5" name="TextBox 4"/>
+          <p:cNvSpPr txBox="1"/>
+          <p:nvPr/>
+        </p:nvSpPr>
+        <p:spPr>
+          <a:xfrm>
+            <a:off x="822960" y="457200"/>
+            <a:ext cx="10058400" cy="365760"/>
+          </a:xfrm>
+          <a:prstGeom prst="rect">
+            <a:avLst/>
+          </a:prstGeom>
+          <a:noFill/>
+        </p:spPr>
+        <p:txBody>
+          <a:bodyPr wrap="square">
+            <a:spAutoFit/>
+          </a:bodyPr>
+          <a:lstStyle/>
+          <a:p>
+            <a:r>
+              <a:rPr sz="1300" b="1" i="0">
+                <a:solidFill>
+                  <a:srgbClr val="E8801A"/>
+                </a:solidFill>
+                <a:latin typeface="Montserrat"/>
+              </a:rPr>
+              <a:t>ARTÍCULO 13 · SANCIONES</a:t>
+            </a:r>
+          </a:p>
+        </p:txBody>
+      </p:sp>
+      <p:sp>
+        <p:nvSpPr>
+          <p:cNvPr id="6" name="TextBox 5"/>
+          <p:cNvSpPr txBox="1"/>
+          <p:nvPr/>
+        </p:nvSpPr>
+        <p:spPr>
+          <a:xfrm>
+            <a:off x="822960" y="868680"/>
+            <a:ext cx="10515600" cy="914400"/>
+          </a:xfrm>
+          <a:prstGeom prst="rect">
+            <a:avLst/>
+          </a:prstGeom>
+          <a:noFill/>
+        </p:spPr>
+        <p:txBody>
+          <a:bodyPr wrap="square">
+            <a:spAutoFit/>
+          </a:bodyPr>
+          <a:lstStyle/>
+          <a:p>
+            <a:r>
+              <a:rPr sz="2800" b="1" i="0">
+                <a:solidFill>
+                  <a:srgbClr val="1E2761"/>
+                </a:solidFill>
+                <a:latin typeface="Montserrat"/>
+              </a:rPr>
+              <a:t>Las multas no las pone el Reglamento</a:t>
+            </a:r>
+          </a:p>
+        </p:txBody>
+      </p:sp>
+      <p:sp>
+        <p:nvSpPr>
+          <p:cNvPr id="7" name="Rectangle 6"/>
+          <p:cNvSpPr/>
+          <p:nvPr/>
+        </p:nvSpPr>
+        <p:spPr>
+          <a:xfrm>
+            <a:off x="868680" y="1627632"/>
+            <a:ext cx="2011680" cy="73152"/>
+          </a:xfrm>
+          <a:prstGeom prst="rect">
             <a:avLst/>
           </a:prstGeom>
           <a:solidFill>
@@ -7883,8 +8746,8 @@
         </p:nvSpPr>
         <p:spPr>
           <a:xfrm>
-            <a:off x="1051560" y="5623560"/>
-            <a:ext cx="10058400" cy="640080"/>
+            <a:off x="6355080" y="1965960"/>
+            <a:ext cx="5029200" cy="4206240"/>
           </a:xfrm>
           <a:prstGeom prst="rect">
             <a:avLst/>
@@ -7897,14 +8760,171 @@
           </a:bodyPr>
           <a:lstStyle/>
           <a:p>
-            <a:r>
-              <a:rPr sz="1500" b="1" i="1">
-                <a:solidFill>
-                  <a:srgbClr val="1E2761"/>
-                </a:solidFill>
-                <a:latin typeface="Montserrat"/>
-              </a:rPr>
-              <a:t>Has terminado el marco normativo: ya piensas como gasista. A por las instalaciones.</a:t>
+            <a:pPr>
+              <a:spcAft>
+                <a:spcPts val="1100"/>
+              </a:spcAft>
+            </a:pPr>
+            <a:r>
+              <a:rPr sz="1600" b="1" i="0">
+                <a:solidFill>
+                  <a:srgbClr val="E8801A"/>
+                </a:solidFill>
+                <a:latin typeface="Montserrat"/>
+              </a:rPr>
+              <a:t>▸  </a:t>
+            </a:r>
+            <a:r>
+              <a:rPr sz="1600" b="0" i="0">
+                <a:solidFill>
+                  <a:srgbClr val="1B2330"/>
+                </a:solidFill>
+                <a:latin typeface="Montserrat"/>
+              </a:rPr>
+              <a:t>Régimen de infracciones y sanciones</a:t>
+            </a:r>
+          </a:p>
+          <a:p>
+            <a:pPr>
+              <a:spcAft>
+                <a:spcPts val="1100"/>
+              </a:spcAft>
+            </a:pPr>
+            <a:r>
+              <a:rPr sz="1600" b="1" i="0">
+                <a:solidFill>
+                  <a:srgbClr val="E8801A"/>
+                </a:solidFill>
+                <a:latin typeface="Montserrat"/>
+              </a:rPr>
+              <a:t>▸  </a:t>
+            </a:r>
+            <a:r>
+              <a:rPr sz="1600" b="0" i="0">
+                <a:solidFill>
+                  <a:srgbClr val="1B2330"/>
+                </a:solidFill>
+                <a:latin typeface="Montserrat"/>
+              </a:rPr>
+              <a:t>Ley de industria y ley de hidrocarburos</a:t>
+            </a:r>
+          </a:p>
+          <a:p>
+            <a:pPr>
+              <a:spcAft>
+                <a:spcPts val="1100"/>
+              </a:spcAft>
+            </a:pPr>
+            <a:r>
+              <a:rPr sz="1600" b="1" i="0">
+                <a:solidFill>
+                  <a:srgbClr val="E8801A"/>
+                </a:solidFill>
+                <a:latin typeface="Montserrat"/>
+              </a:rPr>
+              <a:t>▸  </a:t>
+            </a:r>
+            <a:r>
+              <a:rPr sz="1600" b="0" i="0">
+                <a:solidFill>
+                  <a:srgbClr val="1B2330"/>
+                </a:solidFill>
+                <a:latin typeface="Montserrat"/>
+              </a:rPr>
+              <a:t>Leve, grave o muy grave</a:t>
+            </a:r>
+          </a:p>
+        </p:txBody>
+      </p:sp>
+      <p:sp>
+        <p:nvSpPr>
+          <p:cNvPr id="9" name="imgph" descr="IMGQ:legal code book gavel table"/>
+          <p:cNvSpPr/>
+          <p:nvPr/>
+        </p:nvSpPr>
+        <p:spPr>
+          <a:xfrm>
+            <a:off x="822960" y="1965960"/>
+            <a:ext cx="5303520" cy="4572000"/>
+          </a:xfrm>
+          <a:prstGeom prst="roundRect">
+            <a:avLst/>
+          </a:prstGeom>
+          <a:solidFill>
+            <a:srgbClr val="F3F6FB"/>
+          </a:solidFill>
+          <a:ln w="12700">
+            <a:solidFill>
+              <a:srgbClr val="C7D2E6"/>
+            </a:solidFill>
+          </a:ln>
+          <a:effectLst/>
+        </p:spPr>
+        <p:style>
+          <a:lnRef idx="1">
+            <a:schemeClr val="accent1"/>
+          </a:lnRef>
+          <a:fillRef idx="3">
+            <a:schemeClr val="accent1"/>
+          </a:fillRef>
+          <a:effectRef idx="2">
+            <a:schemeClr val="accent1"/>
+          </a:effectRef>
+          <a:fontRef idx="minor">
+            <a:schemeClr val="lt1"/>
+          </a:fontRef>
+        </p:style>
+        <p:txBody>
+          <a:bodyPr rtlCol="0" anchor="ctr"/>
+          <a:lstStyle/>
+          <a:p>
+            <a:pPr algn="ctr"/>
+          </a:p>
+        </p:txBody>
+      </p:sp>
+      <p:sp>
+        <p:nvSpPr>
+          <p:cNvPr id="10" name="TextBox 9"/>
+          <p:cNvSpPr txBox="1"/>
+          <p:nvPr/>
+        </p:nvSpPr>
+        <p:spPr>
+          <a:xfrm>
+            <a:off x="1097280" y="3611880"/>
+            <a:ext cx="4754880" cy="1280160"/>
+          </a:xfrm>
+          <a:prstGeom prst="rect">
+            <a:avLst/>
+          </a:prstGeom>
+          <a:noFill/>
+        </p:spPr>
+        <p:txBody>
+          <a:bodyPr wrap="square">
+            <a:spAutoFit/>
+          </a:bodyPr>
+          <a:lstStyle/>
+          <a:p>
+            <a:pPr algn="ctr"/>
+            <a:r>
+              <a:rPr sz="1400" b="1" i="0">
+                <a:solidFill>
+                  <a:srgbClr val="64748B"/>
+                </a:solidFill>
+                <a:latin typeface="Montserrat"/>
+              </a:rPr>
+              <a:t>IMAGEN</a:t>
+            </a:r>
+          </a:p>
+          <a:p>
+            <a:pPr algn="ctr"/>
+            <a:r>
+              <a:rPr sz="1100" b="0" i="1">
+                <a:solidFill>
+                  <a:srgbClr val="64748B"/>
+                </a:solidFill>
+                <a:latin typeface="Montserrat"/>
+              </a:rPr>
+              <a:t>legal code book gavel table</a:t>
             </a:r>
           </a:p>
         </p:txBody>
@@ -7914,6 +8934,1355 @@
   <p:clrMapOvr>
     <a:masterClrMapping/>
   </p:clrMapOvr>
+  <mc:AlternateContent xmlns:mc="http://schemas.openxmlformats.org/markup-compatibility/2006">
+    <mc:Choice xmlns:p14="http://schemas.microsoft.com/office/powerpoint/2010/main" Requires="p14">
+      <p:transition spd="med" p14:dur="700">
+        <p14:cube dir="l"/>
+      </p:transition>
+    </mc:Choice>
+    <mc:Fallback>
+      <p:transition spd="med">
+        <p:push dir="l"/>
+      </p:transition>
+    </mc:Fallback>
+  </mc:AlternateContent>
+</p:sld>
+</file>
+
+<file path=ppt/slides/slide18.xml><?xml version="1.0" encoding="utf-8"?>
+<p:sld xmlns:a="http://schemas.openxmlformats.org/drawingml/2006/main" xmlns:p="http://schemas.openxmlformats.org/presentationml/2006/main" xmlns:r="http://schemas.openxmlformats.org/officeDocument/2006/relationships">
+  <p:cSld>
+    <p:spTree>
+      <p:nvGrpSpPr>
+        <p:cNvPr id="1" name=""/>
+        <p:cNvGrpSpPr/>
+        <p:nvPr/>
+      </p:nvGrpSpPr>
+      <p:grpSpPr/>
+      <p:sp>
+        <p:nvSpPr>
+          <p:cNvPr id="2" name="Rectangle 1"/>
+          <p:cNvSpPr/>
+          <p:nvPr/>
+        </p:nvSpPr>
+        <p:spPr>
+          <a:xfrm>
+            <a:off x="0" y="0"/>
+            <a:ext cx="12191695" cy="6858000"/>
+          </a:xfrm>
+          <a:prstGeom prst="rect">
+            <a:avLst/>
+          </a:prstGeom>
+          <a:solidFill>
+            <a:srgbClr val="FFFFFF"/>
+          </a:solidFill>
+          <a:ln>
+            <a:noFill/>
+          </a:ln>
+          <a:effectLst/>
+        </p:spPr>
+        <p:style>
+          <a:lnRef idx="1">
+            <a:schemeClr val="accent1"/>
+          </a:lnRef>
+          <a:fillRef idx="3">
+            <a:schemeClr val="accent1"/>
+          </a:fillRef>
+          <a:effectRef idx="2">
+            <a:schemeClr val="accent1"/>
+          </a:effectRef>
+          <a:fontRef idx="minor">
+            <a:schemeClr val="lt1"/>
+          </a:fontRef>
+        </p:style>
+        <p:txBody>
+          <a:bodyPr rtlCol="0" anchor="ctr"/>
+          <a:lstStyle/>
+          <a:p>
+            <a:pPr algn="ctr"/>
+          </a:p>
+        </p:txBody>
+      </p:sp>
+      <p:sp>
+        <p:nvSpPr>
+          <p:cNvPr id="3" name="TextBox 2"/>
+          <p:cNvSpPr txBox="1"/>
+          <p:nvPr/>
+        </p:nvSpPr>
+        <p:spPr>
+          <a:xfrm>
+            <a:off x="10607040" y="320040"/>
+            <a:ext cx="1371600" cy="365760"/>
+          </a:xfrm>
+          <a:prstGeom prst="rect">
+            <a:avLst/>
+          </a:prstGeom>
+          <a:noFill/>
+        </p:spPr>
+        <p:txBody>
+          <a:bodyPr wrap="square">
+            <a:spAutoFit/>
+          </a:bodyPr>
+          <a:lstStyle/>
+          <a:p>
+            <a:pPr algn="r"/>
+            <a:r>
+              <a:rPr sz="1000" b="1" i="0">
+                <a:solidFill>
+                  <a:srgbClr val="64748B"/>
+                </a:solidFill>
+                <a:latin typeface="Montserrat"/>
+              </a:rPr>
+              <a:t>018 / 022</a:t>
+            </a:r>
+          </a:p>
+        </p:txBody>
+      </p:sp>
+      <p:sp>
+        <p:nvSpPr>
+          <p:cNvPr id="4" name="TextBox 3"/>
+          <p:cNvSpPr txBox="1"/>
+          <p:nvPr/>
+        </p:nvSpPr>
+        <p:spPr>
+          <a:xfrm>
+            <a:off x="457200" y="6419088"/>
+            <a:ext cx="8229600" cy="365760"/>
+          </a:xfrm>
+          <a:prstGeom prst="rect">
+            <a:avLst/>
+          </a:prstGeom>
+          <a:noFill/>
+        </p:spPr>
+        <p:txBody>
+          <a:bodyPr wrap="square">
+            <a:spAutoFit/>
+          </a:bodyPr>
+          <a:lstStyle/>
+          <a:p>
+            <a:r>
+              <a:rPr sz="900" b="0" i="0">
+                <a:solidFill>
+                  <a:srgbClr val="64748B"/>
+                </a:solidFill>
+                <a:latin typeface="Montserrat"/>
+              </a:rPr>
+              <a:t>Curso Gas B · Tema 00 · El Reglamento de Gas</a:t>
+            </a:r>
+          </a:p>
+        </p:txBody>
+      </p:sp>
+      <p:sp>
+        <p:nvSpPr>
+          <p:cNvPr id="5" name="TextBox 4"/>
+          <p:cNvSpPr txBox="1"/>
+          <p:nvPr/>
+        </p:nvSpPr>
+        <p:spPr>
+          <a:xfrm>
+            <a:off x="822960" y="457200"/>
+            <a:ext cx="10058400" cy="365760"/>
+          </a:xfrm>
+          <a:prstGeom prst="rect">
+            <a:avLst/>
+          </a:prstGeom>
+          <a:noFill/>
+        </p:spPr>
+        <p:txBody>
+          <a:bodyPr wrap="square">
+            <a:spAutoFit/>
+          </a:bodyPr>
+          <a:lstStyle/>
+          <a:p>
+            <a:r>
+              <a:rPr sz="1300" b="1" i="0">
+                <a:solidFill>
+                  <a:srgbClr val="E8801A"/>
+                </a:solidFill>
+                <a:latin typeface="Montserrat"/>
+              </a:rPr>
+              <a:t>ARTÍCULO 14 · ACCIDENTES</a:t>
+            </a:r>
+          </a:p>
+        </p:txBody>
+      </p:sp>
+      <p:sp>
+        <p:nvSpPr>
+          <p:cNvPr id="6" name="TextBox 5"/>
+          <p:cNvSpPr txBox="1"/>
+          <p:nvPr/>
+        </p:nvSpPr>
+        <p:spPr>
+          <a:xfrm>
+            <a:off x="822960" y="868680"/>
+            <a:ext cx="10515600" cy="914400"/>
+          </a:xfrm>
+          <a:prstGeom prst="rect">
+            <a:avLst/>
+          </a:prstGeom>
+          <a:noFill/>
+        </p:spPr>
+        <p:txBody>
+          <a:bodyPr wrap="square">
+            <a:spAutoFit/>
+          </a:bodyPr>
+          <a:lstStyle/>
+          <a:p>
+            <a:r>
+              <a:rPr sz="2800" b="1" i="0">
+                <a:solidFill>
+                  <a:srgbClr val="1E2761"/>
+                </a:solidFill>
+                <a:latin typeface="Montserrat"/>
+              </a:rPr>
+              <a:t>Primero llamo, luego escribo</a:t>
+            </a:r>
+          </a:p>
+        </p:txBody>
+      </p:sp>
+      <p:sp>
+        <p:nvSpPr>
+          <p:cNvPr id="7" name="Rectangle 6"/>
+          <p:cNvSpPr/>
+          <p:nvPr/>
+        </p:nvSpPr>
+        <p:spPr>
+          <a:xfrm>
+            <a:off x="868680" y="1627632"/>
+            <a:ext cx="2011680" cy="73152"/>
+          </a:xfrm>
+          <a:prstGeom prst="rect">
+            <a:avLst/>
+          </a:prstGeom>
+          <a:solidFill>
+            <a:srgbClr val="E8801A"/>
+          </a:solidFill>
+          <a:ln>
+            <a:noFill/>
+          </a:ln>
+          <a:effectLst/>
+        </p:spPr>
+        <p:style>
+          <a:lnRef idx="1">
+            <a:schemeClr val="accent1"/>
+          </a:lnRef>
+          <a:fillRef idx="3">
+            <a:schemeClr val="accent1"/>
+          </a:fillRef>
+          <a:effectRef idx="2">
+            <a:schemeClr val="accent1"/>
+          </a:effectRef>
+          <a:fontRef idx="minor">
+            <a:schemeClr val="lt1"/>
+          </a:fontRef>
+        </p:style>
+        <p:txBody>
+          <a:bodyPr rtlCol="0" anchor="ctr"/>
+          <a:lstStyle/>
+          <a:p>
+            <a:pPr algn="ctr"/>
+          </a:p>
+        </p:txBody>
+      </p:sp>
+      <p:sp>
+        <p:nvSpPr>
+          <p:cNvPr id="8" name="TextBox 7"/>
+          <p:cNvSpPr txBox="1"/>
+          <p:nvPr/>
+        </p:nvSpPr>
+        <p:spPr>
+          <a:xfrm>
+            <a:off x="822960" y="1965960"/>
+            <a:ext cx="5029200" cy="4206240"/>
+          </a:xfrm>
+          <a:prstGeom prst="rect">
+            <a:avLst/>
+          </a:prstGeom>
+          <a:noFill/>
+        </p:spPr>
+        <p:txBody>
+          <a:bodyPr wrap="square">
+            <a:spAutoFit/>
+          </a:bodyPr>
+          <a:lstStyle/>
+          <a:p>
+            <a:pPr>
+              <a:spcAft>
+                <a:spcPts val="1100"/>
+              </a:spcAft>
+            </a:pPr>
+            <a:r>
+              <a:rPr sz="1600" b="1" i="0">
+                <a:solidFill>
+                  <a:srgbClr val="E8801A"/>
+                </a:solidFill>
+                <a:latin typeface="Montserrat"/>
+              </a:rPr>
+              <a:t>▸  </a:t>
+            </a:r>
+            <a:r>
+              <a:rPr sz="1600" b="0" i="0">
+                <a:solidFill>
+                  <a:srgbClr val="1B2330"/>
+                </a:solidFill>
+                <a:latin typeface="Montserrat"/>
+              </a:rPr>
+              <a:t>Suministrador avisa en 24 horas</a:t>
+            </a:r>
+          </a:p>
+          <a:p>
+            <a:pPr>
+              <a:spcAft>
+                <a:spcPts val="1100"/>
+              </a:spcAft>
+            </a:pPr>
+            <a:r>
+              <a:rPr sz="1600" b="1" i="0">
+                <a:solidFill>
+                  <a:srgbClr val="E8801A"/>
+                </a:solidFill>
+                <a:latin typeface="Montserrat"/>
+              </a:rPr>
+              <a:t>▸  </a:t>
+            </a:r>
+            <a:r>
+              <a:rPr sz="1600" b="0" i="0">
+                <a:solidFill>
+                  <a:srgbClr val="1B2330"/>
+                </a:solidFill>
+                <a:latin typeface="Montserrat"/>
+              </a:rPr>
+              <a:t>Informe completo en 7 días</a:t>
+            </a:r>
+          </a:p>
+          <a:p>
+            <a:pPr>
+              <a:spcAft>
+                <a:spcPts val="1100"/>
+              </a:spcAft>
+            </a:pPr>
+            <a:r>
+              <a:rPr sz="1600" b="1" i="0">
+                <a:solidFill>
+                  <a:srgbClr val="E8801A"/>
+                </a:solidFill>
+                <a:latin typeface="Montserrat"/>
+              </a:rPr>
+              <a:t>▸  </a:t>
+            </a:r>
+            <a:r>
+              <a:rPr sz="1600" b="0" i="0">
+                <a:solidFill>
+                  <a:srgbClr val="1B2330"/>
+                </a:solidFill>
+                <a:latin typeface="Montserrat"/>
+              </a:rPr>
+              <a:t>Clases: deflagración, explosión, intoxicación, incendio</a:t>
+            </a:r>
+          </a:p>
+        </p:txBody>
+      </p:sp>
+      <p:sp>
+        <p:nvSpPr>
+          <p:cNvPr id="9" name="imgph" descr="IMGQ:emergency gas leak warning scene"/>
+          <p:cNvSpPr/>
+          <p:nvPr/>
+        </p:nvSpPr>
+        <p:spPr>
+          <a:xfrm>
+            <a:off x="6080760" y="1965960"/>
+            <a:ext cx="5303520" cy="4572000"/>
+          </a:xfrm>
+          <a:prstGeom prst="roundRect">
+            <a:avLst/>
+          </a:prstGeom>
+          <a:solidFill>
+            <a:srgbClr val="F3F6FB"/>
+          </a:solidFill>
+          <a:ln w="12700">
+            <a:solidFill>
+              <a:srgbClr val="C7D2E6"/>
+            </a:solidFill>
+          </a:ln>
+          <a:effectLst/>
+        </p:spPr>
+        <p:style>
+          <a:lnRef idx="1">
+            <a:schemeClr val="accent1"/>
+          </a:lnRef>
+          <a:fillRef idx="3">
+            <a:schemeClr val="accent1"/>
+          </a:fillRef>
+          <a:effectRef idx="2">
+            <a:schemeClr val="accent1"/>
+          </a:effectRef>
+          <a:fontRef idx="minor">
+            <a:schemeClr val="lt1"/>
+          </a:fontRef>
+        </p:style>
+        <p:txBody>
+          <a:bodyPr rtlCol="0" anchor="ctr"/>
+          <a:lstStyle/>
+          <a:p>
+            <a:pPr algn="ctr"/>
+          </a:p>
+        </p:txBody>
+      </p:sp>
+      <p:sp>
+        <p:nvSpPr>
+          <p:cNvPr id="10" name="TextBox 9"/>
+          <p:cNvSpPr txBox="1"/>
+          <p:nvPr/>
+        </p:nvSpPr>
+        <p:spPr>
+          <a:xfrm>
+            <a:off x="6355080" y="3611880"/>
+            <a:ext cx="4754880" cy="1280160"/>
+          </a:xfrm>
+          <a:prstGeom prst="rect">
+            <a:avLst/>
+          </a:prstGeom>
+          <a:noFill/>
+        </p:spPr>
+        <p:txBody>
+          <a:bodyPr wrap="square">
+            <a:spAutoFit/>
+          </a:bodyPr>
+          <a:lstStyle/>
+          <a:p>
+            <a:pPr algn="ctr"/>
+            <a:r>
+              <a:rPr sz="1400" b="1" i="0">
+                <a:solidFill>
+                  <a:srgbClr val="64748B"/>
+                </a:solidFill>
+                <a:latin typeface="Montserrat"/>
+              </a:rPr>
+              <a:t>IMAGEN</a:t>
+            </a:r>
+          </a:p>
+          <a:p>
+            <a:pPr algn="ctr"/>
+            <a:r>
+              <a:rPr sz="1100" b="0" i="1">
+                <a:solidFill>
+                  <a:srgbClr val="64748B"/>
+                </a:solidFill>
+                <a:latin typeface="Montserrat"/>
+              </a:rPr>
+              <a:t>emergency gas leak warning scene</a:t>
+            </a:r>
+          </a:p>
+        </p:txBody>
+      </p:sp>
+    </p:spTree>
+  </p:cSld>
+  <p:clrMapOvr>
+    <a:masterClrMapping/>
+  </p:clrMapOvr>
+  <mc:AlternateContent xmlns:mc="http://schemas.openxmlformats.org/markup-compatibility/2006">
+    <mc:Choice xmlns:p14="http://schemas.microsoft.com/office/powerpoint/2010/main" Requires="p14">
+      <p:transition spd="med" p14:dur="700">
+        <p14:cube dir="r"/>
+      </p:transition>
+    </mc:Choice>
+    <mc:Fallback>
+      <p:transition spd="med">
+        <p:push dir="r"/>
+      </p:transition>
+    </mc:Fallback>
+  </mc:AlternateContent>
+</p:sld>
+</file>
+
+<file path=ppt/slides/slide19.xml><?xml version="1.0" encoding="utf-8"?>
+<p:sld xmlns:a="http://schemas.openxmlformats.org/drawingml/2006/main" xmlns:p="http://schemas.openxmlformats.org/presentationml/2006/main" xmlns:r="http://schemas.openxmlformats.org/officeDocument/2006/relationships">
+  <p:cSld>
+    <p:spTree>
+      <p:nvGrpSpPr>
+        <p:cNvPr id="1" name=""/>
+        <p:cNvGrpSpPr/>
+        <p:nvPr/>
+      </p:nvGrpSpPr>
+      <p:grpSpPr/>
+      <p:sp>
+        <p:nvSpPr>
+          <p:cNvPr id="2" name="Rectangle 1"/>
+          <p:cNvSpPr/>
+          <p:nvPr/>
+        </p:nvSpPr>
+        <p:spPr>
+          <a:xfrm>
+            <a:off x="0" y="0"/>
+            <a:ext cx="12191695" cy="6858000"/>
+          </a:xfrm>
+          <a:prstGeom prst="rect">
+            <a:avLst/>
+          </a:prstGeom>
+          <a:solidFill>
+            <a:srgbClr val="FFFFFF"/>
+          </a:solidFill>
+          <a:ln>
+            <a:noFill/>
+          </a:ln>
+          <a:effectLst/>
+        </p:spPr>
+        <p:style>
+          <a:lnRef idx="1">
+            <a:schemeClr val="accent1"/>
+          </a:lnRef>
+          <a:fillRef idx="3">
+            <a:schemeClr val="accent1"/>
+          </a:fillRef>
+          <a:effectRef idx="2">
+            <a:schemeClr val="accent1"/>
+          </a:effectRef>
+          <a:fontRef idx="minor">
+            <a:schemeClr val="lt1"/>
+          </a:fontRef>
+        </p:style>
+        <p:txBody>
+          <a:bodyPr rtlCol="0" anchor="ctr"/>
+          <a:lstStyle/>
+          <a:p>
+            <a:pPr algn="ctr"/>
+          </a:p>
+        </p:txBody>
+      </p:sp>
+      <p:sp>
+        <p:nvSpPr>
+          <p:cNvPr id="3" name="TextBox 2"/>
+          <p:cNvSpPr txBox="1"/>
+          <p:nvPr/>
+        </p:nvSpPr>
+        <p:spPr>
+          <a:xfrm>
+            <a:off x="10607040" y="320040"/>
+            <a:ext cx="1371600" cy="365760"/>
+          </a:xfrm>
+          <a:prstGeom prst="rect">
+            <a:avLst/>
+          </a:prstGeom>
+          <a:noFill/>
+        </p:spPr>
+        <p:txBody>
+          <a:bodyPr wrap="square">
+            <a:spAutoFit/>
+          </a:bodyPr>
+          <a:lstStyle/>
+          <a:p>
+            <a:pPr algn="r"/>
+            <a:r>
+              <a:rPr sz="1000" b="1" i="0">
+                <a:solidFill>
+                  <a:srgbClr val="64748B"/>
+                </a:solidFill>
+                <a:latin typeface="Montserrat"/>
+              </a:rPr>
+              <a:t>019 / 022</a:t>
+            </a:r>
+          </a:p>
+        </p:txBody>
+      </p:sp>
+      <p:sp>
+        <p:nvSpPr>
+          <p:cNvPr id="4" name="TextBox 3"/>
+          <p:cNvSpPr txBox="1"/>
+          <p:nvPr/>
+        </p:nvSpPr>
+        <p:spPr>
+          <a:xfrm>
+            <a:off x="457200" y="6419088"/>
+            <a:ext cx="8229600" cy="365760"/>
+          </a:xfrm>
+          <a:prstGeom prst="rect">
+            <a:avLst/>
+          </a:prstGeom>
+          <a:noFill/>
+        </p:spPr>
+        <p:txBody>
+          <a:bodyPr wrap="square">
+            <a:spAutoFit/>
+          </a:bodyPr>
+          <a:lstStyle/>
+          <a:p>
+            <a:r>
+              <a:rPr sz="900" b="0" i="0">
+                <a:solidFill>
+                  <a:srgbClr val="64748B"/>
+                </a:solidFill>
+                <a:latin typeface="Montserrat"/>
+              </a:rPr>
+              <a:t>Curso Gas B · Tema 00 · El Reglamento de Gas</a:t>
+            </a:r>
+          </a:p>
+        </p:txBody>
+      </p:sp>
+      <p:sp>
+        <p:nvSpPr>
+          <p:cNvPr id="5" name="Rectangle 4"/>
+          <p:cNvSpPr/>
+          <p:nvPr/>
+        </p:nvSpPr>
+        <p:spPr>
+          <a:xfrm>
+            <a:off x="0" y="0"/>
+            <a:ext cx="12191695" cy="1143000"/>
+          </a:xfrm>
+          <a:prstGeom prst="rect">
+            <a:avLst/>
+          </a:prstGeom>
+          <a:solidFill>
+            <a:srgbClr val="E8801A"/>
+          </a:solidFill>
+          <a:ln>
+            <a:noFill/>
+          </a:ln>
+          <a:effectLst/>
+        </p:spPr>
+        <p:style>
+          <a:lnRef idx="1">
+            <a:schemeClr val="accent1"/>
+          </a:lnRef>
+          <a:fillRef idx="3">
+            <a:schemeClr val="accent1"/>
+          </a:fillRef>
+          <a:effectRef idx="2">
+            <a:schemeClr val="accent1"/>
+          </a:effectRef>
+          <a:fontRef idx="minor">
+            <a:schemeClr val="lt1"/>
+          </a:fontRef>
+        </p:style>
+        <p:txBody>
+          <a:bodyPr rtlCol="0" anchor="ctr"/>
+          <a:lstStyle/>
+          <a:p>
+            <a:pPr algn="ctr"/>
+          </a:p>
+        </p:txBody>
+      </p:sp>
+      <p:sp>
+        <p:nvSpPr>
+          <p:cNvPr id="6" name="TextBox 5"/>
+          <p:cNvSpPr txBox="1"/>
+          <p:nvPr/>
+        </p:nvSpPr>
+        <p:spPr>
+          <a:xfrm>
+            <a:off x="822960" y="274320"/>
+            <a:ext cx="10515600" cy="640080"/>
+          </a:xfrm>
+          <a:prstGeom prst="rect">
+            <a:avLst/>
+          </a:prstGeom>
+          <a:noFill/>
+        </p:spPr>
+        <p:txBody>
+          <a:bodyPr wrap="square">
+            <a:spAutoFit/>
+          </a:bodyPr>
+          <a:lstStyle/>
+          <a:p>
+            <a:r>
+              <a:rPr sz="2400" b="1" i="0">
+                <a:solidFill>
+                  <a:srgbClr val="FFFFFF"/>
+                </a:solidFill>
+                <a:latin typeface="Montserrat"/>
+              </a:rPr>
+              <a:t>⚡  PREGUNTA RÁPIDA</a:t>
+            </a:r>
+          </a:p>
+        </p:txBody>
+      </p:sp>
+      <p:sp>
+        <p:nvSpPr>
+          <p:cNvPr id="7" name="TextBox 6"/>
+          <p:cNvSpPr txBox="1"/>
+          <p:nvPr/>
+        </p:nvSpPr>
+        <p:spPr>
+          <a:xfrm>
+            <a:off x="822960" y="1508760"/>
+            <a:ext cx="10515600" cy="1371600"/>
+          </a:xfrm>
+          <a:prstGeom prst="rect">
+            <a:avLst/>
+          </a:prstGeom>
+          <a:noFill/>
+        </p:spPr>
+        <p:txBody>
+          <a:bodyPr wrap="square">
+            <a:spAutoFit/>
+          </a:bodyPr>
+          <a:lstStyle/>
+          <a:p>
+            <a:r>
+              <a:rPr sz="2400" b="1" i="0">
+                <a:solidFill>
+                  <a:srgbClr val="1E2761"/>
+                </a:solidFill>
+                <a:latin typeface="Montserrat"/>
+              </a:rPr>
+              <a:t>Ante un accidente grave, ¿qué plazos debe cumplir el suministrador?</a:t>
+            </a:r>
+          </a:p>
+        </p:txBody>
+      </p:sp>
+      <p:sp>
+        <p:nvSpPr>
+          <p:cNvPr id="8" name="Rounded Rectangle 7"/>
+          <p:cNvSpPr/>
+          <p:nvPr/>
+        </p:nvSpPr>
+        <p:spPr>
+          <a:xfrm>
+            <a:off x="822960" y="3291840"/>
+            <a:ext cx="4983480" cy="1143000"/>
+          </a:xfrm>
+          <a:prstGeom prst="roundRect">
+            <a:avLst/>
+          </a:prstGeom>
+          <a:solidFill>
+            <a:srgbClr val="F3F6FB"/>
+          </a:solidFill>
+          <a:ln w="12700">
+            <a:solidFill>
+              <a:srgbClr val="C7D2E6"/>
+            </a:solidFill>
+          </a:ln>
+          <a:effectLst/>
+        </p:spPr>
+        <p:style>
+          <a:lnRef idx="1">
+            <a:schemeClr val="accent1"/>
+          </a:lnRef>
+          <a:fillRef idx="3">
+            <a:schemeClr val="accent1"/>
+          </a:fillRef>
+          <a:effectRef idx="2">
+            <a:schemeClr val="accent1"/>
+          </a:effectRef>
+          <a:fontRef idx="minor">
+            <a:schemeClr val="lt1"/>
+          </a:fontRef>
+        </p:style>
+        <p:txBody>
+          <a:bodyPr rtlCol="0" anchor="ctr"/>
+          <a:lstStyle/>
+          <a:p>
+            <a:pPr algn="ctr"/>
+          </a:p>
+        </p:txBody>
+      </p:sp>
+      <p:sp>
+        <p:nvSpPr>
+          <p:cNvPr id="9" name="Rectangle 8"/>
+          <p:cNvSpPr/>
+          <p:nvPr/>
+        </p:nvSpPr>
+        <p:spPr>
+          <a:xfrm>
+            <a:off x="822960" y="3291840"/>
+            <a:ext cx="640080" cy="1143000"/>
+          </a:xfrm>
+          <a:prstGeom prst="rect">
+            <a:avLst/>
+          </a:prstGeom>
+          <a:solidFill>
+            <a:srgbClr val="1E2761"/>
+          </a:solidFill>
+          <a:ln>
+            <a:noFill/>
+          </a:ln>
+          <a:effectLst/>
+        </p:spPr>
+        <p:style>
+          <a:lnRef idx="1">
+            <a:schemeClr val="accent1"/>
+          </a:lnRef>
+          <a:fillRef idx="3">
+            <a:schemeClr val="accent1"/>
+          </a:fillRef>
+          <a:effectRef idx="2">
+            <a:schemeClr val="accent1"/>
+          </a:effectRef>
+          <a:fontRef idx="minor">
+            <a:schemeClr val="lt1"/>
+          </a:fontRef>
+        </p:style>
+        <p:txBody>
+          <a:bodyPr rtlCol="0" anchor="ctr"/>
+          <a:lstStyle/>
+          <a:p>
+            <a:pPr algn="ctr"/>
+          </a:p>
+        </p:txBody>
+      </p:sp>
+      <p:sp>
+        <p:nvSpPr>
+          <p:cNvPr id="10" name="TextBox 9"/>
+          <p:cNvSpPr txBox="1"/>
+          <p:nvPr/>
+        </p:nvSpPr>
+        <p:spPr>
+          <a:xfrm>
+            <a:off x="822960" y="3611880"/>
+            <a:ext cx="640080" cy="548640"/>
+          </a:xfrm>
+          <a:prstGeom prst="rect">
+            <a:avLst/>
+          </a:prstGeom>
+          <a:noFill/>
+        </p:spPr>
+        <p:txBody>
+          <a:bodyPr wrap="square">
+            <a:spAutoFit/>
+          </a:bodyPr>
+          <a:lstStyle/>
+          <a:p>
+            <a:pPr algn="ctr"/>
+            <a:r>
+              <a:rPr sz="2200" b="1" i="0">
+                <a:solidFill>
+                  <a:srgbClr val="FFFFFF"/>
+                </a:solidFill>
+                <a:latin typeface="Montserrat"/>
+              </a:rPr>
+              <a:t>A</a:t>
+            </a:r>
+          </a:p>
+        </p:txBody>
+      </p:sp>
+      <p:sp>
+        <p:nvSpPr>
+          <p:cNvPr id="11" name="TextBox 10"/>
+          <p:cNvSpPr txBox="1"/>
+          <p:nvPr/>
+        </p:nvSpPr>
+        <p:spPr>
+          <a:xfrm>
+            <a:off x="1600200" y="3474720"/>
+            <a:ext cx="4114800" cy="868680"/>
+          </a:xfrm>
+          <a:prstGeom prst="rect">
+            <a:avLst/>
+          </a:prstGeom>
+          <a:noFill/>
+        </p:spPr>
+        <p:txBody>
+          <a:bodyPr wrap="square">
+            <a:spAutoFit/>
+          </a:bodyPr>
+          <a:lstStyle/>
+          <a:p>
+            <a:r>
+              <a:rPr sz="1400" b="0" i="0">
+                <a:solidFill>
+                  <a:srgbClr val="1B2330"/>
+                </a:solidFill>
+                <a:latin typeface="Montserrat"/>
+              </a:rPr>
+              <a:t>Veinticuatro horas para avisar y siete días para el informe</a:t>
+            </a:r>
+          </a:p>
+        </p:txBody>
+      </p:sp>
+      <p:sp>
+        <p:nvSpPr>
+          <p:cNvPr id="12" name="Rounded Rectangle 11"/>
+          <p:cNvSpPr/>
+          <p:nvPr/>
+        </p:nvSpPr>
+        <p:spPr>
+          <a:xfrm>
+            <a:off x="6355080" y="3291840"/>
+            <a:ext cx="4983480" cy="1143000"/>
+          </a:xfrm>
+          <a:prstGeom prst="roundRect">
+            <a:avLst/>
+          </a:prstGeom>
+          <a:solidFill>
+            <a:srgbClr val="F3F6FB"/>
+          </a:solidFill>
+          <a:ln w="12700">
+            <a:solidFill>
+              <a:srgbClr val="C7D2E6"/>
+            </a:solidFill>
+          </a:ln>
+          <a:effectLst/>
+        </p:spPr>
+        <p:style>
+          <a:lnRef idx="1">
+            <a:schemeClr val="accent1"/>
+          </a:lnRef>
+          <a:fillRef idx="3">
+            <a:schemeClr val="accent1"/>
+          </a:fillRef>
+          <a:effectRef idx="2">
+            <a:schemeClr val="accent1"/>
+          </a:effectRef>
+          <a:fontRef idx="minor">
+            <a:schemeClr val="lt1"/>
+          </a:fontRef>
+        </p:style>
+        <p:txBody>
+          <a:bodyPr rtlCol="0" anchor="ctr"/>
+          <a:lstStyle/>
+          <a:p>
+            <a:pPr algn="ctr"/>
+          </a:p>
+        </p:txBody>
+      </p:sp>
+      <p:sp>
+        <p:nvSpPr>
+          <p:cNvPr id="13" name="Rectangle 12"/>
+          <p:cNvSpPr/>
+          <p:nvPr/>
+        </p:nvSpPr>
+        <p:spPr>
+          <a:xfrm>
+            <a:off x="6355080" y="3291840"/>
+            <a:ext cx="640080" cy="1143000"/>
+          </a:xfrm>
+          <a:prstGeom prst="rect">
+            <a:avLst/>
+          </a:prstGeom>
+          <a:solidFill>
+            <a:srgbClr val="1E2761"/>
+          </a:solidFill>
+          <a:ln>
+            <a:noFill/>
+          </a:ln>
+          <a:effectLst/>
+        </p:spPr>
+        <p:style>
+          <a:lnRef idx="1">
+            <a:schemeClr val="accent1"/>
+          </a:lnRef>
+          <a:fillRef idx="3">
+            <a:schemeClr val="accent1"/>
+          </a:fillRef>
+          <a:effectRef idx="2">
+            <a:schemeClr val="accent1"/>
+          </a:effectRef>
+          <a:fontRef idx="minor">
+            <a:schemeClr val="lt1"/>
+          </a:fontRef>
+        </p:style>
+        <p:txBody>
+          <a:bodyPr rtlCol="0" anchor="ctr"/>
+          <a:lstStyle/>
+          <a:p>
+            <a:pPr algn="ctr"/>
+          </a:p>
+        </p:txBody>
+      </p:sp>
+      <p:sp>
+        <p:nvSpPr>
+          <p:cNvPr id="14" name="TextBox 13"/>
+          <p:cNvSpPr txBox="1"/>
+          <p:nvPr/>
+        </p:nvSpPr>
+        <p:spPr>
+          <a:xfrm>
+            <a:off x="6355080" y="3611880"/>
+            <a:ext cx="640080" cy="548640"/>
+          </a:xfrm>
+          <a:prstGeom prst="rect">
+            <a:avLst/>
+          </a:prstGeom>
+          <a:noFill/>
+        </p:spPr>
+        <p:txBody>
+          <a:bodyPr wrap="square">
+            <a:spAutoFit/>
+          </a:bodyPr>
+          <a:lstStyle/>
+          <a:p>
+            <a:pPr algn="ctr"/>
+            <a:r>
+              <a:rPr sz="2200" b="1" i="0">
+                <a:solidFill>
+                  <a:srgbClr val="FFFFFF"/>
+                </a:solidFill>
+                <a:latin typeface="Montserrat"/>
+              </a:rPr>
+              <a:t>B</a:t>
+            </a:r>
+          </a:p>
+        </p:txBody>
+      </p:sp>
+      <p:sp>
+        <p:nvSpPr>
+          <p:cNvPr id="15" name="TextBox 14"/>
+          <p:cNvSpPr txBox="1"/>
+          <p:nvPr/>
+        </p:nvSpPr>
+        <p:spPr>
+          <a:xfrm>
+            <a:off x="7132320" y="3474720"/>
+            <a:ext cx="4114800" cy="868680"/>
+          </a:xfrm>
+          <a:prstGeom prst="rect">
+            <a:avLst/>
+          </a:prstGeom>
+          <a:noFill/>
+        </p:spPr>
+        <p:txBody>
+          <a:bodyPr wrap="square">
+            <a:spAutoFit/>
+          </a:bodyPr>
+          <a:lstStyle/>
+          <a:p>
+            <a:r>
+              <a:rPr sz="1400" b="0" i="0">
+                <a:solidFill>
+                  <a:srgbClr val="1B2330"/>
+                </a:solidFill>
+                <a:latin typeface="Montserrat"/>
+              </a:rPr>
+              <a:t>Siete días para avisar y treinta para el informe</a:t>
+            </a:r>
+          </a:p>
+        </p:txBody>
+      </p:sp>
+      <p:sp>
+        <p:nvSpPr>
+          <p:cNvPr id="16" name="Rounded Rectangle 15"/>
+          <p:cNvSpPr/>
+          <p:nvPr/>
+        </p:nvSpPr>
+        <p:spPr>
+          <a:xfrm>
+            <a:off x="822960" y="4617720"/>
+            <a:ext cx="4983480" cy="1143000"/>
+          </a:xfrm>
+          <a:prstGeom prst="roundRect">
+            <a:avLst/>
+          </a:prstGeom>
+          <a:solidFill>
+            <a:srgbClr val="F3F6FB"/>
+          </a:solidFill>
+          <a:ln w="12700">
+            <a:solidFill>
+              <a:srgbClr val="C7D2E6"/>
+            </a:solidFill>
+          </a:ln>
+          <a:effectLst/>
+        </p:spPr>
+        <p:style>
+          <a:lnRef idx="1">
+            <a:schemeClr val="accent1"/>
+          </a:lnRef>
+          <a:fillRef idx="3">
+            <a:schemeClr val="accent1"/>
+          </a:fillRef>
+          <a:effectRef idx="2">
+            <a:schemeClr val="accent1"/>
+          </a:effectRef>
+          <a:fontRef idx="minor">
+            <a:schemeClr val="lt1"/>
+          </a:fontRef>
+        </p:style>
+        <p:txBody>
+          <a:bodyPr rtlCol="0" anchor="ctr"/>
+          <a:lstStyle/>
+          <a:p>
+            <a:pPr algn="ctr"/>
+          </a:p>
+        </p:txBody>
+      </p:sp>
+      <p:sp>
+        <p:nvSpPr>
+          <p:cNvPr id="17" name="Rectangle 16"/>
+          <p:cNvSpPr/>
+          <p:nvPr/>
+        </p:nvSpPr>
+        <p:spPr>
+          <a:xfrm>
+            <a:off x="822960" y="4617720"/>
+            <a:ext cx="640080" cy="1143000"/>
+          </a:xfrm>
+          <a:prstGeom prst="rect">
+            <a:avLst/>
+          </a:prstGeom>
+          <a:solidFill>
+            <a:srgbClr val="1E2761"/>
+          </a:solidFill>
+          <a:ln>
+            <a:noFill/>
+          </a:ln>
+          <a:effectLst/>
+        </p:spPr>
+        <p:style>
+          <a:lnRef idx="1">
+            <a:schemeClr val="accent1"/>
+          </a:lnRef>
+          <a:fillRef idx="3">
+            <a:schemeClr val="accent1"/>
+          </a:fillRef>
+          <a:effectRef idx="2">
+            <a:schemeClr val="accent1"/>
+          </a:effectRef>
+          <a:fontRef idx="minor">
+            <a:schemeClr val="lt1"/>
+          </a:fontRef>
+        </p:style>
+        <p:txBody>
+          <a:bodyPr rtlCol="0" anchor="ctr"/>
+          <a:lstStyle/>
+          <a:p>
+            <a:pPr algn="ctr"/>
+          </a:p>
+        </p:txBody>
+      </p:sp>
+      <p:sp>
+        <p:nvSpPr>
+          <p:cNvPr id="18" name="TextBox 17"/>
+          <p:cNvSpPr txBox="1"/>
+          <p:nvPr/>
+        </p:nvSpPr>
+        <p:spPr>
+          <a:xfrm>
+            <a:off x="822960" y="4937760"/>
+            <a:ext cx="640080" cy="548640"/>
+          </a:xfrm>
+          <a:prstGeom prst="rect">
+            <a:avLst/>
+          </a:prstGeom>
+          <a:noFill/>
+        </p:spPr>
+        <p:txBody>
+          <a:bodyPr wrap="square">
+            <a:spAutoFit/>
+          </a:bodyPr>
+          <a:lstStyle/>
+          <a:p>
+            <a:pPr algn="ctr"/>
+            <a:r>
+              <a:rPr sz="2200" b="1" i="0">
+                <a:solidFill>
+                  <a:srgbClr val="FFFFFF"/>
+                </a:solidFill>
+                <a:latin typeface="Montserrat"/>
+              </a:rPr>
+              <a:t>C</a:t>
+            </a:r>
+          </a:p>
+        </p:txBody>
+      </p:sp>
+      <p:sp>
+        <p:nvSpPr>
+          <p:cNvPr id="19" name="TextBox 18"/>
+          <p:cNvSpPr txBox="1"/>
+          <p:nvPr/>
+        </p:nvSpPr>
+        <p:spPr>
+          <a:xfrm>
+            <a:off x="1600200" y="4800600"/>
+            <a:ext cx="4114800" cy="868680"/>
+          </a:xfrm>
+          <a:prstGeom prst="rect">
+            <a:avLst/>
+          </a:prstGeom>
+          <a:noFill/>
+        </p:spPr>
+        <p:txBody>
+          <a:bodyPr wrap="square">
+            <a:spAutoFit/>
+          </a:bodyPr>
+          <a:lstStyle/>
+          <a:p>
+            <a:r>
+              <a:rPr sz="1400" b="0" i="0">
+                <a:solidFill>
+                  <a:srgbClr val="1B2330"/>
+                </a:solidFill>
+                <a:latin typeface="Montserrat"/>
+              </a:rPr>
+              <a:t>Cuarenta y ocho horas para avisar y quince para el informe</a:t>
+            </a:r>
+          </a:p>
+        </p:txBody>
+      </p:sp>
+      <p:sp>
+        <p:nvSpPr>
+          <p:cNvPr id="20" name="Rounded Rectangle 19"/>
+          <p:cNvSpPr/>
+          <p:nvPr/>
+        </p:nvSpPr>
+        <p:spPr>
+          <a:xfrm>
+            <a:off x="6355080" y="4617720"/>
+            <a:ext cx="4983480" cy="1143000"/>
+          </a:xfrm>
+          <a:prstGeom prst="roundRect">
+            <a:avLst/>
+          </a:prstGeom>
+          <a:solidFill>
+            <a:srgbClr val="F3F6FB"/>
+          </a:solidFill>
+          <a:ln w="12700">
+            <a:solidFill>
+              <a:srgbClr val="C7D2E6"/>
+            </a:solidFill>
+          </a:ln>
+          <a:effectLst/>
+        </p:spPr>
+        <p:style>
+          <a:lnRef idx="1">
+            <a:schemeClr val="accent1"/>
+          </a:lnRef>
+          <a:fillRef idx="3">
+            <a:schemeClr val="accent1"/>
+          </a:fillRef>
+          <a:effectRef idx="2">
+            <a:schemeClr val="accent1"/>
+          </a:effectRef>
+          <a:fontRef idx="minor">
+            <a:schemeClr val="lt1"/>
+          </a:fontRef>
+        </p:style>
+        <p:txBody>
+          <a:bodyPr rtlCol="0" anchor="ctr"/>
+          <a:lstStyle/>
+          <a:p>
+            <a:pPr algn="ctr"/>
+          </a:p>
+        </p:txBody>
+      </p:sp>
+      <p:sp>
+        <p:nvSpPr>
+          <p:cNvPr id="21" name="Rectangle 20"/>
+          <p:cNvSpPr/>
+          <p:nvPr/>
+        </p:nvSpPr>
+        <p:spPr>
+          <a:xfrm>
+            <a:off x="6355080" y="4617720"/>
+            <a:ext cx="640080" cy="1143000"/>
+          </a:xfrm>
+          <a:prstGeom prst="rect">
+            <a:avLst/>
+          </a:prstGeom>
+          <a:solidFill>
+            <a:srgbClr val="1E2761"/>
+          </a:solidFill>
+          <a:ln>
+            <a:noFill/>
+          </a:ln>
+          <a:effectLst/>
+        </p:spPr>
+        <p:style>
+          <a:lnRef idx="1">
+            <a:schemeClr val="accent1"/>
+          </a:lnRef>
+          <a:fillRef idx="3">
+            <a:schemeClr val="accent1"/>
+          </a:fillRef>
+          <a:effectRef idx="2">
+            <a:schemeClr val="accent1"/>
+          </a:effectRef>
+          <a:fontRef idx="minor">
+            <a:schemeClr val="lt1"/>
+          </a:fontRef>
+        </p:style>
+        <p:txBody>
+          <a:bodyPr rtlCol="0" anchor="ctr"/>
+          <a:lstStyle/>
+          <a:p>
+            <a:pPr algn="ctr"/>
+          </a:p>
+        </p:txBody>
+      </p:sp>
+      <p:sp>
+        <p:nvSpPr>
+          <p:cNvPr id="22" name="TextBox 21"/>
+          <p:cNvSpPr txBox="1"/>
+          <p:nvPr/>
+        </p:nvSpPr>
+        <p:spPr>
+          <a:xfrm>
+            <a:off x="6355080" y="4937760"/>
+            <a:ext cx="640080" cy="548640"/>
+          </a:xfrm>
+          <a:prstGeom prst="rect">
+            <a:avLst/>
+          </a:prstGeom>
+          <a:noFill/>
+        </p:spPr>
+        <p:txBody>
+          <a:bodyPr wrap="square">
+            <a:spAutoFit/>
+          </a:bodyPr>
+          <a:lstStyle/>
+          <a:p>
+            <a:pPr algn="ctr"/>
+            <a:r>
+              <a:rPr sz="2200" b="1" i="0">
+                <a:solidFill>
+                  <a:srgbClr val="FFFFFF"/>
+                </a:solidFill>
+                <a:latin typeface="Montserrat"/>
+              </a:rPr>
+              <a:t>D</a:t>
+            </a:r>
+          </a:p>
+        </p:txBody>
+      </p:sp>
+      <p:sp>
+        <p:nvSpPr>
+          <p:cNvPr id="23" name="TextBox 22"/>
+          <p:cNvSpPr txBox="1"/>
+          <p:nvPr/>
+        </p:nvSpPr>
+        <p:spPr>
+          <a:xfrm>
+            <a:off x="7132320" y="4800600"/>
+            <a:ext cx="4114800" cy="868680"/>
+          </a:xfrm>
+          <a:prstGeom prst="rect">
+            <a:avLst/>
+          </a:prstGeom>
+          <a:noFill/>
+        </p:spPr>
+        <p:txBody>
+          <a:bodyPr wrap="square">
+            <a:spAutoFit/>
+          </a:bodyPr>
+          <a:lstStyle/>
+          <a:p>
+            <a:r>
+              <a:rPr sz="1400" b="0" i="0">
+                <a:solidFill>
+                  <a:srgbClr val="1B2330"/>
+                </a:solidFill>
+                <a:latin typeface="Montserrat"/>
+              </a:rPr>
+              <a:t>Aviso inmediato y el informe en veinticuatro horas</a:t>
+            </a:r>
+          </a:p>
+        </p:txBody>
+      </p:sp>
+    </p:spTree>
+  </p:cSld>
+  <p:clrMapOvr>
+    <a:masterClrMapping/>
+  </p:clrMapOvr>
+  <mc:AlternateContent xmlns:mc="http://schemas.openxmlformats.org/markup-compatibility/2006">
+    <mc:Choice xmlns:p14="http://schemas.microsoft.com/office/powerpoint/2010/main" Requires="p14">
+      <p:transition spd="med" p14:dur="700">
+        <p14:cube dir="l"/>
+      </p:transition>
+    </mc:Choice>
+    <mc:Fallback>
+      <p:transition spd="med">
+        <p:push dir="l"/>
+      </p:transition>
+    </mc:Fallback>
+  </mc:AlternateContent>
 </p:sld>
 </file>
 
@@ -8001,7 +10370,7 @@
                 </a:solidFill>
                 <a:latin typeface="Montserrat"/>
               </a:rPr>
-              <a:t>002 / 016</a:t>
+              <a:t>002 / 022</a:t>
             </a:r>
           </a:p>
         </p:txBody>
@@ -8076,7 +10445,7 @@
       </p:sp>
       <p:sp>
         <p:nvSpPr>
-          <p:cNvPr id="6" name="Rounded Rectangle 5"/>
+          <p:cNvPr id="6" name="Rectangle 5"/>
           <p:cNvSpPr/>
           <p:nvPr/>
         </p:nvSpPr>
@@ -8085,7 +10454,7 @@
             <a:off x="868680" y="1234440"/>
             <a:ext cx="1463040" cy="73152"/>
           </a:xfrm>
-          <a:prstGeom prst="roundRect">
+          <a:prstGeom prst="rect">
             <a:avLst/>
           </a:prstGeom>
           <a:solidFill>
@@ -8166,14 +10535,58 @@
       </p:sp>
       <p:sp>
         <p:nvSpPr>
-          <p:cNvPr id="8" name="TextBox 7"/>
+          <p:cNvPr id="8" name="Rectangle 7"/>
+          <p:cNvSpPr/>
+          <p:nvPr/>
+        </p:nvSpPr>
+        <p:spPr>
+          <a:xfrm>
+            <a:off x="822960" y="2011680"/>
+            <a:ext cx="3017520" cy="128016"/>
+          </a:xfrm>
+          <a:prstGeom prst="rect">
+            <a:avLst/>
+          </a:prstGeom>
+          <a:solidFill>
+            <a:srgbClr val="E8801A"/>
+          </a:solidFill>
+          <a:ln>
+            <a:noFill/>
+          </a:ln>
+          <a:effectLst/>
+        </p:spPr>
+        <p:style>
+          <a:lnRef idx="1">
+            <a:schemeClr val="accent1"/>
+          </a:lnRef>
+          <a:fillRef idx="3">
+            <a:schemeClr val="accent1"/>
+          </a:fillRef>
+          <a:effectRef idx="2">
+            <a:schemeClr val="accent1"/>
+          </a:effectRef>
+          <a:fontRef idx="minor">
+            <a:schemeClr val="lt1"/>
+          </a:fontRef>
+        </p:style>
+        <p:txBody>
+          <a:bodyPr rtlCol="0" anchor="ctr"/>
+          <a:lstStyle/>
+          <a:p>
+            <a:pPr algn="ctr"/>
+          </a:p>
+        </p:txBody>
+      </p:sp>
+      <p:sp>
+        <p:nvSpPr>
+          <p:cNvPr id="9" name="TextBox 8"/>
           <p:cNvSpPr txBox="1"/>
           <p:nvPr/>
         </p:nvSpPr>
         <p:spPr>
           <a:xfrm>
-            <a:off x="822960" y="2331720"/>
-            <a:ext cx="3017520" cy="1463040"/>
+            <a:off x="822960" y="2377440"/>
+            <a:ext cx="3017520" cy="1371600"/>
           </a:xfrm>
           <a:prstGeom prst="rect">
             <a:avLst/>
@@ -8188,7 +10601,7 @@
           <a:p>
             <a:pPr algn="ctr"/>
             <a:r>
-              <a:rPr sz="6000" b="1" i="0">
+              <a:rPr sz="5800" b="1" i="0">
                 <a:solidFill>
                   <a:srgbClr val="1E2761"/>
                 </a:solidFill>
@@ -8201,13 +10614,13 @@
       </p:sp>
       <p:sp>
         <p:nvSpPr>
-          <p:cNvPr id="9" name="TextBox 8"/>
+          <p:cNvPr id="10" name="TextBox 9"/>
           <p:cNvSpPr txBox="1"/>
           <p:nvPr/>
         </p:nvSpPr>
         <p:spPr>
           <a:xfrm>
-            <a:off x="1051560" y="3611880"/>
+            <a:off x="1051560" y="3657600"/>
             <a:ext cx="2560320" cy="1005840"/>
           </a:xfrm>
           <a:prstGeom prst="rect">
@@ -8236,7 +10649,7 @@
       </p:sp>
       <p:sp>
         <p:nvSpPr>
-          <p:cNvPr id="10" name="Rounded Rectangle 9"/>
+          <p:cNvPr id="11" name="Rounded Rectangle 10"/>
           <p:cNvSpPr/>
           <p:nvPr/>
         </p:nvSpPr>
@@ -8282,14 +10695,58 @@
       </p:sp>
       <p:sp>
         <p:nvSpPr>
-          <p:cNvPr id="11" name="TextBox 10"/>
+          <p:cNvPr id="12" name="Rectangle 11"/>
+          <p:cNvSpPr/>
+          <p:nvPr/>
+        </p:nvSpPr>
+        <p:spPr>
+          <a:xfrm>
+            <a:off x="4617720" y="2011680"/>
+            <a:ext cx="3017520" cy="128016"/>
+          </a:xfrm>
+          <a:prstGeom prst="rect">
+            <a:avLst/>
+          </a:prstGeom>
+          <a:solidFill>
+            <a:srgbClr val="E8801A"/>
+          </a:solidFill>
+          <a:ln>
+            <a:noFill/>
+          </a:ln>
+          <a:effectLst/>
+        </p:spPr>
+        <p:style>
+          <a:lnRef idx="1">
+            <a:schemeClr val="accent1"/>
+          </a:lnRef>
+          <a:fillRef idx="3">
+            <a:schemeClr val="accent1"/>
+          </a:fillRef>
+          <a:effectRef idx="2">
+            <a:schemeClr val="accent1"/>
+          </a:effectRef>
+          <a:fontRef idx="minor">
+            <a:schemeClr val="lt1"/>
+          </a:fontRef>
+        </p:style>
+        <p:txBody>
+          <a:bodyPr rtlCol="0" anchor="ctr"/>
+          <a:lstStyle/>
+          <a:p>
+            <a:pPr algn="ctr"/>
+          </a:p>
+        </p:txBody>
+      </p:sp>
+      <p:sp>
+        <p:nvSpPr>
+          <p:cNvPr id="13" name="TextBox 12"/>
           <p:cNvSpPr txBox="1"/>
           <p:nvPr/>
         </p:nvSpPr>
         <p:spPr>
           <a:xfrm>
-            <a:off x="4617720" y="2331720"/>
-            <a:ext cx="3017520" cy="1463040"/>
+            <a:off x="4617720" y="2377440"/>
+            <a:ext cx="3017520" cy="1371600"/>
           </a:xfrm>
           <a:prstGeom prst="rect">
             <a:avLst/>
@@ -8304,7 +10761,7 @@
           <a:p>
             <a:pPr algn="ctr"/>
             <a:r>
-              <a:rPr sz="6000" b="1" i="0">
+              <a:rPr sz="5800" b="1" i="0">
                 <a:solidFill>
                   <a:srgbClr val="1E2761"/>
                 </a:solidFill>
@@ -8317,13 +10774,13 @@
       </p:sp>
       <p:sp>
         <p:nvSpPr>
-          <p:cNvPr id="12" name="TextBox 11"/>
+          <p:cNvPr id="14" name="TextBox 13"/>
           <p:cNvSpPr txBox="1"/>
           <p:nvPr/>
         </p:nvSpPr>
         <p:spPr>
           <a:xfrm>
-            <a:off x="4846320" y="3611880"/>
+            <a:off x="4846320" y="3657600"/>
             <a:ext cx="2560320" cy="1005840"/>
           </a:xfrm>
           <a:prstGeom prst="rect">
@@ -8352,7 +10809,7 @@
       </p:sp>
       <p:sp>
         <p:nvSpPr>
-          <p:cNvPr id="13" name="Rounded Rectangle 12"/>
+          <p:cNvPr id="15" name="Rounded Rectangle 14"/>
           <p:cNvSpPr/>
           <p:nvPr/>
         </p:nvSpPr>
@@ -8398,14 +10855,58 @@
       </p:sp>
       <p:sp>
         <p:nvSpPr>
-          <p:cNvPr id="14" name="TextBox 13"/>
+          <p:cNvPr id="16" name="Rectangle 15"/>
+          <p:cNvSpPr/>
+          <p:nvPr/>
+        </p:nvSpPr>
+        <p:spPr>
+          <a:xfrm>
+            <a:off x="8412480" y="2011680"/>
+            <a:ext cx="3017520" cy="128016"/>
+          </a:xfrm>
+          <a:prstGeom prst="rect">
+            <a:avLst/>
+          </a:prstGeom>
+          <a:solidFill>
+            <a:srgbClr val="E8801A"/>
+          </a:solidFill>
+          <a:ln>
+            <a:noFill/>
+          </a:ln>
+          <a:effectLst/>
+        </p:spPr>
+        <p:style>
+          <a:lnRef idx="1">
+            <a:schemeClr val="accent1"/>
+          </a:lnRef>
+          <a:fillRef idx="3">
+            <a:schemeClr val="accent1"/>
+          </a:fillRef>
+          <a:effectRef idx="2">
+            <a:schemeClr val="accent1"/>
+          </a:effectRef>
+          <a:fontRef idx="minor">
+            <a:schemeClr val="lt1"/>
+          </a:fontRef>
+        </p:style>
+        <p:txBody>
+          <a:bodyPr rtlCol="0" anchor="ctr"/>
+          <a:lstStyle/>
+          <a:p>
+            <a:pPr algn="ctr"/>
+          </a:p>
+        </p:txBody>
+      </p:sp>
+      <p:sp>
+        <p:nvSpPr>
+          <p:cNvPr id="17" name="TextBox 16"/>
           <p:cNvSpPr txBox="1"/>
           <p:nvPr/>
         </p:nvSpPr>
         <p:spPr>
           <a:xfrm>
-            <a:off x="8412480" y="2331720"/>
-            <a:ext cx="3017520" cy="1463040"/>
+            <a:off x="8412480" y="2377440"/>
+            <a:ext cx="3017520" cy="1371600"/>
           </a:xfrm>
           <a:prstGeom prst="rect">
             <a:avLst/>
@@ -8420,7 +10921,7 @@
           <a:p>
             <a:pPr algn="ctr"/>
             <a:r>
-              <a:rPr sz="6000" b="1" i="0">
+              <a:rPr sz="5800" b="1" i="0">
                 <a:solidFill>
                   <a:srgbClr val="1E2761"/>
                 </a:solidFill>
@@ -8433,13 +10934,13 @@
       </p:sp>
       <p:sp>
         <p:nvSpPr>
-          <p:cNvPr id="15" name="TextBox 14"/>
+          <p:cNvPr id="18" name="TextBox 17"/>
           <p:cNvSpPr txBox="1"/>
           <p:nvPr/>
         </p:nvSpPr>
         <p:spPr>
           <a:xfrm>
-            <a:off x="8641080" y="3611880"/>
+            <a:off x="8641080" y="3657600"/>
             <a:ext cx="2560320" cy="1005840"/>
           </a:xfrm>
           <a:prstGeom prst="rect">
@@ -8471,6 +10972,1263 @@
   <p:clrMapOvr>
     <a:masterClrMapping/>
   </p:clrMapOvr>
+  <mc:AlternateContent xmlns:mc="http://schemas.openxmlformats.org/markup-compatibility/2006">
+    <mc:Choice xmlns:p14="http://schemas.microsoft.com/office/powerpoint/2010/main" Requires="p14">
+      <p:transition spd="med" p14:dur="700">
+        <p14:cube dir="r"/>
+      </p:transition>
+    </mc:Choice>
+    <mc:Fallback>
+      <p:transition spd="med">
+        <p:push dir="r"/>
+      </p:transition>
+    </mc:Fallback>
+  </mc:AlternateContent>
+</p:sld>
+</file>
+
+<file path=ppt/slides/slide20.xml><?xml version="1.0" encoding="utf-8"?>
+<p:sld xmlns:a="http://schemas.openxmlformats.org/drawingml/2006/main" xmlns:p="http://schemas.openxmlformats.org/presentationml/2006/main" xmlns:r="http://schemas.openxmlformats.org/officeDocument/2006/relationships">
+  <p:cSld>
+    <p:spTree>
+      <p:nvGrpSpPr>
+        <p:cNvPr id="1" name=""/>
+        <p:cNvGrpSpPr/>
+        <p:nvPr/>
+      </p:nvGrpSpPr>
+      <p:grpSpPr/>
+      <p:sp>
+        <p:nvSpPr>
+          <p:cNvPr id="2" name="Rectangle 1"/>
+          <p:cNvSpPr/>
+          <p:nvPr/>
+        </p:nvSpPr>
+        <p:spPr>
+          <a:xfrm>
+            <a:off x="0" y="0"/>
+            <a:ext cx="12191695" cy="6858000"/>
+          </a:xfrm>
+          <a:prstGeom prst="rect">
+            <a:avLst/>
+          </a:prstGeom>
+          <a:solidFill>
+            <a:srgbClr val="FFFFFF"/>
+          </a:solidFill>
+          <a:ln>
+            <a:noFill/>
+          </a:ln>
+          <a:effectLst/>
+        </p:spPr>
+        <p:style>
+          <a:lnRef idx="1">
+            <a:schemeClr val="accent1"/>
+          </a:lnRef>
+          <a:fillRef idx="3">
+            <a:schemeClr val="accent1"/>
+          </a:fillRef>
+          <a:effectRef idx="2">
+            <a:schemeClr val="accent1"/>
+          </a:effectRef>
+          <a:fontRef idx="minor">
+            <a:schemeClr val="lt1"/>
+          </a:fontRef>
+        </p:style>
+        <p:txBody>
+          <a:bodyPr rtlCol="0" anchor="ctr"/>
+          <a:lstStyle/>
+          <a:p>
+            <a:pPr algn="ctr"/>
+          </a:p>
+        </p:txBody>
+      </p:sp>
+      <p:sp>
+        <p:nvSpPr>
+          <p:cNvPr id="3" name="TextBox 2"/>
+          <p:cNvSpPr txBox="1"/>
+          <p:nvPr/>
+        </p:nvSpPr>
+        <p:spPr>
+          <a:xfrm>
+            <a:off x="10607040" y="320040"/>
+            <a:ext cx="1371600" cy="365760"/>
+          </a:xfrm>
+          <a:prstGeom prst="rect">
+            <a:avLst/>
+          </a:prstGeom>
+          <a:noFill/>
+        </p:spPr>
+        <p:txBody>
+          <a:bodyPr wrap="square">
+            <a:spAutoFit/>
+          </a:bodyPr>
+          <a:lstStyle/>
+          <a:p>
+            <a:pPr algn="r"/>
+            <a:r>
+              <a:rPr sz="1000" b="1" i="0">
+                <a:solidFill>
+                  <a:srgbClr val="64748B"/>
+                </a:solidFill>
+                <a:latin typeface="Montserrat"/>
+              </a:rPr>
+              <a:t>020 / 022</a:t>
+            </a:r>
+          </a:p>
+        </p:txBody>
+      </p:sp>
+      <p:sp>
+        <p:nvSpPr>
+          <p:cNvPr id="4" name="TextBox 3"/>
+          <p:cNvSpPr txBox="1"/>
+          <p:nvPr/>
+        </p:nvSpPr>
+        <p:spPr>
+          <a:xfrm>
+            <a:off x="457200" y="6419088"/>
+            <a:ext cx="8229600" cy="365760"/>
+          </a:xfrm>
+          <a:prstGeom prst="rect">
+            <a:avLst/>
+          </a:prstGeom>
+          <a:noFill/>
+        </p:spPr>
+        <p:txBody>
+          <a:bodyPr wrap="square">
+            <a:spAutoFit/>
+          </a:bodyPr>
+          <a:lstStyle/>
+          <a:p>
+            <a:r>
+              <a:rPr sz="900" b="0" i="0">
+                <a:solidFill>
+                  <a:srgbClr val="64748B"/>
+                </a:solidFill>
+                <a:latin typeface="Montserrat"/>
+              </a:rPr>
+              <a:t>Curso Gas B · Tema 00 · El Reglamento de Gas</a:t>
+            </a:r>
+          </a:p>
+        </p:txBody>
+      </p:sp>
+      <p:sp>
+        <p:nvSpPr>
+          <p:cNvPr id="5" name="Rectangle 4"/>
+          <p:cNvSpPr/>
+          <p:nvPr/>
+        </p:nvSpPr>
+        <p:spPr>
+          <a:xfrm>
+            <a:off x="0" y="0"/>
+            <a:ext cx="12191695" cy="1143000"/>
+          </a:xfrm>
+          <a:prstGeom prst="rect">
+            <a:avLst/>
+          </a:prstGeom>
+          <a:solidFill>
+            <a:srgbClr val="1E8E4B"/>
+          </a:solidFill>
+          <a:ln>
+            <a:noFill/>
+          </a:ln>
+          <a:effectLst/>
+        </p:spPr>
+        <p:style>
+          <a:lnRef idx="1">
+            <a:schemeClr val="accent1"/>
+          </a:lnRef>
+          <a:fillRef idx="3">
+            <a:schemeClr val="accent1"/>
+          </a:fillRef>
+          <a:effectRef idx="2">
+            <a:schemeClr val="accent1"/>
+          </a:effectRef>
+          <a:fontRef idx="minor">
+            <a:schemeClr val="lt1"/>
+          </a:fontRef>
+        </p:style>
+        <p:txBody>
+          <a:bodyPr rtlCol="0" anchor="ctr"/>
+          <a:lstStyle/>
+          <a:p>
+            <a:pPr algn="ctr"/>
+          </a:p>
+        </p:txBody>
+      </p:sp>
+      <p:sp>
+        <p:nvSpPr>
+          <p:cNvPr id="6" name="TextBox 5"/>
+          <p:cNvSpPr txBox="1"/>
+          <p:nvPr/>
+        </p:nvSpPr>
+        <p:spPr>
+          <a:xfrm>
+            <a:off x="822960" y="274320"/>
+            <a:ext cx="10515600" cy="640080"/>
+          </a:xfrm>
+          <a:prstGeom prst="rect">
+            <a:avLst/>
+          </a:prstGeom>
+          <a:noFill/>
+        </p:spPr>
+        <p:txBody>
+          <a:bodyPr wrap="square">
+            <a:spAutoFit/>
+          </a:bodyPr>
+          <a:lstStyle/>
+          <a:p>
+            <a:r>
+              <a:rPr sz="2400" b="1" i="0">
+                <a:solidFill>
+                  <a:srgbClr val="FFFFFF"/>
+                </a:solidFill>
+                <a:latin typeface="Montserrat"/>
+              </a:rPr>
+              <a:t>✔  RESPUESTA:  A</a:t>
+            </a:r>
+          </a:p>
+        </p:txBody>
+      </p:sp>
+      <p:sp>
+        <p:nvSpPr>
+          <p:cNvPr id="7" name="TextBox 6"/>
+          <p:cNvSpPr txBox="1"/>
+          <p:nvPr/>
+        </p:nvSpPr>
+        <p:spPr>
+          <a:xfrm>
+            <a:off x="822960" y="1417320"/>
+            <a:ext cx="10515600" cy="914400"/>
+          </a:xfrm>
+          <a:prstGeom prst="rect">
+            <a:avLst/>
+          </a:prstGeom>
+          <a:noFill/>
+        </p:spPr>
+        <p:txBody>
+          <a:bodyPr wrap="square">
+            <a:spAutoFit/>
+          </a:bodyPr>
+          <a:lstStyle/>
+          <a:p>
+            <a:r>
+              <a:rPr sz="1800" b="1" i="0">
+                <a:solidFill>
+                  <a:srgbClr val="64748B"/>
+                </a:solidFill>
+                <a:latin typeface="Montserrat"/>
+              </a:rPr>
+              <a:t>Ante un accidente grave, ¿qué plazos debe cumplir el suministrador?</a:t>
+            </a:r>
+          </a:p>
+        </p:txBody>
+      </p:sp>
+      <p:sp>
+        <p:nvSpPr>
+          <p:cNvPr id="8" name="Rounded Rectangle 7"/>
+          <p:cNvSpPr/>
+          <p:nvPr/>
+        </p:nvSpPr>
+        <p:spPr>
+          <a:xfrm>
+            <a:off x="822960" y="2514600"/>
+            <a:ext cx="10515600" cy="914400"/>
+          </a:xfrm>
+          <a:prstGeom prst="roundRect">
+            <a:avLst/>
+          </a:prstGeom>
+          <a:solidFill>
+            <a:srgbClr val="E9F6EE"/>
+          </a:solidFill>
+          <a:ln w="12700">
+            <a:solidFill>
+              <a:srgbClr val="1E8E4B"/>
+            </a:solidFill>
+          </a:ln>
+          <a:effectLst/>
+        </p:spPr>
+        <p:style>
+          <a:lnRef idx="1">
+            <a:schemeClr val="accent1"/>
+          </a:lnRef>
+          <a:fillRef idx="3">
+            <a:schemeClr val="accent1"/>
+          </a:fillRef>
+          <a:effectRef idx="2">
+            <a:schemeClr val="accent1"/>
+          </a:effectRef>
+          <a:fontRef idx="minor">
+            <a:schemeClr val="lt1"/>
+          </a:fontRef>
+        </p:style>
+        <p:txBody>
+          <a:bodyPr rtlCol="0" anchor="ctr"/>
+          <a:lstStyle/>
+          <a:p>
+            <a:pPr algn="ctr"/>
+          </a:p>
+        </p:txBody>
+      </p:sp>
+      <p:sp>
+        <p:nvSpPr>
+          <p:cNvPr id="9" name="TextBox 8"/>
+          <p:cNvSpPr txBox="1"/>
+          <p:nvPr/>
+        </p:nvSpPr>
+        <p:spPr>
+          <a:xfrm>
+            <a:off x="1097280" y="2697480"/>
+            <a:ext cx="10058400" cy="640080"/>
+          </a:xfrm>
+          <a:prstGeom prst="rect">
+            <a:avLst/>
+          </a:prstGeom>
+          <a:noFill/>
+        </p:spPr>
+        <p:txBody>
+          <a:bodyPr wrap="square">
+            <a:spAutoFit/>
+          </a:bodyPr>
+          <a:lstStyle/>
+          <a:p>
+            <a:r>
+              <a:rPr sz="1800" b="1" i="0">
+                <a:solidFill>
+                  <a:srgbClr val="1E8E4B"/>
+                </a:solidFill>
+                <a:latin typeface="Montserrat"/>
+              </a:rPr>
+              <a:t>A.  </a:t>
+            </a:r>
+            <a:r>
+              <a:rPr sz="1800" b="1" i="0">
+                <a:solidFill>
+                  <a:srgbClr val="1E2761"/>
+                </a:solidFill>
+                <a:latin typeface="Montserrat"/>
+              </a:rPr>
+              <a:t>Veinticuatro horas para avisar y siete días para el informe</a:t>
+            </a:r>
+          </a:p>
+        </p:txBody>
+      </p:sp>
+      <p:sp>
+        <p:nvSpPr>
+          <p:cNvPr id="10" name="TextBox 9"/>
+          <p:cNvSpPr txBox="1"/>
+          <p:nvPr/>
+        </p:nvSpPr>
+        <p:spPr>
+          <a:xfrm>
+            <a:off x="822960" y="3749039"/>
+            <a:ext cx="10515600" cy="2194560"/>
+          </a:xfrm>
+          <a:prstGeom prst="rect">
+            <a:avLst/>
+          </a:prstGeom>
+          <a:noFill/>
+        </p:spPr>
+        <p:txBody>
+          <a:bodyPr wrap="square">
+            <a:spAutoFit/>
+          </a:bodyPr>
+          <a:lstStyle/>
+          <a:p>
+            <a:r>
+              <a:rPr sz="1500" b="1" i="0">
+                <a:solidFill>
+                  <a:srgbClr val="E8801A"/>
+                </a:solidFill>
+                <a:latin typeface="Montserrat"/>
+              </a:rPr>
+              <a:t>Por qué:  </a:t>
+            </a:r>
+            <a:r>
+              <a:rPr sz="1500" b="0" i="0">
+                <a:solidFill>
+                  <a:srgbClr val="1B2330"/>
+                </a:solidFill>
+                <a:latin typeface="Montserrat"/>
+              </a:rPr>
+              <a:t>Primero se llama, en no más de veinticuatro horas, y luego se escribe el informe, en un máximo de siete días.</a:t>
+            </a:r>
+          </a:p>
+        </p:txBody>
+      </p:sp>
+    </p:spTree>
+  </p:cSld>
+  <p:clrMapOvr>
+    <a:masterClrMapping/>
+  </p:clrMapOvr>
+  <mc:AlternateContent xmlns:mc="http://schemas.openxmlformats.org/markup-compatibility/2006">
+    <mc:Choice xmlns:p14="http://schemas.microsoft.com/office/powerpoint/2010/main" Requires="p14">
+      <p:transition spd="med" p14:dur="700">
+        <p14:cube dir="r"/>
+      </p:transition>
+    </mc:Choice>
+    <mc:Fallback>
+      <p:transition spd="med">
+        <p:push dir="r"/>
+      </p:transition>
+    </mc:Fallback>
+  </mc:AlternateContent>
+</p:sld>
+</file>
+
+<file path=ppt/slides/slide21.xml><?xml version="1.0" encoding="utf-8"?>
+<p:sld xmlns:a="http://schemas.openxmlformats.org/drawingml/2006/main" xmlns:p="http://schemas.openxmlformats.org/presentationml/2006/main" xmlns:r="http://schemas.openxmlformats.org/officeDocument/2006/relationships">
+  <p:cSld>
+    <p:spTree>
+      <p:nvGrpSpPr>
+        <p:cNvPr id="1" name=""/>
+        <p:cNvGrpSpPr/>
+        <p:nvPr/>
+      </p:nvGrpSpPr>
+      <p:grpSpPr/>
+      <p:sp>
+        <p:nvSpPr>
+          <p:cNvPr id="2" name="Rectangle 1"/>
+          <p:cNvSpPr/>
+          <p:nvPr/>
+        </p:nvSpPr>
+        <p:spPr>
+          <a:xfrm>
+            <a:off x="0" y="0"/>
+            <a:ext cx="12191695" cy="6858000"/>
+          </a:xfrm>
+          <a:prstGeom prst="rect">
+            <a:avLst/>
+          </a:prstGeom>
+          <a:solidFill>
+            <a:srgbClr val="FFFFFF"/>
+          </a:solidFill>
+          <a:ln>
+            <a:noFill/>
+          </a:ln>
+          <a:effectLst/>
+        </p:spPr>
+        <p:style>
+          <a:lnRef idx="1">
+            <a:schemeClr val="accent1"/>
+          </a:lnRef>
+          <a:fillRef idx="3">
+            <a:schemeClr val="accent1"/>
+          </a:fillRef>
+          <a:effectRef idx="2">
+            <a:schemeClr val="accent1"/>
+          </a:effectRef>
+          <a:fontRef idx="minor">
+            <a:schemeClr val="lt1"/>
+          </a:fontRef>
+        </p:style>
+        <p:txBody>
+          <a:bodyPr rtlCol="0" anchor="ctr"/>
+          <a:lstStyle/>
+          <a:p>
+            <a:pPr algn="ctr"/>
+          </a:p>
+        </p:txBody>
+      </p:sp>
+      <p:sp>
+        <p:nvSpPr>
+          <p:cNvPr id="3" name="TextBox 2"/>
+          <p:cNvSpPr txBox="1"/>
+          <p:nvPr/>
+        </p:nvSpPr>
+        <p:spPr>
+          <a:xfrm>
+            <a:off x="10607040" y="320040"/>
+            <a:ext cx="1371600" cy="365760"/>
+          </a:xfrm>
+          <a:prstGeom prst="rect">
+            <a:avLst/>
+          </a:prstGeom>
+          <a:noFill/>
+        </p:spPr>
+        <p:txBody>
+          <a:bodyPr wrap="square">
+            <a:spAutoFit/>
+          </a:bodyPr>
+          <a:lstStyle/>
+          <a:p>
+            <a:pPr algn="r"/>
+            <a:r>
+              <a:rPr sz="1000" b="1" i="0">
+                <a:solidFill>
+                  <a:srgbClr val="64748B"/>
+                </a:solidFill>
+                <a:latin typeface="Montserrat"/>
+              </a:rPr>
+              <a:t>021 / 022</a:t>
+            </a:r>
+          </a:p>
+        </p:txBody>
+      </p:sp>
+      <p:sp>
+        <p:nvSpPr>
+          <p:cNvPr id="4" name="TextBox 3"/>
+          <p:cNvSpPr txBox="1"/>
+          <p:nvPr/>
+        </p:nvSpPr>
+        <p:spPr>
+          <a:xfrm>
+            <a:off x="457200" y="6419088"/>
+            <a:ext cx="8229600" cy="365760"/>
+          </a:xfrm>
+          <a:prstGeom prst="rect">
+            <a:avLst/>
+          </a:prstGeom>
+          <a:noFill/>
+        </p:spPr>
+        <p:txBody>
+          <a:bodyPr wrap="square">
+            <a:spAutoFit/>
+          </a:bodyPr>
+          <a:lstStyle/>
+          <a:p>
+            <a:r>
+              <a:rPr sz="900" b="0" i="0">
+                <a:solidFill>
+                  <a:srgbClr val="64748B"/>
+                </a:solidFill>
+                <a:latin typeface="Montserrat"/>
+              </a:rPr>
+              <a:t>Curso Gas B · Tema 00 · El Reglamento de Gas</a:t>
+            </a:r>
+          </a:p>
+        </p:txBody>
+      </p:sp>
+      <p:sp>
+        <p:nvSpPr>
+          <p:cNvPr id="5" name="TextBox 4"/>
+          <p:cNvSpPr txBox="1"/>
+          <p:nvPr/>
+        </p:nvSpPr>
+        <p:spPr>
+          <a:xfrm>
+            <a:off x="822960" y="457200"/>
+            <a:ext cx="10058400" cy="365760"/>
+          </a:xfrm>
+          <a:prstGeom prst="rect">
+            <a:avLst/>
+          </a:prstGeom>
+          <a:noFill/>
+        </p:spPr>
+        <p:txBody>
+          <a:bodyPr wrap="square">
+            <a:spAutoFit/>
+          </a:bodyPr>
+          <a:lstStyle/>
+          <a:p>
+            <a:r>
+              <a:rPr sz="1300" b="1" i="0">
+                <a:solidFill>
+                  <a:srgbClr val="E8801A"/>
+                </a:solidFill>
+                <a:latin typeface="Montserrat"/>
+              </a:rPr>
+              <a:t>REPASO RELÁMPAGO</a:t>
+            </a:r>
+          </a:p>
+        </p:txBody>
+      </p:sp>
+      <p:sp>
+        <p:nvSpPr>
+          <p:cNvPr id="6" name="TextBox 5"/>
+          <p:cNvSpPr txBox="1"/>
+          <p:nvPr/>
+        </p:nvSpPr>
+        <p:spPr>
+          <a:xfrm>
+            <a:off x="822960" y="868680"/>
+            <a:ext cx="10515600" cy="914400"/>
+          </a:xfrm>
+          <a:prstGeom prst="rect">
+            <a:avLst/>
+          </a:prstGeom>
+          <a:noFill/>
+        </p:spPr>
+        <p:txBody>
+          <a:bodyPr wrap="square">
+            <a:spAutoFit/>
+          </a:bodyPr>
+          <a:lstStyle/>
+          <a:p>
+            <a:r>
+              <a:rPr sz="2800" b="1" i="0">
+                <a:solidFill>
+                  <a:srgbClr val="1E2761"/>
+                </a:solidFill>
+                <a:latin typeface="Montserrat"/>
+              </a:rPr>
+              <a:t>Fíjalo en treinta segundos</a:t>
+            </a:r>
+          </a:p>
+        </p:txBody>
+      </p:sp>
+      <p:sp>
+        <p:nvSpPr>
+          <p:cNvPr id="7" name="Rectangle 6"/>
+          <p:cNvSpPr/>
+          <p:nvPr/>
+        </p:nvSpPr>
+        <p:spPr>
+          <a:xfrm>
+            <a:off x="868680" y="1627632"/>
+            <a:ext cx="2011680" cy="73152"/>
+          </a:xfrm>
+          <a:prstGeom prst="rect">
+            <a:avLst/>
+          </a:prstGeom>
+          <a:solidFill>
+            <a:srgbClr val="E8801A"/>
+          </a:solidFill>
+          <a:ln>
+            <a:noFill/>
+          </a:ln>
+          <a:effectLst/>
+        </p:spPr>
+        <p:style>
+          <a:lnRef idx="1">
+            <a:schemeClr val="accent1"/>
+          </a:lnRef>
+          <a:fillRef idx="3">
+            <a:schemeClr val="accent1"/>
+          </a:fillRef>
+          <a:effectRef idx="2">
+            <a:schemeClr val="accent1"/>
+          </a:effectRef>
+          <a:fontRef idx="minor">
+            <a:schemeClr val="lt1"/>
+          </a:fontRef>
+        </p:style>
+        <p:txBody>
+          <a:bodyPr rtlCol="0" anchor="ctr"/>
+          <a:lstStyle/>
+          <a:p>
+            <a:pPr algn="ctr"/>
+          </a:p>
+        </p:txBody>
+      </p:sp>
+      <p:sp>
+        <p:nvSpPr>
+          <p:cNvPr id="8" name="TextBox 7"/>
+          <p:cNvSpPr txBox="1"/>
+          <p:nvPr/>
+        </p:nvSpPr>
+        <p:spPr>
+          <a:xfrm>
+            <a:off x="6355080" y="1965960"/>
+            <a:ext cx="5029200" cy="4206240"/>
+          </a:xfrm>
+          <a:prstGeom prst="rect">
+            <a:avLst/>
+          </a:prstGeom>
+          <a:noFill/>
+        </p:spPr>
+        <p:txBody>
+          <a:bodyPr wrap="square">
+            <a:spAutoFit/>
+          </a:bodyPr>
+          <a:lstStyle/>
+          <a:p>
+            <a:pPr>
+              <a:spcAft>
+                <a:spcPts val="1100"/>
+              </a:spcAft>
+            </a:pPr>
+            <a:r>
+              <a:rPr sz="1600" b="1" i="0">
+                <a:solidFill>
+                  <a:srgbClr val="E8801A"/>
+                </a:solidFill>
+                <a:latin typeface="Montserrat"/>
+              </a:rPr>
+              <a:t>▸  </a:t>
+            </a:r>
+            <a:r>
+              <a:rPr sz="1600" b="0" i="0">
+                <a:solidFill>
+                  <a:srgbClr val="1B2330"/>
+                </a:solidFill>
+                <a:latin typeface="Montserrat"/>
+              </a:rPr>
+              <a:t>Conectada a red → inspección; sin red → revisión</a:t>
+            </a:r>
+          </a:p>
+          <a:p>
+            <a:pPr>
+              <a:spcAft>
+                <a:spcPts val="1100"/>
+              </a:spcAft>
+            </a:pPr>
+            <a:r>
+              <a:rPr sz="1600" b="1" i="0">
+                <a:solidFill>
+                  <a:srgbClr val="E8801A"/>
+                </a:solidFill>
+                <a:latin typeface="Montserrat"/>
+              </a:rPr>
+              <a:t>▸  </a:t>
+            </a:r>
+            <a:r>
+              <a:rPr sz="1600" b="0" i="0">
+                <a:solidFill>
+                  <a:srgbClr val="1B2330"/>
+                </a:solidFill>
+                <a:latin typeface="Montserrat"/>
+              </a:rPr>
+              <a:t>Mantener es del titular</a:t>
+            </a:r>
+          </a:p>
+          <a:p>
+            <a:pPr>
+              <a:spcAft>
+                <a:spcPts val="1100"/>
+              </a:spcAft>
+            </a:pPr>
+            <a:r>
+              <a:rPr sz="1600" b="1" i="0">
+                <a:solidFill>
+                  <a:srgbClr val="E8801A"/>
+                </a:solidFill>
+                <a:latin typeface="Montserrat"/>
+              </a:rPr>
+              <a:t>▸  </a:t>
+            </a:r>
+            <a:r>
+              <a:rPr sz="1600" b="0" i="0">
+                <a:solidFill>
+                  <a:srgbClr val="1B2330"/>
+                </a:solidFill>
+                <a:latin typeface="Montserrat"/>
+              </a:rPr>
+              <a:t>Reglamento: el suelo, nunca el techo</a:t>
+            </a:r>
+          </a:p>
+          <a:p>
+            <a:pPr>
+              <a:spcAft>
+                <a:spcPts val="1100"/>
+              </a:spcAft>
+            </a:pPr>
+            <a:r>
+              <a:rPr sz="1600" b="1" i="0">
+                <a:solidFill>
+                  <a:srgbClr val="E8801A"/>
+                </a:solidFill>
+                <a:latin typeface="Montserrat"/>
+              </a:rPr>
+              <a:t>▸  </a:t>
+            </a:r>
+            <a:r>
+              <a:rPr sz="1600" b="0" i="0">
+                <a:solidFill>
+                  <a:srgbClr val="1B2330"/>
+                </a:solidFill>
+                <a:latin typeface="Montserrat"/>
+              </a:rPr>
+              <a:t>Accidente: 24 h para llamar, 7 días para escribir</a:t>
+            </a:r>
+          </a:p>
+        </p:txBody>
+      </p:sp>
+      <p:sp>
+        <p:nvSpPr>
+          <p:cNvPr id="9" name="imgph" descr="IMGQ:gas safety inspection summary checklist"/>
+          <p:cNvSpPr/>
+          <p:nvPr/>
+        </p:nvSpPr>
+        <p:spPr>
+          <a:xfrm>
+            <a:off x="822960" y="1965960"/>
+            <a:ext cx="5303520" cy="4572000"/>
+          </a:xfrm>
+          <a:prstGeom prst="roundRect">
+            <a:avLst/>
+          </a:prstGeom>
+          <a:solidFill>
+            <a:srgbClr val="F3F6FB"/>
+          </a:solidFill>
+          <a:ln w="12700">
+            <a:solidFill>
+              <a:srgbClr val="C7D2E6"/>
+            </a:solidFill>
+          </a:ln>
+          <a:effectLst/>
+        </p:spPr>
+        <p:style>
+          <a:lnRef idx="1">
+            <a:schemeClr val="accent1"/>
+          </a:lnRef>
+          <a:fillRef idx="3">
+            <a:schemeClr val="accent1"/>
+          </a:fillRef>
+          <a:effectRef idx="2">
+            <a:schemeClr val="accent1"/>
+          </a:effectRef>
+          <a:fontRef idx="minor">
+            <a:schemeClr val="lt1"/>
+          </a:fontRef>
+        </p:style>
+        <p:txBody>
+          <a:bodyPr rtlCol="0" anchor="ctr"/>
+          <a:lstStyle/>
+          <a:p>
+            <a:pPr algn="ctr"/>
+          </a:p>
+        </p:txBody>
+      </p:sp>
+      <p:sp>
+        <p:nvSpPr>
+          <p:cNvPr id="10" name="TextBox 9"/>
+          <p:cNvSpPr txBox="1"/>
+          <p:nvPr/>
+        </p:nvSpPr>
+        <p:spPr>
+          <a:xfrm>
+            <a:off x="1097280" y="3611880"/>
+            <a:ext cx="4754880" cy="1280160"/>
+          </a:xfrm>
+          <a:prstGeom prst="rect">
+            <a:avLst/>
+          </a:prstGeom>
+          <a:noFill/>
+        </p:spPr>
+        <p:txBody>
+          <a:bodyPr wrap="square">
+            <a:spAutoFit/>
+          </a:bodyPr>
+          <a:lstStyle/>
+          <a:p>
+            <a:pPr algn="ctr"/>
+            <a:r>
+              <a:rPr sz="1400" b="1" i="0">
+                <a:solidFill>
+                  <a:srgbClr val="64748B"/>
+                </a:solidFill>
+                <a:latin typeface="Montserrat"/>
+              </a:rPr>
+              <a:t>IMAGEN</a:t>
+            </a:r>
+          </a:p>
+          <a:p>
+            <a:pPr algn="ctr"/>
+            <a:r>
+              <a:rPr sz="1100" b="0" i="1">
+                <a:solidFill>
+                  <a:srgbClr val="64748B"/>
+                </a:solidFill>
+                <a:latin typeface="Montserrat"/>
+              </a:rPr>
+              <a:t>gas safety inspection summary checklist</a:t>
+            </a:r>
+          </a:p>
+        </p:txBody>
+      </p:sp>
+    </p:spTree>
+  </p:cSld>
+  <p:clrMapOvr>
+    <a:masterClrMapping/>
+  </p:clrMapOvr>
+  <mc:AlternateContent xmlns:mc="http://schemas.openxmlformats.org/markup-compatibility/2006">
+    <mc:Choice xmlns:p14="http://schemas.microsoft.com/office/powerpoint/2010/main" Requires="p14">
+      <p:transition spd="med" p14:dur="700">
+        <p14:cube dir="l"/>
+      </p:transition>
+    </mc:Choice>
+    <mc:Fallback>
+      <p:transition spd="med">
+        <p:push dir="l"/>
+      </p:transition>
+    </mc:Fallback>
+  </mc:AlternateContent>
+</p:sld>
+</file>
+
+<file path=ppt/slides/slide22.xml><?xml version="1.0" encoding="utf-8"?>
+<p:sld xmlns:a="http://schemas.openxmlformats.org/drawingml/2006/main" xmlns:p="http://schemas.openxmlformats.org/presentationml/2006/main" xmlns:r="http://schemas.openxmlformats.org/officeDocument/2006/relationships">
+  <p:cSld>
+    <p:spTree>
+      <p:nvGrpSpPr>
+        <p:cNvPr id="1" name=""/>
+        <p:cNvGrpSpPr/>
+        <p:nvPr/>
+      </p:nvGrpSpPr>
+      <p:grpSpPr/>
+      <p:sp>
+        <p:nvSpPr>
+          <p:cNvPr id="2" name="Rectangle 1"/>
+          <p:cNvSpPr/>
+          <p:nvPr/>
+        </p:nvSpPr>
+        <p:spPr>
+          <a:xfrm>
+            <a:off x="0" y="0"/>
+            <a:ext cx="12191695" cy="6858000"/>
+          </a:xfrm>
+          <a:prstGeom prst="rect">
+            <a:avLst/>
+          </a:prstGeom>
+          <a:solidFill>
+            <a:srgbClr val="1E2761"/>
+          </a:solidFill>
+          <a:ln>
+            <a:noFill/>
+          </a:ln>
+          <a:effectLst/>
+        </p:spPr>
+        <p:style>
+          <a:lnRef idx="1">
+            <a:schemeClr val="accent1"/>
+          </a:lnRef>
+          <a:fillRef idx="3">
+            <a:schemeClr val="accent1"/>
+          </a:fillRef>
+          <a:effectRef idx="2">
+            <a:schemeClr val="accent1"/>
+          </a:effectRef>
+          <a:fontRef idx="minor">
+            <a:schemeClr val="lt1"/>
+          </a:fontRef>
+        </p:style>
+        <p:txBody>
+          <a:bodyPr rtlCol="0" anchor="ctr"/>
+          <a:lstStyle/>
+          <a:p>
+            <a:pPr algn="ctr"/>
+          </a:p>
+        </p:txBody>
+      </p:sp>
+      <p:sp>
+        <p:nvSpPr>
+          <p:cNvPr id="3" name="TextBox 2"/>
+          <p:cNvSpPr txBox="1"/>
+          <p:nvPr/>
+        </p:nvSpPr>
+        <p:spPr>
+          <a:xfrm>
+            <a:off x="822960" y="640080"/>
+            <a:ext cx="10515600" cy="457200"/>
+          </a:xfrm>
+          <a:prstGeom prst="rect">
+            <a:avLst/>
+          </a:prstGeom>
+          <a:noFill/>
+        </p:spPr>
+        <p:txBody>
+          <a:bodyPr wrap="square">
+            <a:spAutoFit/>
+          </a:bodyPr>
+          <a:lstStyle/>
+          <a:p>
+            <a:r>
+              <a:rPr sz="1400" b="1" i="0">
+                <a:solidFill>
+                  <a:srgbClr val="F4A24C"/>
+                </a:solidFill>
+                <a:latin typeface="Montserrat"/>
+              </a:rPr>
+              <a:t>LO QUE YA DOMINAS</a:t>
+            </a:r>
+          </a:p>
+        </p:txBody>
+      </p:sp>
+      <p:sp>
+        <p:nvSpPr>
+          <p:cNvPr id="4" name="Rectangle 3"/>
+          <p:cNvSpPr/>
+          <p:nvPr/>
+        </p:nvSpPr>
+        <p:spPr>
+          <a:xfrm>
+            <a:off x="868680" y="1051560"/>
+            <a:ext cx="1463040" cy="82296"/>
+          </a:xfrm>
+          <a:prstGeom prst="rect">
+            <a:avLst/>
+          </a:prstGeom>
+          <a:solidFill>
+            <a:srgbClr val="E8801A"/>
+          </a:solidFill>
+          <a:ln>
+            <a:noFill/>
+          </a:ln>
+          <a:effectLst/>
+        </p:spPr>
+        <p:style>
+          <a:lnRef idx="1">
+            <a:schemeClr val="accent1"/>
+          </a:lnRef>
+          <a:fillRef idx="3">
+            <a:schemeClr val="accent1"/>
+          </a:fillRef>
+          <a:effectRef idx="2">
+            <a:schemeClr val="accent1"/>
+          </a:effectRef>
+          <a:fontRef idx="minor">
+            <a:schemeClr val="lt1"/>
+          </a:fontRef>
+        </p:style>
+        <p:txBody>
+          <a:bodyPr rtlCol="0" anchor="ctr"/>
+          <a:lstStyle/>
+          <a:p>
+            <a:pPr algn="ctr"/>
+          </a:p>
+        </p:txBody>
+      </p:sp>
+      <p:sp>
+        <p:nvSpPr>
+          <p:cNvPr id="5" name="TextBox 4"/>
+          <p:cNvSpPr txBox="1"/>
+          <p:nvPr/>
+        </p:nvSpPr>
+        <p:spPr>
+          <a:xfrm>
+            <a:off x="822960" y="1234440"/>
+            <a:ext cx="10515600" cy="1097280"/>
+          </a:xfrm>
+          <a:prstGeom prst="rect">
+            <a:avLst/>
+          </a:prstGeom>
+          <a:noFill/>
+        </p:spPr>
+        <p:txBody>
+          <a:bodyPr wrap="square">
+            <a:spAutoFit/>
+          </a:bodyPr>
+          <a:lstStyle/>
+          <a:p>
+            <a:r>
+              <a:rPr sz="3400" b="1" i="0">
+                <a:solidFill>
+                  <a:srgbClr val="FFFFFF"/>
+                </a:solidFill>
+                <a:latin typeface="Montserrat"/>
+              </a:rPr>
+              <a:t>Cierras el articulado como un profesional</a:t>
+            </a:r>
+          </a:p>
+        </p:txBody>
+      </p:sp>
+      <p:sp>
+        <p:nvSpPr>
+          <p:cNvPr id="6" name="TextBox 5"/>
+          <p:cNvSpPr txBox="1"/>
+          <p:nvPr/>
+        </p:nvSpPr>
+        <p:spPr>
+          <a:xfrm>
+            <a:off x="822960" y="2606040"/>
+            <a:ext cx="10515600" cy="2743200"/>
+          </a:xfrm>
+          <a:prstGeom prst="rect">
+            <a:avLst/>
+          </a:prstGeom>
+          <a:noFill/>
+        </p:spPr>
+        <p:txBody>
+          <a:bodyPr wrap="square">
+            <a:spAutoFit/>
+          </a:bodyPr>
+          <a:lstStyle/>
+          <a:p>
+            <a:pPr>
+              <a:spcAft>
+                <a:spcPts val="1200"/>
+              </a:spcAft>
+            </a:pPr>
+            <a:r>
+              <a:rPr sz="2000" b="1" i="0">
+                <a:solidFill>
+                  <a:srgbClr val="F4A24C"/>
+                </a:solidFill>
+                <a:latin typeface="Montserrat"/>
+              </a:rPr>
+              <a:t>✓  </a:t>
+            </a:r>
+            <a:r>
+              <a:rPr sz="1900" b="0" i="0">
+                <a:solidFill>
+                  <a:srgbClr val="FFFFFF"/>
+                </a:solidFill>
+                <a:latin typeface="Montserrat"/>
+              </a:rPr>
+              <a:t>Distingues inspección de revisión con una pregunta</a:t>
+            </a:r>
+          </a:p>
+          <a:p>
+            <a:pPr>
+              <a:spcAft>
+                <a:spcPts val="1200"/>
+              </a:spcAft>
+            </a:pPr>
+            <a:r>
+              <a:rPr sz="2000" b="1" i="0">
+                <a:solidFill>
+                  <a:srgbClr val="F4A24C"/>
+                </a:solidFill>
+                <a:latin typeface="Montserrat"/>
+              </a:rPr>
+              <a:t>✓  </a:t>
+            </a:r>
+            <a:r>
+              <a:rPr sz="1900" b="0" i="0">
+                <a:solidFill>
+                  <a:srgbClr val="FFFFFF"/>
+                </a:solidFill>
+                <a:latin typeface="Montserrat"/>
+              </a:rPr>
+              <a:t>Sabes que el mantenimiento responde el titular</a:t>
+            </a:r>
+          </a:p>
+          <a:p>
+            <a:pPr>
+              <a:spcAft>
+                <a:spcPts val="1200"/>
+              </a:spcAft>
+            </a:pPr>
+            <a:r>
+              <a:rPr sz="2000" b="1" i="0">
+                <a:solidFill>
+                  <a:srgbClr val="F4A24C"/>
+                </a:solidFill>
+                <a:latin typeface="Montserrat"/>
+              </a:rPr>
+              <a:t>✓  </a:t>
+            </a:r>
+            <a:r>
+              <a:rPr sz="1900" b="0" i="0">
+                <a:solidFill>
+                  <a:srgbClr val="FFFFFF"/>
+                </a:solidFill>
+                <a:latin typeface="Montserrat"/>
+              </a:rPr>
+              <a:t>Manejas mínimos, equivalencias y excepciones</a:t>
+            </a:r>
+          </a:p>
+          <a:p>
+            <a:pPr>
+              <a:spcAft>
+                <a:spcPts val="1200"/>
+              </a:spcAft>
+            </a:pPr>
+            <a:r>
+              <a:rPr sz="2000" b="1" i="0">
+                <a:solidFill>
+                  <a:srgbClr val="F4A24C"/>
+                </a:solidFill>
+                <a:latin typeface="Montserrat"/>
+              </a:rPr>
+              <a:t>✓  </a:t>
+            </a:r>
+            <a:r>
+              <a:rPr sz="1900" b="0" i="0">
+                <a:solidFill>
+                  <a:srgbClr val="FFFFFF"/>
+                </a:solidFill>
+                <a:latin typeface="Montserrat"/>
+              </a:rPr>
+              <a:t>El protocolo de accidente lo tienes de memoria</a:t>
+            </a:r>
+          </a:p>
+        </p:txBody>
+      </p:sp>
+      <p:sp>
+        <p:nvSpPr>
+          <p:cNvPr id="7" name="Rounded Rectangle 6"/>
+          <p:cNvSpPr/>
+          <p:nvPr/>
+        </p:nvSpPr>
+        <p:spPr>
+          <a:xfrm>
+            <a:off x="822960" y="5532120"/>
+            <a:ext cx="10515600" cy="822960"/>
+          </a:xfrm>
+          <a:prstGeom prst="roundRect">
+            <a:avLst/>
+          </a:prstGeom>
+          <a:solidFill>
+            <a:srgbClr val="E8801A"/>
+          </a:solidFill>
+          <a:ln>
+            <a:noFill/>
+          </a:ln>
+          <a:effectLst/>
+        </p:spPr>
+        <p:style>
+          <a:lnRef idx="1">
+            <a:schemeClr val="accent1"/>
+          </a:lnRef>
+          <a:fillRef idx="3">
+            <a:schemeClr val="accent1"/>
+          </a:fillRef>
+          <a:effectRef idx="2">
+            <a:schemeClr val="accent1"/>
+          </a:effectRef>
+          <a:fontRef idx="minor">
+            <a:schemeClr val="lt1"/>
+          </a:fontRef>
+        </p:style>
+        <p:txBody>
+          <a:bodyPr rtlCol="0" anchor="ctr"/>
+          <a:lstStyle/>
+          <a:p>
+            <a:pPr algn="ctr"/>
+          </a:p>
+        </p:txBody>
+      </p:sp>
+      <p:sp>
+        <p:nvSpPr>
+          <p:cNvPr id="8" name="TextBox 7"/>
+          <p:cNvSpPr txBox="1"/>
+          <p:nvPr/>
+        </p:nvSpPr>
+        <p:spPr>
+          <a:xfrm>
+            <a:off x="1051560" y="5623560"/>
+            <a:ext cx="10058400" cy="640080"/>
+          </a:xfrm>
+          <a:prstGeom prst="rect">
+            <a:avLst/>
+          </a:prstGeom>
+          <a:noFill/>
+        </p:spPr>
+        <p:txBody>
+          <a:bodyPr wrap="square">
+            <a:spAutoFit/>
+          </a:bodyPr>
+          <a:lstStyle/>
+          <a:p>
+            <a:r>
+              <a:rPr sz="1500" b="1" i="1">
+                <a:solidFill>
+                  <a:srgbClr val="1E2761"/>
+                </a:solidFill>
+                <a:latin typeface="Montserrat"/>
+              </a:rPr>
+              <a:t>Has terminado el marco normativo: ya piensas como gasista. A por las instalaciones.</a:t>
+            </a:r>
+          </a:p>
+        </p:txBody>
+      </p:sp>
+    </p:spTree>
+  </p:cSld>
+  <p:clrMapOvr>
+    <a:masterClrMapping/>
+  </p:clrMapOvr>
+  <mc:AlternateContent xmlns:mc="http://schemas.openxmlformats.org/markup-compatibility/2006">
+    <mc:Choice xmlns:p14="http://schemas.microsoft.com/office/powerpoint/2010/main" Requires="p14">
+      <p:transition spd="med" p14:dur="700">
+        <p14:cube dir="r"/>
+      </p:transition>
+    </mc:Choice>
+    <mc:Fallback>
+      <p:transition spd="med">
+        <p:push dir="r"/>
+      </p:transition>
+    </mc:Fallback>
+  </mc:AlternateContent>
 </p:sld>
 </file>
 
@@ -8558,7 +12316,7 @@
                 </a:solidFill>
                 <a:latin typeface="Montserrat"/>
               </a:rPr>
-              <a:t>003 / 016</a:t>
+              <a:t>003 / 022</a:t>
             </a:r>
           </a:p>
         </p:txBody>
@@ -8667,7 +12425,7 @@
       </p:sp>
       <p:sp>
         <p:nvSpPr>
-          <p:cNvPr id="7" name="Rounded Rectangle 6"/>
+          <p:cNvPr id="7" name="Rectangle 6"/>
           <p:cNvSpPr/>
           <p:nvPr/>
         </p:nvSpPr>
@@ -8676,7 +12434,7 @@
             <a:off x="868680" y="1673352"/>
             <a:ext cx="2011680" cy="73152"/>
           </a:xfrm>
-          <a:prstGeom prst="roundRect">
+          <a:prstGeom prst="rect">
             <a:avLst/>
           </a:prstGeom>
           <a:solidFill>
@@ -8962,6 +12720,18 @@
   <p:clrMapOvr>
     <a:masterClrMapping/>
   </p:clrMapOvr>
+  <mc:AlternateContent xmlns:mc="http://schemas.openxmlformats.org/markup-compatibility/2006">
+    <mc:Choice xmlns:p14="http://schemas.microsoft.com/office/powerpoint/2010/main" Requires="p14">
+      <p:transition spd="med" p14:dur="700">
+        <p14:cube dir="l"/>
+      </p:transition>
+    </mc:Choice>
+    <mc:Fallback>
+      <p:transition spd="med">
+        <p:push dir="l"/>
+      </p:transition>
+    </mc:Fallback>
+  </mc:AlternateContent>
 </p:sld>
 </file>
 
@@ -9049,7 +12819,7 @@
                 </a:solidFill>
                 <a:latin typeface="Montserrat"/>
               </a:rPr>
-              <a:t>004 / 016</a:t>
+              <a:t>004 / 022</a:t>
             </a:r>
           </a:p>
         </p:txBody>
@@ -9158,7 +12928,7 @@
       </p:sp>
       <p:sp>
         <p:nvSpPr>
-          <p:cNvPr id="7" name="Rounded Rectangle 6"/>
+          <p:cNvPr id="7" name="Rectangle 6"/>
           <p:cNvSpPr/>
           <p:nvPr/>
         </p:nvSpPr>
@@ -9167,7 +12937,7 @@
             <a:off x="868680" y="1627632"/>
             <a:ext cx="2011680" cy="73152"/>
           </a:xfrm>
-          <a:prstGeom prst="roundRect">
+          <a:prstGeom prst="rect">
             <a:avLst/>
           </a:prstGeom>
           <a:solidFill>
@@ -9209,7 +12979,7 @@
         <p:spPr>
           <a:xfrm>
             <a:off x="822960" y="1965960"/>
-            <a:ext cx="4983480" cy="4206240"/>
+            <a:ext cx="5029200" cy="4206240"/>
           </a:xfrm>
           <a:prstGeom prst="rect">
             <a:avLst/>
@@ -9306,8 +13076,8 @@
         </p:nvSpPr>
         <p:spPr>
           <a:xfrm>
-            <a:off x="5806440" y="1051560"/>
-            <a:ext cx="5298947" cy="4629150"/>
+            <a:off x="6080760" y="1965960"/>
+            <a:ext cx="5303520" cy="4572000"/>
           </a:xfrm>
           <a:prstGeom prst="roundRect">
             <a:avLst/>
@@ -9352,8 +13122,8 @@
         </p:nvSpPr>
         <p:spPr>
           <a:xfrm>
-            <a:off x="6080760" y="2726055"/>
-            <a:ext cx="4750307" cy="1280160"/>
+            <a:off x="6355080" y="3611880"/>
+            <a:ext cx="4754880" cy="1280160"/>
           </a:xfrm>
           <a:prstGeom prst="rect">
             <a:avLst/>
@@ -9374,7 +13144,7 @@
                 </a:solidFill>
                 <a:latin typeface="Montserrat"/>
               </a:rPr>
-              <a:t>IMAGEN REALISTA</a:t>
+              <a:t>IMAGEN</a:t>
             </a:r>
           </a:p>
           <a:p>
@@ -9396,6 +13166,18 @@
   <p:clrMapOvr>
     <a:masterClrMapping/>
   </p:clrMapOvr>
+  <mc:AlternateContent xmlns:mc="http://schemas.openxmlformats.org/markup-compatibility/2006">
+    <mc:Choice xmlns:p14="http://schemas.microsoft.com/office/powerpoint/2010/main" Requires="p14">
+      <p:transition spd="med" p14:dur="700">
+        <p14:cube dir="r"/>
+      </p:transition>
+    </mc:Choice>
+    <mc:Fallback>
+      <p:transition spd="med">
+        <p:push dir="r"/>
+      </p:transition>
+    </mc:Fallback>
+  </mc:AlternateContent>
 </p:sld>
 </file>
 
@@ -9483,7 +13265,7 @@
                 </a:solidFill>
                 <a:latin typeface="Montserrat"/>
               </a:rPr>
-              <a:t>005 / 016</a:t>
+              <a:t>005 / 022</a:t>
             </a:r>
           </a:p>
         </p:txBody>
@@ -9524,84 +13306,16 @@
       </p:sp>
       <p:sp>
         <p:nvSpPr>
-          <p:cNvPr id="5" name="TextBox 4"/>
-          <p:cNvSpPr txBox="1"/>
-          <p:nvPr/>
-        </p:nvSpPr>
-        <p:spPr>
-          <a:xfrm>
-            <a:off x="822960" y="457200"/>
-            <a:ext cx="10058400" cy="365760"/>
-          </a:xfrm>
-          <a:prstGeom prst="rect">
-            <a:avLst/>
-          </a:prstGeom>
-          <a:noFill/>
-        </p:spPr>
-        <p:txBody>
-          <a:bodyPr wrap="square">
-            <a:spAutoFit/>
-          </a:bodyPr>
-          <a:lstStyle/>
-          <a:p>
-            <a:r>
-              <a:rPr sz="1300" b="1" i="0">
-                <a:solidFill>
-                  <a:srgbClr val="E8801A"/>
-                </a:solidFill>
-                <a:latin typeface="Montserrat"/>
-              </a:rPr>
-              <a:t>ARTÍCULO 7.2 · LA PREGUNTA ESTRELLA</a:t>
-            </a:r>
-          </a:p>
-        </p:txBody>
-      </p:sp>
-      <p:sp>
-        <p:nvSpPr>
-          <p:cNvPr id="6" name="TextBox 5"/>
-          <p:cNvSpPr txBox="1"/>
-          <p:nvPr/>
-        </p:nvSpPr>
-        <p:spPr>
-          <a:xfrm>
-            <a:off x="822960" y="868680"/>
-            <a:ext cx="10515600" cy="914400"/>
-          </a:xfrm>
-          <a:prstGeom prst="rect">
-            <a:avLst/>
-          </a:prstGeom>
-          <a:noFill/>
-        </p:spPr>
-        <p:txBody>
-          <a:bodyPr wrap="square">
-            <a:spAutoFit/>
-          </a:bodyPr>
-          <a:lstStyle/>
-          <a:p>
-            <a:r>
-              <a:rPr sz="2800" b="1" i="0">
-                <a:solidFill>
-                  <a:srgbClr val="1E2761"/>
-                </a:solidFill>
-                <a:latin typeface="Montserrat"/>
-              </a:rPr>
-              <a:t>¿Inspección o revisión?</a:t>
-            </a:r>
-          </a:p>
-        </p:txBody>
-      </p:sp>
-      <p:sp>
-        <p:nvSpPr>
-          <p:cNvPr id="7" name="Rounded Rectangle 6"/>
+          <p:cNvPr id="5" name="Rectangle 4"/>
           <p:cNvSpPr/>
           <p:nvPr/>
         </p:nvSpPr>
         <p:spPr>
           <a:xfrm>
-            <a:off x="868680" y="1627632"/>
-            <a:ext cx="2011680" cy="73152"/>
-          </a:xfrm>
-          <a:prstGeom prst="roundRect">
+            <a:off x="0" y="0"/>
+            <a:ext cx="12191695" cy="1143000"/>
+          </a:xfrm>
+          <a:prstGeom prst="rect">
             <a:avLst/>
           </a:prstGeom>
           <a:solidFill>
@@ -9636,14 +13350,14 @@
       </p:sp>
       <p:sp>
         <p:nvSpPr>
-          <p:cNvPr id="8" name="TextBox 7"/>
+          <p:cNvPr id="6" name="TextBox 5"/>
           <p:cNvSpPr txBox="1"/>
           <p:nvPr/>
         </p:nvSpPr>
         <p:spPr>
           <a:xfrm>
-            <a:off x="822960" y="1965960"/>
-            <a:ext cx="4983480" cy="4206240"/>
+            <a:off x="822960" y="274320"/>
+            <a:ext cx="10515600" cy="640080"/>
           </a:xfrm>
           <a:prstGeom prst="rect">
             <a:avLst/>
@@ -9656,117 +13370,62 @@
           </a:bodyPr>
           <a:lstStyle/>
           <a:p>
-            <a:pPr>
-              <a:spcAft>
-                <a:spcPts val="1100"/>
-              </a:spcAft>
-            </a:pPr>
-            <a:r>
-              <a:rPr sz="1600" b="1" i="0">
-                <a:solidFill>
-                  <a:srgbClr val="E8801A"/>
-                </a:solidFill>
-                <a:latin typeface="Montserrat"/>
-              </a:rPr>
-              <a:t>▸  </a:t>
-            </a:r>
-            <a:r>
-              <a:rPr sz="1600" b="0" i="0">
-                <a:solidFill>
-                  <a:srgbClr val="1B2330"/>
-                </a:solidFill>
-                <a:latin typeface="Montserrat"/>
-              </a:rPr>
-              <a:t>¿Conectada a la red de distribución?</a:t>
-            </a:r>
-          </a:p>
-          <a:p>
-            <a:pPr>
-              <a:spcAft>
-                <a:spcPts val="1100"/>
-              </a:spcAft>
-            </a:pPr>
-            <a:r>
-              <a:rPr sz="1600" b="1" i="0">
-                <a:solidFill>
-                  <a:srgbClr val="E8801A"/>
-                </a:solidFill>
-                <a:latin typeface="Montserrat"/>
-              </a:rPr>
-              <a:t>▸  </a:t>
-            </a:r>
-            <a:r>
-              <a:rPr sz="1600" b="0" i="0">
-                <a:solidFill>
-                  <a:srgbClr val="1B2330"/>
-                </a:solidFill>
-                <a:latin typeface="Montserrat"/>
-              </a:rPr>
-              <a:t>SÍ (red) → inspección</a:t>
-            </a:r>
-          </a:p>
-          <a:p>
-            <a:pPr>
-              <a:spcAft>
-                <a:spcPts val="1100"/>
-              </a:spcAft>
-            </a:pPr>
-            <a:r>
-              <a:rPr sz="1600" b="1" i="0">
-                <a:solidFill>
-                  <a:srgbClr val="E8801A"/>
-                </a:solidFill>
-                <a:latin typeface="Montserrat"/>
-              </a:rPr>
-              <a:t>▸  </a:t>
-            </a:r>
-            <a:r>
-              <a:rPr sz="1600" b="0" i="0">
-                <a:solidFill>
-                  <a:srgbClr val="1B2330"/>
-                </a:solidFill>
-                <a:latin typeface="Montserrat"/>
-              </a:rPr>
-              <a:t>NO (depósito propio) → revisión</a:t>
-            </a:r>
-          </a:p>
-          <a:p>
-            <a:pPr>
-              <a:spcAft>
-                <a:spcPts val="1100"/>
-              </a:spcAft>
-            </a:pPr>
-            <a:r>
-              <a:rPr sz="1600" b="1" i="0">
-                <a:solidFill>
-                  <a:srgbClr val="E8801A"/>
-                </a:solidFill>
-                <a:latin typeface="Montserrat"/>
-              </a:rPr>
-              <a:t>▸  </a:t>
-            </a:r>
-            <a:r>
-              <a:rPr sz="1600" b="0" i="0">
-                <a:solidFill>
-                  <a:srgbClr val="1B2330"/>
-                </a:solidFill>
-                <a:latin typeface="Montserrat"/>
-              </a:rPr>
-              <a:t>Organismo de control obligatorio → inspección</a:t>
-            </a:r>
-          </a:p>
-        </p:txBody>
-      </p:sp>
-      <p:sp>
-        <p:nvSpPr>
-          <p:cNvPr id="9" name="imgph" descr="IMGQ:gas distribution pipeline street valve"/>
+            <a:r>
+              <a:rPr sz="2400" b="1" i="0">
+                <a:solidFill>
+                  <a:srgbClr val="FFFFFF"/>
+                </a:solidFill>
+                <a:latin typeface="Montserrat"/>
+              </a:rPr>
+              <a:t>⚡  PREGUNTA RÁPIDA</a:t>
+            </a:r>
+          </a:p>
+        </p:txBody>
+      </p:sp>
+      <p:sp>
+        <p:nvSpPr>
+          <p:cNvPr id="7" name="TextBox 6"/>
+          <p:cNvSpPr txBox="1"/>
+          <p:nvPr/>
+        </p:nvSpPr>
+        <p:spPr>
+          <a:xfrm>
+            <a:off x="822960" y="1508760"/>
+            <a:ext cx="10515600" cy="1371600"/>
+          </a:xfrm>
+          <a:prstGeom prst="rect">
+            <a:avLst/>
+          </a:prstGeom>
+          <a:noFill/>
+        </p:spPr>
+        <p:txBody>
+          <a:bodyPr wrap="square">
+            <a:spAutoFit/>
+          </a:bodyPr>
+          <a:lstStyle/>
+          <a:p>
+            <a:r>
+              <a:rPr sz="2400" b="1" i="0">
+                <a:solidFill>
+                  <a:srgbClr val="1E2761"/>
+                </a:solidFill>
+                <a:latin typeface="Montserrat"/>
+              </a:rPr>
+              <a:t>¿De quién es la obligación de mantener la instalación en buen estado?</a:t>
+            </a:r>
+          </a:p>
+        </p:txBody>
+      </p:sp>
+      <p:sp>
+        <p:nvSpPr>
+          <p:cNvPr id="8" name="Rounded Rectangle 7"/>
           <p:cNvSpPr/>
           <p:nvPr/>
         </p:nvSpPr>
         <p:spPr>
           <a:xfrm>
-            <a:off x="5806440" y="1051560"/>
-            <a:ext cx="5298947" cy="4629150"/>
+            <a:off x="822960" y="3291840"/>
+            <a:ext cx="4983480" cy="1143000"/>
           </a:xfrm>
           <a:prstGeom prst="roundRect">
             <a:avLst/>
@@ -9805,14 +13464,58 @@
       </p:sp>
       <p:sp>
         <p:nvSpPr>
+          <p:cNvPr id="9" name="Rectangle 8"/>
+          <p:cNvSpPr/>
+          <p:nvPr/>
+        </p:nvSpPr>
+        <p:spPr>
+          <a:xfrm>
+            <a:off x="822960" y="3291840"/>
+            <a:ext cx="640080" cy="1143000"/>
+          </a:xfrm>
+          <a:prstGeom prst="rect">
+            <a:avLst/>
+          </a:prstGeom>
+          <a:solidFill>
+            <a:srgbClr val="1E2761"/>
+          </a:solidFill>
+          <a:ln>
+            <a:noFill/>
+          </a:ln>
+          <a:effectLst/>
+        </p:spPr>
+        <p:style>
+          <a:lnRef idx="1">
+            <a:schemeClr val="accent1"/>
+          </a:lnRef>
+          <a:fillRef idx="3">
+            <a:schemeClr val="accent1"/>
+          </a:fillRef>
+          <a:effectRef idx="2">
+            <a:schemeClr val="accent1"/>
+          </a:effectRef>
+          <a:fontRef idx="minor">
+            <a:schemeClr val="lt1"/>
+          </a:fontRef>
+        </p:style>
+        <p:txBody>
+          <a:bodyPr rtlCol="0" anchor="ctr"/>
+          <a:lstStyle/>
+          <a:p>
+            <a:pPr algn="ctr"/>
+          </a:p>
+        </p:txBody>
+      </p:sp>
+      <p:sp>
+        <p:nvSpPr>
           <p:cNvPr id="10" name="TextBox 9"/>
           <p:cNvSpPr txBox="1"/>
           <p:nvPr/>
         </p:nvSpPr>
         <p:spPr>
           <a:xfrm>
-            <a:off x="6080760" y="2726055"/>
-            <a:ext cx="4750307" cy="1280160"/>
+            <a:off x="822960" y="3611880"/>
+            <a:ext cx="640080" cy="548640"/>
           </a:xfrm>
           <a:prstGeom prst="rect">
             <a:avLst/>
@@ -9827,25 +13530,524 @@
           <a:p>
             <a:pPr algn="ctr"/>
             <a:r>
-              <a:rPr sz="1400" b="1" i="0">
-                <a:solidFill>
-                  <a:srgbClr val="64748B"/>
-                </a:solidFill>
-                <a:latin typeface="Montserrat"/>
-              </a:rPr>
-              <a:t>IMAGEN REALISTA</a:t>
-            </a:r>
-          </a:p>
+              <a:rPr sz="2200" b="1" i="0">
+                <a:solidFill>
+                  <a:srgbClr val="FFFFFF"/>
+                </a:solidFill>
+                <a:latin typeface="Montserrat"/>
+              </a:rPr>
+              <a:t>A</a:t>
+            </a:r>
+          </a:p>
+        </p:txBody>
+      </p:sp>
+      <p:sp>
+        <p:nvSpPr>
+          <p:cNvPr id="11" name="TextBox 10"/>
+          <p:cNvSpPr txBox="1"/>
+          <p:nvPr/>
+        </p:nvSpPr>
+        <p:spPr>
+          <a:xfrm>
+            <a:off x="1600200" y="3474720"/>
+            <a:ext cx="4114800" cy="868680"/>
+          </a:xfrm>
+          <a:prstGeom prst="rect">
+            <a:avLst/>
+          </a:prstGeom>
+          <a:noFill/>
+        </p:spPr>
+        <p:txBody>
+          <a:bodyPr wrap="square">
+            <a:spAutoFit/>
+          </a:bodyPr>
+          <a:lstStyle/>
+          <a:p>
+            <a:r>
+              <a:rPr sz="1400" b="0" i="0">
+                <a:solidFill>
+                  <a:srgbClr val="1B2330"/>
+                </a:solidFill>
+                <a:latin typeface="Montserrat"/>
+              </a:rPr>
+              <a:t>De la empresa instaladora</a:t>
+            </a:r>
+          </a:p>
+        </p:txBody>
+      </p:sp>
+      <p:sp>
+        <p:nvSpPr>
+          <p:cNvPr id="12" name="Rounded Rectangle 11"/>
+          <p:cNvSpPr/>
+          <p:nvPr/>
+        </p:nvSpPr>
+        <p:spPr>
+          <a:xfrm>
+            <a:off x="6355080" y="3291840"/>
+            <a:ext cx="4983480" cy="1143000"/>
+          </a:xfrm>
+          <a:prstGeom prst="roundRect">
+            <a:avLst/>
+          </a:prstGeom>
+          <a:solidFill>
+            <a:srgbClr val="F3F6FB"/>
+          </a:solidFill>
+          <a:ln w="12700">
+            <a:solidFill>
+              <a:srgbClr val="C7D2E6"/>
+            </a:solidFill>
+          </a:ln>
+          <a:effectLst/>
+        </p:spPr>
+        <p:style>
+          <a:lnRef idx="1">
+            <a:schemeClr val="accent1"/>
+          </a:lnRef>
+          <a:fillRef idx="3">
+            <a:schemeClr val="accent1"/>
+          </a:fillRef>
+          <a:effectRef idx="2">
+            <a:schemeClr val="accent1"/>
+          </a:effectRef>
+          <a:fontRef idx="minor">
+            <a:schemeClr val="lt1"/>
+          </a:fontRef>
+        </p:style>
+        <p:txBody>
+          <a:bodyPr rtlCol="0" anchor="ctr"/>
+          <a:lstStyle/>
           <a:p>
             <a:pPr algn="ctr"/>
-            <a:r>
-              <a:rPr sz="1100" b="0" i="1">
-                <a:solidFill>
-                  <a:srgbClr val="64748B"/>
-                </a:solidFill>
-                <a:latin typeface="Montserrat"/>
-              </a:rPr>
-              <a:t>gas distribution pipeline street valve</a:t>
+          </a:p>
+        </p:txBody>
+      </p:sp>
+      <p:sp>
+        <p:nvSpPr>
+          <p:cNvPr id="13" name="Rectangle 12"/>
+          <p:cNvSpPr/>
+          <p:nvPr/>
+        </p:nvSpPr>
+        <p:spPr>
+          <a:xfrm>
+            <a:off x="6355080" y="3291840"/>
+            <a:ext cx="640080" cy="1143000"/>
+          </a:xfrm>
+          <a:prstGeom prst="rect">
+            <a:avLst/>
+          </a:prstGeom>
+          <a:solidFill>
+            <a:srgbClr val="1E2761"/>
+          </a:solidFill>
+          <a:ln>
+            <a:noFill/>
+          </a:ln>
+          <a:effectLst/>
+        </p:spPr>
+        <p:style>
+          <a:lnRef idx="1">
+            <a:schemeClr val="accent1"/>
+          </a:lnRef>
+          <a:fillRef idx="3">
+            <a:schemeClr val="accent1"/>
+          </a:fillRef>
+          <a:effectRef idx="2">
+            <a:schemeClr val="accent1"/>
+          </a:effectRef>
+          <a:fontRef idx="minor">
+            <a:schemeClr val="lt1"/>
+          </a:fontRef>
+        </p:style>
+        <p:txBody>
+          <a:bodyPr rtlCol="0" anchor="ctr"/>
+          <a:lstStyle/>
+          <a:p>
+            <a:pPr algn="ctr"/>
+          </a:p>
+        </p:txBody>
+      </p:sp>
+      <p:sp>
+        <p:nvSpPr>
+          <p:cNvPr id="14" name="TextBox 13"/>
+          <p:cNvSpPr txBox="1"/>
+          <p:nvPr/>
+        </p:nvSpPr>
+        <p:spPr>
+          <a:xfrm>
+            <a:off x="6355080" y="3611880"/>
+            <a:ext cx="640080" cy="548640"/>
+          </a:xfrm>
+          <a:prstGeom prst="rect">
+            <a:avLst/>
+          </a:prstGeom>
+          <a:noFill/>
+        </p:spPr>
+        <p:txBody>
+          <a:bodyPr wrap="square">
+            <a:spAutoFit/>
+          </a:bodyPr>
+          <a:lstStyle/>
+          <a:p>
+            <a:pPr algn="ctr"/>
+            <a:r>
+              <a:rPr sz="2200" b="1" i="0">
+                <a:solidFill>
+                  <a:srgbClr val="FFFFFF"/>
+                </a:solidFill>
+                <a:latin typeface="Montserrat"/>
+              </a:rPr>
+              <a:t>B</a:t>
+            </a:r>
+          </a:p>
+        </p:txBody>
+      </p:sp>
+      <p:sp>
+        <p:nvSpPr>
+          <p:cNvPr id="15" name="TextBox 14"/>
+          <p:cNvSpPr txBox="1"/>
+          <p:nvPr/>
+        </p:nvSpPr>
+        <p:spPr>
+          <a:xfrm>
+            <a:off x="7132320" y="3474720"/>
+            <a:ext cx="4114800" cy="868680"/>
+          </a:xfrm>
+          <a:prstGeom prst="rect">
+            <a:avLst/>
+          </a:prstGeom>
+          <a:noFill/>
+        </p:spPr>
+        <p:txBody>
+          <a:bodyPr wrap="square">
+            <a:spAutoFit/>
+          </a:bodyPr>
+          <a:lstStyle/>
+          <a:p>
+            <a:r>
+              <a:rPr sz="1400" b="0" i="0">
+                <a:solidFill>
+                  <a:srgbClr val="1B2330"/>
+                </a:solidFill>
+                <a:latin typeface="Montserrat"/>
+              </a:rPr>
+              <a:t>Del titular y, en su defecto, del usuario</a:t>
+            </a:r>
+          </a:p>
+        </p:txBody>
+      </p:sp>
+      <p:sp>
+        <p:nvSpPr>
+          <p:cNvPr id="16" name="Rounded Rectangle 15"/>
+          <p:cNvSpPr/>
+          <p:nvPr/>
+        </p:nvSpPr>
+        <p:spPr>
+          <a:xfrm>
+            <a:off x="822960" y="4617720"/>
+            <a:ext cx="4983480" cy="1143000"/>
+          </a:xfrm>
+          <a:prstGeom prst="roundRect">
+            <a:avLst/>
+          </a:prstGeom>
+          <a:solidFill>
+            <a:srgbClr val="F3F6FB"/>
+          </a:solidFill>
+          <a:ln w="12700">
+            <a:solidFill>
+              <a:srgbClr val="C7D2E6"/>
+            </a:solidFill>
+          </a:ln>
+          <a:effectLst/>
+        </p:spPr>
+        <p:style>
+          <a:lnRef idx="1">
+            <a:schemeClr val="accent1"/>
+          </a:lnRef>
+          <a:fillRef idx="3">
+            <a:schemeClr val="accent1"/>
+          </a:fillRef>
+          <a:effectRef idx="2">
+            <a:schemeClr val="accent1"/>
+          </a:effectRef>
+          <a:fontRef idx="minor">
+            <a:schemeClr val="lt1"/>
+          </a:fontRef>
+        </p:style>
+        <p:txBody>
+          <a:bodyPr rtlCol="0" anchor="ctr"/>
+          <a:lstStyle/>
+          <a:p>
+            <a:pPr algn="ctr"/>
+          </a:p>
+        </p:txBody>
+      </p:sp>
+      <p:sp>
+        <p:nvSpPr>
+          <p:cNvPr id="17" name="Rectangle 16"/>
+          <p:cNvSpPr/>
+          <p:nvPr/>
+        </p:nvSpPr>
+        <p:spPr>
+          <a:xfrm>
+            <a:off x="822960" y="4617720"/>
+            <a:ext cx="640080" cy="1143000"/>
+          </a:xfrm>
+          <a:prstGeom prst="rect">
+            <a:avLst/>
+          </a:prstGeom>
+          <a:solidFill>
+            <a:srgbClr val="1E2761"/>
+          </a:solidFill>
+          <a:ln>
+            <a:noFill/>
+          </a:ln>
+          <a:effectLst/>
+        </p:spPr>
+        <p:style>
+          <a:lnRef idx="1">
+            <a:schemeClr val="accent1"/>
+          </a:lnRef>
+          <a:fillRef idx="3">
+            <a:schemeClr val="accent1"/>
+          </a:fillRef>
+          <a:effectRef idx="2">
+            <a:schemeClr val="accent1"/>
+          </a:effectRef>
+          <a:fontRef idx="minor">
+            <a:schemeClr val="lt1"/>
+          </a:fontRef>
+        </p:style>
+        <p:txBody>
+          <a:bodyPr rtlCol="0" anchor="ctr"/>
+          <a:lstStyle/>
+          <a:p>
+            <a:pPr algn="ctr"/>
+          </a:p>
+        </p:txBody>
+      </p:sp>
+      <p:sp>
+        <p:nvSpPr>
+          <p:cNvPr id="18" name="TextBox 17"/>
+          <p:cNvSpPr txBox="1"/>
+          <p:nvPr/>
+        </p:nvSpPr>
+        <p:spPr>
+          <a:xfrm>
+            <a:off x="822960" y="4937760"/>
+            <a:ext cx="640080" cy="548640"/>
+          </a:xfrm>
+          <a:prstGeom prst="rect">
+            <a:avLst/>
+          </a:prstGeom>
+          <a:noFill/>
+        </p:spPr>
+        <p:txBody>
+          <a:bodyPr wrap="square">
+            <a:spAutoFit/>
+          </a:bodyPr>
+          <a:lstStyle/>
+          <a:p>
+            <a:pPr algn="ctr"/>
+            <a:r>
+              <a:rPr sz="2200" b="1" i="0">
+                <a:solidFill>
+                  <a:srgbClr val="FFFFFF"/>
+                </a:solidFill>
+                <a:latin typeface="Montserrat"/>
+              </a:rPr>
+              <a:t>C</a:t>
+            </a:r>
+          </a:p>
+        </p:txBody>
+      </p:sp>
+      <p:sp>
+        <p:nvSpPr>
+          <p:cNvPr id="19" name="TextBox 18"/>
+          <p:cNvSpPr txBox="1"/>
+          <p:nvPr/>
+        </p:nvSpPr>
+        <p:spPr>
+          <a:xfrm>
+            <a:off x="1600200" y="4800600"/>
+            <a:ext cx="4114800" cy="868680"/>
+          </a:xfrm>
+          <a:prstGeom prst="rect">
+            <a:avLst/>
+          </a:prstGeom>
+          <a:noFill/>
+        </p:spPr>
+        <p:txBody>
+          <a:bodyPr wrap="square">
+            <a:spAutoFit/>
+          </a:bodyPr>
+          <a:lstStyle/>
+          <a:p>
+            <a:r>
+              <a:rPr sz="1400" b="0" i="0">
+                <a:solidFill>
+                  <a:srgbClr val="1B2330"/>
+                </a:solidFill>
+                <a:latin typeface="Montserrat"/>
+              </a:rPr>
+              <a:t>Del distribuidor de gas</a:t>
+            </a:r>
+          </a:p>
+        </p:txBody>
+      </p:sp>
+      <p:sp>
+        <p:nvSpPr>
+          <p:cNvPr id="20" name="Rounded Rectangle 19"/>
+          <p:cNvSpPr/>
+          <p:nvPr/>
+        </p:nvSpPr>
+        <p:spPr>
+          <a:xfrm>
+            <a:off x="6355080" y="4617720"/>
+            <a:ext cx="4983480" cy="1143000"/>
+          </a:xfrm>
+          <a:prstGeom prst="roundRect">
+            <a:avLst/>
+          </a:prstGeom>
+          <a:solidFill>
+            <a:srgbClr val="F3F6FB"/>
+          </a:solidFill>
+          <a:ln w="12700">
+            <a:solidFill>
+              <a:srgbClr val="C7D2E6"/>
+            </a:solidFill>
+          </a:ln>
+          <a:effectLst/>
+        </p:spPr>
+        <p:style>
+          <a:lnRef idx="1">
+            <a:schemeClr val="accent1"/>
+          </a:lnRef>
+          <a:fillRef idx="3">
+            <a:schemeClr val="accent1"/>
+          </a:fillRef>
+          <a:effectRef idx="2">
+            <a:schemeClr val="accent1"/>
+          </a:effectRef>
+          <a:fontRef idx="minor">
+            <a:schemeClr val="lt1"/>
+          </a:fontRef>
+        </p:style>
+        <p:txBody>
+          <a:bodyPr rtlCol="0" anchor="ctr"/>
+          <a:lstStyle/>
+          <a:p>
+            <a:pPr algn="ctr"/>
+          </a:p>
+        </p:txBody>
+      </p:sp>
+      <p:sp>
+        <p:nvSpPr>
+          <p:cNvPr id="21" name="Rectangle 20"/>
+          <p:cNvSpPr/>
+          <p:nvPr/>
+        </p:nvSpPr>
+        <p:spPr>
+          <a:xfrm>
+            <a:off x="6355080" y="4617720"/>
+            <a:ext cx="640080" cy="1143000"/>
+          </a:xfrm>
+          <a:prstGeom prst="rect">
+            <a:avLst/>
+          </a:prstGeom>
+          <a:solidFill>
+            <a:srgbClr val="1E2761"/>
+          </a:solidFill>
+          <a:ln>
+            <a:noFill/>
+          </a:ln>
+          <a:effectLst/>
+        </p:spPr>
+        <p:style>
+          <a:lnRef idx="1">
+            <a:schemeClr val="accent1"/>
+          </a:lnRef>
+          <a:fillRef idx="3">
+            <a:schemeClr val="accent1"/>
+          </a:fillRef>
+          <a:effectRef idx="2">
+            <a:schemeClr val="accent1"/>
+          </a:effectRef>
+          <a:fontRef idx="minor">
+            <a:schemeClr val="lt1"/>
+          </a:fontRef>
+        </p:style>
+        <p:txBody>
+          <a:bodyPr rtlCol="0" anchor="ctr"/>
+          <a:lstStyle/>
+          <a:p>
+            <a:pPr algn="ctr"/>
+          </a:p>
+        </p:txBody>
+      </p:sp>
+      <p:sp>
+        <p:nvSpPr>
+          <p:cNvPr id="22" name="TextBox 21"/>
+          <p:cNvSpPr txBox="1"/>
+          <p:nvPr/>
+        </p:nvSpPr>
+        <p:spPr>
+          <a:xfrm>
+            <a:off x="6355080" y="4937760"/>
+            <a:ext cx="640080" cy="548640"/>
+          </a:xfrm>
+          <a:prstGeom prst="rect">
+            <a:avLst/>
+          </a:prstGeom>
+          <a:noFill/>
+        </p:spPr>
+        <p:txBody>
+          <a:bodyPr wrap="square">
+            <a:spAutoFit/>
+          </a:bodyPr>
+          <a:lstStyle/>
+          <a:p>
+            <a:pPr algn="ctr"/>
+            <a:r>
+              <a:rPr sz="2200" b="1" i="0">
+                <a:solidFill>
+                  <a:srgbClr val="FFFFFF"/>
+                </a:solidFill>
+                <a:latin typeface="Montserrat"/>
+              </a:rPr>
+              <a:t>D</a:t>
+            </a:r>
+          </a:p>
+        </p:txBody>
+      </p:sp>
+      <p:sp>
+        <p:nvSpPr>
+          <p:cNvPr id="23" name="TextBox 22"/>
+          <p:cNvSpPr txBox="1"/>
+          <p:nvPr/>
+        </p:nvSpPr>
+        <p:spPr>
+          <a:xfrm>
+            <a:off x="7132320" y="4800600"/>
+            <a:ext cx="4114800" cy="868680"/>
+          </a:xfrm>
+          <a:prstGeom prst="rect">
+            <a:avLst/>
+          </a:prstGeom>
+          <a:noFill/>
+        </p:spPr>
+        <p:txBody>
+          <a:bodyPr wrap="square">
+            <a:spAutoFit/>
+          </a:bodyPr>
+          <a:lstStyle/>
+          <a:p>
+            <a:r>
+              <a:rPr sz="1400" b="0" i="0">
+                <a:solidFill>
+                  <a:srgbClr val="1B2330"/>
+                </a:solidFill>
+                <a:latin typeface="Montserrat"/>
+              </a:rPr>
+              <a:t>Del organismo de control</a:t>
             </a:r>
           </a:p>
         </p:txBody>
@@ -9855,6 +14057,18 @@
   <p:clrMapOvr>
     <a:masterClrMapping/>
   </p:clrMapOvr>
+  <mc:AlternateContent xmlns:mc="http://schemas.openxmlformats.org/markup-compatibility/2006">
+    <mc:Choice xmlns:p14="http://schemas.microsoft.com/office/powerpoint/2010/main" Requires="p14">
+      <p:transition spd="med" p14:dur="700">
+        <p14:cube dir="l"/>
+      </p:transition>
+    </mc:Choice>
+    <mc:Fallback>
+      <p:transition spd="med">
+        <p:push dir="l"/>
+      </p:transition>
+    </mc:Fallback>
+  </mc:AlternateContent>
 </p:sld>
 </file>
 
@@ -9942,7 +14156,7 @@
                 </a:solidFill>
                 <a:latin typeface="Montserrat"/>
               </a:rPr>
-              <a:t>006 / 016</a:t>
+              <a:t>006 / 022</a:t>
             </a:r>
           </a:p>
         </p:txBody>
@@ -9983,88 +14197,20 @@
       </p:sp>
       <p:sp>
         <p:nvSpPr>
-          <p:cNvPr id="5" name="TextBox 4"/>
-          <p:cNvSpPr txBox="1"/>
-          <p:nvPr/>
-        </p:nvSpPr>
-        <p:spPr>
-          <a:xfrm>
-            <a:off x="822960" y="457200"/>
-            <a:ext cx="10058400" cy="365760"/>
-          </a:xfrm>
-          <a:prstGeom prst="rect">
-            <a:avLst/>
-          </a:prstGeom>
-          <a:noFill/>
-        </p:spPr>
-        <p:txBody>
-          <a:bodyPr wrap="square">
-            <a:spAutoFit/>
-          </a:bodyPr>
-          <a:lstStyle/>
-          <a:p>
-            <a:r>
-              <a:rPr sz="1300" b="1" i="0">
-                <a:solidFill>
-                  <a:srgbClr val="E8801A"/>
-                </a:solidFill>
-                <a:latin typeface="Montserrat"/>
-              </a:rPr>
-              <a:t>ARTÍCULO 7.2.1 · INSPECCIONES</a:t>
-            </a:r>
-          </a:p>
-        </p:txBody>
-      </p:sp>
-      <p:sp>
-        <p:nvSpPr>
-          <p:cNvPr id="6" name="TextBox 5"/>
-          <p:cNvSpPr txBox="1"/>
-          <p:nvPr/>
-        </p:nvSpPr>
-        <p:spPr>
-          <a:xfrm>
-            <a:off x="822960" y="868680"/>
-            <a:ext cx="10515600" cy="914400"/>
-          </a:xfrm>
-          <a:prstGeom prst="rect">
-            <a:avLst/>
-          </a:prstGeom>
-          <a:noFill/>
-        </p:spPr>
-        <p:txBody>
-          <a:bodyPr wrap="square">
-            <a:spAutoFit/>
-          </a:bodyPr>
-          <a:lstStyle/>
-          <a:p>
-            <a:r>
-              <a:rPr sz="2800" b="1" i="0">
-                <a:solidFill>
-                  <a:srgbClr val="1E2761"/>
-                </a:solidFill>
-                <a:latin typeface="Montserrat"/>
-              </a:rPr>
-              <a:t>Inspección: quién la hace</a:t>
-            </a:r>
-          </a:p>
-        </p:txBody>
-      </p:sp>
-      <p:sp>
-        <p:nvSpPr>
-          <p:cNvPr id="7" name="Rounded Rectangle 6"/>
+          <p:cNvPr id="5" name="Rectangle 4"/>
           <p:cNvSpPr/>
           <p:nvPr/>
         </p:nvSpPr>
         <p:spPr>
           <a:xfrm>
-            <a:off x="868680" y="1627632"/>
-            <a:ext cx="2011680" cy="73152"/>
-          </a:xfrm>
-          <a:prstGeom prst="roundRect">
+            <a:off x="0" y="0"/>
+            <a:ext cx="12191695" cy="1143000"/>
+          </a:xfrm>
+          <a:prstGeom prst="rect">
             <a:avLst/>
           </a:prstGeom>
           <a:solidFill>
-            <a:srgbClr val="E8801A"/>
+            <a:srgbClr val="1E8E4B"/>
           </a:solidFill>
           <a:ln>
             <a:noFill/>
@@ -10095,14 +14241,14 @@
       </p:sp>
       <p:sp>
         <p:nvSpPr>
-          <p:cNvPr id="8" name="TextBox 7"/>
+          <p:cNvPr id="6" name="TextBox 5"/>
           <p:cNvSpPr txBox="1"/>
           <p:nvPr/>
         </p:nvSpPr>
         <p:spPr>
           <a:xfrm>
-            <a:off x="822960" y="1965960"/>
-            <a:ext cx="4983480" cy="4206240"/>
+            <a:off x="822960" y="274320"/>
+            <a:ext cx="10515600" cy="640080"/>
           </a:xfrm>
           <a:prstGeom prst="rect">
             <a:avLst/>
@@ -10115,102 +14261,72 @@
           </a:bodyPr>
           <a:lstStyle/>
           <a:p>
-            <a:pPr>
-              <a:spcAft>
-                <a:spcPts val="1100"/>
-              </a:spcAft>
-            </a:pPr>
-            <a:r>
-              <a:rPr sz="1600" b="1" i="0">
-                <a:solidFill>
-                  <a:srgbClr val="E8801A"/>
-                </a:solidFill>
-                <a:latin typeface="Montserrat"/>
-              </a:rPr>
-              <a:t>▸  </a:t>
-            </a:r>
-            <a:r>
-              <a:rPr sz="1600" b="0" i="0">
-                <a:solidFill>
-                  <a:srgbClr val="1B2330"/>
-                </a:solidFill>
-                <a:latin typeface="Montserrat"/>
-              </a:rPr>
-              <a:t>Receptoras desde red por canalización</a:t>
-            </a:r>
-          </a:p>
-          <a:p>
-            <a:pPr>
-              <a:spcAft>
-                <a:spcPts val="1100"/>
-              </a:spcAft>
-            </a:pPr>
-            <a:r>
-              <a:rPr sz="1600" b="1" i="0">
-                <a:solidFill>
-                  <a:srgbClr val="E8801A"/>
-                </a:solidFill>
-                <a:latin typeface="Montserrat"/>
-              </a:rPr>
-              <a:t>▸  </a:t>
-            </a:r>
-            <a:r>
-              <a:rPr sz="1600" b="0" i="0">
-                <a:solidFill>
-                  <a:srgbClr val="1B2330"/>
-                </a:solidFill>
-                <a:latin typeface="Montserrat"/>
-              </a:rPr>
-              <a:t>Empresa instaladora habilitada o distribuidor</a:t>
-            </a:r>
-          </a:p>
-          <a:p>
-            <a:pPr>
-              <a:spcAft>
-                <a:spcPts val="1100"/>
-              </a:spcAft>
-            </a:pPr>
-            <a:r>
-              <a:rPr sz="1600" b="1" i="0">
-                <a:solidFill>
-                  <a:srgbClr val="E8801A"/>
-                </a:solidFill>
-                <a:latin typeface="Montserrat"/>
-              </a:rPr>
-              <a:t>▸  </a:t>
-            </a:r>
-            <a:r>
-              <a:rPr sz="1600" b="0" i="0">
-                <a:solidFill>
-                  <a:srgbClr val="1B2330"/>
-                </a:solidFill>
-                <a:latin typeface="Montserrat"/>
-              </a:rPr>
-              <a:t>También la parte común</a:t>
-            </a:r>
-          </a:p>
-        </p:txBody>
-      </p:sp>
-      <p:sp>
-        <p:nvSpPr>
-          <p:cNvPr id="9" name="imgph" descr="IMGQ:gas technician inspecting meter cabinet"/>
+            <a:r>
+              <a:rPr sz="2400" b="1" i="0">
+                <a:solidFill>
+                  <a:srgbClr val="FFFFFF"/>
+                </a:solidFill>
+                <a:latin typeface="Montserrat"/>
+              </a:rPr>
+              <a:t>✔  RESPUESTA:  B</a:t>
+            </a:r>
+          </a:p>
+        </p:txBody>
+      </p:sp>
+      <p:sp>
+        <p:nvSpPr>
+          <p:cNvPr id="7" name="TextBox 6"/>
+          <p:cNvSpPr txBox="1"/>
+          <p:nvPr/>
+        </p:nvSpPr>
+        <p:spPr>
+          <a:xfrm>
+            <a:off x="822960" y="1417320"/>
+            <a:ext cx="10515600" cy="914400"/>
+          </a:xfrm>
+          <a:prstGeom prst="rect">
+            <a:avLst/>
+          </a:prstGeom>
+          <a:noFill/>
+        </p:spPr>
+        <p:txBody>
+          <a:bodyPr wrap="square">
+            <a:spAutoFit/>
+          </a:bodyPr>
+          <a:lstStyle/>
+          <a:p>
+            <a:r>
+              <a:rPr sz="1800" b="1" i="0">
+                <a:solidFill>
+                  <a:srgbClr val="64748B"/>
+                </a:solidFill>
+                <a:latin typeface="Montserrat"/>
+              </a:rPr>
+              <a:t>¿De quién es la obligación de mantener la instalación en buen estado?</a:t>
+            </a:r>
+          </a:p>
+        </p:txBody>
+      </p:sp>
+      <p:sp>
+        <p:nvSpPr>
+          <p:cNvPr id="8" name="Rounded Rectangle 7"/>
           <p:cNvSpPr/>
           <p:nvPr/>
         </p:nvSpPr>
         <p:spPr>
           <a:xfrm>
-            <a:off x="5806440" y="1051560"/>
-            <a:ext cx="5298947" cy="4629150"/>
+            <a:off x="822960" y="2514600"/>
+            <a:ext cx="10515600" cy="914400"/>
           </a:xfrm>
           <a:prstGeom prst="roundRect">
             <a:avLst/>
           </a:prstGeom>
           <a:solidFill>
-            <a:srgbClr val="F3F6FB"/>
+            <a:srgbClr val="E9F6EE"/>
           </a:solidFill>
           <a:ln w="12700">
             <a:solidFill>
-              <a:srgbClr val="C7D2E6"/>
+              <a:srgbClr val="1E8E4B"/>
             </a:solidFill>
           </a:ln>
           <a:effectLst/>
@@ -10239,14 +14355,14 @@
       </p:sp>
       <p:sp>
         <p:nvSpPr>
-          <p:cNvPr id="10" name="TextBox 9"/>
+          <p:cNvPr id="9" name="TextBox 8"/>
           <p:cNvSpPr txBox="1"/>
           <p:nvPr/>
         </p:nvSpPr>
         <p:spPr>
           <a:xfrm>
-            <a:off x="6080760" y="2726055"/>
-            <a:ext cx="4750307" cy="1280160"/>
+            <a:off x="1097280" y="2697480"/>
+            <a:ext cx="10058400" cy="640080"/>
           </a:xfrm>
           <a:prstGeom prst="rect">
             <a:avLst/>
@@ -10259,27 +14375,66 @@
           </a:bodyPr>
           <a:lstStyle/>
           <a:p>
-            <a:pPr algn="ctr"/>
-            <a:r>
-              <a:rPr sz="1400" b="1" i="0">
-                <a:solidFill>
-                  <a:srgbClr val="64748B"/>
-                </a:solidFill>
-                <a:latin typeface="Montserrat"/>
-              </a:rPr>
-              <a:t>IMAGEN REALISTA</a:t>
-            </a:r>
-          </a:p>
-          <a:p>
-            <a:pPr algn="ctr"/>
-            <a:r>
-              <a:rPr sz="1100" b="0" i="1">
-                <a:solidFill>
-                  <a:srgbClr val="64748B"/>
-                </a:solidFill>
-                <a:latin typeface="Montserrat"/>
-              </a:rPr>
-              <a:t>gas technician inspecting meter cabinet</a:t>
+            <a:r>
+              <a:rPr sz="1800" b="1" i="0">
+                <a:solidFill>
+                  <a:srgbClr val="1E8E4B"/>
+                </a:solidFill>
+                <a:latin typeface="Montserrat"/>
+              </a:rPr>
+              <a:t>B.  </a:t>
+            </a:r>
+            <a:r>
+              <a:rPr sz="1800" b="1" i="0">
+                <a:solidFill>
+                  <a:srgbClr val="1E2761"/>
+                </a:solidFill>
+                <a:latin typeface="Montserrat"/>
+              </a:rPr>
+              <a:t>Del titular y, en su defecto, del usuario</a:t>
+            </a:r>
+          </a:p>
+        </p:txBody>
+      </p:sp>
+      <p:sp>
+        <p:nvSpPr>
+          <p:cNvPr id="10" name="TextBox 9"/>
+          <p:cNvSpPr txBox="1"/>
+          <p:nvPr/>
+        </p:nvSpPr>
+        <p:spPr>
+          <a:xfrm>
+            <a:off x="822960" y="3749039"/>
+            <a:ext cx="10515600" cy="2194560"/>
+          </a:xfrm>
+          <a:prstGeom prst="rect">
+            <a:avLst/>
+          </a:prstGeom>
+          <a:noFill/>
+        </p:spPr>
+        <p:txBody>
+          <a:bodyPr wrap="square">
+            <a:spAutoFit/>
+          </a:bodyPr>
+          <a:lstStyle/>
+          <a:p>
+            <a:r>
+              <a:rPr sz="1500" b="1" i="0">
+                <a:solidFill>
+                  <a:srgbClr val="E8801A"/>
+                </a:solidFill>
+                <a:latin typeface="Montserrat"/>
+              </a:rPr>
+              <a:t>Por qué:  </a:t>
+            </a:r>
+            <a:r>
+              <a:rPr sz="1500" b="0" i="0">
+                <a:solidFill>
+                  <a:srgbClr val="1B2330"/>
+                </a:solidFill>
+                <a:latin typeface="Montserrat"/>
+              </a:rPr>
+              <a:t>La obligación de mantenimiento es del titular y, en su defecto, del usuario; el instalador ejecuta y aconseja, pero no responde por él.</a:t>
             </a:r>
           </a:p>
         </p:txBody>
@@ -10289,6 +14444,18 @@
   <p:clrMapOvr>
     <a:masterClrMapping/>
   </p:clrMapOvr>
+  <mc:AlternateContent xmlns:mc="http://schemas.openxmlformats.org/markup-compatibility/2006">
+    <mc:Choice xmlns:p14="http://schemas.microsoft.com/office/powerpoint/2010/main" Requires="p14">
+      <p:transition spd="med" p14:dur="700">
+        <p14:cube dir="r"/>
+      </p:transition>
+    </mc:Choice>
+    <mc:Fallback>
+      <p:transition spd="med">
+        <p:push dir="r"/>
+      </p:transition>
+    </mc:Fallback>
+  </mc:AlternateContent>
 </p:sld>
 </file>
 
@@ -10376,7 +14543,7 @@
                 </a:solidFill>
                 <a:latin typeface="Montserrat"/>
               </a:rPr>
-              <a:t>007 / 016</a:t>
+              <a:t>007 / 022</a:t>
             </a:r>
           </a:p>
         </p:txBody>
@@ -10444,7 +14611,7 @@
                 </a:solidFill>
                 <a:latin typeface="Montserrat"/>
               </a:rPr>
-              <a:t>ARTÍCULO 7.2.2 · REVISIONES</a:t>
+              <a:t>ARTÍCULO 7.2 · LA PREGUNTA ESTRELLA</a:t>
             </a:r>
           </a:p>
         </p:txBody>
@@ -10478,14 +14645,14 @@
                 </a:solidFill>
                 <a:latin typeface="Montserrat"/>
               </a:rPr>
-              <a:t>Revisión: quién la hace</a:t>
-            </a:r>
-          </a:p>
-        </p:txBody>
-      </p:sp>
-      <p:sp>
-        <p:nvSpPr>
-          <p:cNvPr id="7" name="Rounded Rectangle 6"/>
+              <a:t>¿Inspección o revisión?</a:t>
+            </a:r>
+          </a:p>
+        </p:txBody>
+      </p:sp>
+      <p:sp>
+        <p:nvSpPr>
+          <p:cNvPr id="7" name="Rectangle 6"/>
           <p:cNvSpPr/>
           <p:nvPr/>
         </p:nvSpPr>
@@ -10494,7 +14661,7 @@
             <a:off x="868680" y="1627632"/>
             <a:ext cx="2011680" cy="73152"/>
           </a:xfrm>
-          <a:prstGeom prst="roundRect">
+          <a:prstGeom prst="rect">
             <a:avLst/>
           </a:prstGeom>
           <a:solidFill>
@@ -10535,8 +14702,8 @@
         </p:nvSpPr>
         <p:spPr>
           <a:xfrm>
-            <a:off x="822960" y="1965960"/>
-            <a:ext cx="4983480" cy="4206240"/>
+            <a:off x="6355080" y="1965960"/>
+            <a:ext cx="5029200" cy="4206240"/>
           </a:xfrm>
           <a:prstGeom prst="rect">
             <a:avLst/>
@@ -10570,7 +14737,7 @@
                 </a:solidFill>
                 <a:latin typeface="Montserrat"/>
               </a:rPr>
-              <a:t>Instalaciones no conectadas a red</a:t>
+              <a:t>¿Conectada a la red de distribución?</a:t>
             </a:r>
           </a:p>
           <a:p>
@@ -10595,7 +14762,7 @@
                 </a:solidFill>
                 <a:latin typeface="Montserrat"/>
               </a:rPr>
-              <a:t>Obligación del titular o usuario</a:t>
+              <a:t>SÍ (red) → inspección</a:t>
             </a:r>
           </a:p>
           <a:p>
@@ -10620,21 +14787,46 @@
                 </a:solidFill>
                 <a:latin typeface="Montserrat"/>
               </a:rPr>
-              <a:t>Entidades que indique la ITC</a:t>
-            </a:r>
-          </a:p>
-        </p:txBody>
-      </p:sp>
-      <p:sp>
-        <p:nvSpPr>
-          <p:cNvPr id="9" name="imgph" descr="IMGQ:lpg tank house garden inspection"/>
+              <a:t>NO (depósito propio) → revisión</a:t>
+            </a:r>
+          </a:p>
+          <a:p>
+            <a:pPr>
+              <a:spcAft>
+                <a:spcPts val="1100"/>
+              </a:spcAft>
+            </a:pPr>
+            <a:r>
+              <a:rPr sz="1600" b="1" i="0">
+                <a:solidFill>
+                  <a:srgbClr val="E8801A"/>
+                </a:solidFill>
+                <a:latin typeface="Montserrat"/>
+              </a:rPr>
+              <a:t>▸  </a:t>
+            </a:r>
+            <a:r>
+              <a:rPr sz="1600" b="0" i="0">
+                <a:solidFill>
+                  <a:srgbClr val="1B2330"/>
+                </a:solidFill>
+                <a:latin typeface="Montserrat"/>
+              </a:rPr>
+              <a:t>Organismo de control obligatorio → inspección</a:t>
+            </a:r>
+          </a:p>
+        </p:txBody>
+      </p:sp>
+      <p:sp>
+        <p:nvSpPr>
+          <p:cNvPr id="9" name="imgph" descr="IMGQ:gas distribution pipeline street valve"/>
           <p:cNvSpPr/>
           <p:nvPr/>
         </p:nvSpPr>
         <p:spPr>
           <a:xfrm>
-            <a:off x="5806440" y="1051560"/>
-            <a:ext cx="5298947" cy="4629150"/>
+            <a:off x="822960" y="1965960"/>
+            <a:ext cx="5303520" cy="4572000"/>
           </a:xfrm>
           <a:prstGeom prst="roundRect">
             <a:avLst/>
@@ -10679,8 +14871,8 @@
         </p:nvSpPr>
         <p:spPr>
           <a:xfrm>
-            <a:off x="6080760" y="2726055"/>
-            <a:ext cx="4750307" cy="1280160"/>
+            <a:off x="1097280" y="3611880"/>
+            <a:ext cx="4754880" cy="1280160"/>
           </a:xfrm>
           <a:prstGeom prst="rect">
             <a:avLst/>
@@ -10701,7 +14893,7 @@
                 </a:solidFill>
                 <a:latin typeface="Montserrat"/>
               </a:rPr>
-              <a:t>IMAGEN REALISTA</a:t>
+              <a:t>IMAGEN</a:t>
             </a:r>
           </a:p>
           <a:p>
@@ -10713,7 +14905,7 @@
                 </a:solidFill>
                 <a:latin typeface="Montserrat"/>
               </a:rPr>
-              <a:t>lpg tank house garden inspection</a:t>
+              <a:t>gas distribution pipeline street valve</a:t>
             </a:r>
           </a:p>
         </p:txBody>
@@ -10723,6 +14915,18 @@
   <p:clrMapOvr>
     <a:masterClrMapping/>
   </p:clrMapOvr>
+  <mc:AlternateContent xmlns:mc="http://schemas.openxmlformats.org/markup-compatibility/2006">
+    <mc:Choice xmlns:p14="http://schemas.microsoft.com/office/powerpoint/2010/main" Requires="p14">
+      <p:transition spd="med" p14:dur="700">
+        <p14:cube dir="l"/>
+      </p:transition>
+    </mc:Choice>
+    <mc:Fallback>
+      <p:transition spd="med">
+        <p:push dir="l"/>
+      </p:transition>
+    </mc:Fallback>
+  </mc:AlternateContent>
 </p:sld>
 </file>
 
@@ -10810,7 +15014,7 @@
                 </a:solidFill>
                 <a:latin typeface="Montserrat"/>
               </a:rPr>
-              <a:t>008 / 016</a:t>
+              <a:t>008 / 022</a:t>
             </a:r>
           </a:p>
         </p:txBody>
@@ -10851,84 +15055,16 @@
       </p:sp>
       <p:sp>
         <p:nvSpPr>
-          <p:cNvPr id="5" name="TextBox 4"/>
-          <p:cNvSpPr txBox="1"/>
-          <p:nvPr/>
-        </p:nvSpPr>
-        <p:spPr>
-          <a:xfrm>
-            <a:off x="822960" y="457200"/>
-            <a:ext cx="10058400" cy="365760"/>
-          </a:xfrm>
-          <a:prstGeom prst="rect">
-            <a:avLst/>
-          </a:prstGeom>
-          <a:noFill/>
-        </p:spPr>
-        <p:txBody>
-          <a:bodyPr wrap="square">
-            <a:spAutoFit/>
-          </a:bodyPr>
-          <a:lstStyle/>
-          <a:p>
-            <a:r>
-              <a:rPr sz="1300" b="1" i="0">
-                <a:solidFill>
-                  <a:srgbClr val="E8801A"/>
-                </a:solidFill>
-                <a:latin typeface="Montserrat"/>
-              </a:rPr>
-              <a:t>CONTROL PERIÓDICO · PARA QUÉ SIRVE</a:t>
-            </a:r>
-          </a:p>
-        </p:txBody>
-      </p:sp>
-      <p:sp>
-        <p:nvSpPr>
-          <p:cNvPr id="6" name="TextBox 5"/>
-          <p:cNvSpPr txBox="1"/>
-          <p:nvPr/>
-        </p:nvSpPr>
-        <p:spPr>
-          <a:xfrm>
-            <a:off x="822960" y="868680"/>
-            <a:ext cx="10515600" cy="914400"/>
-          </a:xfrm>
-          <a:prstGeom prst="rect">
-            <a:avLst/>
-          </a:prstGeom>
-          <a:noFill/>
-        </p:spPr>
-        <p:txBody>
-          <a:bodyPr wrap="square">
-            <a:spAutoFit/>
-          </a:bodyPr>
-          <a:lstStyle/>
-          <a:p>
-            <a:r>
-              <a:rPr sz="2800" b="1" i="0">
-                <a:solidFill>
-                  <a:srgbClr val="1E2761"/>
-                </a:solidFill>
-                <a:latin typeface="Montserrat"/>
-              </a:rPr>
-              <a:t>Cazar lo que mata despacio</a:t>
-            </a:r>
-          </a:p>
-        </p:txBody>
-      </p:sp>
-      <p:sp>
-        <p:nvSpPr>
-          <p:cNvPr id="7" name="Rounded Rectangle 6"/>
+          <p:cNvPr id="5" name="Rectangle 4"/>
           <p:cNvSpPr/>
           <p:nvPr/>
         </p:nvSpPr>
         <p:spPr>
           <a:xfrm>
-            <a:off x="868680" y="1627632"/>
-            <a:ext cx="2011680" cy="73152"/>
-          </a:xfrm>
-          <a:prstGeom prst="roundRect">
+            <a:off x="0" y="0"/>
+            <a:ext cx="12191695" cy="1143000"/>
+          </a:xfrm>
+          <a:prstGeom prst="rect">
             <a:avLst/>
           </a:prstGeom>
           <a:solidFill>
@@ -10963,14 +15099,14 @@
       </p:sp>
       <p:sp>
         <p:nvSpPr>
-          <p:cNvPr id="8" name="TextBox 7"/>
+          <p:cNvPr id="6" name="TextBox 5"/>
           <p:cNvSpPr txBox="1"/>
           <p:nvPr/>
         </p:nvSpPr>
         <p:spPr>
           <a:xfrm>
-            <a:off x="822960" y="1965960"/>
-            <a:ext cx="4983480" cy="4206240"/>
+            <a:off x="822960" y="274320"/>
+            <a:ext cx="10515600" cy="640080"/>
           </a:xfrm>
           <a:prstGeom prst="rect">
             <a:avLst/>
@@ -10983,92 +15119,62 @@
           </a:bodyPr>
           <a:lstStyle/>
           <a:p>
-            <a:pPr>
-              <a:spcAft>
-                <a:spcPts val="1100"/>
-              </a:spcAft>
-            </a:pPr>
-            <a:r>
-              <a:rPr sz="1600" b="1" i="0">
-                <a:solidFill>
-                  <a:srgbClr val="E8801A"/>
-                </a:solidFill>
-                <a:latin typeface="Montserrat"/>
-              </a:rPr>
-              <a:t>▸  </a:t>
-            </a:r>
-            <a:r>
-              <a:rPr sz="1600" b="0" i="0">
-                <a:solidFill>
-                  <a:srgbClr val="1B2330"/>
-                </a:solidFill>
-                <a:latin typeface="Montserrat"/>
-              </a:rPr>
-              <a:t>Rejilla de ventilación tapada</a:t>
-            </a:r>
-          </a:p>
-          <a:p>
-            <a:pPr>
-              <a:spcAft>
-                <a:spcPts val="1100"/>
-              </a:spcAft>
-            </a:pPr>
-            <a:r>
-              <a:rPr sz="1600" b="1" i="0">
-                <a:solidFill>
-                  <a:srgbClr val="E8801A"/>
-                </a:solidFill>
-                <a:latin typeface="Montserrat"/>
-              </a:rPr>
-              <a:t>▸  </a:t>
-            </a:r>
-            <a:r>
-              <a:rPr sz="1600" b="0" i="0">
-                <a:solidFill>
-                  <a:srgbClr val="1B2330"/>
-                </a:solidFill>
-                <a:latin typeface="Montserrat"/>
-              </a:rPr>
-              <a:t>Conducto de evacuación obstruido</a:t>
-            </a:r>
-          </a:p>
-          <a:p>
-            <a:pPr>
-              <a:spcAft>
-                <a:spcPts val="1100"/>
-              </a:spcAft>
-            </a:pPr>
-            <a:r>
-              <a:rPr sz="1600" b="1" i="0">
-                <a:solidFill>
-                  <a:srgbClr val="E8801A"/>
-                </a:solidFill>
-                <a:latin typeface="Montserrat"/>
-              </a:rPr>
-              <a:t>▸  </a:t>
-            </a:r>
-            <a:r>
-              <a:rPr sz="1600" b="0" i="0">
-                <a:solidFill>
-                  <a:srgbClr val="1B2330"/>
-                </a:solidFill>
-                <a:latin typeface="Montserrat"/>
-              </a:rPr>
-              <a:t>Fuga incipiente, mala combustión, CO</a:t>
-            </a:r>
-          </a:p>
-        </p:txBody>
-      </p:sp>
-      <p:sp>
-        <p:nvSpPr>
-          <p:cNvPr id="9" name="imgph" descr="IMGQ:blocked ventilation grille wall dust"/>
+            <a:r>
+              <a:rPr sz="2400" b="1" i="0">
+                <a:solidFill>
+                  <a:srgbClr val="FFFFFF"/>
+                </a:solidFill>
+                <a:latin typeface="Montserrat"/>
+              </a:rPr>
+              <a:t>⚡  PREGUNTA RÁPIDA</a:t>
+            </a:r>
+          </a:p>
+        </p:txBody>
+      </p:sp>
+      <p:sp>
+        <p:nvSpPr>
+          <p:cNvPr id="7" name="TextBox 6"/>
+          <p:cNvSpPr txBox="1"/>
+          <p:nvPr/>
+        </p:nvSpPr>
+        <p:spPr>
+          <a:xfrm>
+            <a:off x="822960" y="1508760"/>
+            <a:ext cx="10515600" cy="1371600"/>
+          </a:xfrm>
+          <a:prstGeom prst="rect">
+            <a:avLst/>
+          </a:prstGeom>
+          <a:noFill/>
+        </p:spPr>
+        <p:txBody>
+          <a:bodyPr wrap="square">
+            <a:spAutoFit/>
+          </a:bodyPr>
+          <a:lstStyle/>
+          <a:p>
+            <a:r>
+              <a:rPr sz="2400" b="1" i="0">
+                <a:solidFill>
+                  <a:srgbClr val="1E2761"/>
+                </a:solidFill>
+                <a:latin typeface="Montserrat"/>
+              </a:rPr>
+              <a:t>¿Qué determina si un control periódico es inspección o revisión?</a:t>
+            </a:r>
+          </a:p>
+        </p:txBody>
+      </p:sp>
+      <p:sp>
+        <p:nvSpPr>
+          <p:cNvPr id="8" name="Rounded Rectangle 7"/>
           <p:cNvSpPr/>
           <p:nvPr/>
         </p:nvSpPr>
         <p:spPr>
           <a:xfrm>
-            <a:off x="5806440" y="1051560"/>
-            <a:ext cx="5298947" cy="4629150"/>
+            <a:off x="822960" y="3291840"/>
+            <a:ext cx="4983480" cy="1143000"/>
           </a:xfrm>
           <a:prstGeom prst="roundRect">
             <a:avLst/>
@@ -11107,14 +15213,58 @@
       </p:sp>
       <p:sp>
         <p:nvSpPr>
+          <p:cNvPr id="9" name="Rectangle 8"/>
+          <p:cNvSpPr/>
+          <p:nvPr/>
+        </p:nvSpPr>
+        <p:spPr>
+          <a:xfrm>
+            <a:off x="822960" y="3291840"/>
+            <a:ext cx="640080" cy="1143000"/>
+          </a:xfrm>
+          <a:prstGeom prst="rect">
+            <a:avLst/>
+          </a:prstGeom>
+          <a:solidFill>
+            <a:srgbClr val="1E2761"/>
+          </a:solidFill>
+          <a:ln>
+            <a:noFill/>
+          </a:ln>
+          <a:effectLst/>
+        </p:spPr>
+        <p:style>
+          <a:lnRef idx="1">
+            <a:schemeClr val="accent1"/>
+          </a:lnRef>
+          <a:fillRef idx="3">
+            <a:schemeClr val="accent1"/>
+          </a:fillRef>
+          <a:effectRef idx="2">
+            <a:schemeClr val="accent1"/>
+          </a:effectRef>
+          <a:fontRef idx="minor">
+            <a:schemeClr val="lt1"/>
+          </a:fontRef>
+        </p:style>
+        <p:txBody>
+          <a:bodyPr rtlCol="0" anchor="ctr"/>
+          <a:lstStyle/>
+          <a:p>
+            <a:pPr algn="ctr"/>
+          </a:p>
+        </p:txBody>
+      </p:sp>
+      <p:sp>
+        <p:nvSpPr>
           <p:cNvPr id="10" name="TextBox 9"/>
           <p:cNvSpPr txBox="1"/>
           <p:nvPr/>
         </p:nvSpPr>
         <p:spPr>
           <a:xfrm>
-            <a:off x="6080760" y="2726055"/>
-            <a:ext cx="4750307" cy="1280160"/>
+            <a:off x="822960" y="3611880"/>
+            <a:ext cx="640080" cy="548640"/>
           </a:xfrm>
           <a:prstGeom prst="rect">
             <a:avLst/>
@@ -11129,25 +15279,524 @@
           <a:p>
             <a:pPr algn="ctr"/>
             <a:r>
-              <a:rPr sz="1400" b="1" i="0">
-                <a:solidFill>
-                  <a:srgbClr val="64748B"/>
-                </a:solidFill>
-                <a:latin typeface="Montserrat"/>
-              </a:rPr>
-              <a:t>IMAGEN REALISTA</a:t>
-            </a:r>
-          </a:p>
+              <a:rPr sz="2200" b="1" i="0">
+                <a:solidFill>
+                  <a:srgbClr val="FFFFFF"/>
+                </a:solidFill>
+                <a:latin typeface="Montserrat"/>
+              </a:rPr>
+              <a:t>A</a:t>
+            </a:r>
+          </a:p>
+        </p:txBody>
+      </p:sp>
+      <p:sp>
+        <p:nvSpPr>
+          <p:cNvPr id="11" name="TextBox 10"/>
+          <p:cNvSpPr txBox="1"/>
+          <p:nvPr/>
+        </p:nvSpPr>
+        <p:spPr>
+          <a:xfrm>
+            <a:off x="1600200" y="3474720"/>
+            <a:ext cx="4114800" cy="868680"/>
+          </a:xfrm>
+          <a:prstGeom prst="rect">
+            <a:avLst/>
+          </a:prstGeom>
+          <a:noFill/>
+        </p:spPr>
+        <p:txBody>
+          <a:bodyPr wrap="square">
+            <a:spAutoFit/>
+          </a:bodyPr>
+          <a:lstStyle/>
+          <a:p>
+            <a:r>
+              <a:rPr sz="1400" b="0" i="0">
+                <a:solidFill>
+                  <a:srgbClr val="1B2330"/>
+                </a:solidFill>
+                <a:latin typeface="Montserrat"/>
+              </a:rPr>
+              <a:t>El tamaño de la vivienda</a:t>
+            </a:r>
+          </a:p>
+        </p:txBody>
+      </p:sp>
+      <p:sp>
+        <p:nvSpPr>
+          <p:cNvPr id="12" name="Rounded Rectangle 11"/>
+          <p:cNvSpPr/>
+          <p:nvPr/>
+        </p:nvSpPr>
+        <p:spPr>
+          <a:xfrm>
+            <a:off x="6355080" y="3291840"/>
+            <a:ext cx="4983480" cy="1143000"/>
+          </a:xfrm>
+          <a:prstGeom prst="roundRect">
+            <a:avLst/>
+          </a:prstGeom>
+          <a:solidFill>
+            <a:srgbClr val="F3F6FB"/>
+          </a:solidFill>
+          <a:ln w="12700">
+            <a:solidFill>
+              <a:srgbClr val="C7D2E6"/>
+            </a:solidFill>
+          </a:ln>
+          <a:effectLst/>
+        </p:spPr>
+        <p:style>
+          <a:lnRef idx="1">
+            <a:schemeClr val="accent1"/>
+          </a:lnRef>
+          <a:fillRef idx="3">
+            <a:schemeClr val="accent1"/>
+          </a:fillRef>
+          <a:effectRef idx="2">
+            <a:schemeClr val="accent1"/>
+          </a:effectRef>
+          <a:fontRef idx="minor">
+            <a:schemeClr val="lt1"/>
+          </a:fontRef>
+        </p:style>
+        <p:txBody>
+          <a:bodyPr rtlCol="0" anchor="ctr"/>
+          <a:lstStyle/>
           <a:p>
             <a:pPr algn="ctr"/>
-            <a:r>
-              <a:rPr sz="1100" b="0" i="1">
-                <a:solidFill>
-                  <a:srgbClr val="64748B"/>
-                </a:solidFill>
-                <a:latin typeface="Montserrat"/>
-              </a:rPr>
-              <a:t>blocked ventilation grille wall dust</a:t>
+          </a:p>
+        </p:txBody>
+      </p:sp>
+      <p:sp>
+        <p:nvSpPr>
+          <p:cNvPr id="13" name="Rectangle 12"/>
+          <p:cNvSpPr/>
+          <p:nvPr/>
+        </p:nvSpPr>
+        <p:spPr>
+          <a:xfrm>
+            <a:off x="6355080" y="3291840"/>
+            <a:ext cx="640080" cy="1143000"/>
+          </a:xfrm>
+          <a:prstGeom prst="rect">
+            <a:avLst/>
+          </a:prstGeom>
+          <a:solidFill>
+            <a:srgbClr val="1E2761"/>
+          </a:solidFill>
+          <a:ln>
+            <a:noFill/>
+          </a:ln>
+          <a:effectLst/>
+        </p:spPr>
+        <p:style>
+          <a:lnRef idx="1">
+            <a:schemeClr val="accent1"/>
+          </a:lnRef>
+          <a:fillRef idx="3">
+            <a:schemeClr val="accent1"/>
+          </a:fillRef>
+          <a:effectRef idx="2">
+            <a:schemeClr val="accent1"/>
+          </a:effectRef>
+          <a:fontRef idx="minor">
+            <a:schemeClr val="lt1"/>
+          </a:fontRef>
+        </p:style>
+        <p:txBody>
+          <a:bodyPr rtlCol="0" anchor="ctr"/>
+          <a:lstStyle/>
+          <a:p>
+            <a:pPr algn="ctr"/>
+          </a:p>
+        </p:txBody>
+      </p:sp>
+      <p:sp>
+        <p:nvSpPr>
+          <p:cNvPr id="14" name="TextBox 13"/>
+          <p:cNvSpPr txBox="1"/>
+          <p:nvPr/>
+        </p:nvSpPr>
+        <p:spPr>
+          <a:xfrm>
+            <a:off x="6355080" y="3611880"/>
+            <a:ext cx="640080" cy="548640"/>
+          </a:xfrm>
+          <a:prstGeom prst="rect">
+            <a:avLst/>
+          </a:prstGeom>
+          <a:noFill/>
+        </p:spPr>
+        <p:txBody>
+          <a:bodyPr wrap="square">
+            <a:spAutoFit/>
+          </a:bodyPr>
+          <a:lstStyle/>
+          <a:p>
+            <a:pPr algn="ctr"/>
+            <a:r>
+              <a:rPr sz="2200" b="1" i="0">
+                <a:solidFill>
+                  <a:srgbClr val="FFFFFF"/>
+                </a:solidFill>
+                <a:latin typeface="Montserrat"/>
+              </a:rPr>
+              <a:t>B</a:t>
+            </a:r>
+          </a:p>
+        </p:txBody>
+      </p:sp>
+      <p:sp>
+        <p:nvSpPr>
+          <p:cNvPr id="15" name="TextBox 14"/>
+          <p:cNvSpPr txBox="1"/>
+          <p:nvPr/>
+        </p:nvSpPr>
+        <p:spPr>
+          <a:xfrm>
+            <a:off x="7132320" y="3474720"/>
+            <a:ext cx="4114800" cy="868680"/>
+          </a:xfrm>
+          <a:prstGeom prst="rect">
+            <a:avLst/>
+          </a:prstGeom>
+          <a:noFill/>
+        </p:spPr>
+        <p:txBody>
+          <a:bodyPr wrap="square">
+            <a:spAutoFit/>
+          </a:bodyPr>
+          <a:lstStyle/>
+          <a:p>
+            <a:r>
+              <a:rPr sz="1400" b="0" i="0">
+                <a:solidFill>
+                  <a:srgbClr val="1B2330"/>
+                </a:solidFill>
+                <a:latin typeface="Montserrat"/>
+              </a:rPr>
+              <a:t>Si la instalación está conectada a la red de distribución</a:t>
+            </a:r>
+          </a:p>
+        </p:txBody>
+      </p:sp>
+      <p:sp>
+        <p:nvSpPr>
+          <p:cNvPr id="16" name="Rounded Rectangle 15"/>
+          <p:cNvSpPr/>
+          <p:nvPr/>
+        </p:nvSpPr>
+        <p:spPr>
+          <a:xfrm>
+            <a:off x="822960" y="4617720"/>
+            <a:ext cx="4983480" cy="1143000"/>
+          </a:xfrm>
+          <a:prstGeom prst="roundRect">
+            <a:avLst/>
+          </a:prstGeom>
+          <a:solidFill>
+            <a:srgbClr val="F3F6FB"/>
+          </a:solidFill>
+          <a:ln w="12700">
+            <a:solidFill>
+              <a:srgbClr val="C7D2E6"/>
+            </a:solidFill>
+          </a:ln>
+          <a:effectLst/>
+        </p:spPr>
+        <p:style>
+          <a:lnRef idx="1">
+            <a:schemeClr val="accent1"/>
+          </a:lnRef>
+          <a:fillRef idx="3">
+            <a:schemeClr val="accent1"/>
+          </a:fillRef>
+          <a:effectRef idx="2">
+            <a:schemeClr val="accent1"/>
+          </a:effectRef>
+          <a:fontRef idx="minor">
+            <a:schemeClr val="lt1"/>
+          </a:fontRef>
+        </p:style>
+        <p:txBody>
+          <a:bodyPr rtlCol="0" anchor="ctr"/>
+          <a:lstStyle/>
+          <a:p>
+            <a:pPr algn="ctr"/>
+          </a:p>
+        </p:txBody>
+      </p:sp>
+      <p:sp>
+        <p:nvSpPr>
+          <p:cNvPr id="17" name="Rectangle 16"/>
+          <p:cNvSpPr/>
+          <p:nvPr/>
+        </p:nvSpPr>
+        <p:spPr>
+          <a:xfrm>
+            <a:off x="822960" y="4617720"/>
+            <a:ext cx="640080" cy="1143000"/>
+          </a:xfrm>
+          <a:prstGeom prst="rect">
+            <a:avLst/>
+          </a:prstGeom>
+          <a:solidFill>
+            <a:srgbClr val="1E2761"/>
+          </a:solidFill>
+          <a:ln>
+            <a:noFill/>
+          </a:ln>
+          <a:effectLst/>
+        </p:spPr>
+        <p:style>
+          <a:lnRef idx="1">
+            <a:schemeClr val="accent1"/>
+          </a:lnRef>
+          <a:fillRef idx="3">
+            <a:schemeClr val="accent1"/>
+          </a:fillRef>
+          <a:effectRef idx="2">
+            <a:schemeClr val="accent1"/>
+          </a:effectRef>
+          <a:fontRef idx="minor">
+            <a:schemeClr val="lt1"/>
+          </a:fontRef>
+        </p:style>
+        <p:txBody>
+          <a:bodyPr rtlCol="0" anchor="ctr"/>
+          <a:lstStyle/>
+          <a:p>
+            <a:pPr algn="ctr"/>
+          </a:p>
+        </p:txBody>
+      </p:sp>
+      <p:sp>
+        <p:nvSpPr>
+          <p:cNvPr id="18" name="TextBox 17"/>
+          <p:cNvSpPr txBox="1"/>
+          <p:nvPr/>
+        </p:nvSpPr>
+        <p:spPr>
+          <a:xfrm>
+            <a:off x="822960" y="4937760"/>
+            <a:ext cx="640080" cy="548640"/>
+          </a:xfrm>
+          <a:prstGeom prst="rect">
+            <a:avLst/>
+          </a:prstGeom>
+          <a:noFill/>
+        </p:spPr>
+        <p:txBody>
+          <a:bodyPr wrap="square">
+            <a:spAutoFit/>
+          </a:bodyPr>
+          <a:lstStyle/>
+          <a:p>
+            <a:pPr algn="ctr"/>
+            <a:r>
+              <a:rPr sz="2200" b="1" i="0">
+                <a:solidFill>
+                  <a:srgbClr val="FFFFFF"/>
+                </a:solidFill>
+                <a:latin typeface="Montserrat"/>
+              </a:rPr>
+              <a:t>C</a:t>
+            </a:r>
+          </a:p>
+        </p:txBody>
+      </p:sp>
+      <p:sp>
+        <p:nvSpPr>
+          <p:cNvPr id="19" name="TextBox 18"/>
+          <p:cNvSpPr txBox="1"/>
+          <p:nvPr/>
+        </p:nvSpPr>
+        <p:spPr>
+          <a:xfrm>
+            <a:off x="1600200" y="4800600"/>
+            <a:ext cx="4114800" cy="868680"/>
+          </a:xfrm>
+          <a:prstGeom prst="rect">
+            <a:avLst/>
+          </a:prstGeom>
+          <a:noFill/>
+        </p:spPr>
+        <p:txBody>
+          <a:bodyPr wrap="square">
+            <a:spAutoFit/>
+          </a:bodyPr>
+          <a:lstStyle/>
+          <a:p>
+            <a:r>
+              <a:rPr sz="1400" b="0" i="0">
+                <a:solidFill>
+                  <a:srgbClr val="1B2330"/>
+                </a:solidFill>
+                <a:latin typeface="Montserrat"/>
+              </a:rPr>
+              <a:t>La antigüedad de la instalación</a:t>
+            </a:r>
+          </a:p>
+        </p:txBody>
+      </p:sp>
+      <p:sp>
+        <p:nvSpPr>
+          <p:cNvPr id="20" name="Rounded Rectangle 19"/>
+          <p:cNvSpPr/>
+          <p:nvPr/>
+        </p:nvSpPr>
+        <p:spPr>
+          <a:xfrm>
+            <a:off x="6355080" y="4617720"/>
+            <a:ext cx="4983480" cy="1143000"/>
+          </a:xfrm>
+          <a:prstGeom prst="roundRect">
+            <a:avLst/>
+          </a:prstGeom>
+          <a:solidFill>
+            <a:srgbClr val="F3F6FB"/>
+          </a:solidFill>
+          <a:ln w="12700">
+            <a:solidFill>
+              <a:srgbClr val="C7D2E6"/>
+            </a:solidFill>
+          </a:ln>
+          <a:effectLst/>
+        </p:spPr>
+        <p:style>
+          <a:lnRef idx="1">
+            <a:schemeClr val="accent1"/>
+          </a:lnRef>
+          <a:fillRef idx="3">
+            <a:schemeClr val="accent1"/>
+          </a:fillRef>
+          <a:effectRef idx="2">
+            <a:schemeClr val="accent1"/>
+          </a:effectRef>
+          <a:fontRef idx="minor">
+            <a:schemeClr val="lt1"/>
+          </a:fontRef>
+        </p:style>
+        <p:txBody>
+          <a:bodyPr rtlCol="0" anchor="ctr"/>
+          <a:lstStyle/>
+          <a:p>
+            <a:pPr algn="ctr"/>
+          </a:p>
+        </p:txBody>
+      </p:sp>
+      <p:sp>
+        <p:nvSpPr>
+          <p:cNvPr id="21" name="Rectangle 20"/>
+          <p:cNvSpPr/>
+          <p:nvPr/>
+        </p:nvSpPr>
+        <p:spPr>
+          <a:xfrm>
+            <a:off x="6355080" y="4617720"/>
+            <a:ext cx="640080" cy="1143000"/>
+          </a:xfrm>
+          <a:prstGeom prst="rect">
+            <a:avLst/>
+          </a:prstGeom>
+          <a:solidFill>
+            <a:srgbClr val="1E2761"/>
+          </a:solidFill>
+          <a:ln>
+            <a:noFill/>
+          </a:ln>
+          <a:effectLst/>
+        </p:spPr>
+        <p:style>
+          <a:lnRef idx="1">
+            <a:schemeClr val="accent1"/>
+          </a:lnRef>
+          <a:fillRef idx="3">
+            <a:schemeClr val="accent1"/>
+          </a:fillRef>
+          <a:effectRef idx="2">
+            <a:schemeClr val="accent1"/>
+          </a:effectRef>
+          <a:fontRef idx="minor">
+            <a:schemeClr val="lt1"/>
+          </a:fontRef>
+        </p:style>
+        <p:txBody>
+          <a:bodyPr rtlCol="0" anchor="ctr"/>
+          <a:lstStyle/>
+          <a:p>
+            <a:pPr algn="ctr"/>
+          </a:p>
+        </p:txBody>
+      </p:sp>
+      <p:sp>
+        <p:nvSpPr>
+          <p:cNvPr id="22" name="TextBox 21"/>
+          <p:cNvSpPr txBox="1"/>
+          <p:nvPr/>
+        </p:nvSpPr>
+        <p:spPr>
+          <a:xfrm>
+            <a:off x="6355080" y="4937760"/>
+            <a:ext cx="640080" cy="548640"/>
+          </a:xfrm>
+          <a:prstGeom prst="rect">
+            <a:avLst/>
+          </a:prstGeom>
+          <a:noFill/>
+        </p:spPr>
+        <p:txBody>
+          <a:bodyPr wrap="square">
+            <a:spAutoFit/>
+          </a:bodyPr>
+          <a:lstStyle/>
+          <a:p>
+            <a:pPr algn="ctr"/>
+            <a:r>
+              <a:rPr sz="2200" b="1" i="0">
+                <a:solidFill>
+                  <a:srgbClr val="FFFFFF"/>
+                </a:solidFill>
+                <a:latin typeface="Montserrat"/>
+              </a:rPr>
+              <a:t>D</a:t>
+            </a:r>
+          </a:p>
+        </p:txBody>
+      </p:sp>
+      <p:sp>
+        <p:nvSpPr>
+          <p:cNvPr id="23" name="TextBox 22"/>
+          <p:cNvSpPr txBox="1"/>
+          <p:nvPr/>
+        </p:nvSpPr>
+        <p:spPr>
+          <a:xfrm>
+            <a:off x="7132320" y="4800600"/>
+            <a:ext cx="4114800" cy="868680"/>
+          </a:xfrm>
+          <a:prstGeom prst="rect">
+            <a:avLst/>
+          </a:prstGeom>
+          <a:noFill/>
+        </p:spPr>
+        <p:txBody>
+          <a:bodyPr wrap="square">
+            <a:spAutoFit/>
+          </a:bodyPr>
+          <a:lstStyle/>
+          <a:p>
+            <a:r>
+              <a:rPr sz="1400" b="0" i="0">
+                <a:solidFill>
+                  <a:srgbClr val="1B2330"/>
+                </a:solidFill>
+                <a:latin typeface="Montserrat"/>
+              </a:rPr>
+              <a:t>El tipo de aparato instalado</a:t>
             </a:r>
           </a:p>
         </p:txBody>
@@ -11157,6 +15806,18 @@
   <p:clrMapOvr>
     <a:masterClrMapping/>
   </p:clrMapOvr>
+  <mc:AlternateContent xmlns:mc="http://schemas.openxmlformats.org/markup-compatibility/2006">
+    <mc:Choice xmlns:p14="http://schemas.microsoft.com/office/powerpoint/2010/main" Requires="p14">
+      <p:transition spd="med" p14:dur="700">
+        <p14:cube dir="r"/>
+      </p:transition>
+    </mc:Choice>
+    <mc:Fallback>
+      <p:transition spd="med">
+        <p:push dir="r"/>
+      </p:transition>
+    </mc:Fallback>
+  </mc:AlternateContent>
 </p:sld>
 </file>
 
@@ -11244,7 +15905,7 @@
                 </a:solidFill>
                 <a:latin typeface="Montserrat"/>
               </a:rPr>
-              <a:t>009 / 016</a:t>
+              <a:t>009 / 022</a:t>
             </a:r>
           </a:p>
         </p:txBody>
@@ -11285,88 +15946,20 @@
       </p:sp>
       <p:sp>
         <p:nvSpPr>
-          <p:cNvPr id="5" name="TextBox 4"/>
-          <p:cNvSpPr txBox="1"/>
-          <p:nvPr/>
-        </p:nvSpPr>
-        <p:spPr>
-          <a:xfrm>
-            <a:off x="822960" y="457200"/>
-            <a:ext cx="10058400" cy="365760"/>
-          </a:xfrm>
-          <a:prstGeom prst="rect">
-            <a:avLst/>
-          </a:prstGeom>
-          <a:noFill/>
-        </p:spPr>
-        <p:txBody>
-          <a:bodyPr wrap="square">
-            <a:spAutoFit/>
-          </a:bodyPr>
-          <a:lstStyle/>
-          <a:p>
-            <a:r>
-              <a:rPr sz="1300" b="1" i="0">
-                <a:solidFill>
-                  <a:srgbClr val="E8801A"/>
-                </a:solidFill>
-                <a:latin typeface="Montserrat"/>
-              </a:rPr>
-              <a:t>ARTÍCULO 7.3 · CONTROL ADMINISTRATIVO</a:t>
-            </a:r>
-          </a:p>
-        </p:txBody>
-      </p:sp>
-      <p:sp>
-        <p:nvSpPr>
-          <p:cNvPr id="6" name="TextBox 5"/>
-          <p:cNvSpPr txBox="1"/>
-          <p:nvPr/>
-        </p:nvSpPr>
-        <p:spPr>
-          <a:xfrm>
-            <a:off x="822960" y="868680"/>
-            <a:ext cx="10515600" cy="914400"/>
-          </a:xfrm>
-          <a:prstGeom prst="rect">
-            <a:avLst/>
-          </a:prstGeom>
-          <a:noFill/>
-        </p:spPr>
-        <p:txBody>
-          <a:bodyPr wrap="square">
-            <a:spAutoFit/>
-          </a:bodyPr>
-          <a:lstStyle/>
-          <a:p>
-            <a:r>
-              <a:rPr sz="2800" b="1" i="0">
-                <a:solidFill>
-                  <a:srgbClr val="1E2761"/>
-                </a:solidFill>
-                <a:latin typeface="Montserrat"/>
-              </a:rPr>
-              <a:t>La policía del gas</a:t>
-            </a:r>
-          </a:p>
-        </p:txBody>
-      </p:sp>
-      <p:sp>
-        <p:nvSpPr>
-          <p:cNvPr id="7" name="Rounded Rectangle 6"/>
+          <p:cNvPr id="5" name="Rectangle 4"/>
           <p:cNvSpPr/>
           <p:nvPr/>
         </p:nvSpPr>
         <p:spPr>
           <a:xfrm>
-            <a:off x="868680" y="1627632"/>
-            <a:ext cx="2011680" cy="73152"/>
-          </a:xfrm>
-          <a:prstGeom prst="roundRect">
+            <a:off x="0" y="0"/>
+            <a:ext cx="12191695" cy="1143000"/>
+          </a:xfrm>
+          <a:prstGeom prst="rect">
             <a:avLst/>
           </a:prstGeom>
           <a:solidFill>
-            <a:srgbClr val="E8801A"/>
+            <a:srgbClr val="1E8E4B"/>
           </a:solidFill>
           <a:ln>
             <a:noFill/>
@@ -11397,14 +15990,14 @@
       </p:sp>
       <p:sp>
         <p:nvSpPr>
-          <p:cNvPr id="8" name="TextBox 7"/>
+          <p:cNvPr id="6" name="TextBox 5"/>
           <p:cNvSpPr txBox="1"/>
           <p:nvPr/>
         </p:nvSpPr>
         <p:spPr>
           <a:xfrm>
-            <a:off x="822960" y="1965960"/>
-            <a:ext cx="4983480" cy="4206240"/>
+            <a:off x="822960" y="274320"/>
+            <a:ext cx="10515600" cy="640080"/>
           </a:xfrm>
           <a:prstGeom prst="rect">
             <a:avLst/>
@@ -11417,102 +16010,72 @@
           </a:bodyPr>
           <a:lstStyle/>
           <a:p>
-            <a:pPr>
-              <a:spcAft>
-                <a:spcPts val="1100"/>
-              </a:spcAft>
-            </a:pPr>
-            <a:r>
-              <a:rPr sz="1600" b="1" i="0">
-                <a:solidFill>
-                  <a:srgbClr val="E8801A"/>
-                </a:solidFill>
-                <a:latin typeface="Montserrat"/>
-              </a:rPr>
-              <a:t>▸  </a:t>
-            </a:r>
-            <a:r>
-              <a:rPr sz="1600" b="0" i="0">
-                <a:solidFill>
-                  <a:srgbClr val="1B2330"/>
-                </a:solidFill>
-                <a:latin typeface="Montserrat"/>
-              </a:rPr>
-              <a:t>La Comunidad Autónoma, cuando quiera</a:t>
-            </a:r>
-          </a:p>
-          <a:p>
-            <a:pPr>
-              <a:spcAft>
-                <a:spcPts val="1100"/>
-              </a:spcAft>
-            </a:pPr>
-            <a:r>
-              <a:rPr sz="1600" b="1" i="0">
-                <a:solidFill>
-                  <a:srgbClr val="E8801A"/>
-                </a:solidFill>
-                <a:latin typeface="Montserrat"/>
-              </a:rPr>
-              <a:t>▸  </a:t>
-            </a:r>
-            <a:r>
-              <a:rPr sz="1600" b="0" i="0">
-                <a:solidFill>
-                  <a:srgbClr val="1B2330"/>
-                </a:solidFill>
-                <a:latin typeface="Montserrat"/>
-              </a:rPr>
-              <a:t>De oficio o a instancia de parte</a:t>
-            </a:r>
-          </a:p>
-          <a:p>
-            <a:pPr>
-              <a:spcAft>
-                <a:spcPts val="1100"/>
-              </a:spcAft>
-            </a:pPr>
-            <a:r>
-              <a:rPr sz="1600" b="1" i="0">
-                <a:solidFill>
-                  <a:srgbClr val="E8801A"/>
-                </a:solidFill>
-                <a:latin typeface="Montserrat"/>
-              </a:rPr>
-              <a:t>▸  </a:t>
-            </a:r>
-            <a:r>
-              <a:rPr sz="1600" b="0" i="0">
-                <a:solidFill>
-                  <a:srgbClr val="1B2330"/>
-                </a:solidFill>
-                <a:latin typeface="Montserrat"/>
-              </a:rPr>
-              <a:t>Sobre todo si hay riesgo significativo</a:t>
-            </a:r>
-          </a:p>
-        </p:txBody>
-      </p:sp>
-      <p:sp>
-        <p:nvSpPr>
-          <p:cNvPr id="9" name="imgph" descr="IMGQ:government inspector safety vest clipboard"/>
+            <a:r>
+              <a:rPr sz="2400" b="1" i="0">
+                <a:solidFill>
+                  <a:srgbClr val="FFFFFF"/>
+                </a:solidFill>
+                <a:latin typeface="Montserrat"/>
+              </a:rPr>
+              <a:t>✔  RESPUESTA:  B</a:t>
+            </a:r>
+          </a:p>
+        </p:txBody>
+      </p:sp>
+      <p:sp>
+        <p:nvSpPr>
+          <p:cNvPr id="7" name="TextBox 6"/>
+          <p:cNvSpPr txBox="1"/>
+          <p:nvPr/>
+        </p:nvSpPr>
+        <p:spPr>
+          <a:xfrm>
+            <a:off x="822960" y="1417320"/>
+            <a:ext cx="10515600" cy="914400"/>
+          </a:xfrm>
+          <a:prstGeom prst="rect">
+            <a:avLst/>
+          </a:prstGeom>
+          <a:noFill/>
+        </p:spPr>
+        <p:txBody>
+          <a:bodyPr wrap="square">
+            <a:spAutoFit/>
+          </a:bodyPr>
+          <a:lstStyle/>
+          <a:p>
+            <a:r>
+              <a:rPr sz="1800" b="1" i="0">
+                <a:solidFill>
+                  <a:srgbClr val="64748B"/>
+                </a:solidFill>
+                <a:latin typeface="Montserrat"/>
+              </a:rPr>
+              <a:t>¿Qué determina si un control periódico es inspección o revisión?</a:t>
+            </a:r>
+          </a:p>
+        </p:txBody>
+      </p:sp>
+      <p:sp>
+        <p:nvSpPr>
+          <p:cNvPr id="8" name="Rounded Rectangle 7"/>
           <p:cNvSpPr/>
           <p:nvPr/>
         </p:nvSpPr>
         <p:spPr>
           <a:xfrm>
-            <a:off x="5806440" y="1051560"/>
-            <a:ext cx="5298947" cy="4629150"/>
+            <a:off x="822960" y="2514600"/>
+            <a:ext cx="10515600" cy="914400"/>
           </a:xfrm>
           <a:prstGeom prst="roundRect">
             <a:avLst/>
           </a:prstGeom>
           <a:solidFill>
-            <a:srgbClr val="F3F6FB"/>
+            <a:srgbClr val="E9F6EE"/>
           </a:solidFill>
           <a:ln w="12700">
             <a:solidFill>
-              <a:srgbClr val="C7D2E6"/>
+              <a:srgbClr val="1E8E4B"/>
             </a:solidFill>
           </a:ln>
           <a:effectLst/>
@@ -11541,14 +16104,14 @@
       </p:sp>
       <p:sp>
         <p:nvSpPr>
-          <p:cNvPr id="10" name="TextBox 9"/>
+          <p:cNvPr id="9" name="TextBox 8"/>
           <p:cNvSpPr txBox="1"/>
           <p:nvPr/>
         </p:nvSpPr>
         <p:spPr>
           <a:xfrm>
-            <a:off x="6080760" y="2726055"/>
-            <a:ext cx="4750307" cy="1280160"/>
+            <a:off x="1097280" y="2697480"/>
+            <a:ext cx="10058400" cy="640080"/>
           </a:xfrm>
           <a:prstGeom prst="rect">
             <a:avLst/>
@@ -11561,27 +16124,66 @@
           </a:bodyPr>
           <a:lstStyle/>
           <a:p>
-            <a:pPr algn="ctr"/>
-            <a:r>
-              <a:rPr sz="1400" b="1" i="0">
-                <a:solidFill>
-                  <a:srgbClr val="64748B"/>
-                </a:solidFill>
-                <a:latin typeface="Montserrat"/>
-              </a:rPr>
-              <a:t>IMAGEN REALISTA</a:t>
-            </a:r>
-          </a:p>
-          <a:p>
-            <a:pPr algn="ctr"/>
-            <a:r>
-              <a:rPr sz="1100" b="0" i="1">
-                <a:solidFill>
-                  <a:srgbClr val="64748B"/>
-                </a:solidFill>
-                <a:latin typeface="Montserrat"/>
-              </a:rPr>
-              <a:t>government inspector safety vest clipboard</a:t>
+            <a:r>
+              <a:rPr sz="1800" b="1" i="0">
+                <a:solidFill>
+                  <a:srgbClr val="1E8E4B"/>
+                </a:solidFill>
+                <a:latin typeface="Montserrat"/>
+              </a:rPr>
+              <a:t>B.  </a:t>
+            </a:r>
+            <a:r>
+              <a:rPr sz="1800" b="1" i="0">
+                <a:solidFill>
+                  <a:srgbClr val="1E2761"/>
+                </a:solidFill>
+                <a:latin typeface="Montserrat"/>
+              </a:rPr>
+              <a:t>Si la instalación está conectada a la red de distribución</a:t>
+            </a:r>
+          </a:p>
+        </p:txBody>
+      </p:sp>
+      <p:sp>
+        <p:nvSpPr>
+          <p:cNvPr id="10" name="TextBox 9"/>
+          <p:cNvSpPr txBox="1"/>
+          <p:nvPr/>
+        </p:nvSpPr>
+        <p:spPr>
+          <a:xfrm>
+            <a:off x="822960" y="3749039"/>
+            <a:ext cx="10515600" cy="2194560"/>
+          </a:xfrm>
+          <a:prstGeom prst="rect">
+            <a:avLst/>
+          </a:prstGeom>
+          <a:noFill/>
+        </p:spPr>
+        <p:txBody>
+          <a:bodyPr wrap="square">
+            <a:spAutoFit/>
+          </a:bodyPr>
+          <a:lstStyle/>
+          <a:p>
+            <a:r>
+              <a:rPr sz="1500" b="1" i="0">
+                <a:solidFill>
+                  <a:srgbClr val="E8801A"/>
+                </a:solidFill>
+                <a:latin typeface="Montserrat"/>
+              </a:rPr>
+              <a:t>Por qué:  </a:t>
+            </a:r>
+            <a:r>
+              <a:rPr sz="1500" b="0" i="0">
+                <a:solidFill>
+                  <a:srgbClr val="1B2330"/>
+                </a:solidFill>
+                <a:latin typeface="Montserrat"/>
+              </a:rPr>
+              <a:t>Conectada a la red de distribución es inspección; por tu cuenta, sin red, revisión. Y si obliga organismo de control, inspección siempre.</a:t>
             </a:r>
           </a:p>
         </p:txBody>
@@ -11591,6 +16193,18 @@
   <p:clrMapOvr>
     <a:masterClrMapping/>
   </p:clrMapOvr>
+  <mc:AlternateContent xmlns:mc="http://schemas.openxmlformats.org/markup-compatibility/2006">
+    <mc:Choice xmlns:p14="http://schemas.microsoft.com/office/powerpoint/2010/main" Requires="p14">
+      <p:transition spd="med" p14:dur="700">
+        <p14:cube dir="l"/>
+      </p:transition>
+    </mc:Choice>
+    <mc:Fallback>
+      <p:transition spd="med">
+        <p:push dir="l"/>
+      </p:transition>
+    </mc:Fallback>
+  </mc:AlternateContent>
 </p:sld>
 </file>
 

--- a/Curso Gas B/00 - El Reglamento de Gas - estructura, ambito y generalidades/00 - El Reglamento de Gas - Vídeo 3.pptx
+++ b/Curso Gas B/00 - El Reglamento de Gas - estructura, ambito y generalidades/00 - El Reglamento de Gas - Vídeo 3.pptx
@@ -1273,7 +1273,7 @@
           <a:lstStyle/>
           <a:p>
             <a:r>
-              <a:t>N1: Dos plazos que van en pareja. ¿Cuáles son ante un accidente grave?</a:t>
+              <a:t>N1: Dos plazos que van siempre en pareja. La pregunta: ante un accidente grave, ¿qué plazos debe cumplir el suministrador? Opción A, veinticuatro horas para avisar y siete días para el informe. Opción B, siete días para avisar y treinta para el informe. Opción C, cuarenta y ocho horas para avisar y quince para el informe. Opción D, aviso inmediato y el informe en veinticuatro horas. Piénsalo un momento.</a:t>
             </a:r>
           </a:p>
           <a:p>
@@ -1423,12 +1423,12 @@
           <a:lstStyle/>
           <a:p>
             <a:r>
-              <a:t>N1: ¿Por qué esos plazos?</a:t>
-            </a:r>
-          </a:p>
-          <a:p>
-            <a:r>
-              <a:t>N2: Porque lo urgente es avisar cuanto antes, en no más de veinticuatro horas, y el informe detallado puede esperar un poco, hasta siete días. Recuerda además las cuatro clases cerradas: deflagración, explosión, intoxicación e incendio.</a:t>
+              <a:t>N2: La respuesta correcta es la opción A: veinticuatro horas para avisar y siete días para el informe. Lo urgente es avisar cuanto antes, en no más de veinticuatro horas, y el informe detallado puede esperar un poco, hasta siete días. Las opciones B, C y D cambian los números o los cruzan para liarte, pero el orden es siempre ese: primero llamo, veinticuatro horas; luego escribo, siete días. Y recuerda las cuatro clases cerradas de accidente: deflagración, explosión, intoxicación e incendio.</a:t>
+            </a:r>
+          </a:p>
+          <a:p>
+            <a:r>
+              <a:t>N1: Primero el teléfono, después el papel.</a:t>
             </a:r>
           </a:p>
         </p:txBody>
@@ -1799,12 +1799,12 @@
           <a:lstStyle/>
           <a:p>
             <a:r>
-              <a:t>N1: Que tú vayas con las herramientas no te hace el obligado. ¿De quién es el deber de mantener?</a:t>
-            </a:r>
-          </a:p>
-          <a:p>
-            <a:r>
-              <a:t>N2: Piénsalo como el coche: el taller lo arregla, pero ¿quién debe llevarlo a revisión?</a:t>
+              <a:t>N1: Que tú vayas con las herramientas no te hace el obligado. La pregunta es: ¿de quién es la obligación de mantener la instalación en buen estado? Opción A, de la empresa instaladora. Opción B, del titular y, en su defecto, del usuario. Opción C, del distribuidor de gas. Opción D, del organismo de control. Piénsalo un momento.</a:t>
+            </a:r>
+          </a:p>
+          <a:p>
+            <a:r>
+              <a:t>N2: Míralo como el coche: el taller lo arregla, pero ¿quién está obligado a llevarlo a la revisión?</a:t>
             </a:r>
           </a:p>
         </p:txBody>
@@ -1874,12 +1874,12 @@
           <a:lstStyle/>
           <a:p>
             <a:r>
-              <a:t>N1: ¿Por qué el titular?</a:t>
-            </a:r>
-          </a:p>
-          <a:p>
-            <a:r>
-              <a:t>N2: Porque la ley pone el deber de conservación en el dueño y, si no, en quien usa la instalación. El instalador y la compañía ayudan y recomiendan, pero la responsabilidad última de que esté en disposición de servicio es del titular.</a:t>
+              <a:t>N2: La respuesta correcta es la opción B: del titular y, en su defecto, del usuario. La ley pone el deber de conservación en el dueño y, si no lo hay, en quien usa la instalación. La empresa instaladora de la opción A, el distribuidor de la opción C y el organismo de control de la opción D ayudan, ejecutan o vigilan, pero la responsabilidad última de que esté en disposición de servicio es del titular.</a:t>
+            </a:r>
+          </a:p>
+          <a:p>
+            <a:r>
+              <a:t>N1: El taller arregla; el propietario responde.</a:t>
             </a:r>
           </a:p>
         </p:txBody>
@@ -2024,12 +2024,12 @@
           <a:lstStyle/>
           <a:p>
             <a:r>
-              <a:t>N1: La pregunta estrella del tema. ¿Con qué se decide inspección o revisión?</a:t>
-            </a:r>
-          </a:p>
-          <a:p>
-            <a:r>
-              <a:t>N2: Solo necesitas hacerte una pregunta, la de la tubería de la calle.</a:t>
+              <a:t>N1: La pregunta estrella de todo el tema, presta atención. ¿Qué determina si un control periódico es inspección o revisión? Opción A, el tamaño de la vivienda. Opción B, si la instalación está conectada a la red de distribución. Opción C, la antigüedad de la instalación. Opción D, el tipo de aparato instalado. Tómate un segundo y elige.</a:t>
+            </a:r>
+          </a:p>
+          <a:p>
+            <a:r>
+              <a:t>N2: Solo necesitas hacerte una pregunta: la de la tubería de la calle.</a:t>
             </a:r>
           </a:p>
         </p:txBody>
@@ -2099,12 +2099,12 @@
           <a:lstStyle/>
           <a:p>
             <a:r>
-              <a:t>N1: ¿Por qué la conexión a la red?</a:t>
-            </a:r>
-          </a:p>
-          <a:p>
-            <a:r>
-              <a:t>N2: Porque un fallo en una instalación de red afecta a muchos, así que la vigila alguien habilitado ajeno: eso es inspección. Lo privado, tu depósito, es revisión. Y si la ley obliga a organismo de control, gana esa regla: inspección siempre.</a:t>
+              <a:t>N2: La respuesta correcta es la opción B: si la instalación está conectada a la red de distribución. Si está enganchada a la red, un fallo puede afectar a muchos vecinos, así que la vigila alguien habilitado y ajeno; eso es inspección. Lo privado, tu depósito por tu cuenta, es revisión. El tamaño de la vivienda de la opción A, la antigüedad de la opción C o el tipo de aparato de la opción D no pintan nada aquí. Y recuerda la regla que gana cualquier empate: si la ley obliga a organismo de control, inspección siempre.</a:t>
+            </a:r>
+          </a:p>
+          <a:p>
+            <a:r>
+              <a:t>N1: Conectada a red, inspección; por tu cuenta, revisión.</a:t>
             </a:r>
           </a:p>
         </p:txBody>
